--- a/BD6 Assignment.pptx
+++ b/BD6 Assignment.pptx
@@ -263,7 +263,7 @@
               <a:rPr lang="en-GB" smtClean="0"/>
               <a:t>27/03/2026</a:t>
             </a:fld>
-            <a:endParaRPr lang="en-GB"/>
+            <a:endParaRPr lang="en-GB" dirty="0"/>
           </a:p>
         </p:txBody>
       </p:sp>
@@ -288,7 +288,7 @@
           <a:bodyPr/>
           <a:lstStyle/>
           <a:p>
-            <a:endParaRPr lang="en-GB"/>
+            <a:endParaRPr lang="en-GB" dirty="0"/>
           </a:p>
         </p:txBody>
       </p:sp>
@@ -317,7 +317,7 @@
               <a:rPr lang="en-GB" smtClean="0"/>
               <a:t>‹#›</a:t>
             </a:fld>
-            <a:endParaRPr lang="en-GB"/>
+            <a:endParaRPr lang="en-GB" dirty="0"/>
           </a:p>
         </p:txBody>
       </p:sp>
@@ -463,7 +463,7 @@
               <a:rPr lang="en-GB" smtClean="0"/>
               <a:t>27/03/2026</a:t>
             </a:fld>
-            <a:endParaRPr lang="en-GB"/>
+            <a:endParaRPr lang="en-GB" dirty="0"/>
           </a:p>
         </p:txBody>
       </p:sp>
@@ -488,7 +488,7 @@
           <a:bodyPr/>
           <a:lstStyle/>
           <a:p>
-            <a:endParaRPr lang="en-GB"/>
+            <a:endParaRPr lang="en-GB" dirty="0"/>
           </a:p>
         </p:txBody>
       </p:sp>
@@ -517,7 +517,7 @@
               <a:rPr lang="en-GB" smtClean="0"/>
               <a:t>‹#›</a:t>
             </a:fld>
-            <a:endParaRPr lang="en-GB"/>
+            <a:endParaRPr lang="en-GB" dirty="0"/>
           </a:p>
         </p:txBody>
       </p:sp>
@@ -673,7 +673,7 @@
               <a:rPr lang="en-GB" smtClean="0"/>
               <a:t>27/03/2026</a:t>
             </a:fld>
-            <a:endParaRPr lang="en-GB"/>
+            <a:endParaRPr lang="en-GB" dirty="0"/>
           </a:p>
         </p:txBody>
       </p:sp>
@@ -698,7 +698,7 @@
           <a:bodyPr/>
           <a:lstStyle/>
           <a:p>
-            <a:endParaRPr lang="en-GB"/>
+            <a:endParaRPr lang="en-GB" dirty="0"/>
           </a:p>
         </p:txBody>
       </p:sp>
@@ -727,7 +727,7 @@
               <a:rPr lang="en-GB" smtClean="0"/>
               <a:t>‹#›</a:t>
             </a:fld>
-            <a:endParaRPr lang="en-GB"/>
+            <a:endParaRPr lang="en-GB" dirty="0"/>
           </a:p>
         </p:txBody>
       </p:sp>
@@ -873,7 +873,7 @@
               <a:rPr lang="en-GB" smtClean="0"/>
               <a:t>27/03/2026</a:t>
             </a:fld>
-            <a:endParaRPr lang="en-GB"/>
+            <a:endParaRPr lang="en-GB" dirty="0"/>
           </a:p>
         </p:txBody>
       </p:sp>
@@ -898,7 +898,7 @@
           <a:bodyPr/>
           <a:lstStyle/>
           <a:p>
-            <a:endParaRPr lang="en-GB"/>
+            <a:endParaRPr lang="en-GB" dirty="0"/>
           </a:p>
         </p:txBody>
       </p:sp>
@@ -927,7 +927,7 @@
               <a:rPr lang="en-GB" smtClean="0"/>
               <a:t>‹#›</a:t>
             </a:fld>
-            <a:endParaRPr lang="en-GB"/>
+            <a:endParaRPr lang="en-GB" dirty="0"/>
           </a:p>
         </p:txBody>
       </p:sp>
@@ -1149,7 +1149,7 @@
               <a:rPr lang="en-GB" smtClean="0"/>
               <a:t>27/03/2026</a:t>
             </a:fld>
-            <a:endParaRPr lang="en-GB"/>
+            <a:endParaRPr lang="en-GB" dirty="0"/>
           </a:p>
         </p:txBody>
       </p:sp>
@@ -1174,7 +1174,7 @@
           <a:bodyPr/>
           <a:lstStyle/>
           <a:p>
-            <a:endParaRPr lang="en-GB"/>
+            <a:endParaRPr lang="en-GB" dirty="0"/>
           </a:p>
         </p:txBody>
       </p:sp>
@@ -1203,7 +1203,7 @@
               <a:rPr lang="en-GB" smtClean="0"/>
               <a:t>‹#›</a:t>
             </a:fld>
-            <a:endParaRPr lang="en-GB"/>
+            <a:endParaRPr lang="en-GB" dirty="0"/>
           </a:p>
         </p:txBody>
       </p:sp>
@@ -1417,7 +1417,7 @@
               <a:rPr lang="en-GB" smtClean="0"/>
               <a:t>27/03/2026</a:t>
             </a:fld>
-            <a:endParaRPr lang="en-GB"/>
+            <a:endParaRPr lang="en-GB" dirty="0"/>
           </a:p>
         </p:txBody>
       </p:sp>
@@ -1442,7 +1442,7 @@
           <a:bodyPr/>
           <a:lstStyle/>
           <a:p>
-            <a:endParaRPr lang="en-GB"/>
+            <a:endParaRPr lang="en-GB" dirty="0"/>
           </a:p>
         </p:txBody>
       </p:sp>
@@ -1471,7 +1471,7 @@
               <a:rPr lang="en-GB" smtClean="0"/>
               <a:t>‹#›</a:t>
             </a:fld>
-            <a:endParaRPr lang="en-GB"/>
+            <a:endParaRPr lang="en-GB" dirty="0"/>
           </a:p>
         </p:txBody>
       </p:sp>
@@ -1832,7 +1832,7 @@
               <a:rPr lang="en-GB" smtClean="0"/>
               <a:t>27/03/2026</a:t>
             </a:fld>
-            <a:endParaRPr lang="en-GB"/>
+            <a:endParaRPr lang="en-GB" dirty="0"/>
           </a:p>
         </p:txBody>
       </p:sp>
@@ -1857,7 +1857,7 @@
           <a:bodyPr/>
           <a:lstStyle/>
           <a:p>
-            <a:endParaRPr lang="en-GB"/>
+            <a:endParaRPr lang="en-GB" dirty="0"/>
           </a:p>
         </p:txBody>
       </p:sp>
@@ -1886,7 +1886,7 @@
               <a:rPr lang="en-GB" smtClean="0"/>
               <a:t>‹#›</a:t>
             </a:fld>
-            <a:endParaRPr lang="en-GB"/>
+            <a:endParaRPr lang="en-GB" dirty="0"/>
           </a:p>
         </p:txBody>
       </p:sp>
@@ -1974,7 +1974,7 @@
               <a:rPr lang="en-GB" smtClean="0"/>
               <a:t>27/03/2026</a:t>
             </a:fld>
-            <a:endParaRPr lang="en-GB"/>
+            <a:endParaRPr lang="en-GB" dirty="0"/>
           </a:p>
         </p:txBody>
       </p:sp>
@@ -1999,7 +1999,7 @@
           <a:bodyPr/>
           <a:lstStyle/>
           <a:p>
-            <a:endParaRPr lang="en-GB"/>
+            <a:endParaRPr lang="en-GB" dirty="0"/>
           </a:p>
         </p:txBody>
       </p:sp>
@@ -2028,7 +2028,7 @@
               <a:rPr lang="en-GB" smtClean="0"/>
               <a:t>‹#›</a:t>
             </a:fld>
-            <a:endParaRPr lang="en-GB"/>
+            <a:endParaRPr lang="en-GB" dirty="0"/>
           </a:p>
         </p:txBody>
       </p:sp>
@@ -2087,7 +2087,7 @@
               <a:rPr lang="en-GB" smtClean="0"/>
               <a:t>27/03/2026</a:t>
             </a:fld>
-            <a:endParaRPr lang="en-GB"/>
+            <a:endParaRPr lang="en-GB" dirty="0"/>
           </a:p>
         </p:txBody>
       </p:sp>
@@ -2112,7 +2112,7 @@
           <a:bodyPr/>
           <a:lstStyle/>
           <a:p>
-            <a:endParaRPr lang="en-GB"/>
+            <a:endParaRPr lang="en-GB" dirty="0"/>
           </a:p>
         </p:txBody>
       </p:sp>
@@ -2141,7 +2141,7 @@
               <a:rPr lang="en-GB" smtClean="0"/>
               <a:t>‹#›</a:t>
             </a:fld>
-            <a:endParaRPr lang="en-GB"/>
+            <a:endParaRPr lang="en-GB" dirty="0"/>
           </a:p>
         </p:txBody>
       </p:sp>
@@ -2400,7 +2400,7 @@
               <a:rPr lang="en-GB" smtClean="0"/>
               <a:t>27/03/2026</a:t>
             </a:fld>
-            <a:endParaRPr lang="en-GB"/>
+            <a:endParaRPr lang="en-GB" dirty="0"/>
           </a:p>
         </p:txBody>
       </p:sp>
@@ -2425,7 +2425,7 @@
           <a:bodyPr/>
           <a:lstStyle/>
           <a:p>
-            <a:endParaRPr lang="en-GB"/>
+            <a:endParaRPr lang="en-GB" dirty="0"/>
           </a:p>
         </p:txBody>
       </p:sp>
@@ -2454,7 +2454,7 @@
               <a:rPr lang="en-GB" smtClean="0"/>
               <a:t>‹#›</a:t>
             </a:fld>
-            <a:endParaRPr lang="en-GB"/>
+            <a:endParaRPr lang="en-GB" dirty="0"/>
           </a:p>
         </p:txBody>
       </p:sp>
@@ -2589,7 +2589,7 @@
             </a:lvl9pPr>
           </a:lstStyle>
           <a:p>
-            <a:endParaRPr lang="en-GB"/>
+            <a:endParaRPr lang="en-GB" dirty="0"/>
           </a:p>
         </p:txBody>
       </p:sp>
@@ -2689,7 +2689,7 @@
               <a:rPr lang="en-GB" smtClean="0"/>
               <a:t>27/03/2026</a:t>
             </a:fld>
-            <a:endParaRPr lang="en-GB"/>
+            <a:endParaRPr lang="en-GB" dirty="0"/>
           </a:p>
         </p:txBody>
       </p:sp>
@@ -2714,7 +2714,7 @@
           <a:bodyPr/>
           <a:lstStyle/>
           <a:p>
-            <a:endParaRPr lang="en-GB"/>
+            <a:endParaRPr lang="en-GB" dirty="0"/>
           </a:p>
         </p:txBody>
       </p:sp>
@@ -2743,7 +2743,7 @@
               <a:rPr lang="en-GB" smtClean="0"/>
               <a:t>‹#›</a:t>
             </a:fld>
-            <a:endParaRPr lang="en-GB"/>
+            <a:endParaRPr lang="en-GB" dirty="0"/>
           </a:p>
         </p:txBody>
       </p:sp>
@@ -2932,7 +2932,7 @@
               <a:rPr lang="en-GB" smtClean="0"/>
               <a:t>27/03/2026</a:t>
             </a:fld>
-            <a:endParaRPr lang="en-GB"/>
+            <a:endParaRPr lang="en-GB" dirty="0"/>
           </a:p>
         </p:txBody>
       </p:sp>
@@ -2975,7 +2975,7 @@
             </a:lvl1pPr>
           </a:lstStyle>
           <a:p>
-            <a:endParaRPr lang="en-GB"/>
+            <a:endParaRPr lang="en-GB" dirty="0"/>
           </a:p>
         </p:txBody>
       </p:sp>
@@ -3022,7 +3022,7 @@
               <a:rPr lang="en-GB" smtClean="0"/>
               <a:t>‹#›</a:t>
             </a:fld>
-            <a:endParaRPr lang="en-GB"/>
+            <a:endParaRPr lang="en-GB" dirty="0"/>
           </a:p>
         </p:txBody>
       </p:sp>
@@ -3361,8 +3361,8 @@
         </p:nvSpPr>
         <p:spPr>
           <a:xfrm>
-            <a:off x="525101" y="6703042"/>
-            <a:ext cx="8848120" cy="2185214"/>
+            <a:off x="4882289" y="6703042"/>
+            <a:ext cx="4490932" cy="2339102"/>
           </a:xfrm>
           <a:prstGeom prst="rect">
             <a:avLst/>
@@ -3417,7 +3417,7 @@
               </a:rPr>
               <a:t>5. Model Training and Hyper Parameters</a:t>
             </a:r>
-            <a:endParaRPr lang="en-GB" sz="2000" b="0" i="0" u="none" strike="noStrike" kern="1200" cap="none" spc="0" normalizeH="0" baseline="0" noProof="0">
+            <a:endParaRPr lang="en-GB" sz="2000" b="0" i="0" u="none" strike="noStrike" kern="1200" cap="none" spc="0" normalizeH="0" baseline="0" noProof="0" dirty="0">
               <a:ln>
                 <a:noFill/>
               </a:ln>
@@ -3730,8 +3730,8 @@
         </p:nvSpPr>
         <p:spPr>
           <a:xfrm>
-            <a:off x="475353" y="8816780"/>
-            <a:ext cx="8831538" cy="2015936"/>
+            <a:off x="4882289" y="8816780"/>
+            <a:ext cx="4424602" cy="2015936"/>
           </a:xfrm>
           <a:prstGeom prst="rect">
             <a:avLst/>
@@ -4134,8 +4134,8 @@
         </p:nvSpPr>
         <p:spPr>
           <a:xfrm>
-            <a:off x="540612" y="12021739"/>
-            <a:ext cx="4884758" cy="553998"/>
+            <a:off x="4882288" y="12021739"/>
+            <a:ext cx="543081" cy="3693319"/>
           </a:xfrm>
           <a:prstGeom prst="rect">
             <a:avLst/>
@@ -4516,14 +4516,14 @@
           <p:nvPr>
             <p:extLst>
               <p:ext uri="{D42A27DB-BD31-4B8C-83A1-F6EECF244321}">
-                <p14:modId xmlns:p14="http://schemas.microsoft.com/office/powerpoint/2010/main" val="1738814142"/>
+                <p14:modId xmlns:p14="http://schemas.microsoft.com/office/powerpoint/2010/main" val="374137924"/>
               </p:ext>
             </p:extLst>
           </p:nvPr>
         </p:nvGraphicFramePr>
         <p:xfrm>
-          <a:off x="589137" y="9555928"/>
-          <a:ext cx="4178298" cy="1120548"/>
+          <a:off x="5005441" y="9764892"/>
+          <a:ext cx="4178298" cy="1151476"/>
         </p:xfrm>
         <a:graphic>
           <a:graphicData uri="http://schemas.openxmlformats.org/drawingml/2006/table">
@@ -4554,7 +4554,7 @@
                   </a:extLst>
                 </a:gridCol>
               </a:tblGrid>
-              <a:tr h="370840">
+              <a:tr h="401768">
                 <a:tc>
                   <a:txBody>
                     <a:bodyPr/>
@@ -5013,7 +5013,7 @@
         </p:nvSpPr>
         <p:spPr>
           <a:xfrm>
-            <a:off x="1291458" y="7603951"/>
+            <a:off x="5130744" y="7041596"/>
             <a:ext cx="2320660" cy="830997"/>
           </a:xfrm>
           <a:prstGeom prst="rect">
@@ -5062,8 +5062,8 @@
         </p:nvSpPr>
         <p:spPr>
           <a:xfrm>
-            <a:off x="475354" y="745082"/>
-            <a:ext cx="3964272" cy="3516347"/>
+            <a:off x="475353" y="745082"/>
+            <a:ext cx="4211646" cy="7232749"/>
           </a:xfrm>
           <a:prstGeom prst="rect">
             <a:avLst/>
@@ -5091,6 +5091,7 @@
           </a:p>
           <a:p>
             <a:pPr marL="228600" indent="-228600">
+              <a:buFont typeface="+mj-lt"/>
               <a:buAutoNum type="arabicPeriod"/>
             </a:pPr>
             <a:r>
@@ -5099,12 +5100,19 @@
             </a:r>
           </a:p>
           <a:p>
+            <a:r>
+              <a:rPr lang="en-GB" sz="1050" i="1" dirty="0">
+                <a:ea typeface="Calibri"/>
+                <a:cs typeface="Calibri"/>
+              </a:rPr>
+              <a:t>The goal </a:t>
+            </a:r>
             <a:r>
               <a:rPr lang="en-GB" sz="1050" dirty="0">
                 <a:ea typeface="Calibri"/>
                 <a:cs typeface="Calibri"/>
               </a:rPr>
-              <a:t>The goal is to predict the probability of the infrastructure failure in a city block during the monitoring period P(failure=1). </a:t>
+              <a:t>is to predict the probability of the infrastructure failure in a city block during the monitoring period P(failure=1). </a:t>
             </a:r>
           </a:p>
           <a:p>
@@ -5113,14 +5121,158 @@
                 <a:ea typeface="Calibri"/>
                 <a:cs typeface="Calibri"/>
               </a:rPr>
-              <a:t>This is a binary classification task with target variable failure, where 1 – failure occurs, 0 – no failure (p ≥ 0.5 -&gt; failure; p &lt; 0.5 -&gt; </a:t>
-            </a:r>
-            <a:r>
-              <a:rPr lang="en-GB" sz="1050">
+              <a:t>This is a binary classification task with target variable failure, where </a:t>
+            </a:r>
+          </a:p>
+          <a:p>
+            <a:r>
+              <a:rPr lang="en-GB" sz="1050" dirty="0">
                 <a:ea typeface="Calibri"/>
                 <a:cs typeface="Calibri"/>
               </a:rPr>
-              <a:t>no failure).  </a:t>
+              <a:t>1 – failure occurs, 0 – no failure (p ≥ 0.5 -&gt; failure; p &lt; 0.5 -&gt; no failure).  </a:t>
+            </a:r>
+          </a:p>
+          <a:p>
+            <a:r>
+              <a:rPr lang="en-GB" sz="1050" i="1" dirty="0">
+                <a:ea typeface="Calibri"/>
+                <a:cs typeface="Calibri"/>
+              </a:rPr>
+              <a:t>To solve this task</a:t>
+            </a:r>
+            <a:r>
+              <a:rPr lang="en-GB" sz="1050" dirty="0">
+                <a:ea typeface="Calibri"/>
+                <a:cs typeface="Calibri"/>
+              </a:rPr>
+              <a:t>, we cannot use conventional software because we do not know the exactly rules under which a failure occurs. Besides, many factors may influence the failure simultaneously and there may be complex dependencies between them. Machine Learning is the best way to solve this problem because it automatically finds pattern in the data, uses past observations, and build probability model. </a:t>
+            </a:r>
+          </a:p>
+          <a:p>
+            <a:r>
+              <a:rPr lang="en-GB" sz="1050" dirty="0">
+                <a:ea typeface="Calibri"/>
+                <a:cs typeface="Calibri"/>
+              </a:rPr>
+              <a:t>It is important to note that a ’good model’ for this task should </a:t>
+            </a:r>
+          </a:p>
+          <a:p>
+            <a:pPr marL="171450" indent="-171450">
+              <a:buFont typeface="Wingdings" pitchFamily="2" charset="2"/>
+              <a:buChar char="ü"/>
+            </a:pPr>
+            <a:r>
+              <a:rPr lang="en-GB" sz="1050" dirty="0">
+                <a:ea typeface="Calibri"/>
+                <a:cs typeface="Calibri"/>
+              </a:rPr>
+              <a:t>accurately predict infrastructure failure, minimise false negative </a:t>
+            </a:r>
+          </a:p>
+          <a:p>
+            <a:r>
+              <a:rPr lang="en-GB" sz="1050" dirty="0">
+                <a:ea typeface="Calibri"/>
+                <a:cs typeface="Calibri"/>
+              </a:rPr>
+              <a:t>(we need high Recall for failure) to avoid missing high-risk areas and</a:t>
+            </a:r>
+          </a:p>
+          <a:p>
+            <a:pPr marL="171450" indent="-171450">
+              <a:buFont typeface="Wingdings" pitchFamily="2" charset="2"/>
+              <a:buChar char="ü"/>
+            </a:pPr>
+            <a:r>
+              <a:rPr lang="en-GB" sz="1050" dirty="0">
+                <a:ea typeface="Calibri"/>
+                <a:cs typeface="Calibri"/>
+              </a:rPr>
+              <a:t>generalise  well to unseen data to be useful in real-world applications. </a:t>
+            </a:r>
+          </a:p>
+          <a:p>
+            <a:r>
+              <a:rPr lang="en-GB" sz="1050" dirty="0">
+                <a:ea typeface="Calibri"/>
+                <a:cs typeface="Calibri"/>
+              </a:rPr>
+              <a:t>It worth to emphasise that care must be taken to avoid overtraining the model and preventing data leakage. </a:t>
+            </a:r>
+          </a:p>
+          <a:p>
+            <a:pPr marL="228600" indent="-228600">
+              <a:buFont typeface="+mj-lt"/>
+              <a:buAutoNum type="arabicPeriod" startAt="2"/>
+            </a:pPr>
+            <a:r>
+              <a:rPr lang="en-GB" sz="1050" b="1" dirty="0">
+                <a:ea typeface="Calibri"/>
+                <a:cs typeface="Calibri"/>
+              </a:rPr>
+              <a:t>Data Understanding</a:t>
+            </a:r>
+          </a:p>
+          <a:p>
+            <a:r>
+              <a:rPr lang="en-GB" sz="1050" dirty="0">
+                <a:ea typeface="Calibri"/>
+                <a:cs typeface="Calibri"/>
+              </a:rPr>
+              <a:t>Inputs to the model: almost all of the input variables are continues numeric features which are describing infrastructure and environmental conditions. Only two of them (</a:t>
+            </a:r>
+            <a:r>
+              <a:rPr lang="en-GB" sz="1050" dirty="0" err="1">
+                <a:ea typeface="Calibri"/>
+                <a:cs typeface="Calibri"/>
+              </a:rPr>
+              <a:t>inspection_season</a:t>
+            </a:r>
+            <a:r>
+              <a:rPr lang="en-GB" sz="1050" dirty="0">
+                <a:ea typeface="Calibri"/>
+                <a:cs typeface="Calibri"/>
+              </a:rPr>
+              <a:t> and </a:t>
+            </a:r>
+            <a:r>
+              <a:rPr lang="en-GB" sz="1050" dirty="0" err="1">
+                <a:ea typeface="Calibri"/>
+                <a:cs typeface="Calibri"/>
+              </a:rPr>
+              <a:t>inspection_window</a:t>
+            </a:r>
+            <a:r>
+              <a:rPr lang="en-GB" sz="1050" dirty="0">
+                <a:ea typeface="Calibri"/>
+                <a:cs typeface="Calibri"/>
+              </a:rPr>
+              <a:t>) are categorical and need to be encoded by one-hot encoding. Additionally, there is one discrete numeric variable – </a:t>
+            </a:r>
+            <a:r>
+              <a:rPr lang="en-GB" sz="1050" dirty="0" err="1">
+                <a:ea typeface="Calibri"/>
+                <a:cs typeface="Calibri"/>
+              </a:rPr>
+              <a:t>inspector_id</a:t>
+            </a:r>
+            <a:r>
+              <a:rPr lang="en-GB" sz="1050" dirty="0">
+                <a:ea typeface="Calibri"/>
+                <a:cs typeface="Calibri"/>
+              </a:rPr>
+              <a:t>, - which identifies an inspector and not contain information about infrastructure, so it has almost nothing to do with failure. This variable adds an unnecessary dimension to the model, increase its complexity, and introduces more noise. Thus, it would be best just to remove it from the dataset. </a:t>
+            </a:r>
+          </a:p>
+          <a:p>
+            <a:pPr marL="228600" indent="-228600">
+              <a:buAutoNum type="arabicPeriod" startAt="2"/>
+            </a:pPr>
+            <a:r>
+              <a:rPr lang="en-GB" sz="1050" dirty="0"/>
+              <a:t>Include train/validate/test split and model selection</a:t>
             </a:r>
             <a:endParaRPr lang="en-GB" sz="1050" dirty="0">
               <a:ea typeface="Calibri"/>
@@ -5129,11 +5281,11 @@
           </a:p>
           <a:p>
             <a:pPr marL="228600" indent="-228600">
-              <a:buAutoNum type="arabicPeriod"/>
+              <a:buAutoNum type="arabicPeriod" startAt="2"/>
             </a:pPr>
             <a:r>
               <a:rPr lang="en-GB" sz="1050" dirty="0"/>
-              <a:t>Include train/validate/test split and model selection</a:t>
+              <a:t>This list should cover ALL the steps in the process</a:t>
             </a:r>
             <a:endParaRPr lang="en-GB" sz="1050" dirty="0">
               <a:ea typeface="Calibri"/>
@@ -5142,11 +5294,11 @@
           </a:p>
           <a:p>
             <a:pPr marL="228600" indent="-228600">
-              <a:buAutoNum type="arabicPeriod"/>
+              <a:buAutoNum type="arabicPeriod" startAt="2"/>
             </a:pPr>
             <a:r>
               <a:rPr lang="en-GB" sz="1050" dirty="0"/>
-              <a:t>This list should cover ALL the steps in the process</a:t>
+              <a:t>…</a:t>
             </a:r>
             <a:endParaRPr lang="en-GB" sz="1050" dirty="0">
               <a:ea typeface="Calibri"/>
@@ -5155,7 +5307,7 @@
           </a:p>
           <a:p>
             <a:pPr marL="228600" indent="-228600">
-              <a:buAutoNum type="arabicPeriod"/>
+              <a:buAutoNum type="arabicPeriod" startAt="2"/>
             </a:pPr>
             <a:r>
               <a:rPr lang="en-GB" sz="1050" dirty="0"/>
@@ -5167,19 +5319,6 @@
             </a:endParaRPr>
           </a:p>
           <a:p>
-            <a:pPr marL="228600" indent="-228600">
-              <a:buAutoNum type="arabicPeriod"/>
-            </a:pPr>
-            <a:r>
-              <a:rPr lang="en-GB" sz="1050" dirty="0"/>
-              <a:t>…</a:t>
-            </a:r>
-            <a:endParaRPr lang="en-GB" sz="1050" dirty="0">
-              <a:ea typeface="Calibri"/>
-              <a:cs typeface="Calibri"/>
-            </a:endParaRPr>
-          </a:p>
-          <a:p>
             <a:endParaRPr lang="en-GB" sz="1200" dirty="0"/>
           </a:p>
           <a:p>
@@ -5222,8 +5361,8 @@
         </p:nvSpPr>
         <p:spPr>
           <a:xfrm>
-            <a:off x="4569655" y="745082"/>
-            <a:ext cx="4803568" cy="2823850"/>
+            <a:off x="4686999" y="745082"/>
+            <a:ext cx="4686223" cy="2823850"/>
           </a:xfrm>
           <a:prstGeom prst="rect">
             <a:avLst/>
@@ -5265,7 +5404,7 @@
               <a:rPr lang="en-GB" sz="2000" dirty="0"/>
               <a:t>3 Variables</a:t>
             </a:r>
-            <a:endParaRPr lang="en-GB" sz="1000">
+            <a:endParaRPr lang="en-GB" sz="1000" dirty="0">
               <a:ea typeface="Calibri"/>
               <a:cs typeface="Calibri"/>
             </a:endParaRPr>
@@ -5297,7 +5436,7 @@
               </a:rPr>
               <a:t>Say which variables you used in your model, and whether you treated then as numeric3 Variables</a:t>
             </a:r>
-            <a:endParaRPr lang="en-GB" sz="1000">
+            <a:endParaRPr lang="en-GB" sz="1000" dirty="0">
               <a:solidFill>
                 <a:prstClr val="black"/>
               </a:solidFill>
@@ -5333,25 +5472,6 @@
               </a:rPr>
               <a:t>Say which variables you used in your model, and whether you treated then as numeric or categorical. Explain the impact your choices will have on the models you build. You can use a table:</a:t>
             </a:r>
-            <a:endParaRPr lang="en-GB" sz="1000">
-              <a:solidFill>
-                <a:prstClr val="black"/>
-              </a:solidFill>
-              <a:latin typeface="Calibri" panose="020F0502020204030204"/>
-              <a:ea typeface="Calibri"/>
-              <a:cs typeface="Calibri"/>
-            </a:endParaRPr>
-          </a:p>
-          <a:p>
-            <a:r>
-              <a:rPr lang="en-GB" sz="1000" dirty="0">
-                <a:solidFill>
-                  <a:prstClr val="black"/>
-                </a:solidFill>
-                <a:latin typeface="Calibri" panose="020F0502020204030204"/>
-              </a:rPr>
-              <a:t> or categorical. Explain the impact your choices will have on the models you build. You can use a table:</a:t>
-            </a:r>
             <a:endParaRPr lang="en-GB" sz="1000" dirty="0">
               <a:solidFill>
                 <a:prstClr val="black"/>
@@ -5362,6 +5482,25 @@
             </a:endParaRPr>
           </a:p>
           <a:p>
+            <a:r>
+              <a:rPr lang="en-GB" sz="1000" dirty="0">
+                <a:solidFill>
+                  <a:prstClr val="black"/>
+                </a:solidFill>
+                <a:latin typeface="Calibri" panose="020F0502020204030204"/>
+              </a:rPr>
+              <a:t> or categorical. Explain the impact your choices will have on the models you build. You can use a table:</a:t>
+            </a:r>
+            <a:endParaRPr lang="en-GB" sz="1000" dirty="0">
+              <a:solidFill>
+                <a:prstClr val="black"/>
+              </a:solidFill>
+              <a:latin typeface="Calibri" panose="020F0502020204030204"/>
+              <a:ea typeface="Calibri"/>
+              <a:cs typeface="Calibri"/>
+            </a:endParaRPr>
+          </a:p>
+          <a:p>
             <a:endParaRPr lang="en-GB" sz="1200" dirty="0">
               <a:solidFill>
                 <a:prstClr val="black"/>
@@ -5433,8 +5572,8 @@
         </p:nvSpPr>
         <p:spPr>
           <a:xfrm>
-            <a:off x="525101" y="5538821"/>
-            <a:ext cx="8848121" cy="1046440"/>
+            <a:off x="4882290" y="5538821"/>
+            <a:ext cx="4490932" cy="1046440"/>
           </a:xfrm>
           <a:prstGeom prst="rect">
             <a:avLst/>
@@ -5771,8 +5910,8 @@
         </p:nvSpPr>
         <p:spPr>
           <a:xfrm>
-            <a:off x="524029" y="10977048"/>
-            <a:ext cx="8847947" cy="923330"/>
+            <a:off x="4881044" y="10977048"/>
+            <a:ext cx="4490932" cy="1261884"/>
           </a:xfrm>
           <a:prstGeom prst="rect">
             <a:avLst/>

--- a/BD6 Assignment.pptx
+++ b/BD6 Assignment.pptx
@@ -5063,7 +5063,7 @@
         <p:spPr>
           <a:xfrm>
             <a:off x="475353" y="745082"/>
-            <a:ext cx="4211646" cy="7232749"/>
+            <a:ext cx="4211646" cy="11757065"/>
           </a:xfrm>
           <a:prstGeom prst="rect">
             <a:avLst/>
@@ -5084,15 +5084,23 @@
           </a:bodyPr>
           <a:lstStyle/>
           <a:p>
+            <a:pPr>
+              <a:tabLst>
+                <a:tab pos="219075" algn="l"/>
+              </a:tabLst>
+            </a:pPr>
             <a:r>
               <a:rPr lang="en-GB" sz="2000" dirty="0"/>
               <a:t>2. Project Methodology</a:t>
             </a:r>
           </a:p>
           <a:p>
-            <a:pPr marL="228600" indent="-228600">
+            <a:pPr>
               <a:buFont typeface="+mj-lt"/>
               <a:buAutoNum type="arabicPeriod"/>
+              <a:tabLst>
+                <a:tab pos="219075" algn="l"/>
+              </a:tabLst>
             </a:pPr>
             <a:r>
               <a:rPr lang="en-GB" sz="1050" b="1" dirty="0"/>
@@ -5100,179 +5108,68 @@
             </a:r>
           </a:p>
           <a:p>
+            <a:pPr>
+              <a:tabLst>
+                <a:tab pos="219075" algn="l"/>
+              </a:tabLst>
+            </a:pPr>
+            <a:r>
+              <a:rPr lang="en-GB" sz="1050" dirty="0">
+                <a:ea typeface="Calibri"/>
+                <a:cs typeface="Calibri"/>
+              </a:rPr>
+              <a:t>This is a binary classification task with target variable failure, where probability of failure ≥ 0.5 means infrastructure failure. </a:t>
+            </a:r>
+          </a:p>
+          <a:p>
+            <a:pPr>
+              <a:tabLst>
+                <a:tab pos="219075" algn="l"/>
+              </a:tabLst>
+            </a:pPr>
+            <a:r>
+              <a:rPr lang="en-GB" sz="1050" i="1" u="sng" dirty="0">
+                <a:ea typeface="Calibri"/>
+                <a:cs typeface="Calibri"/>
+              </a:rPr>
+              <a:t>The goal </a:t>
+            </a:r>
+            <a:r>
+              <a:rPr lang="en-GB" sz="1050" dirty="0">
+                <a:ea typeface="Calibri"/>
+                <a:cs typeface="Calibri"/>
+              </a:rPr>
+              <a:t>is to predict the probability of the infrastructure failure in a city block during the monitoring period. </a:t>
+            </a:r>
+          </a:p>
+          <a:p>
+            <a:pPr>
+              <a:tabLst>
+                <a:tab pos="219075" algn="l"/>
+              </a:tabLst>
+            </a:pPr>
+            <a:r>
+              <a:rPr lang="en-GB" sz="1050" i="1" u="sng" dirty="0">
+                <a:ea typeface="Calibri"/>
+                <a:cs typeface="Calibri"/>
+              </a:rPr>
+              <a:t>It is important to note that a ’good model’ for this task should </a:t>
+            </a:r>
+          </a:p>
+          <a:p>
+            <a:pPr>
+              <a:buFont typeface="Wingdings" pitchFamily="2" charset="2"/>
+              <a:buChar char="ü"/>
+              <a:tabLst>
+                <a:tab pos="219075" algn="l"/>
+              </a:tabLst>
+            </a:pPr>
             <a:r>
               <a:rPr lang="en-GB" sz="1050" i="1" dirty="0">
                 <a:ea typeface="Calibri"/>
                 <a:cs typeface="Calibri"/>
               </a:rPr>
-              <a:t>The goal </a:t>
-            </a:r>
-            <a:r>
-              <a:rPr lang="en-GB" sz="1050" dirty="0">
-                <a:ea typeface="Calibri"/>
-                <a:cs typeface="Calibri"/>
-              </a:rPr>
-              <a:t>is to predict the probability of the infrastructure failure in a city block during the monitoring period P(failure=1). </a:t>
-            </a:r>
-          </a:p>
-          <a:p>
-            <a:r>
-              <a:rPr lang="en-GB" sz="1050" dirty="0">
-                <a:ea typeface="Calibri"/>
-                <a:cs typeface="Calibri"/>
-              </a:rPr>
-              <a:t>This is a binary classification task with target variable failure, where </a:t>
-            </a:r>
-          </a:p>
-          <a:p>
-            <a:r>
-              <a:rPr lang="en-GB" sz="1050" dirty="0">
-                <a:ea typeface="Calibri"/>
-                <a:cs typeface="Calibri"/>
-              </a:rPr>
-              <a:t>1 – failure occurs, 0 – no failure (p ≥ 0.5 -&gt; failure; p &lt; 0.5 -&gt; no failure).  </a:t>
-            </a:r>
-          </a:p>
-          <a:p>
-            <a:r>
-              <a:rPr lang="en-GB" sz="1050" i="1" dirty="0">
-                <a:ea typeface="Calibri"/>
-                <a:cs typeface="Calibri"/>
-              </a:rPr>
-              <a:t>To solve this task</a:t>
-            </a:r>
-            <a:r>
-              <a:rPr lang="en-GB" sz="1050" dirty="0">
-                <a:ea typeface="Calibri"/>
-                <a:cs typeface="Calibri"/>
-              </a:rPr>
-              <a:t>, we cannot use conventional software because we do not know the exactly rules under which a failure occurs. Besides, many factors may influence the failure simultaneously and there may be complex dependencies between them. Machine Learning is the best way to solve this problem because it automatically finds pattern in the data, uses past observations, and build probability model. </a:t>
-            </a:r>
-          </a:p>
-          <a:p>
-            <a:r>
-              <a:rPr lang="en-GB" sz="1050" dirty="0">
-                <a:ea typeface="Calibri"/>
-                <a:cs typeface="Calibri"/>
-              </a:rPr>
-              <a:t>It is important to note that a ’good model’ for this task should </a:t>
-            </a:r>
-          </a:p>
-          <a:p>
-            <a:pPr marL="171450" indent="-171450">
-              <a:buFont typeface="Wingdings" pitchFamily="2" charset="2"/>
-              <a:buChar char="ü"/>
-            </a:pPr>
-            <a:r>
-              <a:rPr lang="en-GB" sz="1050" dirty="0">
-                <a:ea typeface="Calibri"/>
-                <a:cs typeface="Calibri"/>
-              </a:rPr>
-              <a:t>accurately predict infrastructure failure, minimise false negative </a:t>
-            </a:r>
-          </a:p>
-          <a:p>
-            <a:r>
-              <a:rPr lang="en-GB" sz="1050" dirty="0">
-                <a:ea typeface="Calibri"/>
-                <a:cs typeface="Calibri"/>
-              </a:rPr>
-              <a:t>(we need high Recall for failure) to avoid missing high-risk areas and</a:t>
-            </a:r>
-          </a:p>
-          <a:p>
-            <a:pPr marL="171450" indent="-171450">
-              <a:buFont typeface="Wingdings" pitchFamily="2" charset="2"/>
-              <a:buChar char="ü"/>
-            </a:pPr>
-            <a:r>
-              <a:rPr lang="en-GB" sz="1050" dirty="0">
-                <a:ea typeface="Calibri"/>
-                <a:cs typeface="Calibri"/>
-              </a:rPr>
-              <a:t>generalise  well to unseen data to be useful in real-world applications. </a:t>
-            </a:r>
-          </a:p>
-          <a:p>
-            <a:r>
-              <a:rPr lang="en-GB" sz="1050" dirty="0">
-                <a:ea typeface="Calibri"/>
-                <a:cs typeface="Calibri"/>
-              </a:rPr>
-              <a:t>It worth to emphasise that care must be taken to avoid overtraining the model and preventing data leakage. </a:t>
-            </a:r>
-          </a:p>
-          <a:p>
-            <a:pPr marL="228600" indent="-228600">
-              <a:buFont typeface="+mj-lt"/>
-              <a:buAutoNum type="arabicPeriod" startAt="2"/>
-            </a:pPr>
-            <a:r>
-              <a:rPr lang="en-GB" sz="1050" b="1" dirty="0">
-                <a:ea typeface="Calibri"/>
-                <a:cs typeface="Calibri"/>
-              </a:rPr>
-              <a:t>Data Understanding</a:t>
-            </a:r>
-          </a:p>
-          <a:p>
-            <a:r>
-              <a:rPr lang="en-GB" sz="1050" dirty="0">
-                <a:ea typeface="Calibri"/>
-                <a:cs typeface="Calibri"/>
-              </a:rPr>
-              <a:t>Inputs to the model: almost all of the input variables are continues numeric features which are describing infrastructure and environmental conditions. Only two of them (</a:t>
-            </a:r>
-            <a:r>
-              <a:rPr lang="en-GB" sz="1050" dirty="0" err="1">
-                <a:ea typeface="Calibri"/>
-                <a:cs typeface="Calibri"/>
-              </a:rPr>
-              <a:t>inspection_season</a:t>
-            </a:r>
-            <a:r>
-              <a:rPr lang="en-GB" sz="1050" dirty="0">
-                <a:ea typeface="Calibri"/>
-                <a:cs typeface="Calibri"/>
-              </a:rPr>
-              <a:t> and </a:t>
-            </a:r>
-            <a:r>
-              <a:rPr lang="en-GB" sz="1050" dirty="0" err="1">
-                <a:ea typeface="Calibri"/>
-                <a:cs typeface="Calibri"/>
-              </a:rPr>
-              <a:t>inspection_window</a:t>
-            </a:r>
-            <a:r>
-              <a:rPr lang="en-GB" sz="1050" dirty="0">
-                <a:ea typeface="Calibri"/>
-                <a:cs typeface="Calibri"/>
-              </a:rPr>
-              <a:t>) are categorical and need to be encoded by one-hot encoding. Additionally, there is one discrete numeric variable – </a:t>
-            </a:r>
-            <a:r>
-              <a:rPr lang="en-GB" sz="1050" dirty="0" err="1">
-                <a:ea typeface="Calibri"/>
-                <a:cs typeface="Calibri"/>
-              </a:rPr>
-              <a:t>inspector_id</a:t>
-            </a:r>
-            <a:r>
-              <a:rPr lang="en-GB" sz="1050" dirty="0">
-                <a:ea typeface="Calibri"/>
-                <a:cs typeface="Calibri"/>
-              </a:rPr>
-              <a:t>, - which identifies an inspector and not contain information about infrastructure, so it has almost nothing to do with failure. This variable adds an unnecessary dimension to the model, increase its complexity, and introduces more noise. Thus, it would be best just to remove it from the dataset. </a:t>
-            </a:r>
-          </a:p>
-          <a:p>
-            <a:pPr marL="228600" indent="-228600">
-              <a:buAutoNum type="arabicPeriod" startAt="2"/>
-            </a:pPr>
-            <a:r>
-              <a:rPr lang="en-GB" sz="1050" dirty="0"/>
-              <a:t>Include train/validate/test split and model selection</a:t>
+              <a:t>accurately predict infrastructure failure;</a:t>
             </a:r>
             <a:endParaRPr lang="en-GB" sz="1050" dirty="0">
               <a:ea typeface="Calibri"/>
@@ -5280,12 +5177,352 @@
             </a:endParaRPr>
           </a:p>
           <a:p>
-            <a:pPr marL="228600" indent="-228600">
+            <a:pPr>
+              <a:buFont typeface="Wingdings" pitchFamily="2" charset="2"/>
+              <a:buChar char="ü"/>
+              <a:tabLst>
+                <a:tab pos="219075" algn="l"/>
+              </a:tabLst>
+            </a:pPr>
+            <a:r>
+              <a:rPr lang="en-GB" sz="1050" i="1" dirty="0">
+                <a:ea typeface="Calibri"/>
+                <a:cs typeface="Calibri"/>
+              </a:rPr>
+              <a:t>minimise false negative </a:t>
+            </a:r>
+            <a:r>
+              <a:rPr lang="en-GB" sz="1050" dirty="0">
+                <a:ea typeface="Calibri"/>
+                <a:cs typeface="Calibri"/>
+              </a:rPr>
+              <a:t>to avoid missing high-risk areas </a:t>
+            </a:r>
+          </a:p>
+          <a:p>
+            <a:pPr>
+              <a:tabLst>
+                <a:tab pos="219075" algn="l"/>
+              </a:tabLst>
+            </a:pPr>
+            <a:r>
+              <a:rPr lang="en-GB" sz="1050" dirty="0">
+                <a:ea typeface="Calibri"/>
+                <a:cs typeface="Calibri"/>
+              </a:rPr>
+              <a:t>(high Recall for failure is the most important metric for this task) ;</a:t>
+            </a:r>
+          </a:p>
+          <a:p>
+            <a:pPr>
+              <a:buFont typeface="Wingdings" pitchFamily="2" charset="2"/>
+              <a:buChar char="ü"/>
+              <a:tabLst>
+                <a:tab pos="219075" algn="l"/>
+              </a:tabLst>
+            </a:pPr>
+            <a:r>
+              <a:rPr lang="en-GB" sz="1050" i="1" dirty="0">
+                <a:ea typeface="Calibri"/>
+                <a:cs typeface="Calibri"/>
+              </a:rPr>
+              <a:t>generalise  well to unseen data</a:t>
+            </a:r>
+            <a:r>
+              <a:rPr lang="en-GB" sz="1050" dirty="0">
+                <a:ea typeface="Calibri"/>
+                <a:cs typeface="Calibri"/>
+              </a:rPr>
+              <a:t> to be useful in real-world applications. </a:t>
+            </a:r>
+          </a:p>
+          <a:p>
+            <a:pPr>
+              <a:tabLst>
+                <a:tab pos="219075" algn="l"/>
+              </a:tabLst>
+            </a:pPr>
+            <a:r>
+              <a:rPr lang="en-GB" sz="1050" dirty="0">
+                <a:ea typeface="Calibri"/>
+                <a:cs typeface="Calibri"/>
+              </a:rPr>
+              <a:t>In addition, it is important to identify which features have the greatest impact on failure, as this can provide valuable insights for decision-making and risk minimisation.</a:t>
+            </a:r>
+          </a:p>
+          <a:p>
+            <a:pPr>
+              <a:buFont typeface="+mj-lt"/>
               <a:buAutoNum type="arabicPeriod" startAt="2"/>
+              <a:tabLst>
+                <a:tab pos="219075" algn="l"/>
+              </a:tabLst>
             </a:pPr>
             <a:r>
-              <a:rPr lang="en-GB" sz="1050" dirty="0"/>
-              <a:t>This list should cover ALL the steps in the process</a:t>
+              <a:rPr lang="en-GB" sz="1050" b="1" dirty="0">
+                <a:ea typeface="Calibri"/>
+                <a:cs typeface="Calibri"/>
+              </a:rPr>
+              <a:t>Data Understanding</a:t>
+            </a:r>
+          </a:p>
+          <a:p>
+            <a:pPr>
+              <a:tabLst>
+                <a:tab pos="219075" algn="l"/>
+              </a:tabLst>
+            </a:pPr>
+            <a:r>
+              <a:rPr lang="en-GB" sz="1050" i="1" u="sng" dirty="0">
+                <a:ea typeface="Calibri"/>
+                <a:cs typeface="Calibri"/>
+              </a:rPr>
+              <a:t>Inputs to the model: </a:t>
+            </a:r>
+            <a:r>
+              <a:rPr lang="en-GB" sz="1050" dirty="0">
+                <a:ea typeface="Calibri"/>
+                <a:cs typeface="Calibri"/>
+              </a:rPr>
+              <a:t>almost all of the input variables are continues numeric features which are describing infrastructure and environmental conditions. Only two of them (</a:t>
+            </a:r>
+            <a:r>
+              <a:rPr lang="en-GB" sz="1050" dirty="0" err="1">
+                <a:ea typeface="Calibri"/>
+                <a:cs typeface="Calibri"/>
+              </a:rPr>
+              <a:t>inspection_season</a:t>
+            </a:r>
+            <a:r>
+              <a:rPr lang="en-GB" sz="1050" dirty="0">
+                <a:ea typeface="Calibri"/>
+                <a:cs typeface="Calibri"/>
+              </a:rPr>
+              <a:t> and </a:t>
+            </a:r>
+            <a:r>
+              <a:rPr lang="en-GB" sz="1050" dirty="0" err="1">
+                <a:ea typeface="Calibri"/>
+                <a:cs typeface="Calibri"/>
+              </a:rPr>
+              <a:t>inspection_window</a:t>
+            </a:r>
+            <a:r>
+              <a:rPr lang="en-GB" sz="1050" dirty="0">
+                <a:ea typeface="Calibri"/>
+                <a:cs typeface="Calibri"/>
+              </a:rPr>
+              <a:t>) are categorical and need to be encoded by one-hot encoding. Additionally, there is one discrete numeric variable – </a:t>
+            </a:r>
+            <a:r>
+              <a:rPr lang="en-GB" sz="1050" dirty="0" err="1">
+                <a:ea typeface="Calibri"/>
+                <a:cs typeface="Calibri"/>
+              </a:rPr>
+              <a:t>inspector_id</a:t>
+            </a:r>
+            <a:r>
+              <a:rPr lang="en-GB" sz="1050" dirty="0">
+                <a:ea typeface="Calibri"/>
+                <a:cs typeface="Calibri"/>
+              </a:rPr>
+              <a:t>, - which identifies an inspector and not contain information about infrastructure, so it has almost nothing to do with failure. This variable adds an unnecessary dimension to the model, increase its complexity, and introduces more noise. Thus, it would be best just to remove it from the dataset. </a:t>
+            </a:r>
+          </a:p>
+          <a:p>
+            <a:pPr>
+              <a:tabLst>
+                <a:tab pos="219075" algn="l"/>
+              </a:tabLst>
+            </a:pPr>
+            <a:r>
+              <a:rPr lang="en-GB" sz="1050" i="1" u="sng" dirty="0">
+                <a:ea typeface="Calibri"/>
+                <a:cs typeface="Calibri"/>
+              </a:rPr>
+              <a:t>Output of the model</a:t>
+            </a:r>
+            <a:r>
+              <a:rPr lang="en-GB" sz="1050" dirty="0">
+                <a:ea typeface="Calibri"/>
+                <a:cs typeface="Calibri"/>
+              </a:rPr>
+              <a:t> is the binary categorical variable failure (target) which takes values 0 – for no infrastructure failure and 1 - for failure occurs. </a:t>
+            </a:r>
+          </a:p>
+          <a:p>
+            <a:pPr>
+              <a:tabLst>
+                <a:tab pos="219075" algn="l"/>
+              </a:tabLst>
+            </a:pPr>
+            <a:r>
+              <a:rPr lang="en-GB" sz="1050" i="1" u="sng" dirty="0">
+                <a:ea typeface="Calibri"/>
+                <a:cs typeface="Calibri"/>
+              </a:rPr>
+              <a:t>To solve this task</a:t>
+            </a:r>
+            <a:r>
+              <a:rPr lang="en-GB" sz="1050" dirty="0">
+                <a:ea typeface="Calibri"/>
+                <a:cs typeface="Calibri"/>
+              </a:rPr>
+              <a:t>, we cannot use conventional software because we do not know the exactly rules under which a failure occurs. Besides, many factors may influence the failure simultaneously and there may be complex dependencies between them. Machine Learning is the best way to solve this problem because it automatically finds pattern in the data, uses past observations, and build probability model. </a:t>
+            </a:r>
+          </a:p>
+          <a:p>
+            <a:pPr>
+              <a:tabLst>
+                <a:tab pos="219075" algn="l"/>
+              </a:tabLst>
+            </a:pPr>
+            <a:r>
+              <a:rPr lang="en-GB" sz="1050" i="1" dirty="0">
+                <a:ea typeface="Calibri"/>
+                <a:cs typeface="Calibri"/>
+              </a:rPr>
+              <a:t>It worth to emphasise that care must be taken to avoid overtraining the model and preventing data leakage. </a:t>
+            </a:r>
+          </a:p>
+          <a:p>
+            <a:pPr>
+              <a:tabLst>
+                <a:tab pos="219075" algn="l"/>
+              </a:tabLst>
+            </a:pPr>
+            <a:r>
+              <a:rPr lang="en-GB" sz="1050" i="1" u="sng" dirty="0">
+                <a:ea typeface="Calibri"/>
+                <a:cs typeface="Calibri"/>
+              </a:rPr>
+              <a:t>Plot the data</a:t>
+            </a:r>
+            <a:r>
+              <a:rPr lang="en-GB" sz="1050" dirty="0">
+                <a:ea typeface="Calibri"/>
+                <a:cs typeface="Calibri"/>
+              </a:rPr>
+              <a:t> for better data mining and possible errors identification. </a:t>
+            </a:r>
+          </a:p>
+          <a:p>
+            <a:pPr>
+              <a:tabLst>
+                <a:tab pos="219075" algn="l"/>
+              </a:tabLst>
+            </a:pPr>
+            <a:r>
+              <a:rPr lang="en-GB" sz="1050" dirty="0">
+                <a:ea typeface="Calibri"/>
+                <a:cs typeface="Calibri"/>
+              </a:rPr>
+              <a:t>Histograms show that some features (like </a:t>
+            </a:r>
+            <a:r>
+              <a:rPr lang="en-GB" sz="1050" dirty="0" err="1">
+                <a:ea typeface="Calibri"/>
+                <a:cs typeface="Calibri"/>
+              </a:rPr>
+              <a:t>structural_mass_ratio</a:t>
+            </a:r>
+            <a:r>
+              <a:rPr lang="en-GB" sz="1050" dirty="0">
+                <a:ea typeface="Calibri"/>
+                <a:cs typeface="Calibri"/>
+              </a:rPr>
+              <a:t>, </a:t>
+            </a:r>
+            <a:r>
+              <a:rPr lang="en-GB" sz="1050" dirty="0" err="1">
+                <a:ea typeface="Calibri"/>
+                <a:cs typeface="Calibri"/>
+              </a:rPr>
+              <a:t>surface_debris</a:t>
+            </a:r>
+            <a:r>
+              <a:rPr lang="en-GB" sz="1050" dirty="0">
+                <a:ea typeface="Calibri"/>
+                <a:cs typeface="Calibri"/>
+              </a:rPr>
+              <a:t>, </a:t>
+            </a:r>
+            <a:r>
+              <a:rPr lang="en-GB" sz="1050" dirty="0" err="1">
+                <a:ea typeface="Calibri"/>
+                <a:cs typeface="Calibri"/>
+              </a:rPr>
+              <a:t>infrastructure_age</a:t>
+            </a:r>
+            <a:r>
+              <a:rPr lang="en-GB" sz="1050" dirty="0">
+                <a:ea typeface="Calibri"/>
+                <a:cs typeface="Calibri"/>
+              </a:rPr>
+              <a:t>, </a:t>
+            </a:r>
+            <a:r>
+              <a:rPr lang="en-GB" sz="1050" dirty="0" err="1">
+                <a:ea typeface="Calibri"/>
+                <a:cs typeface="Calibri"/>
+              </a:rPr>
+              <a:t>moisture_stress</a:t>
+            </a:r>
+            <a:r>
+              <a:rPr lang="en-GB" sz="1050" dirty="0">
+                <a:ea typeface="Calibri"/>
+                <a:cs typeface="Calibri"/>
+              </a:rPr>
+              <a:t>, </a:t>
+            </a:r>
+            <a:r>
+              <a:rPr lang="en-GB" sz="1050" dirty="0" err="1">
+                <a:ea typeface="Calibri"/>
+                <a:cs typeface="Calibri"/>
+              </a:rPr>
+              <a:t>recent_precipitation</a:t>
+            </a:r>
+            <a:r>
+              <a:rPr lang="en-GB" sz="1050" dirty="0">
+                <a:ea typeface="Calibri"/>
+                <a:cs typeface="Calibri"/>
+              </a:rPr>
+              <a:t>) have significant impact on failure, where higher values increase probability of failure. </a:t>
+            </a:r>
+          </a:p>
+          <a:p>
+            <a:pPr>
+              <a:tabLst>
+                <a:tab pos="219075" algn="l"/>
+              </a:tabLst>
+            </a:pPr>
+            <a:r>
+              <a:rPr lang="en-GB" sz="1050" dirty="0">
+                <a:ea typeface="Calibri"/>
+                <a:cs typeface="Calibri"/>
+              </a:rPr>
+              <a:t>By </a:t>
+            </a:r>
+            <a:r>
+              <a:rPr lang="en-GB" sz="1050" dirty="0" err="1">
+                <a:ea typeface="Calibri"/>
+                <a:cs typeface="Calibri"/>
+              </a:rPr>
+              <a:t>examing</a:t>
+            </a:r>
+            <a:r>
+              <a:rPr lang="en-GB" sz="1050" dirty="0">
+                <a:ea typeface="Calibri"/>
+                <a:cs typeface="Calibri"/>
+              </a:rPr>
+              <a:t> the distribution, it becomes clear that there are some errors in </a:t>
+            </a:r>
+            <a:r>
+              <a:rPr lang="en-GB" sz="1050">
+                <a:ea typeface="Calibri"/>
+                <a:cs typeface="Calibri"/>
+              </a:rPr>
+              <a:t>the dataset. </a:t>
             </a:r>
             <a:endParaRPr lang="en-GB" sz="1050" dirty="0">
               <a:ea typeface="Calibri"/>
@@ -5293,56 +5530,267 @@
             </a:endParaRPr>
           </a:p>
           <a:p>
-            <a:pPr marL="228600" indent="-228600">
-              <a:buAutoNum type="arabicPeriod" startAt="2"/>
+            <a:pPr>
+              <a:buFont typeface="+mj-lt"/>
+              <a:buAutoNum type="arabicPeriod" startAt="3"/>
+              <a:tabLst>
+                <a:tab pos="219075" algn="l"/>
+              </a:tabLst>
             </a:pPr>
             <a:r>
-              <a:rPr lang="en-GB" sz="1050" dirty="0"/>
-              <a:t>…</a:t>
-            </a:r>
+              <a:rPr lang="en-GB" sz="1050" b="1" dirty="0">
+                <a:ea typeface="Calibri"/>
+                <a:cs typeface="Calibri"/>
+              </a:rPr>
+              <a:t>Data Preparation</a:t>
+            </a:r>
+          </a:p>
+          <a:p>
+            <a:pPr marL="7938" indent="-7938">
+              <a:buFont typeface="Arial" panose="020B0604020202020204" pitchFamily="34" charset="0"/>
+              <a:buChar char="•"/>
+              <a:tabLst>
+                <a:tab pos="219075" algn="l"/>
+              </a:tabLst>
+            </a:pPr>
+            <a:r>
+              <a:rPr lang="en-GB" sz="1050" dirty="0">
+                <a:ea typeface="Calibri"/>
+                <a:cs typeface="Calibri"/>
+              </a:rPr>
+              <a:t>  Afte visualising the data, the </a:t>
+            </a:r>
+            <a:r>
+              <a:rPr lang="en-GB" sz="1050" dirty="0" err="1">
+                <a:ea typeface="Calibri"/>
+                <a:cs typeface="Calibri"/>
+              </a:rPr>
+              <a:t>inspector_id</a:t>
+            </a:r>
+            <a:r>
+              <a:rPr lang="en-GB" sz="1050" dirty="0">
+                <a:ea typeface="Calibri"/>
+                <a:cs typeface="Calibri"/>
+              </a:rPr>
+              <a:t>  feature appears to have a flat distribution and therefore, is not useful for prediction. As mentioned before, it should be removed from the dataset at this stage. </a:t>
+            </a:r>
+          </a:p>
+          <a:p>
+            <a:pPr marL="7938" indent="-7938">
+              <a:buFont typeface="Arial" panose="020B0604020202020204" pitchFamily="34" charset="0"/>
+              <a:buChar char="•"/>
+              <a:tabLst>
+                <a:tab pos="219075" algn="l"/>
+              </a:tabLst>
+            </a:pPr>
+            <a:r>
+              <a:rPr lang="en-GB" sz="1050" dirty="0">
+                <a:ea typeface="Calibri"/>
+                <a:cs typeface="Calibri"/>
+              </a:rPr>
+              <a:t>  Besides, there are some mistakes can be seen in categorical values (</a:t>
+            </a:r>
+            <a:r>
+              <a:rPr lang="en-GB" sz="1050" dirty="0" err="1">
+                <a:ea typeface="Calibri"/>
+                <a:cs typeface="Calibri"/>
+              </a:rPr>
+              <a:t>sumer</a:t>
+            </a:r>
+            <a:r>
+              <a:rPr lang="en-GB" sz="1050" dirty="0">
+                <a:ea typeface="Calibri"/>
+                <a:cs typeface="Calibri"/>
+              </a:rPr>
+              <a:t> instead of summer and morni1ng instead of morning). It is appropriate to fix them before splitting the data. </a:t>
+            </a:r>
+          </a:p>
+          <a:p>
+            <a:pPr marL="7938" indent="-7938">
+              <a:buFont typeface="Arial" panose="020B0604020202020204" pitchFamily="34" charset="0"/>
+              <a:buChar char="•"/>
+              <a:tabLst>
+                <a:tab pos="219075" algn="l"/>
+              </a:tabLst>
+            </a:pPr>
+            <a:r>
+              <a:rPr lang="en-GB" sz="1050" dirty="0">
+                <a:ea typeface="Calibri"/>
+                <a:cs typeface="Calibri"/>
+              </a:rPr>
+              <a:t>  Additionally, there are 0.2% missing values</a:t>
+            </a:r>
+            <a:r>
+              <a:rPr lang="ru-RU" sz="1050" dirty="0">
+                <a:ea typeface="Calibri"/>
+                <a:cs typeface="Calibri"/>
+              </a:rPr>
+              <a:t> (</a:t>
+            </a:r>
+            <a:r>
+              <a:rPr lang="en-GB" sz="1050" dirty="0">
+                <a:ea typeface="Calibri"/>
+                <a:cs typeface="Calibri"/>
+              </a:rPr>
+              <a:t>only 11 instances in the dataset), and the best way here is to simply delete these rows  rather than impute impute values. Deleting such a small amount of data is unlikely to affect model performance and it is better option than attempting to estimate missing values. </a:t>
+            </a:r>
+          </a:p>
+          <a:p>
+            <a:pPr>
+              <a:tabLst>
+                <a:tab pos="219075" algn="l"/>
+              </a:tabLst>
+            </a:pPr>
             <a:endParaRPr lang="en-GB" sz="1050" dirty="0">
               <a:ea typeface="Calibri"/>
               <a:cs typeface="Calibri"/>
             </a:endParaRPr>
           </a:p>
           <a:p>
-            <a:pPr marL="228600" indent="-228600">
-              <a:buAutoNum type="arabicPeriod" startAt="2"/>
+            <a:pPr>
+              <a:tabLst>
+                <a:tab pos="219075" algn="l"/>
+              </a:tabLst>
             </a:pPr>
-            <a:r>
-              <a:rPr lang="en-GB" sz="1050" dirty="0"/>
-              <a:t>…</a:t>
-            </a:r>
             <a:endParaRPr lang="en-GB" sz="1050" dirty="0">
               <a:ea typeface="Calibri"/>
               <a:cs typeface="Calibri"/>
             </a:endParaRPr>
           </a:p>
           <a:p>
+            <a:pPr>
+              <a:buAutoNum type="arabicPeriod" startAt="2"/>
+              <a:tabLst>
+                <a:tab pos="219075" algn="l"/>
+              </a:tabLst>
+            </a:pPr>
+            <a:r>
+              <a:rPr lang="en-GB" sz="1050" dirty="0"/>
+              <a:t>Include train/validate/test split and model selection</a:t>
+            </a:r>
+            <a:endParaRPr lang="en-GB" sz="1050" dirty="0">
+              <a:ea typeface="Calibri"/>
+              <a:cs typeface="Calibri"/>
+            </a:endParaRPr>
+          </a:p>
+          <a:p>
+            <a:pPr>
+              <a:buAutoNum type="arabicPeriod" startAt="2"/>
+              <a:tabLst>
+                <a:tab pos="219075" algn="l"/>
+              </a:tabLst>
+            </a:pPr>
+            <a:r>
+              <a:rPr lang="en-GB" sz="1050" dirty="0"/>
+              <a:t>This list should cover ALL the steps in the process</a:t>
+            </a:r>
+            <a:endParaRPr lang="en-GB" sz="1050" dirty="0">
+              <a:ea typeface="Calibri"/>
+              <a:cs typeface="Calibri"/>
+            </a:endParaRPr>
+          </a:p>
+          <a:p>
+            <a:pPr>
+              <a:buAutoNum type="arabicPeriod" startAt="2"/>
+              <a:tabLst>
+                <a:tab pos="219075" algn="l"/>
+              </a:tabLst>
+            </a:pPr>
+            <a:r>
+              <a:rPr lang="en-GB" sz="1050" dirty="0"/>
+              <a:t>…</a:t>
+            </a:r>
+            <a:endParaRPr lang="en-GB" sz="1050" dirty="0">
+              <a:ea typeface="Calibri"/>
+              <a:cs typeface="Calibri"/>
+            </a:endParaRPr>
+          </a:p>
+          <a:p>
+            <a:pPr>
+              <a:buAutoNum type="arabicPeriod" startAt="2"/>
+              <a:tabLst>
+                <a:tab pos="219075" algn="l"/>
+              </a:tabLst>
+            </a:pPr>
+            <a:r>
+              <a:rPr lang="en-GB" sz="1050" dirty="0"/>
+              <a:t>…</a:t>
+            </a:r>
+            <a:endParaRPr lang="en-GB" sz="1050" dirty="0">
+              <a:ea typeface="Calibri"/>
+              <a:cs typeface="Calibri"/>
+            </a:endParaRPr>
+          </a:p>
+          <a:p>
+            <a:pPr>
+              <a:tabLst>
+                <a:tab pos="219075" algn="l"/>
+              </a:tabLst>
+            </a:pPr>
             <a:endParaRPr lang="en-GB" sz="1200" dirty="0"/>
           </a:p>
           <a:p>
+            <a:pPr>
+              <a:tabLst>
+                <a:tab pos="219075" algn="l"/>
+              </a:tabLst>
+            </a:pPr>
             <a:endParaRPr lang="en-GB" sz="1200" dirty="0"/>
           </a:p>
           <a:p>
+            <a:pPr>
+              <a:tabLst>
+                <a:tab pos="219075" algn="l"/>
+              </a:tabLst>
+            </a:pPr>
             <a:endParaRPr lang="en-GB" sz="1200" dirty="0"/>
           </a:p>
           <a:p>
+            <a:pPr>
+              <a:tabLst>
+                <a:tab pos="219075" algn="l"/>
+              </a:tabLst>
+            </a:pPr>
             <a:endParaRPr lang="en-GB" sz="1200" dirty="0"/>
           </a:p>
           <a:p>
+            <a:pPr>
+              <a:tabLst>
+                <a:tab pos="219075" algn="l"/>
+              </a:tabLst>
+            </a:pPr>
             <a:endParaRPr lang="en-GB" sz="1200" dirty="0"/>
           </a:p>
           <a:p>
+            <a:pPr>
+              <a:tabLst>
+                <a:tab pos="219075" algn="l"/>
+              </a:tabLst>
+            </a:pPr>
             <a:endParaRPr lang="en-GB" sz="1200" dirty="0"/>
           </a:p>
           <a:p>
+            <a:pPr>
+              <a:tabLst>
+                <a:tab pos="219075" algn="l"/>
+              </a:tabLst>
+            </a:pPr>
             <a:endParaRPr lang="en-GB" sz="1200" dirty="0"/>
           </a:p>
           <a:p>
+            <a:pPr>
+              <a:tabLst>
+                <a:tab pos="219075" algn="l"/>
+              </a:tabLst>
+            </a:pPr>
             <a:endParaRPr lang="en-GB" sz="1200" dirty="0"/>
           </a:p>
           <a:p>
+            <a:pPr>
+              <a:tabLst>
+                <a:tab pos="219075" algn="l"/>
+              </a:tabLst>
+            </a:pPr>
             <a:endParaRPr lang="en-GB" sz="1200" dirty="0"/>
           </a:p>
         </p:txBody>

--- a/BD6 Assignment.pptx
+++ b/BD6 Assignment.pptx
@@ -4117,62 +4117,6 @@
               <a:ea typeface="+mn-ea"/>
               <a:cs typeface="+mn-cs"/>
             </a:endParaRPr>
-          </a:p>
-        </p:txBody>
-      </p:sp>
-      <p:sp>
-        <p:nvSpPr>
-          <p:cNvPr id="6" name="TextBox 5">
-            <a:extLst>
-              <a:ext uri="{FF2B5EF4-FFF2-40B4-BE49-F238E27FC236}">
-                <a16:creationId xmlns:a16="http://schemas.microsoft.com/office/drawing/2014/main" id="{8AF6D823-6DA6-9959-0DCB-CCA6AD2DD76E}"/>
-              </a:ext>
-            </a:extLst>
-          </p:cNvPr>
-          <p:cNvSpPr txBox="1"/>
-          <p:nvPr/>
-        </p:nvSpPr>
-        <p:spPr>
-          <a:xfrm>
-            <a:off x="4882288" y="12021739"/>
-            <a:ext cx="543081" cy="3693319"/>
-          </a:xfrm>
-          <a:prstGeom prst="rect">
-            <a:avLst/>
-          </a:prstGeom>
-          <a:noFill/>
-          <a:ln w="38100">
-            <a:solidFill>
-              <a:schemeClr val="accent1">
-                <a:lumMod val="60000"/>
-                <a:lumOff val="40000"/>
-              </a:schemeClr>
-            </a:solidFill>
-          </a:ln>
-        </p:spPr>
-        <p:txBody>
-          <a:bodyPr wrap="square" lIns="91440" tIns="45720" rIns="91440" bIns="45720" rtlCol="0" anchor="t">
-            <a:spAutoFit/>
-          </a:bodyPr>
-          <a:lstStyle/>
-          <a:p>
-            <a:r>
-              <a:rPr lang="en-GB" dirty="0"/>
-              <a:t>8. References</a:t>
-            </a:r>
-          </a:p>
-          <a:p>
-            <a:r>
-              <a:rPr lang="en-GB" sz="1200" b="0" i="0" dirty="0">
-                <a:solidFill>
-                  <a:srgbClr val="202122"/>
-                </a:solidFill>
-                <a:effectLst/>
-                <a:latin typeface="Arial" panose="020B0604020202020204" pitchFamily="34" charset="0"/>
-              </a:rPr>
-              <a:t>[1] If you reference any papers or websites, list them here</a:t>
-            </a:r>
-            <a:endParaRPr lang="en-GB" dirty="0"/>
           </a:p>
         </p:txBody>
       </p:sp>
@@ -5063,7 +5007,7 @@
         <p:spPr>
           <a:xfrm>
             <a:off x="475353" y="745082"/>
-            <a:ext cx="4211646" cy="11757065"/>
+            <a:ext cx="4211646" cy="25306928"/>
           </a:xfrm>
           <a:prstGeom prst="rect">
             <a:avLst/>
@@ -5413,11 +5357,18 @@
               </a:tabLst>
             </a:pPr>
             <a:r>
+              <a:rPr lang="en-GB" sz="1050" i="1" dirty="0">
+                <a:ea typeface="Calibri"/>
+                <a:cs typeface="Calibri"/>
+              </a:rPr>
+              <a:t>Histograms show </a:t>
+            </a:r>
+            <a:r>
               <a:rPr lang="en-GB" sz="1050" dirty="0">
                 <a:ea typeface="Calibri"/>
                 <a:cs typeface="Calibri"/>
               </a:rPr>
-              <a:t>Histograms show that some features (like </a:t>
+              <a:t>that some features (like </a:t>
             </a:r>
             <a:r>
               <a:rPr lang="en-GB" sz="1050" dirty="0" err="1">
@@ -5487,7 +5438,21 @@
                 <a:ea typeface="Calibri"/>
                 <a:cs typeface="Calibri"/>
               </a:rPr>
-              <a:t>) have significant impact on failure, where higher values increase probability of failure. </a:t>
+              <a:t>) have significant impact on failure, where higher values increase probability of failure. And histogram of of </a:t>
+            </a:r>
+            <a:r>
+              <a:rPr lang="en-GB" sz="1050" dirty="0" err="1">
+                <a:ea typeface="Calibri"/>
+                <a:cs typeface="Calibri"/>
+              </a:rPr>
+              <a:t>inspection_season</a:t>
+            </a:r>
+            <a:r>
+              <a:rPr lang="en-GB" sz="1050" dirty="0">
+                <a:ea typeface="Calibri"/>
+                <a:cs typeface="Calibri"/>
+              </a:rPr>
+              <a:t> shows that failures occur mostly in summer period. </a:t>
             </a:r>
           </a:p>
           <a:p>
@@ -5501,33 +5466,8 @@
                 <a:ea typeface="Calibri"/>
                 <a:cs typeface="Calibri"/>
               </a:rPr>
-              <a:t>By </a:t>
-            </a:r>
-            <a:r>
-              <a:rPr lang="en-GB" sz="1050" dirty="0" err="1">
-                <a:ea typeface="Calibri"/>
-                <a:cs typeface="Calibri"/>
-              </a:rPr>
-              <a:t>examing</a:t>
-            </a:r>
-            <a:r>
-              <a:rPr lang="en-GB" sz="1050" dirty="0">
-                <a:ea typeface="Calibri"/>
-                <a:cs typeface="Calibri"/>
-              </a:rPr>
-              <a:t> the distribution, it becomes clear that there are some errors in </a:t>
-            </a:r>
-            <a:r>
-              <a:rPr lang="en-GB" sz="1050">
-                <a:ea typeface="Calibri"/>
-                <a:cs typeface="Calibri"/>
-              </a:rPr>
-              <a:t>the dataset. </a:t>
-            </a:r>
-            <a:endParaRPr lang="en-GB" sz="1050" dirty="0">
-              <a:ea typeface="Calibri"/>
-              <a:cs typeface="Calibri"/>
-            </a:endParaRPr>
+              <a:t>By examine the distribution, it becomes clear that there are some errors in the dataset. </a:t>
+            </a:r>
           </a:p>
           <a:p>
             <a:pPr>
@@ -5636,15 +5576,154 @@
             </a:r>
           </a:p>
           <a:p>
+            <a:pPr marL="7938" indent="-7938">
+              <a:buFont typeface="Arial" panose="020B0604020202020204" pitchFamily="34" charset="0"/>
+              <a:buChar char="•"/>
+              <a:tabLst>
+                <a:tab pos="219075" algn="l"/>
+              </a:tabLst>
+            </a:pPr>
+            <a:r>
+              <a:rPr lang="en-GB" sz="1050" dirty="0">
+                <a:ea typeface="Calibri"/>
+                <a:cs typeface="Calibri"/>
+              </a:rPr>
+              <a:t>  Splitting the data into 70% of training data and 30% of of test data. </a:t>
+            </a:r>
+          </a:p>
+          <a:p>
+            <a:pPr marL="7938" indent="-7938">
+              <a:buFont typeface="Arial" panose="020B0604020202020204" pitchFamily="34" charset="0"/>
+              <a:buChar char="•"/>
+              <a:tabLst>
+                <a:tab pos="219075" algn="l"/>
+              </a:tabLst>
+            </a:pPr>
+            <a:r>
+              <a:rPr lang="en-GB" sz="1050" dirty="0">
+                <a:ea typeface="Calibri"/>
+                <a:cs typeface="Calibri"/>
+              </a:rPr>
+              <a:t>  There is an outlier in </a:t>
+            </a:r>
+            <a:r>
+              <a:rPr lang="en-GB" sz="1050" dirty="0" err="1">
+                <a:ea typeface="Calibri"/>
+                <a:cs typeface="Calibri"/>
+              </a:rPr>
+              <a:t>material_flexibility</a:t>
+            </a:r>
+            <a:r>
+              <a:rPr lang="en-GB" sz="1050" dirty="0">
+                <a:ea typeface="Calibri"/>
+                <a:cs typeface="Calibri"/>
+              </a:rPr>
+              <a:t> feature (≈90) which should be deleted. </a:t>
+            </a:r>
+          </a:p>
+          <a:p>
+            <a:pPr marL="7938" indent="-7938">
+              <a:buFont typeface="Arial" panose="020B0604020202020204" pitchFamily="34" charset="0"/>
+              <a:buChar char="•"/>
+              <a:tabLst>
+                <a:tab pos="219075" algn="l"/>
+              </a:tabLst>
+            </a:pPr>
+            <a:r>
+              <a:rPr lang="en-GB" sz="1050" dirty="0">
+                <a:ea typeface="Calibri"/>
+                <a:cs typeface="Calibri"/>
+              </a:rPr>
+              <a:t>  Categorical </a:t>
+            </a:r>
+            <a:r>
+              <a:rPr lang="en-GB" sz="1050" dirty="0" err="1">
+                <a:ea typeface="Calibri"/>
+                <a:cs typeface="Calibri"/>
+              </a:rPr>
+              <a:t>varialbles</a:t>
+            </a:r>
+            <a:r>
+              <a:rPr lang="en-GB" sz="1050" dirty="0">
+                <a:ea typeface="Calibri"/>
+                <a:cs typeface="Calibri"/>
+              </a:rPr>
+              <a:t> </a:t>
+            </a:r>
+            <a:r>
+              <a:rPr lang="en-GB" sz="1050" dirty="0" err="1">
+                <a:ea typeface="Calibri"/>
+                <a:cs typeface="Calibri"/>
+              </a:rPr>
+              <a:t>inspection_season</a:t>
+            </a:r>
+            <a:r>
+              <a:rPr lang="en-GB" sz="1050" dirty="0">
+                <a:ea typeface="Calibri"/>
+                <a:cs typeface="Calibri"/>
+              </a:rPr>
+              <a:t> and </a:t>
+            </a:r>
+            <a:r>
+              <a:rPr lang="en-GB" sz="1050" dirty="0" err="1">
+                <a:ea typeface="Calibri"/>
+                <a:cs typeface="Calibri"/>
+              </a:rPr>
+              <a:t>inspection_window</a:t>
+            </a:r>
+            <a:r>
+              <a:rPr lang="en-GB" sz="1050" dirty="0">
+                <a:ea typeface="Calibri"/>
+                <a:cs typeface="Calibri"/>
+              </a:rPr>
+              <a:t> should be encoded by one-hot encoding at this stage as well. </a:t>
+            </a:r>
+          </a:p>
+          <a:p>
+            <a:pPr marL="7938" indent="-7938">
+              <a:buFont typeface="Arial" panose="020B0604020202020204" pitchFamily="34" charset="0"/>
+              <a:buChar char="•"/>
+              <a:tabLst>
+                <a:tab pos="219075" algn="l"/>
+              </a:tabLst>
+            </a:pPr>
+            <a:r>
+              <a:rPr lang="en-GB" sz="1050" dirty="0">
+                <a:ea typeface="Calibri"/>
+                <a:cs typeface="Calibri"/>
+              </a:rPr>
+              <a:t>  The variables have different scales, so normalisation must be done before modelling. </a:t>
+            </a:r>
+          </a:p>
+          <a:p>
             <a:pPr>
               <a:tabLst>
                 <a:tab pos="219075" algn="l"/>
               </a:tabLst>
             </a:pPr>
-            <a:endParaRPr lang="en-GB" sz="1050" dirty="0">
-              <a:ea typeface="Calibri"/>
-              <a:cs typeface="Calibri"/>
-            </a:endParaRPr>
+            <a:r>
+              <a:rPr lang="en-GB" sz="1050" dirty="0">
+                <a:ea typeface="Calibri"/>
+                <a:cs typeface="Calibri"/>
+              </a:rPr>
+              <a:t>Now, our data is ready for the modelling. </a:t>
+            </a:r>
+          </a:p>
+          <a:p>
+            <a:pPr marL="228600" indent="-228600">
+              <a:buFont typeface="+mj-lt"/>
+              <a:buAutoNum type="arabicPeriod" startAt="4"/>
+              <a:tabLst>
+                <a:tab pos="219075" algn="l"/>
+              </a:tabLst>
+            </a:pPr>
+            <a:r>
+              <a:rPr lang="en-GB" sz="1050" b="1" dirty="0">
+                <a:ea typeface="Calibri"/>
+                <a:cs typeface="Calibri"/>
+              </a:rPr>
+              <a:t>Building Logistic Regression Model</a:t>
+            </a:r>
           </a:p>
           <a:p>
             <a:pPr>
@@ -5652,74 +5731,13 @@
                 <a:tab pos="219075" algn="l"/>
               </a:tabLst>
             </a:pPr>
-            <a:endParaRPr lang="en-GB" sz="1050" dirty="0">
-              <a:ea typeface="Calibri"/>
-              <a:cs typeface="Calibri"/>
-            </a:endParaRPr>
-          </a:p>
-          <a:p>
-            <a:pPr>
-              <a:buAutoNum type="arabicPeriod" startAt="2"/>
-              <a:tabLst>
-                <a:tab pos="219075" algn="l"/>
-              </a:tabLst>
-            </a:pPr>
-            <a:r>
-              <a:rPr lang="en-GB" sz="1050" dirty="0"/>
-              <a:t>Include train/validate/test split and model selection</a:t>
-            </a:r>
-            <a:endParaRPr lang="en-GB" sz="1050" dirty="0">
-              <a:ea typeface="Calibri"/>
-              <a:cs typeface="Calibri"/>
-            </a:endParaRPr>
-          </a:p>
-          <a:p>
-            <a:pPr>
-              <a:buAutoNum type="arabicPeriod" startAt="2"/>
-              <a:tabLst>
-                <a:tab pos="219075" algn="l"/>
-              </a:tabLst>
-            </a:pPr>
-            <a:r>
-              <a:rPr lang="en-GB" sz="1050" dirty="0"/>
-              <a:t>This list should cover ALL the steps in the process</a:t>
-            </a:r>
-            <a:endParaRPr lang="en-GB" sz="1050" dirty="0">
-              <a:ea typeface="Calibri"/>
-              <a:cs typeface="Calibri"/>
-            </a:endParaRPr>
-          </a:p>
-          <a:p>
-            <a:pPr>
-              <a:buAutoNum type="arabicPeriod" startAt="2"/>
-              <a:tabLst>
-                <a:tab pos="219075" algn="l"/>
-              </a:tabLst>
-            </a:pPr>
-            <a:r>
-              <a:rPr lang="en-GB" sz="1050" dirty="0"/>
-              <a:t>…</a:t>
-            </a:r>
-            <a:endParaRPr lang="en-GB" sz="1050" dirty="0">
-              <a:ea typeface="Calibri"/>
-              <a:cs typeface="Calibri"/>
-            </a:endParaRPr>
-          </a:p>
-          <a:p>
-            <a:pPr>
-              <a:buAutoNum type="arabicPeriod" startAt="2"/>
-              <a:tabLst>
-                <a:tab pos="219075" algn="l"/>
-              </a:tabLst>
-            </a:pPr>
-            <a:r>
-              <a:rPr lang="en-GB" sz="1050" dirty="0"/>
-              <a:t>…</a:t>
-            </a:r>
-            <a:endParaRPr lang="en-GB" sz="1050" dirty="0">
-              <a:ea typeface="Calibri"/>
-              <a:cs typeface="Calibri"/>
-            </a:endParaRPr>
+            <a:r>
+              <a:rPr lang="en-GB" sz="1050" dirty="0">
+                <a:ea typeface="Calibri"/>
+                <a:cs typeface="Calibri"/>
+              </a:rPr>
+              <a:t>On 5-folds cross validation data the model shows the AUC = 0.953, which means the there is a 95.3% probability that the model will assign a higher score to a true failure case than to a non-failure case. </a:t>
+            </a:r>
           </a:p>
           <a:p>
             <a:pPr>
@@ -5727,7 +5745,145 @@
                 <a:tab pos="219075" algn="l"/>
               </a:tabLst>
             </a:pPr>
-            <a:endParaRPr lang="en-GB" sz="1200" dirty="0"/>
+            <a:r>
+              <a:rPr lang="en-GB" sz="1050" dirty="0">
+                <a:ea typeface="Calibri"/>
+                <a:cs typeface="Calibri"/>
+              </a:rPr>
+              <a:t>Recall metric = 0.889, meaning that 88.9% of actual failure cases were correctly identified. </a:t>
+            </a:r>
+          </a:p>
+          <a:p>
+            <a:pPr marL="171450" indent="-171450">
+              <a:buFont typeface="Arial" panose="020B0604020202020204" pitchFamily="34" charset="0"/>
+              <a:buChar char="•"/>
+              <a:tabLst>
+                <a:tab pos="219075" algn="l"/>
+              </a:tabLst>
+            </a:pPr>
+            <a:r>
+              <a:rPr lang="en-GB" sz="1050" dirty="0">
+                <a:ea typeface="Calibri"/>
+                <a:cs typeface="Calibri"/>
+              </a:rPr>
+              <a:t>L1-regularisation (Lasso) was applied , with the hyperparameter </a:t>
+            </a:r>
+            <a:r>
+              <a:rPr lang="en-GB" sz="1050" i="1" dirty="0">
+                <a:ea typeface="Calibri"/>
+                <a:cs typeface="Calibri"/>
+              </a:rPr>
+              <a:t>C</a:t>
+            </a:r>
+            <a:r>
+              <a:rPr lang="en-GB" sz="1050" dirty="0">
+                <a:ea typeface="Calibri"/>
+                <a:cs typeface="Calibri"/>
+              </a:rPr>
+              <a:t> tuned across multiple values (0.001, 0.01, 0.05, 0.1, 0.2, 1, 10, 100, 1000) to control the strength of regularisation. The optimal performance was achieved at </a:t>
+            </a:r>
+            <a:r>
+              <a:rPr lang="en-GB" sz="1050" i="1" dirty="0">
+                <a:ea typeface="Calibri"/>
+                <a:cs typeface="Calibri"/>
+              </a:rPr>
+              <a:t>C = 0.05</a:t>
+            </a:r>
+            <a:r>
+              <a:rPr lang="en-GB" sz="1050" dirty="0">
+                <a:ea typeface="Calibri"/>
+                <a:cs typeface="Calibri"/>
+              </a:rPr>
+              <a:t>, yielding a Recall = 0.915 and AUC = 0.969.</a:t>
+            </a:r>
+          </a:p>
+          <a:p>
+            <a:pPr marL="171450" indent="-171450">
+              <a:buFont typeface="Arial" panose="020B0604020202020204" pitchFamily="34" charset="0"/>
+              <a:buChar char="•"/>
+              <a:tabLst>
+                <a:tab pos="219075" algn="l"/>
+              </a:tabLst>
+            </a:pPr>
+            <a:r>
+              <a:rPr lang="en-GB" sz="1050" dirty="0">
+                <a:ea typeface="Calibri"/>
+                <a:cs typeface="Calibri"/>
+              </a:rPr>
+              <a:t>L2-regularisation (Ridge) was applied , with the same rage of hyperparameter </a:t>
+            </a:r>
+            <a:r>
+              <a:rPr lang="en-GB" sz="1050" i="1" dirty="0">
+                <a:ea typeface="Calibri"/>
+                <a:cs typeface="Calibri"/>
+              </a:rPr>
+              <a:t>C. </a:t>
+            </a:r>
+            <a:r>
+              <a:rPr lang="en-GB" sz="1050" dirty="0">
+                <a:ea typeface="Calibri"/>
+                <a:cs typeface="Calibri"/>
+              </a:rPr>
+              <a:t>The best result was achieved with the </a:t>
+            </a:r>
+            <a:r>
+              <a:rPr lang="en-GB" sz="1050" i="1" dirty="0">
+                <a:ea typeface="Calibri"/>
+                <a:cs typeface="Calibri"/>
+              </a:rPr>
+              <a:t>C = 0.05 and balancing class distribution</a:t>
+            </a:r>
+            <a:r>
+              <a:rPr lang="en-GB" sz="1050" dirty="0">
+                <a:ea typeface="Calibri"/>
+                <a:cs typeface="Calibri"/>
+              </a:rPr>
+              <a:t>, yielding a </a:t>
+            </a:r>
+            <a:r>
+              <a:rPr lang="en-GB" sz="1050" b="1" dirty="0">
+                <a:ea typeface="Calibri"/>
+                <a:cs typeface="Calibri"/>
+              </a:rPr>
+              <a:t>Recall = 0.919 </a:t>
+            </a:r>
+            <a:r>
+              <a:rPr lang="en-GB" sz="1050" dirty="0">
+                <a:ea typeface="Calibri"/>
+                <a:cs typeface="Calibri"/>
+              </a:rPr>
+              <a:t>and </a:t>
+            </a:r>
+            <a:r>
+              <a:rPr lang="en-GB" sz="1050" b="1" dirty="0">
+                <a:ea typeface="Calibri"/>
+                <a:cs typeface="Calibri"/>
+              </a:rPr>
+              <a:t>AUC = 0.971</a:t>
+            </a:r>
+            <a:r>
+              <a:rPr lang="en-GB" sz="1050" dirty="0">
+                <a:ea typeface="Calibri"/>
+                <a:cs typeface="Calibri"/>
+              </a:rPr>
+              <a:t>.</a:t>
+            </a:r>
+          </a:p>
+          <a:p>
+            <a:pPr marL="228600" indent="-228600">
+              <a:buFont typeface="+mj-lt"/>
+              <a:buAutoNum type="arabicPeriod" startAt="5"/>
+              <a:tabLst>
+                <a:tab pos="219075" algn="l"/>
+              </a:tabLst>
+            </a:pPr>
+            <a:r>
+              <a:rPr lang="en-GB" sz="1050" b="1" dirty="0">
+                <a:ea typeface="Calibri"/>
+                <a:cs typeface="Calibri"/>
+              </a:rPr>
+              <a:t>Building Decision Tree Model</a:t>
+            </a:r>
           </a:p>
           <a:p>
             <a:pPr>
@@ -5735,7 +5891,61 @@
                 <a:tab pos="219075" algn="l"/>
               </a:tabLst>
             </a:pPr>
-            <a:endParaRPr lang="en-GB" sz="1200" dirty="0"/>
+            <a:r>
+              <a:rPr lang="en-GB" sz="1050" dirty="0">
+                <a:ea typeface="Calibri"/>
+                <a:cs typeface="Calibri"/>
+              </a:rPr>
+              <a:t>Different hyperparameters were examined, including: </a:t>
+            </a:r>
+          </a:p>
+          <a:p>
+            <a:pPr marL="171450" indent="-171450">
+              <a:buFont typeface="Arial" panose="020B0604020202020204" pitchFamily="34" charset="0"/>
+              <a:buChar char="•"/>
+              <a:tabLst>
+                <a:tab pos="219075" algn="l"/>
+              </a:tabLst>
+            </a:pPr>
+            <a:r>
+              <a:rPr lang="en-GB" sz="1050" dirty="0">
+                <a:ea typeface="Calibri"/>
+                <a:cs typeface="Calibri"/>
+              </a:rPr>
+              <a:t>Minimum number of instances in leaves (2, 5, 10, 20);</a:t>
+            </a:r>
+          </a:p>
+          <a:p>
+            <a:pPr marL="171450" indent="-171450">
+              <a:buFont typeface="Arial" panose="020B0604020202020204" pitchFamily="34" charset="0"/>
+              <a:buChar char="•"/>
+              <a:tabLst>
+                <a:tab pos="219075" algn="l"/>
+              </a:tabLst>
+            </a:pPr>
+            <a:r>
+              <a:rPr lang="en-GB" sz="1050" dirty="0">
+                <a:ea typeface="Calibri"/>
+                <a:cs typeface="Calibri"/>
+              </a:rPr>
+              <a:t>Split subsets (5, 10, 20), which did not have any effect on the results;</a:t>
+            </a:r>
+          </a:p>
+          <a:p>
+            <a:pPr marL="171450" indent="-171450">
+              <a:buFont typeface="Arial" panose="020B0604020202020204" pitchFamily="34" charset="0"/>
+              <a:buChar char="•"/>
+              <a:tabLst>
+                <a:tab pos="219075" algn="l"/>
+              </a:tabLst>
+            </a:pPr>
+            <a:r>
+              <a:rPr lang="en-GB" sz="1050" dirty="0">
+                <a:ea typeface="Calibri"/>
+                <a:cs typeface="Calibri"/>
+              </a:rPr>
+              <a:t>Maximum tree depth (2, 5, 8, 10). </a:t>
+            </a:r>
           </a:p>
           <a:p>
             <a:pPr>
@@ -5743,7 +5953,57 @@
                 <a:tab pos="219075" algn="l"/>
               </a:tabLst>
             </a:pPr>
-            <a:endParaRPr lang="en-GB" sz="1200" dirty="0"/>
+            <a:r>
+              <a:rPr lang="en-GB" sz="1050" dirty="0">
+                <a:ea typeface="Calibri"/>
+                <a:cs typeface="Calibri"/>
+              </a:rPr>
+              <a:t>The best performance was achieved with 10 instances in leaves, 5 split subsets and a maximum tree depth of 10, resulting in </a:t>
+            </a:r>
+            <a:r>
+              <a:rPr lang="en-GB" sz="1050" b="1" dirty="0">
+                <a:ea typeface="Calibri"/>
+                <a:cs typeface="Calibri"/>
+              </a:rPr>
+              <a:t>Recall = 0.889 </a:t>
+            </a:r>
+            <a:r>
+              <a:rPr lang="en-GB" sz="1050" dirty="0">
+                <a:ea typeface="Calibri"/>
+                <a:cs typeface="Calibri"/>
+              </a:rPr>
+              <a:t>and </a:t>
+            </a:r>
+            <a:r>
+              <a:rPr lang="en-GB" sz="1050" b="1" dirty="0">
+                <a:ea typeface="Calibri"/>
+                <a:cs typeface="Calibri"/>
+              </a:rPr>
+              <a:t>AUC = 0.938</a:t>
+            </a:r>
+            <a:r>
+              <a:rPr lang="en-GB" sz="1050" dirty="0">
+                <a:ea typeface="Calibri"/>
+                <a:cs typeface="Calibri"/>
+              </a:rPr>
+              <a:t>. </a:t>
+            </a:r>
+          </a:p>
+          <a:p>
+            <a:pPr marL="228600" indent="-228600">
+              <a:buFont typeface="+mj-lt"/>
+              <a:buAutoNum type="arabicPeriod" startAt="6"/>
+              <a:tabLst>
+                <a:tab pos="219075" algn="l"/>
+              </a:tabLst>
+            </a:pPr>
+            <a:r>
+              <a:rPr lang="en-GB" sz="1050" b="1" dirty="0">
+                <a:ea typeface="Calibri"/>
+                <a:cs typeface="Calibri"/>
+              </a:rPr>
+              <a:t>Building Neural Network Model</a:t>
+            </a:r>
           </a:p>
           <a:p>
             <a:pPr>
@@ -5751,7 +6011,118 @@
                 <a:tab pos="219075" algn="l"/>
               </a:tabLst>
             </a:pPr>
-            <a:endParaRPr lang="en-GB" sz="1200" dirty="0"/>
+            <a:r>
+              <a:rPr lang="en-GB" sz="1050" dirty="0">
+                <a:ea typeface="Calibri"/>
+                <a:cs typeface="Calibri"/>
+              </a:rPr>
+              <a:t>The following hyperparameters were examined on </a:t>
+            </a:r>
+            <a:r>
+              <a:rPr lang="en-GB" sz="1050" dirty="0"/>
+              <a:t>across multiple </a:t>
+            </a:r>
+            <a:r>
+              <a:rPr lang="en-GB" sz="1050" dirty="0">
+                <a:ea typeface="Calibri"/>
+                <a:cs typeface="Calibri"/>
+              </a:rPr>
+              <a:t>MLPs:</a:t>
+            </a:r>
+          </a:p>
+          <a:p>
+            <a:pPr marL="171450" indent="-171450">
+              <a:buFont typeface="Arial" panose="020B0604020202020204" pitchFamily="34" charset="0"/>
+              <a:buChar char="•"/>
+              <a:tabLst>
+                <a:tab pos="219075" algn="l"/>
+              </a:tabLst>
+            </a:pPr>
+            <a:r>
+              <a:rPr lang="en-GB" sz="1050" dirty="0">
+                <a:ea typeface="Calibri"/>
+                <a:cs typeface="Calibri"/>
+              </a:rPr>
+              <a:t>Neurons in hidden layers (10, 20, 50, 100, 200, 300);</a:t>
+            </a:r>
+          </a:p>
+          <a:p>
+            <a:pPr marL="171450" indent="-171450">
+              <a:buFont typeface="Arial" panose="020B0604020202020204" pitchFamily="34" charset="0"/>
+              <a:buChar char="•"/>
+              <a:tabLst>
+                <a:tab pos="219075" algn="l"/>
+              </a:tabLst>
+            </a:pPr>
+            <a:r>
+              <a:rPr lang="en-GB" sz="1050" dirty="0">
+                <a:ea typeface="Calibri"/>
+                <a:cs typeface="Calibri"/>
+              </a:rPr>
+              <a:t>Activation functions (</a:t>
+            </a:r>
+            <a:r>
+              <a:rPr lang="en-GB" sz="1050" dirty="0" err="1">
+                <a:ea typeface="Calibri"/>
+                <a:cs typeface="Calibri"/>
+              </a:rPr>
+              <a:t>ReLu</a:t>
+            </a:r>
+            <a:r>
+              <a:rPr lang="en-GB" sz="1050" dirty="0">
+                <a:ea typeface="Calibri"/>
+                <a:cs typeface="Calibri"/>
+              </a:rPr>
+              <a:t>, tanh, logistic);</a:t>
+            </a:r>
+          </a:p>
+          <a:p>
+            <a:pPr marL="171450" indent="-171450">
+              <a:buFont typeface="Arial" panose="020B0604020202020204" pitchFamily="34" charset="0"/>
+              <a:buChar char="•"/>
+              <a:tabLst>
+                <a:tab pos="219075" algn="l"/>
+              </a:tabLst>
+            </a:pPr>
+            <a:r>
+              <a:rPr lang="en-GB" sz="1050" dirty="0">
+                <a:ea typeface="Calibri"/>
+                <a:cs typeface="Calibri"/>
+              </a:rPr>
+              <a:t>Solver (Adam, L-BFGS, SGD);</a:t>
+            </a:r>
+          </a:p>
+          <a:p>
+            <a:pPr marL="171450" indent="-171450">
+              <a:buFont typeface="Arial" panose="020B0604020202020204" pitchFamily="34" charset="0"/>
+              <a:buChar char="•"/>
+              <a:tabLst>
+                <a:tab pos="219075" algn="l"/>
+              </a:tabLst>
+            </a:pPr>
+            <a:r>
+              <a:rPr lang="en-GB" sz="1050" dirty="0">
+                <a:ea typeface="Calibri"/>
+                <a:cs typeface="Calibri"/>
+              </a:rPr>
+              <a:t>Regularisation (0.0001, 0.001, 0.01, 0.1, 1, 2, 3, 4, 5, 6, 7, 8, 10, 15);</a:t>
+            </a:r>
+          </a:p>
+          <a:p>
+            <a:pPr marL="171450" indent="-171450">
+              <a:buFont typeface="Arial" panose="020B0604020202020204" pitchFamily="34" charset="0"/>
+              <a:buChar char="•"/>
+              <a:tabLst>
+                <a:tab pos="219075" algn="l"/>
+              </a:tabLst>
+            </a:pPr>
+            <a:r>
+              <a:rPr lang="en-GB" sz="1050" dirty="0">
+                <a:ea typeface="Calibri"/>
+                <a:cs typeface="Calibri"/>
+              </a:rPr>
+              <a:t>Maximal number of iterations (50, 100, 200, 300, 400, 500, 700, 800, 1000)</a:t>
+            </a:r>
           </a:p>
           <a:p>
             <a:pPr>
@@ -5759,7 +6130,61 @@
                 <a:tab pos="219075" algn="l"/>
               </a:tabLst>
             </a:pPr>
-            <a:endParaRPr lang="en-GB" sz="1200" dirty="0"/>
+            <a:r>
+              <a:rPr lang="en-GB" sz="1050" dirty="0"/>
+              <a:t>The best-performing configuration consisted of 50 neurons in the hidden layer, a tanh activation function, the SGD solver and 200 </a:t>
+            </a:r>
+            <a:r>
+              <a:rPr lang="en-GB" sz="1050" dirty="0">
+                <a:ea typeface="Calibri"/>
+                <a:cs typeface="Calibri"/>
+              </a:rPr>
+              <a:t>epochs, resulting in </a:t>
+            </a:r>
+            <a:r>
+              <a:rPr lang="en-GB" sz="1050" b="1" dirty="0">
+                <a:ea typeface="Calibri"/>
+                <a:cs typeface="Calibri"/>
+              </a:rPr>
+              <a:t>Recall = 0.928 </a:t>
+            </a:r>
+            <a:r>
+              <a:rPr lang="en-GB" sz="1050" dirty="0">
+                <a:ea typeface="Calibri"/>
+                <a:cs typeface="Calibri"/>
+              </a:rPr>
+              <a:t>and </a:t>
+            </a:r>
+            <a:r>
+              <a:rPr lang="en-GB" sz="1050" b="1" dirty="0">
+                <a:ea typeface="Calibri"/>
+                <a:cs typeface="Calibri"/>
+              </a:rPr>
+              <a:t>AUC = 0.965</a:t>
+            </a:r>
+            <a:r>
+              <a:rPr lang="en-GB" sz="1050" dirty="0">
+                <a:ea typeface="Calibri"/>
+                <a:cs typeface="Calibri"/>
+              </a:rPr>
+              <a:t>. </a:t>
+            </a:r>
+          </a:p>
+          <a:p>
+            <a:pPr marL="228600" indent="-228600">
+              <a:buFont typeface="+mj-lt"/>
+              <a:buAutoNum type="arabicPeriod" startAt="7"/>
+              <a:tabLst>
+                <a:tab pos="219075" algn="l"/>
+              </a:tabLst>
+            </a:pPr>
+            <a:r>
+              <a:rPr lang="en-GB" sz="1050" b="1" dirty="0">
+                <a:cs typeface="Calibri"/>
+              </a:rPr>
+              <a:t>Feature Projection</a:t>
+            </a:r>
+            <a:endParaRPr lang="en-GB" sz="1200" b="1" dirty="0"/>
           </a:p>
           <a:p>
             <a:pPr>
@@ -5767,7 +6192,22 @@
                 <a:tab pos="219075" algn="l"/>
               </a:tabLst>
             </a:pPr>
-            <a:endParaRPr lang="en-GB" sz="1200" dirty="0"/>
+            <a:r>
+              <a:rPr lang="en-GB" sz="1200" i="1" dirty="0"/>
+              <a:t>Principal Component Analysis </a:t>
+            </a:r>
+            <a:r>
+              <a:rPr lang="en-GB" sz="1200" dirty="0"/>
+              <a:t>was applied to the dataset; however, it decreased the accuracy of the models. PCA reduced the number of dimension, but it also worsened the separability</a:t>
+            </a:r>
+            <a:r>
+              <a:rPr lang="ru-RU" sz="1200" dirty="0"/>
+              <a:t> </a:t>
+            </a:r>
+            <a:r>
+              <a:rPr lang="en-GB" sz="1200" dirty="0"/>
+              <a:t>by mixing the classes and losing important relationships between the features, which led to poorer model performance. </a:t>
+            </a:r>
           </a:p>
           <a:p>
             <a:pPr>
@@ -5775,7 +6215,14 @@
                 <a:tab pos="219075" algn="l"/>
               </a:tabLst>
             </a:pPr>
-            <a:endParaRPr lang="en-GB" sz="1200" dirty="0"/>
+            <a:r>
+              <a:rPr lang="en-GB" sz="1200" i="1" dirty="0"/>
+              <a:t>Manifold learning </a:t>
+            </a:r>
+            <a:r>
+              <a:rPr lang="en-GB" sz="1200" dirty="0"/>
+              <a:t>was also applied, but it resulted in a slight decrease in model accuracy as well.</a:t>
+            </a:r>
           </a:p>
           <a:p>
             <a:pPr>
@@ -5783,7 +6230,23 @@
                 <a:tab pos="219075" algn="l"/>
               </a:tabLst>
             </a:pPr>
-            <a:endParaRPr lang="en-GB" sz="1200" dirty="0"/>
+            <a:r>
+              <a:rPr lang="en-GB" sz="1200" i="1" dirty="0"/>
+              <a:t>Therefore, these methods were excluded from the final modelling pipeline. </a:t>
+            </a:r>
+          </a:p>
+          <a:p>
+            <a:pPr marL="228600" indent="-228600">
+              <a:buFont typeface="+mj-lt"/>
+              <a:buAutoNum type="arabicPeriod" startAt="8"/>
+              <a:tabLst>
+                <a:tab pos="219075" algn="l"/>
+              </a:tabLst>
+            </a:pPr>
+            <a:r>
+              <a:rPr lang="en-GB" sz="1200" b="1" dirty="0"/>
+              <a:t>Feature Selection</a:t>
+            </a:r>
           </a:p>
           <a:p>
             <a:pPr>
@@ -5791,7 +6254,318 @@
                 <a:tab pos="219075" algn="l"/>
               </a:tabLst>
             </a:pPr>
-            <a:endParaRPr lang="en-GB" sz="1200" dirty="0"/>
+            <a:r>
+              <a:rPr lang="en-GB" sz="1200" i="1" dirty="0"/>
+              <a:t>Filter-based (correlation</a:t>
+            </a:r>
+            <a:r>
+              <a:rPr lang="en-GB" sz="1200" dirty="0"/>
+              <a:t>/feature ranking</a:t>
+            </a:r>
+            <a:r>
+              <a:rPr lang="en-GB" sz="1200" i="1" dirty="0"/>
+              <a:t>) method </a:t>
+            </a:r>
+            <a:r>
+              <a:rPr lang="en-GB" sz="1200" dirty="0"/>
+              <a:t>was </a:t>
+            </a:r>
+            <a:r>
+              <a:rPr lang="en-GB" sz="1200" dirty="0" err="1"/>
+              <a:t>appliedto</a:t>
+            </a:r>
+            <a:r>
+              <a:rPr lang="en-GB" sz="1200" dirty="0"/>
+              <a:t> identify the most relevant features. The results showed that several features (</a:t>
+            </a:r>
+            <a:r>
+              <a:rPr lang="en-GB" sz="1200" dirty="0" err="1"/>
+              <a:t>inspection_window</a:t>
+            </a:r>
+            <a:r>
+              <a:rPr lang="en-GB" sz="1200" dirty="0"/>
+              <a:t>, </a:t>
+            </a:r>
+            <a:r>
+              <a:rPr lang="en-GB" sz="1200" dirty="0" err="1"/>
+              <a:t>inspection_season</a:t>
+            </a:r>
+            <a:r>
+              <a:rPr lang="en-GB" sz="1200" dirty="0"/>
+              <a:t>=autumn, </a:t>
+            </a:r>
+            <a:r>
+              <a:rPr lang="en-GB" sz="1200" dirty="0" err="1"/>
+              <a:t>inspection_season</a:t>
+            </a:r>
+            <a:r>
+              <a:rPr lang="en-GB" sz="1200" dirty="0"/>
+              <a:t>=spring, and </a:t>
+            </a:r>
+            <a:r>
+              <a:rPr lang="en-GB" sz="1200" dirty="0" err="1"/>
+              <a:t>vibration_exposure</a:t>
+            </a:r>
+            <a:r>
+              <a:rPr lang="en-GB" sz="1200" dirty="0"/>
+              <a:t>) had very low predictive value. After removing these weak features, model performance improved, with the following results:</a:t>
+            </a:r>
+          </a:p>
+          <a:p>
+            <a:pPr marL="228600" indent="-228600">
+              <a:buFont typeface="+mj-lt"/>
+              <a:buAutoNum type="arabicParenR"/>
+              <a:tabLst>
+                <a:tab pos="219075" algn="l"/>
+              </a:tabLst>
+            </a:pPr>
+            <a:r>
+              <a:rPr lang="en-GB" sz="1200" b="1" dirty="0"/>
+              <a:t>Logistic Regression: </a:t>
+            </a:r>
+            <a:r>
+              <a:rPr lang="en-GB" sz="1200" b="1" dirty="0">
+                <a:ea typeface="Calibri"/>
+                <a:cs typeface="Calibri"/>
+              </a:rPr>
+              <a:t>Recall = 0.935, AUC = 0.972;</a:t>
+            </a:r>
+          </a:p>
+          <a:p>
+            <a:pPr marL="228600" indent="-228600">
+              <a:buFont typeface="+mj-lt"/>
+              <a:buAutoNum type="arabicParenR"/>
+              <a:tabLst>
+                <a:tab pos="219075" algn="l"/>
+              </a:tabLst>
+            </a:pPr>
+            <a:r>
+              <a:rPr lang="en-GB" sz="1200" dirty="0">
+                <a:cs typeface="Calibri"/>
+              </a:rPr>
+              <a:t>Neural Network: Recall = 0.919, AUC = 0.971;</a:t>
+            </a:r>
+          </a:p>
+          <a:p>
+            <a:pPr marL="228600" indent="-228600">
+              <a:buFont typeface="+mj-lt"/>
+              <a:buAutoNum type="arabicParenR"/>
+              <a:tabLst>
+                <a:tab pos="219075" algn="l"/>
+              </a:tabLst>
+            </a:pPr>
+            <a:r>
+              <a:rPr lang="en-GB" sz="1200" dirty="0">
+                <a:cs typeface="Calibri"/>
+              </a:rPr>
+              <a:t>Decision Tree: Recall = 0.902, AUC = 0.918. </a:t>
+            </a:r>
+          </a:p>
+          <a:p>
+            <a:pPr>
+              <a:tabLst>
+                <a:tab pos="219075" algn="l"/>
+              </a:tabLst>
+            </a:pPr>
+            <a:r>
+              <a:rPr lang="en-GB" sz="1200" dirty="0"/>
+              <a:t>A wrapper-based approach</a:t>
+            </a:r>
+            <a:r>
+              <a:rPr lang="en-GB" sz="1200" i="1" dirty="0"/>
+              <a:t> </a:t>
+            </a:r>
+            <a:r>
+              <a:rPr lang="en-GB" sz="1200" dirty="0"/>
+              <a:t>was also applied, which confirmed the same best subset of 9 features, with the following results:</a:t>
+            </a:r>
+          </a:p>
+          <a:p>
+            <a:pPr marL="228600" indent="-228600">
+              <a:buFont typeface="+mj-lt"/>
+              <a:buAutoNum type="arabicParenR"/>
+              <a:tabLst>
+                <a:tab pos="219075" algn="l"/>
+              </a:tabLst>
+            </a:pPr>
+            <a:r>
+              <a:rPr lang="en-GB" sz="1200" b="1" dirty="0"/>
+              <a:t>Logistic Regression: </a:t>
+            </a:r>
+            <a:r>
+              <a:rPr lang="en-GB" sz="1200" b="1" dirty="0">
+                <a:ea typeface="Calibri"/>
+                <a:cs typeface="Calibri"/>
+              </a:rPr>
+              <a:t>Recall = 0.935, AUC = 0.971;</a:t>
+            </a:r>
+          </a:p>
+          <a:p>
+            <a:pPr marL="228600" indent="-228600">
+              <a:buFont typeface="+mj-lt"/>
+              <a:buAutoNum type="arabicParenR"/>
+              <a:tabLst>
+                <a:tab pos="219075" algn="l"/>
+              </a:tabLst>
+            </a:pPr>
+            <a:r>
+              <a:rPr lang="en-GB" sz="1200" dirty="0">
+                <a:cs typeface="Calibri"/>
+              </a:rPr>
+              <a:t>Neural Network: Recall = 0.932, AUC = 0.968;</a:t>
+            </a:r>
+          </a:p>
+          <a:p>
+            <a:pPr marL="228600" indent="-228600">
+              <a:buFont typeface="+mj-lt"/>
+              <a:buAutoNum type="arabicParenR"/>
+              <a:tabLst>
+                <a:tab pos="219075" algn="l"/>
+              </a:tabLst>
+            </a:pPr>
+            <a:r>
+              <a:rPr lang="en-GB" sz="1200" dirty="0">
+                <a:cs typeface="Calibri"/>
+              </a:rPr>
+              <a:t>Decision Tree: Recall = 0.899, AUC = 0.940. </a:t>
+            </a:r>
+          </a:p>
+          <a:p>
+            <a:pPr>
+              <a:tabLst>
+                <a:tab pos="219075" algn="l"/>
+              </a:tabLst>
+            </a:pPr>
+            <a:r>
+              <a:rPr lang="en-GB" sz="1200" i="1" dirty="0"/>
+              <a:t>Overall, Feature Selection reduced dimensionality, training time, model complexity, removed noise and improved model performance. </a:t>
+            </a:r>
+          </a:p>
+          <a:p>
+            <a:pPr>
+              <a:tabLst>
+                <a:tab pos="219075" algn="l"/>
+              </a:tabLst>
+            </a:pPr>
+            <a:r>
+              <a:rPr lang="en-GB" sz="1200" i="1" dirty="0"/>
+              <a:t>--------------------------------------------------------------------------------------</a:t>
+            </a:r>
+          </a:p>
+          <a:p>
+            <a:pPr>
+              <a:tabLst>
+                <a:tab pos="219075" algn="l"/>
+              </a:tabLst>
+            </a:pPr>
+            <a:r>
+              <a:rPr lang="en-GB" sz="1200" dirty="0"/>
+              <a:t>Considering all 5-fold cross-validation evaluation metrics, </a:t>
+            </a:r>
+            <a:r>
+              <a:rPr lang="en-GB" sz="1200" b="1" dirty="0"/>
+              <a:t>Logistic Regression was selected as the final model</a:t>
+            </a:r>
+            <a:r>
+              <a:rPr lang="en-GB" sz="1200" dirty="0"/>
+              <a:t>, as it achieved the best overall performance and the highest recall, making it the most suitable choice for identifying infrastructure failure.</a:t>
+            </a:r>
+          </a:p>
+          <a:p>
+            <a:pPr>
+              <a:tabLst>
+                <a:tab pos="219075" algn="l"/>
+              </a:tabLst>
+            </a:pPr>
+            <a:r>
+              <a:rPr lang="en-GB" sz="1200" dirty="0"/>
+              <a:t>----------------------------------------------------------------------------------</a:t>
+            </a:r>
+          </a:p>
+          <a:p>
+            <a:pPr marL="228600" indent="-228600">
+              <a:buFont typeface="+mj-lt"/>
+              <a:buAutoNum type="arabicPeriod" startAt="9"/>
+              <a:tabLst>
+                <a:tab pos="219075" algn="l"/>
+              </a:tabLst>
+            </a:pPr>
+            <a:r>
+              <a:rPr lang="en-GB" sz="1200" b="1" dirty="0"/>
+              <a:t>Test Data Preparation</a:t>
+            </a:r>
+          </a:p>
+          <a:p>
+            <a:pPr>
+              <a:tabLst>
+                <a:tab pos="219075" algn="l"/>
+              </a:tabLst>
+            </a:pPr>
+            <a:r>
+              <a:rPr lang="en-GB" sz="1200" dirty="0"/>
+              <a:t>The test data was transformed using the same encoding and normalisation parameters derived from the training data. </a:t>
+            </a:r>
+          </a:p>
+          <a:p>
+            <a:pPr marL="228600" indent="-228600">
+              <a:buFont typeface="+mj-lt"/>
+              <a:buAutoNum type="arabicPeriod" startAt="10"/>
+              <a:tabLst>
+                <a:tab pos="219075" algn="l"/>
+              </a:tabLst>
+            </a:pPr>
+            <a:r>
+              <a:rPr lang="en-GB" sz="1200" b="1" dirty="0"/>
+              <a:t>Final Model Evaluation</a:t>
+            </a:r>
+          </a:p>
+          <a:p>
+            <a:pPr>
+              <a:tabLst>
+                <a:tab pos="219075" algn="l"/>
+              </a:tabLst>
+            </a:pPr>
+            <a:r>
+              <a:rPr lang="en-GB" sz="1200" dirty="0"/>
+              <a:t>The Logistic Regression model was evaluated on unseen test data archiving </a:t>
+            </a:r>
+            <a:r>
+              <a:rPr lang="en-GB" sz="1200" b="1" dirty="0">
+                <a:ea typeface="Calibri"/>
+                <a:cs typeface="Calibri"/>
+              </a:rPr>
+              <a:t>Recall = 0.925, AUC = 0.958. </a:t>
+            </a:r>
+          </a:p>
+          <a:p>
+            <a:pPr>
+              <a:tabLst>
+                <a:tab pos="219075" algn="l"/>
+              </a:tabLst>
+            </a:pPr>
+            <a:r>
+              <a:rPr lang="en-GB" sz="1200" i="1" dirty="0"/>
+              <a:t>The accuracy of the model shows that 92.5% of all real failure cases were correctly detected. This means that the model almost never misses dangerous </a:t>
+            </a:r>
+            <a:r>
+              <a:rPr lang="en-GB" sz="1200" i="1"/>
+              <a:t>cases, has </a:t>
+            </a:r>
+            <a:r>
+              <a:rPr lang="en-GB" sz="1200" i="1" dirty="0"/>
+              <a:t>a low number of false negatives and is good at identifying the risk of infrastructure failure. </a:t>
+            </a:r>
+          </a:p>
+          <a:p>
+            <a:pPr>
+              <a:tabLst>
+                <a:tab pos="219075" algn="l"/>
+              </a:tabLst>
+            </a:pPr>
+            <a:r>
+              <a:rPr lang="en-GB" sz="1200" i="1" dirty="0"/>
+              <a:t>These results confirm that the model generalises well to unseen data and is suitable for real-world application.</a:t>
+            </a:r>
           </a:p>
         </p:txBody>
       </p:sp>

--- a/BD6 Assignment.pptx
+++ b/BD6 Assignment.pptx
@@ -4,6 +4,9 @@
   <p:sldMasterIdLst>
     <p:sldMasterId id="2147483648" r:id="rId4"/>
   </p:sldMasterIdLst>
+  <p:notesMasterIdLst>
+    <p:notesMasterId r:id="rId6"/>
+  </p:notesMasterIdLst>
   <p:sldIdLst>
     <p:sldId id="257" r:id="rId5"/>
   </p:sldIdLst>
@@ -110,6 +113,439 @@
     </p:ext>
   </p:extLst>
 </p:presentation>
+</file>
+
+<file path=ppt/notesMasters/notesMaster1.xml><?xml version="1.0" encoding="utf-8"?>
+<p:notesMaster xmlns:a="http://schemas.openxmlformats.org/drawingml/2006/main" xmlns:r="http://schemas.openxmlformats.org/officeDocument/2006/relationships" xmlns:p="http://schemas.openxmlformats.org/presentationml/2006/main">
+  <p:cSld>
+    <p:bg>
+      <p:bgRef idx="1001">
+        <a:schemeClr val="bg1"/>
+      </p:bgRef>
+    </p:bg>
+    <p:spTree>
+      <p:nvGrpSpPr>
+        <p:cNvPr id="1" name=""/>
+        <p:cNvGrpSpPr/>
+        <p:nvPr/>
+      </p:nvGrpSpPr>
+      <p:grpSpPr>
+        <a:xfrm>
+          <a:off x="0" y="0"/>
+          <a:ext cx="0" cy="0"/>
+          <a:chOff x="0" y="0"/>
+          <a:chExt cx="0" cy="0"/>
+        </a:xfrm>
+      </p:grpSpPr>
+      <p:sp>
+        <p:nvSpPr>
+          <p:cNvPr id="2" name="Header Placeholder 1"/>
+          <p:cNvSpPr>
+            <a:spLocks noGrp="1"/>
+          </p:cNvSpPr>
+          <p:nvPr>
+            <p:ph type="hdr" sz="quarter"/>
+          </p:nvPr>
+        </p:nvSpPr>
+        <p:spPr>
+          <a:xfrm>
+            <a:off x="0" y="0"/>
+            <a:ext cx="2971800" cy="458788"/>
+          </a:xfrm>
+          <a:prstGeom prst="rect">
+            <a:avLst/>
+          </a:prstGeom>
+        </p:spPr>
+        <p:txBody>
+          <a:bodyPr vert="horz" lIns="91440" tIns="45720" rIns="91440" bIns="45720" rtlCol="0"/>
+          <a:lstStyle>
+            <a:lvl1pPr algn="l">
+              <a:defRPr sz="1200"/>
+            </a:lvl1pPr>
+          </a:lstStyle>
+          <a:p>
+            <a:endParaRPr lang="en-GB"/>
+          </a:p>
+        </p:txBody>
+      </p:sp>
+      <p:sp>
+        <p:nvSpPr>
+          <p:cNvPr id="3" name="Date Placeholder 2"/>
+          <p:cNvSpPr>
+            <a:spLocks noGrp="1"/>
+          </p:cNvSpPr>
+          <p:nvPr>
+            <p:ph type="dt" idx="1"/>
+          </p:nvPr>
+        </p:nvSpPr>
+        <p:spPr>
+          <a:xfrm>
+            <a:off x="3884613" y="0"/>
+            <a:ext cx="2971800" cy="458788"/>
+          </a:xfrm>
+          <a:prstGeom prst="rect">
+            <a:avLst/>
+          </a:prstGeom>
+        </p:spPr>
+        <p:txBody>
+          <a:bodyPr vert="horz" lIns="91440" tIns="45720" rIns="91440" bIns="45720" rtlCol="0"/>
+          <a:lstStyle>
+            <a:lvl1pPr algn="r">
+              <a:defRPr sz="1200"/>
+            </a:lvl1pPr>
+          </a:lstStyle>
+          <a:p>
+            <a:fld id="{41E0DECE-F939-FA46-AFCD-82950D062E73}" type="datetimeFigureOut">
+              <a:rPr lang="en-GB" smtClean="0"/>
+              <a:t>30/03/2026</a:t>
+            </a:fld>
+            <a:endParaRPr lang="en-GB"/>
+          </a:p>
+        </p:txBody>
+      </p:sp>
+      <p:sp>
+        <p:nvSpPr>
+          <p:cNvPr id="4" name="Slide Image Placeholder 3"/>
+          <p:cNvSpPr>
+            <a:spLocks noGrp="1" noRot="1" noChangeAspect="1"/>
+          </p:cNvSpPr>
+          <p:nvPr>
+            <p:ph type="sldImg" idx="2"/>
+          </p:nvPr>
+        </p:nvSpPr>
+        <p:spPr>
+          <a:xfrm>
+            <a:off x="2271713" y="1143000"/>
+            <a:ext cx="2314575" cy="3086100"/>
+          </a:xfrm>
+          <a:prstGeom prst="rect">
+            <a:avLst/>
+          </a:prstGeom>
+          <a:noFill/>
+          <a:ln w="12700">
+            <a:solidFill>
+              <a:prstClr val="black"/>
+            </a:solidFill>
+          </a:ln>
+        </p:spPr>
+        <p:txBody>
+          <a:bodyPr vert="horz" lIns="91440" tIns="45720" rIns="91440" bIns="45720" rtlCol="0" anchor="ctr"/>
+          <a:lstStyle/>
+          <a:p>
+            <a:endParaRPr lang="en-GB"/>
+          </a:p>
+        </p:txBody>
+      </p:sp>
+      <p:sp>
+        <p:nvSpPr>
+          <p:cNvPr id="5" name="Notes Placeholder 4"/>
+          <p:cNvSpPr>
+            <a:spLocks noGrp="1"/>
+          </p:cNvSpPr>
+          <p:nvPr>
+            <p:ph type="body" sz="quarter" idx="3"/>
+          </p:nvPr>
+        </p:nvSpPr>
+        <p:spPr>
+          <a:xfrm>
+            <a:off x="685800" y="4400550"/>
+            <a:ext cx="5486400" cy="3600450"/>
+          </a:xfrm>
+          <a:prstGeom prst="rect">
+            <a:avLst/>
+          </a:prstGeom>
+        </p:spPr>
+        <p:txBody>
+          <a:bodyPr vert="horz" lIns="91440" tIns="45720" rIns="91440" bIns="45720" rtlCol="0"/>
+          <a:lstStyle/>
+          <a:p>
+            <a:pPr lvl="0"/>
+            <a:r>
+              <a:rPr lang="en-GB"/>
+              <a:t>Click to edit Master text styles</a:t>
+            </a:r>
+          </a:p>
+          <a:p>
+            <a:pPr lvl="1"/>
+            <a:r>
+              <a:rPr lang="en-GB"/>
+              <a:t>Second level</a:t>
+            </a:r>
+          </a:p>
+          <a:p>
+            <a:pPr lvl="2"/>
+            <a:r>
+              <a:rPr lang="en-GB"/>
+              <a:t>Third level</a:t>
+            </a:r>
+          </a:p>
+          <a:p>
+            <a:pPr lvl="3"/>
+            <a:r>
+              <a:rPr lang="en-GB"/>
+              <a:t>Fourth level</a:t>
+            </a:r>
+          </a:p>
+          <a:p>
+            <a:pPr lvl="4"/>
+            <a:r>
+              <a:rPr lang="en-GB"/>
+              <a:t>Fifth level</a:t>
+            </a:r>
+          </a:p>
+        </p:txBody>
+      </p:sp>
+      <p:sp>
+        <p:nvSpPr>
+          <p:cNvPr id="6" name="Footer Placeholder 5"/>
+          <p:cNvSpPr>
+            <a:spLocks noGrp="1"/>
+          </p:cNvSpPr>
+          <p:nvPr>
+            <p:ph type="ftr" sz="quarter" idx="4"/>
+          </p:nvPr>
+        </p:nvSpPr>
+        <p:spPr>
+          <a:xfrm>
+            <a:off x="0" y="8685213"/>
+            <a:ext cx="2971800" cy="458787"/>
+          </a:xfrm>
+          <a:prstGeom prst="rect">
+            <a:avLst/>
+          </a:prstGeom>
+        </p:spPr>
+        <p:txBody>
+          <a:bodyPr vert="horz" lIns="91440" tIns="45720" rIns="91440" bIns="45720" rtlCol="0" anchor="b"/>
+          <a:lstStyle>
+            <a:lvl1pPr algn="l">
+              <a:defRPr sz="1200"/>
+            </a:lvl1pPr>
+          </a:lstStyle>
+          <a:p>
+            <a:endParaRPr lang="en-GB"/>
+          </a:p>
+        </p:txBody>
+      </p:sp>
+      <p:sp>
+        <p:nvSpPr>
+          <p:cNvPr id="7" name="Slide Number Placeholder 6"/>
+          <p:cNvSpPr>
+            <a:spLocks noGrp="1"/>
+          </p:cNvSpPr>
+          <p:nvPr>
+            <p:ph type="sldNum" sz="quarter" idx="5"/>
+          </p:nvPr>
+        </p:nvSpPr>
+        <p:spPr>
+          <a:xfrm>
+            <a:off x="3884613" y="8685213"/>
+            <a:ext cx="2971800" cy="458787"/>
+          </a:xfrm>
+          <a:prstGeom prst="rect">
+            <a:avLst/>
+          </a:prstGeom>
+        </p:spPr>
+        <p:txBody>
+          <a:bodyPr vert="horz" lIns="91440" tIns="45720" rIns="91440" bIns="45720" rtlCol="0" anchor="b"/>
+          <a:lstStyle>
+            <a:lvl1pPr algn="r">
+              <a:defRPr sz="1200"/>
+            </a:lvl1pPr>
+          </a:lstStyle>
+          <a:p>
+            <a:fld id="{842BEAF4-753D-F040-A46A-77FFC8E9928E}" type="slidenum">
+              <a:rPr lang="en-GB" smtClean="0"/>
+              <a:t>‹#›</a:t>
+            </a:fld>
+            <a:endParaRPr lang="en-GB"/>
+          </a:p>
+        </p:txBody>
+      </p:sp>
+    </p:spTree>
+    <p:extLst>
+      <p:ext uri="{BB962C8B-B14F-4D97-AF65-F5344CB8AC3E}">
+        <p14:creationId xmlns:p14="http://schemas.microsoft.com/office/powerpoint/2010/main" val="1054406502"/>
+      </p:ext>
+    </p:extLst>
+  </p:cSld>
+  <p:clrMap bg1="lt1" tx1="dk1" bg2="lt2" tx2="dk2" accent1="accent1" accent2="accent2" accent3="accent3" accent4="accent4" accent5="accent5" accent6="accent6" hlink="hlink" folHlink="folHlink"/>
+  <p:notesStyle>
+    <a:lvl1pPr marL="0" algn="l" defTabSz="914400" rtl="0" eaLnBrk="1" latinLnBrk="0" hangingPunct="1">
+      <a:defRPr sz="1200" kern="1200">
+        <a:solidFill>
+          <a:schemeClr val="tx1"/>
+        </a:solidFill>
+        <a:latin typeface="+mn-lt"/>
+        <a:ea typeface="+mn-ea"/>
+        <a:cs typeface="+mn-cs"/>
+      </a:defRPr>
+    </a:lvl1pPr>
+    <a:lvl2pPr marL="457200" algn="l" defTabSz="914400" rtl="0" eaLnBrk="1" latinLnBrk="0" hangingPunct="1">
+      <a:defRPr sz="1200" kern="1200">
+        <a:solidFill>
+          <a:schemeClr val="tx1"/>
+        </a:solidFill>
+        <a:latin typeface="+mn-lt"/>
+        <a:ea typeface="+mn-ea"/>
+        <a:cs typeface="+mn-cs"/>
+      </a:defRPr>
+    </a:lvl2pPr>
+    <a:lvl3pPr marL="914400" algn="l" defTabSz="914400" rtl="0" eaLnBrk="1" latinLnBrk="0" hangingPunct="1">
+      <a:defRPr sz="1200" kern="1200">
+        <a:solidFill>
+          <a:schemeClr val="tx1"/>
+        </a:solidFill>
+        <a:latin typeface="+mn-lt"/>
+        <a:ea typeface="+mn-ea"/>
+        <a:cs typeface="+mn-cs"/>
+      </a:defRPr>
+    </a:lvl3pPr>
+    <a:lvl4pPr marL="1371600" algn="l" defTabSz="914400" rtl="0" eaLnBrk="1" latinLnBrk="0" hangingPunct="1">
+      <a:defRPr sz="1200" kern="1200">
+        <a:solidFill>
+          <a:schemeClr val="tx1"/>
+        </a:solidFill>
+        <a:latin typeface="+mn-lt"/>
+        <a:ea typeface="+mn-ea"/>
+        <a:cs typeface="+mn-cs"/>
+      </a:defRPr>
+    </a:lvl4pPr>
+    <a:lvl5pPr marL="1828800" algn="l" defTabSz="914400" rtl="0" eaLnBrk="1" latinLnBrk="0" hangingPunct="1">
+      <a:defRPr sz="1200" kern="1200">
+        <a:solidFill>
+          <a:schemeClr val="tx1"/>
+        </a:solidFill>
+        <a:latin typeface="+mn-lt"/>
+        <a:ea typeface="+mn-ea"/>
+        <a:cs typeface="+mn-cs"/>
+      </a:defRPr>
+    </a:lvl5pPr>
+    <a:lvl6pPr marL="2286000" algn="l" defTabSz="914400" rtl="0" eaLnBrk="1" latinLnBrk="0" hangingPunct="1">
+      <a:defRPr sz="1200" kern="1200">
+        <a:solidFill>
+          <a:schemeClr val="tx1"/>
+        </a:solidFill>
+        <a:latin typeface="+mn-lt"/>
+        <a:ea typeface="+mn-ea"/>
+        <a:cs typeface="+mn-cs"/>
+      </a:defRPr>
+    </a:lvl6pPr>
+    <a:lvl7pPr marL="2743200" algn="l" defTabSz="914400" rtl="0" eaLnBrk="1" latinLnBrk="0" hangingPunct="1">
+      <a:defRPr sz="1200" kern="1200">
+        <a:solidFill>
+          <a:schemeClr val="tx1"/>
+        </a:solidFill>
+        <a:latin typeface="+mn-lt"/>
+        <a:ea typeface="+mn-ea"/>
+        <a:cs typeface="+mn-cs"/>
+      </a:defRPr>
+    </a:lvl7pPr>
+    <a:lvl8pPr marL="3200400" algn="l" defTabSz="914400" rtl="0" eaLnBrk="1" latinLnBrk="0" hangingPunct="1">
+      <a:defRPr sz="1200" kern="1200">
+        <a:solidFill>
+          <a:schemeClr val="tx1"/>
+        </a:solidFill>
+        <a:latin typeface="+mn-lt"/>
+        <a:ea typeface="+mn-ea"/>
+        <a:cs typeface="+mn-cs"/>
+      </a:defRPr>
+    </a:lvl8pPr>
+    <a:lvl9pPr marL="3657600" algn="l" defTabSz="914400" rtl="0" eaLnBrk="1" latinLnBrk="0" hangingPunct="1">
+      <a:defRPr sz="1200" kern="1200">
+        <a:solidFill>
+          <a:schemeClr val="tx1"/>
+        </a:solidFill>
+        <a:latin typeface="+mn-lt"/>
+        <a:ea typeface="+mn-ea"/>
+        <a:cs typeface="+mn-cs"/>
+      </a:defRPr>
+    </a:lvl9pPr>
+  </p:notesStyle>
+</p:notesMaster>
+</file>
+
+<file path=ppt/notesSlides/notesSlide1.xml><?xml version="1.0" encoding="utf-8"?>
+<p:notes xmlns:a="http://schemas.openxmlformats.org/drawingml/2006/main" xmlns:r="http://schemas.openxmlformats.org/officeDocument/2006/relationships" xmlns:p="http://schemas.openxmlformats.org/presentationml/2006/main">
+  <p:cSld>
+    <p:spTree>
+      <p:nvGrpSpPr>
+        <p:cNvPr id="1" name=""/>
+        <p:cNvGrpSpPr/>
+        <p:nvPr/>
+      </p:nvGrpSpPr>
+      <p:grpSpPr>
+        <a:xfrm>
+          <a:off x="0" y="0"/>
+          <a:ext cx="0" cy="0"/>
+          <a:chOff x="0" y="0"/>
+          <a:chExt cx="0" cy="0"/>
+        </a:xfrm>
+      </p:grpSpPr>
+      <p:sp>
+        <p:nvSpPr>
+          <p:cNvPr id="2" name="Slide Image Placeholder 1"/>
+          <p:cNvSpPr>
+            <a:spLocks noGrp="1" noRot="1" noChangeAspect="1"/>
+          </p:cNvSpPr>
+          <p:nvPr>
+            <p:ph type="sldImg"/>
+          </p:nvPr>
+        </p:nvSpPr>
+        <p:spPr/>
+      </p:sp>
+      <p:sp>
+        <p:nvSpPr>
+          <p:cNvPr id="3" name="Notes Placeholder 2"/>
+          <p:cNvSpPr>
+            <a:spLocks noGrp="1"/>
+          </p:cNvSpPr>
+          <p:nvPr>
+            <p:ph type="body" idx="1"/>
+          </p:nvPr>
+        </p:nvSpPr>
+        <p:spPr/>
+        <p:txBody>
+          <a:bodyPr/>
+          <a:lstStyle/>
+          <a:p>
+            <a:endParaRPr lang="en-GB" dirty="0"/>
+          </a:p>
+        </p:txBody>
+      </p:sp>
+      <p:sp>
+        <p:nvSpPr>
+          <p:cNvPr id="4" name="Slide Number Placeholder 3"/>
+          <p:cNvSpPr>
+            <a:spLocks noGrp="1"/>
+          </p:cNvSpPr>
+          <p:nvPr>
+            <p:ph type="sldNum" sz="quarter" idx="5"/>
+          </p:nvPr>
+        </p:nvSpPr>
+        <p:spPr/>
+        <p:txBody>
+          <a:bodyPr/>
+          <a:lstStyle/>
+          <a:p>
+            <a:fld id="{842BEAF4-753D-F040-A46A-77FFC8E9928E}" type="slidenum">
+              <a:rPr lang="en-GB" smtClean="0"/>
+              <a:t>1</a:t>
+            </a:fld>
+            <a:endParaRPr lang="en-GB"/>
+          </a:p>
+        </p:txBody>
+      </p:sp>
+    </p:spTree>
+    <p:extLst>
+      <p:ext uri="{BB962C8B-B14F-4D97-AF65-F5344CB8AC3E}">
+        <p14:creationId xmlns:p14="http://schemas.microsoft.com/office/powerpoint/2010/main" val="3114449453"/>
+      </p:ext>
+    </p:extLst>
+  </p:cSld>
+  <p:clrMapOvr>
+    <a:masterClrMapping/>
+  </p:clrMapOvr>
+</p:notes>
 </file>
 
 <file path=ppt/slideLayouts/slideLayout1.xml><?xml version="1.0" encoding="utf-8"?>
@@ -3347,12 +3783,42 @@
           <a:chExt cx="0" cy="0"/>
         </a:xfrm>
       </p:grpSpPr>
+      <p:pic>
+        <p:nvPicPr>
+          <p:cNvPr id="48" name="Picture 47">
+            <a:extLst>
+              <a:ext uri="{FF2B5EF4-FFF2-40B4-BE49-F238E27FC236}">
+                <a16:creationId xmlns:a16="http://schemas.microsoft.com/office/drawing/2014/main" id="{5F126031-DD53-40D9-0C7F-5E458091FC20}"/>
+              </a:ext>
+            </a:extLst>
+          </p:cNvPr>
+          <p:cNvPicPr>
+            <a:picLocks noChangeAspect="1"/>
+          </p:cNvPicPr>
+          <p:nvPr/>
+        </p:nvPicPr>
+        <p:blipFill>
+          <a:blip r:embed="rId3"/>
+          <a:stretch>
+            <a:fillRect/>
+          </a:stretch>
+        </p:blipFill>
+        <p:spPr>
+          <a:xfrm>
+            <a:off x="7369696" y="8403449"/>
+            <a:ext cx="1689656" cy="923344"/>
+          </a:xfrm>
+          <a:prstGeom prst="rect">
+            <a:avLst/>
+          </a:prstGeom>
+        </p:spPr>
+      </p:pic>
       <p:sp>
         <p:nvSpPr>
-          <p:cNvPr id="18" name="TextBox 17">
+          <p:cNvPr id="47" name="TextBox 1">
             <a:extLst>
               <a:ext uri="{FF2B5EF4-FFF2-40B4-BE49-F238E27FC236}">
-                <a16:creationId xmlns:a16="http://schemas.microsoft.com/office/drawing/2014/main" id="{C388C717-AB61-4AA5-0065-CF8334987466}"/>
+                <a16:creationId xmlns:a16="http://schemas.microsoft.com/office/drawing/2014/main" id="{AFF3AFDD-3804-075E-4BC9-89A45A239C98}"/>
               </a:ext>
             </a:extLst>
           </p:cNvPr>
@@ -3361,8 +3827,749 @@
         </p:nvSpPr>
         <p:spPr>
           <a:xfrm>
-            <a:off x="4882289" y="6703042"/>
-            <a:ext cx="4490932" cy="2339102"/>
+            <a:off x="6809773" y="7432929"/>
+            <a:ext cx="2613195" cy="5328000"/>
+          </a:xfrm>
+          <a:prstGeom prst="rect">
+            <a:avLst/>
+          </a:prstGeom>
+          <a:noFill/>
+          <a:ln w="38100">
+            <a:solidFill>
+              <a:schemeClr val="accent1">
+                <a:lumMod val="60000"/>
+                <a:lumOff val="40000"/>
+              </a:schemeClr>
+            </a:solidFill>
+          </a:ln>
+        </p:spPr>
+        <p:style>
+          <a:lnRef idx="0">
+            <a:scrgbClr r="0" g="0" b="0"/>
+          </a:lnRef>
+          <a:fillRef idx="0">
+            <a:scrgbClr r="0" g="0" b="0"/>
+          </a:fillRef>
+          <a:effectRef idx="0">
+            <a:scrgbClr r="0" g="0" b="0"/>
+          </a:effectRef>
+          <a:fontRef idx="major"/>
+        </p:style>
+        <p:txBody>
+          <a:bodyPr wrap="square" lIns="91440" tIns="45720" rIns="91440" bIns="45720" anchor="t">
+            <a:spAutoFit/>
+          </a:bodyPr>
+          <a:lstStyle>
+            <a:lvl1pPr>
+              <a:defRPr>
+                <a:latin typeface="+mj-lt"/>
+                <a:ea typeface="+mj-ea"/>
+                <a:cs typeface="+mj-cs"/>
+              </a:defRPr>
+            </a:lvl1pPr>
+            <a:lvl2pPr>
+              <a:defRPr>
+                <a:latin typeface="+mj-lt"/>
+                <a:ea typeface="+mj-ea"/>
+                <a:cs typeface="+mj-cs"/>
+              </a:defRPr>
+            </a:lvl2pPr>
+            <a:lvl3pPr>
+              <a:defRPr>
+                <a:latin typeface="+mj-lt"/>
+                <a:ea typeface="+mj-ea"/>
+                <a:cs typeface="+mj-cs"/>
+              </a:defRPr>
+            </a:lvl3pPr>
+            <a:lvl4pPr>
+              <a:defRPr>
+                <a:latin typeface="+mj-lt"/>
+                <a:ea typeface="+mj-ea"/>
+                <a:cs typeface="+mj-cs"/>
+              </a:defRPr>
+            </a:lvl4pPr>
+            <a:lvl5pPr>
+              <a:defRPr>
+                <a:latin typeface="+mj-lt"/>
+                <a:ea typeface="+mj-ea"/>
+                <a:cs typeface="+mj-cs"/>
+              </a:defRPr>
+            </a:lvl5pPr>
+            <a:lvl6pPr>
+              <a:defRPr>
+                <a:latin typeface="+mj-lt"/>
+                <a:ea typeface="+mj-ea"/>
+                <a:cs typeface="+mj-cs"/>
+              </a:defRPr>
+            </a:lvl6pPr>
+            <a:lvl7pPr>
+              <a:defRPr>
+                <a:latin typeface="+mj-lt"/>
+                <a:ea typeface="+mj-ea"/>
+                <a:cs typeface="+mj-cs"/>
+              </a:defRPr>
+            </a:lvl7pPr>
+            <a:lvl8pPr>
+              <a:defRPr>
+                <a:latin typeface="+mj-lt"/>
+                <a:ea typeface="+mj-ea"/>
+                <a:cs typeface="+mj-cs"/>
+              </a:defRPr>
+            </a:lvl8pPr>
+            <a:lvl9pPr>
+              <a:defRPr>
+                <a:latin typeface="+mj-lt"/>
+                <a:ea typeface="+mj-ea"/>
+                <a:cs typeface="+mj-cs"/>
+              </a:defRPr>
+            </a:lvl9pPr>
+          </a:lstStyle>
+          <a:p>
+            <a:pPr marL="0" marR="0" lvl="0" indent="0" algn="l" defTabSz="1706910" rtl="0" eaLnBrk="1" fontAlgn="auto" latinLnBrk="0" hangingPunct="1">
+              <a:lnSpc>
+                <a:spcPct val="100000"/>
+              </a:lnSpc>
+              <a:spcBef>
+                <a:spcPts val="0"/>
+              </a:spcBef>
+              <a:spcAft>
+                <a:spcPts val="0"/>
+              </a:spcAft>
+              <a:buClrTx/>
+              <a:buSzTx/>
+              <a:buFontTx/>
+              <a:buNone/>
+              <a:tabLst/>
+              <a:defRPr/>
+            </a:pPr>
+            <a:r>
+              <a:rPr kumimoji="0" lang="en-GB" sz="1600" b="0" i="0" u="none" strike="noStrike" kern="1200" cap="none" spc="0" normalizeH="0" baseline="0" noProof="0" dirty="0">
+                <a:ln>
+                  <a:noFill/>
+                </a:ln>
+                <a:solidFill>
+                  <a:prstClr val="black"/>
+                </a:solidFill>
+                <a:effectLst/>
+                <a:uLnTx/>
+                <a:uFillTx/>
+                <a:latin typeface="Calibri" panose="020F0502020204030204"/>
+                <a:ea typeface="+mn-ea"/>
+                <a:cs typeface="+mn-cs"/>
+              </a:rPr>
+              <a:t>6. Final Model </a:t>
+            </a:r>
+            <a:r>
+              <a:rPr lang="en-GB" sz="1600" dirty="0">
+                <a:solidFill>
+                  <a:prstClr val="black"/>
+                </a:solidFill>
+                <a:latin typeface="Calibri" panose="020F0502020204030204"/>
+              </a:rPr>
+              <a:t>&amp; </a:t>
+            </a:r>
+            <a:r>
+              <a:rPr kumimoji="0" lang="en-GB" sz="1600" b="0" i="0" u="none" strike="noStrike" kern="1200" cap="none" spc="0" normalizeH="0" baseline="0" noProof="0" dirty="0">
+                <a:ln>
+                  <a:noFill/>
+                </a:ln>
+                <a:solidFill>
+                  <a:prstClr val="black"/>
+                </a:solidFill>
+                <a:effectLst/>
+                <a:uLnTx/>
+                <a:uFillTx/>
+                <a:latin typeface="Calibri" panose="020F0502020204030204"/>
+                <a:ea typeface="+mn-ea"/>
+                <a:cs typeface="+mn-cs"/>
+              </a:rPr>
+              <a:t>Results</a:t>
+            </a:r>
+          </a:p>
+          <a:p>
+            <a:pPr lvl="0" defTabSz="1706910">
+              <a:defRPr/>
+            </a:pPr>
+            <a:r>
+              <a:rPr lang="en-GB" sz="1000" dirty="0">
+                <a:solidFill>
+                  <a:prstClr val="black"/>
+                </a:solidFill>
+                <a:latin typeface="+mn-lt"/>
+              </a:rPr>
+              <a:t>After applying Feature Selection method, </a:t>
+            </a:r>
+            <a:r>
+              <a:rPr lang="en-GB" sz="1000" b="1" dirty="0">
+                <a:solidFill>
+                  <a:prstClr val="black"/>
+                </a:solidFill>
+                <a:latin typeface="+mn-lt"/>
+              </a:rPr>
+              <a:t>Logistic Regression achieved the best performance, with the highest recall (Recall = 0.935, AUC = 0.972)</a:t>
+            </a:r>
+            <a:r>
+              <a:rPr lang="en-GB" sz="1000" dirty="0">
+                <a:solidFill>
+                  <a:prstClr val="black"/>
+                </a:solidFill>
+                <a:latin typeface="+mn-lt"/>
+              </a:rPr>
+              <a:t>, and was therefore selected as the final model. </a:t>
+            </a:r>
+          </a:p>
+          <a:p>
+            <a:pPr lvl="0" defTabSz="1706910">
+              <a:defRPr/>
+            </a:pPr>
+            <a:endParaRPr kumimoji="0" lang="en-GB" sz="1000" b="0" i="0" u="none" strike="noStrike" kern="1200" cap="none" spc="0" normalizeH="0" baseline="0" noProof="0" dirty="0">
+              <a:ln>
+                <a:noFill/>
+              </a:ln>
+              <a:solidFill>
+                <a:prstClr val="black"/>
+              </a:solidFill>
+              <a:effectLst/>
+              <a:uLnTx/>
+              <a:uFillTx/>
+              <a:latin typeface="+mn-lt"/>
+              <a:ea typeface="+mn-ea"/>
+              <a:cs typeface="+mn-cs"/>
+            </a:endParaRPr>
+          </a:p>
+          <a:p>
+            <a:pPr lvl="0" defTabSz="1706910">
+              <a:defRPr/>
+            </a:pPr>
+            <a:endParaRPr lang="en-GB" sz="1000" dirty="0">
+              <a:solidFill>
+                <a:prstClr val="black"/>
+              </a:solidFill>
+              <a:latin typeface="+mn-lt"/>
+            </a:endParaRPr>
+          </a:p>
+          <a:p>
+            <a:pPr lvl="0" defTabSz="1706910">
+              <a:defRPr/>
+            </a:pPr>
+            <a:endParaRPr kumimoji="0" lang="en-GB" sz="1000" b="0" i="0" u="none" strike="noStrike" kern="1200" cap="none" spc="0" normalizeH="0" baseline="0" noProof="0" dirty="0">
+              <a:ln>
+                <a:noFill/>
+              </a:ln>
+              <a:solidFill>
+                <a:prstClr val="black"/>
+              </a:solidFill>
+              <a:effectLst/>
+              <a:uLnTx/>
+              <a:uFillTx/>
+              <a:latin typeface="+mn-lt"/>
+              <a:ea typeface="+mn-ea"/>
+              <a:cs typeface="+mn-cs"/>
+            </a:endParaRPr>
+          </a:p>
+          <a:p>
+            <a:pPr lvl="0" defTabSz="1706910">
+              <a:defRPr/>
+            </a:pPr>
+            <a:endParaRPr lang="en-GB" sz="1000" noProof="0" dirty="0">
+              <a:solidFill>
+                <a:prstClr val="black"/>
+              </a:solidFill>
+              <a:latin typeface="+mn-lt"/>
+            </a:endParaRPr>
+          </a:p>
+          <a:p>
+            <a:pPr lvl="0" defTabSz="1706910">
+              <a:defRPr/>
+            </a:pPr>
+            <a:endParaRPr kumimoji="0" lang="ru-RU" sz="1000" b="0" i="0" u="none" strike="noStrike" kern="1200" cap="none" spc="0" normalizeH="0" baseline="0" noProof="0" dirty="0">
+              <a:ln>
+                <a:noFill/>
+              </a:ln>
+              <a:solidFill>
+                <a:prstClr val="black"/>
+              </a:solidFill>
+              <a:effectLst/>
+              <a:uLnTx/>
+              <a:uFillTx/>
+              <a:latin typeface="+mn-lt"/>
+              <a:ea typeface="+mn-ea"/>
+              <a:cs typeface="+mn-cs"/>
+            </a:endParaRPr>
+          </a:p>
+          <a:p>
+            <a:pPr lvl="0" defTabSz="1706910">
+              <a:defRPr/>
+            </a:pPr>
+            <a:endParaRPr kumimoji="0" lang="ru-RU" sz="1000" b="1" i="0" u="none" strike="noStrike" kern="1200" cap="none" spc="0" normalizeH="0" baseline="0" noProof="0" dirty="0">
+              <a:ln>
+                <a:noFill/>
+              </a:ln>
+              <a:solidFill>
+                <a:prstClr val="black"/>
+              </a:solidFill>
+              <a:effectLst/>
+              <a:uLnTx/>
+              <a:uFillTx/>
+              <a:latin typeface="+mn-lt"/>
+              <a:ea typeface="+mn-ea"/>
+              <a:cs typeface="+mn-cs"/>
+            </a:endParaRPr>
+          </a:p>
+          <a:p>
+            <a:pPr lvl="0" defTabSz="1706910">
+              <a:defRPr/>
+            </a:pPr>
+            <a:r>
+              <a:rPr kumimoji="0" lang="en-GB" sz="1000" b="1" i="0" u="none" strike="noStrike" kern="1200" cap="none" spc="0" normalizeH="0" baseline="0" noProof="0" dirty="0">
+                <a:ln>
+                  <a:noFill/>
+                </a:ln>
+                <a:solidFill>
+                  <a:prstClr val="black"/>
+                </a:solidFill>
+                <a:effectLst/>
+                <a:uLnTx/>
+                <a:uFillTx/>
+                <a:latin typeface="+mn-lt"/>
+                <a:ea typeface="+mn-ea"/>
+                <a:cs typeface="+mn-cs"/>
+              </a:rPr>
+              <a:t>Confusion Matrix shows the following:</a:t>
+            </a:r>
+          </a:p>
+          <a:p>
+            <a:pPr lvl="0" defTabSz="1706910">
+              <a:defRPr/>
+            </a:pPr>
+            <a:r>
+              <a:rPr lang="en-GB" sz="1000" i="1" dirty="0">
+                <a:latin typeface="+mn-lt"/>
+                <a:ea typeface="Calibri"/>
+                <a:cs typeface="Calibri"/>
+              </a:rPr>
+              <a:t>• </a:t>
+            </a:r>
+            <a:r>
+              <a:rPr lang="en-GB" sz="1000" dirty="0">
+                <a:solidFill>
+                  <a:prstClr val="black"/>
+                </a:solidFill>
+                <a:latin typeface="+mn-lt"/>
+              </a:rPr>
+              <a:t>True Negatives </a:t>
+            </a:r>
+            <a:r>
+              <a:rPr lang="en-GB" sz="1000" b="1" dirty="0">
+                <a:solidFill>
+                  <a:prstClr val="black"/>
+                </a:solidFill>
+                <a:latin typeface="+mn-lt"/>
+              </a:rPr>
+              <a:t>(TN) = 81 </a:t>
+            </a:r>
+            <a:endParaRPr lang="ru-RU" sz="1000" b="1" dirty="0">
+              <a:solidFill>
+                <a:prstClr val="black"/>
+              </a:solidFill>
+              <a:latin typeface="+mn-lt"/>
+            </a:endParaRPr>
+          </a:p>
+          <a:p>
+            <a:pPr lvl="0" defTabSz="1706910">
+              <a:defRPr/>
+            </a:pPr>
+            <a:r>
+              <a:rPr lang="ru-RU" sz="1000" dirty="0">
+                <a:solidFill>
+                  <a:prstClr val="black"/>
+                </a:solidFill>
+                <a:latin typeface="+mn-lt"/>
+              </a:rPr>
+              <a:t>   </a:t>
+            </a:r>
+            <a:r>
+              <a:rPr lang="en-GB" sz="1000" dirty="0">
+                <a:solidFill>
+                  <a:prstClr val="black"/>
+                </a:solidFill>
+                <a:latin typeface="+mn-lt"/>
+              </a:rPr>
+              <a:t>(correctly predicted no failure);</a:t>
+            </a:r>
+          </a:p>
+          <a:p>
+            <a:pPr lvl="0" defTabSz="1706910">
+              <a:defRPr/>
+            </a:pPr>
+            <a:r>
+              <a:rPr lang="en-GB" sz="1000" i="1" dirty="0">
+                <a:latin typeface="+mn-lt"/>
+                <a:ea typeface="Calibri"/>
+                <a:cs typeface="Calibri"/>
+              </a:rPr>
+              <a:t>• </a:t>
+            </a:r>
+            <a:r>
+              <a:rPr lang="en-GB" sz="1000" dirty="0">
+                <a:solidFill>
+                  <a:prstClr val="black"/>
+                </a:solidFill>
+                <a:latin typeface="+mn-lt"/>
+              </a:rPr>
+              <a:t>False Positives </a:t>
+            </a:r>
+            <a:r>
+              <a:rPr lang="en-GB" sz="1000" b="1" dirty="0">
+                <a:solidFill>
+                  <a:prstClr val="black"/>
+                </a:solidFill>
+                <a:latin typeface="+mn-lt"/>
+              </a:rPr>
+              <a:t>(FP) = 5 </a:t>
+            </a:r>
+            <a:endParaRPr lang="ru-RU" sz="1000" b="1" dirty="0">
+              <a:solidFill>
+                <a:prstClr val="black"/>
+              </a:solidFill>
+              <a:latin typeface="+mn-lt"/>
+            </a:endParaRPr>
+          </a:p>
+          <a:p>
+            <a:pPr lvl="0" defTabSz="1706910">
+              <a:defRPr/>
+            </a:pPr>
+            <a:r>
+              <a:rPr lang="ru-RU" sz="1000" dirty="0">
+                <a:solidFill>
+                  <a:prstClr val="black"/>
+                </a:solidFill>
+                <a:latin typeface="+mn-lt"/>
+              </a:rPr>
+              <a:t>   </a:t>
+            </a:r>
+            <a:r>
+              <a:rPr lang="en-GB" sz="1000" dirty="0">
+                <a:solidFill>
+                  <a:prstClr val="black"/>
+                </a:solidFill>
+                <a:latin typeface="+mn-lt"/>
+              </a:rPr>
+              <a:t>(predicted a failure when none occurred);</a:t>
+            </a:r>
+          </a:p>
+          <a:p>
+            <a:pPr lvl="0" defTabSz="1706910">
+              <a:defRPr/>
+            </a:pPr>
+            <a:r>
+              <a:rPr lang="en-GB" sz="1000" i="1" dirty="0">
+                <a:latin typeface="+mn-lt"/>
+                <a:ea typeface="Calibri"/>
+                <a:cs typeface="Calibri"/>
+              </a:rPr>
+              <a:t>• </a:t>
+            </a:r>
+            <a:r>
+              <a:rPr lang="en-GB" sz="1000" dirty="0">
+                <a:solidFill>
+                  <a:prstClr val="black"/>
+                </a:solidFill>
+                <a:latin typeface="+mn-lt"/>
+              </a:rPr>
+              <a:t>False Negatives </a:t>
+            </a:r>
+            <a:r>
+              <a:rPr lang="en-GB" sz="1000" b="1" dirty="0">
+                <a:solidFill>
+                  <a:prstClr val="black"/>
+                </a:solidFill>
+                <a:latin typeface="+mn-lt"/>
+              </a:rPr>
+              <a:t>(FN) = 5 </a:t>
+            </a:r>
+            <a:endParaRPr lang="ru-RU" sz="1000" b="1" dirty="0">
+              <a:solidFill>
+                <a:prstClr val="black"/>
+              </a:solidFill>
+              <a:latin typeface="+mn-lt"/>
+            </a:endParaRPr>
+          </a:p>
+          <a:p>
+            <a:pPr lvl="0" defTabSz="1706910">
+              <a:defRPr/>
+            </a:pPr>
+            <a:r>
+              <a:rPr lang="ru-RU" sz="1000" dirty="0">
+                <a:solidFill>
+                  <a:prstClr val="black"/>
+                </a:solidFill>
+                <a:latin typeface="+mn-lt"/>
+              </a:rPr>
+              <a:t>   </a:t>
+            </a:r>
+            <a:r>
+              <a:rPr lang="en-GB" sz="1000" dirty="0">
+                <a:solidFill>
+                  <a:prstClr val="black"/>
+                </a:solidFill>
+                <a:latin typeface="+mn-lt"/>
+              </a:rPr>
+              <a:t>(the model missed a failure case);</a:t>
+            </a:r>
+          </a:p>
+          <a:p>
+            <a:pPr lvl="0" defTabSz="1706910">
+              <a:defRPr/>
+            </a:pPr>
+            <a:r>
+              <a:rPr lang="en-GB" sz="1000" i="1" dirty="0">
+                <a:latin typeface="+mn-lt"/>
+                <a:ea typeface="Calibri"/>
+                <a:cs typeface="Calibri"/>
+              </a:rPr>
+              <a:t>• </a:t>
+            </a:r>
+            <a:r>
+              <a:rPr lang="en-GB" sz="1000" dirty="0">
+                <a:solidFill>
+                  <a:prstClr val="black"/>
+                </a:solidFill>
+                <a:latin typeface="+mn-lt"/>
+              </a:rPr>
+              <a:t>True Positives </a:t>
+            </a:r>
+            <a:r>
+              <a:rPr lang="en-GB" sz="1000" b="1" dirty="0">
+                <a:solidFill>
+                  <a:prstClr val="black"/>
+                </a:solidFill>
+                <a:latin typeface="+mn-lt"/>
+              </a:rPr>
+              <a:t>(TP) = 42 </a:t>
+            </a:r>
+            <a:endParaRPr lang="ru-RU" sz="1000" b="1" dirty="0">
+              <a:solidFill>
+                <a:prstClr val="black"/>
+              </a:solidFill>
+              <a:latin typeface="+mn-lt"/>
+            </a:endParaRPr>
+          </a:p>
+          <a:p>
+            <a:pPr lvl="0" defTabSz="1706910">
+              <a:defRPr/>
+            </a:pPr>
+            <a:r>
+              <a:rPr lang="ru-RU" sz="1000" dirty="0">
+                <a:solidFill>
+                  <a:prstClr val="black"/>
+                </a:solidFill>
+                <a:latin typeface="+mn-lt"/>
+              </a:rPr>
+              <a:t>   </a:t>
+            </a:r>
+            <a:r>
+              <a:rPr lang="en-GB" sz="1000" dirty="0">
+                <a:solidFill>
+                  <a:prstClr val="black"/>
+                </a:solidFill>
+                <a:latin typeface="+mn-lt"/>
+              </a:rPr>
+              <a:t>(correctly detected failure cases). </a:t>
+            </a:r>
+          </a:p>
+          <a:p>
+            <a:pPr lvl="0" defTabSz="1706910">
+              <a:defRPr/>
+            </a:pPr>
+            <a:r>
+              <a:rPr lang="en-GB" sz="1000" b="1" dirty="0">
+                <a:solidFill>
+                  <a:prstClr val="black"/>
+                </a:solidFill>
+                <a:latin typeface="+mn-lt"/>
+              </a:rPr>
+              <a:t>Recall = TP / (TP + FN) = 42 / (42 + 5) ≈ 0.894</a:t>
+            </a:r>
+          </a:p>
+          <a:p>
+            <a:pPr lvl="0" defTabSz="1706910">
+              <a:defRPr/>
+            </a:pPr>
+            <a:r>
+              <a:rPr lang="en-GB" sz="1000" i="1" dirty="0">
+                <a:solidFill>
+                  <a:prstClr val="black"/>
+                </a:solidFill>
+                <a:latin typeface="+mn-lt"/>
+              </a:rPr>
+              <a:t>This means that the model correctly identifies about 89.4% of all failure cases. </a:t>
+            </a:r>
+            <a:endParaRPr lang="ru-RU" sz="1000" dirty="0">
+              <a:solidFill>
+                <a:prstClr val="black"/>
+              </a:solidFill>
+              <a:latin typeface="+mn-lt"/>
+            </a:endParaRPr>
+          </a:p>
+          <a:p>
+            <a:pPr lvl="0" defTabSz="1706910">
+              <a:defRPr/>
+            </a:pPr>
+            <a:r>
+              <a:rPr lang="en-GB" sz="1000" dirty="0">
+                <a:solidFill>
+                  <a:prstClr val="black"/>
+                </a:solidFill>
+                <a:latin typeface="+mn-lt"/>
+              </a:rPr>
+              <a:t>The Recall obtained from the confusion matrix differs slightly from the cross-validation result, as it is calculated on a single test split rather than averaged across 5 folds. Cross-validation provides a more robust assessment of model performance, while the confusion matrix reflects performance on a specific dataset.</a:t>
+            </a:r>
+          </a:p>
+          <a:p>
+            <a:pPr lvl="0" defTabSz="1706910">
+              <a:defRPr/>
+            </a:pPr>
+            <a:r>
+              <a:rPr kumimoji="0" lang="en-GB" sz="1000" b="1" i="0" u="none" strike="noStrike" kern="1200" cap="none" spc="0" normalizeH="0" baseline="0" noProof="0" dirty="0">
+                <a:ln>
+                  <a:noFill/>
+                </a:ln>
+                <a:solidFill>
+                  <a:prstClr val="black"/>
+                </a:solidFill>
+                <a:effectLst/>
+                <a:uLnTx/>
+                <a:uFillTx/>
+                <a:latin typeface="+mn-lt"/>
+                <a:ea typeface="+mn-ea"/>
+                <a:cs typeface="+mn-cs"/>
+              </a:rPr>
+              <a:t>Overall</a:t>
+            </a:r>
+            <a:r>
+              <a:rPr lang="en-GB" sz="1000" b="1" dirty="0">
+                <a:solidFill>
+                  <a:prstClr val="black"/>
+                </a:solidFill>
+                <a:latin typeface="+mn-lt"/>
+              </a:rPr>
+              <a:t>, the relatively low number of false negatives indicates that the model is effective at identifying high-risk cases.</a:t>
+            </a:r>
+            <a:endParaRPr kumimoji="0" lang="en-GB" sz="1000" b="1" i="0" u="none" strike="noStrike" kern="1200" cap="none" spc="0" normalizeH="0" baseline="0" noProof="0" dirty="0">
+              <a:ln>
+                <a:noFill/>
+              </a:ln>
+              <a:solidFill>
+                <a:prstClr val="black"/>
+              </a:solidFill>
+              <a:effectLst/>
+              <a:uLnTx/>
+              <a:uFillTx/>
+              <a:latin typeface="+mn-lt"/>
+              <a:ea typeface="+mn-ea"/>
+              <a:cs typeface="+mn-cs"/>
+            </a:endParaRPr>
+          </a:p>
+        </p:txBody>
+      </p:sp>
+      <p:grpSp>
+        <p:nvGrpSpPr>
+          <p:cNvPr id="46" name="Group 45">
+            <a:extLst>
+              <a:ext uri="{FF2B5EF4-FFF2-40B4-BE49-F238E27FC236}">
+                <a16:creationId xmlns:a16="http://schemas.microsoft.com/office/drawing/2014/main" id="{F5D19067-2CC8-9932-8C17-51A16E8969FB}"/>
+              </a:ext>
+            </a:extLst>
+          </p:cNvPr>
+          <p:cNvGrpSpPr/>
+          <p:nvPr/>
+        </p:nvGrpSpPr>
+        <p:grpSpPr>
+          <a:xfrm>
+            <a:off x="6887534" y="6474652"/>
+            <a:ext cx="2390472" cy="878254"/>
+            <a:chOff x="6887534" y="6940579"/>
+            <a:chExt cx="2390472" cy="878254"/>
+          </a:xfrm>
+        </p:grpSpPr>
+        <p:pic>
+          <p:nvPicPr>
+            <p:cNvPr id="44" name="Picture 43">
+              <a:extLst>
+                <a:ext uri="{FF2B5EF4-FFF2-40B4-BE49-F238E27FC236}">
+                  <a16:creationId xmlns:a16="http://schemas.microsoft.com/office/drawing/2014/main" id="{EA77F69F-3B18-A26C-CEE3-5258A87A943F}"/>
+                </a:ext>
+              </a:extLst>
+            </p:cNvPr>
+            <p:cNvPicPr>
+              <a:picLocks noChangeAspect="1"/>
+            </p:cNvPicPr>
+            <p:nvPr/>
+          </p:nvPicPr>
+          <p:blipFill>
+            <a:blip r:embed="rId4"/>
+            <a:stretch>
+              <a:fillRect/>
+            </a:stretch>
+          </p:blipFill>
+          <p:spPr>
+            <a:xfrm>
+              <a:off x="6887534" y="6956223"/>
+              <a:ext cx="1063481" cy="862610"/>
+            </a:xfrm>
+            <a:prstGeom prst="rect">
+              <a:avLst/>
+            </a:prstGeom>
+          </p:spPr>
+        </p:pic>
+        <p:pic>
+          <p:nvPicPr>
+            <p:cNvPr id="45" name="Picture 44">
+              <a:extLst>
+                <a:ext uri="{FF2B5EF4-FFF2-40B4-BE49-F238E27FC236}">
+                  <a16:creationId xmlns:a16="http://schemas.microsoft.com/office/drawing/2014/main" id="{2AA08488-883E-E6AE-AA45-4A91D7FDBF07}"/>
+                </a:ext>
+              </a:extLst>
+            </p:cNvPr>
+            <p:cNvPicPr>
+              <a:picLocks noChangeAspect="1"/>
+            </p:cNvPicPr>
+            <p:nvPr/>
+          </p:nvPicPr>
+          <p:blipFill>
+            <a:blip r:embed="rId5"/>
+            <a:stretch>
+              <a:fillRect/>
+            </a:stretch>
+          </p:blipFill>
+          <p:spPr>
+            <a:xfrm>
+              <a:off x="8214524" y="6940579"/>
+              <a:ext cx="1063482" cy="865067"/>
+            </a:xfrm>
+            <a:prstGeom prst="rect">
+              <a:avLst/>
+            </a:prstGeom>
+          </p:spPr>
+        </p:pic>
+      </p:grpSp>
+      <p:sp>
+        <p:nvSpPr>
+          <p:cNvPr id="43" name="TextBox 42">
+            <a:extLst>
+              <a:ext uri="{FF2B5EF4-FFF2-40B4-BE49-F238E27FC236}">
+                <a16:creationId xmlns:a16="http://schemas.microsoft.com/office/drawing/2014/main" id="{1840F2E3-D0CB-6A22-247B-2C71641C1CF8}"/>
+              </a:ext>
+            </a:extLst>
+          </p:cNvPr>
+          <p:cNvSpPr txBox="1"/>
+          <p:nvPr/>
+        </p:nvSpPr>
+        <p:spPr>
+          <a:xfrm>
+            <a:off x="6823500" y="5969519"/>
+            <a:ext cx="2599468" cy="1404000"/>
           </a:xfrm>
           <a:prstGeom prst="rect">
             <a:avLst/>
@@ -3401,7 +4608,7 @@
               <a:defRPr/>
             </a:pPr>
             <a:r>
-              <a:rPr kumimoji="0" lang="en-GB" sz="2000" b="0" i="0" u="none" strike="noStrike" kern="1200" cap="none" spc="0" normalizeH="0" baseline="0" noProof="0" dirty="0">
+              <a:rPr kumimoji="0" lang="en-GB" sz="1600" b="0" i="0" u="none" strike="noStrike" kern="1200" cap="none" spc="0" normalizeH="0" baseline="0" noProof="0" dirty="0">
                 <a:ln>
                   <a:noFill/>
                 </a:ln>
@@ -3415,9 +4622,128 @@
                 <a:ea typeface="+mn-ea"/>
                 <a:cs typeface="+mn-cs"/>
               </a:rPr>
-              <a:t>5. Model Training and Hyper Parameters</a:t>
-            </a:r>
-            <a:endParaRPr lang="en-GB" sz="2000" b="0" i="0" u="none" strike="noStrike" kern="1200" cap="none" spc="0" normalizeH="0" baseline="0" noProof="0" dirty="0">
+              <a:t>4. Data Preparation</a:t>
+            </a:r>
+          </a:p>
+          <a:p>
+            <a:pPr lvl="0" defTabSz="1706910">
+              <a:defRPr/>
+            </a:pPr>
+            <a:r>
+              <a:rPr lang="en-GB" sz="1000" dirty="0">
+                <a:solidFill>
+                  <a:prstClr val="black"/>
+                </a:solidFill>
+              </a:rPr>
+              <a:t>The </a:t>
+            </a:r>
+            <a:r>
+              <a:rPr lang="en-GB" sz="1000" dirty="0" err="1">
+                <a:solidFill>
+                  <a:prstClr val="black"/>
+                </a:solidFill>
+              </a:rPr>
+              <a:t>inspection_window</a:t>
+            </a:r>
+            <a:r>
+              <a:rPr lang="en-GB" sz="1000" dirty="0">
+                <a:solidFill>
+                  <a:prstClr val="black"/>
+                </a:solidFill>
+              </a:rPr>
+              <a:t> variable before and </a:t>
+            </a:r>
+            <a:r>
+              <a:rPr kumimoji="0" lang="en-GB" sz="1000" b="0" i="0" u="none" strike="noStrike" kern="1200" cap="none" spc="0" normalizeH="0" baseline="0" noProof="0" dirty="0">
+                <a:ln>
+                  <a:noFill/>
+                </a:ln>
+                <a:solidFill>
+                  <a:prstClr val="black"/>
+                </a:solidFill>
+                <a:effectLst/>
+                <a:uLnTx/>
+                <a:uFillTx/>
+                <a:latin typeface="Calibri" panose="020F0502020204030204"/>
+                <a:ea typeface="+mn-ea"/>
+                <a:cs typeface="+mn-cs"/>
+              </a:rPr>
+              <a:t>after cleaning. </a:t>
+            </a:r>
+          </a:p>
+          <a:p>
+            <a:pPr lvl="0" defTabSz="1706910">
+              <a:defRPr/>
+            </a:pPr>
+            <a:endParaRPr kumimoji="0" lang="en-GB" sz="1000" b="0" i="0" u="none" strike="noStrike" kern="1200" cap="none" spc="0" normalizeH="0" baseline="0" noProof="0" dirty="0">
+              <a:ln>
+                <a:noFill/>
+              </a:ln>
+              <a:solidFill>
+                <a:prstClr val="black"/>
+              </a:solidFill>
+              <a:effectLst/>
+              <a:uLnTx/>
+              <a:uFillTx/>
+              <a:latin typeface="Calibri" panose="020F0502020204030204"/>
+              <a:ea typeface="+mn-ea"/>
+              <a:cs typeface="+mn-cs"/>
+            </a:endParaRPr>
+          </a:p>
+          <a:p>
+            <a:pPr lvl="0" defTabSz="1706910">
+              <a:defRPr/>
+            </a:pPr>
+            <a:endParaRPr lang="en-GB" sz="1000" dirty="0">
+              <a:solidFill>
+                <a:prstClr val="black"/>
+              </a:solidFill>
+              <a:latin typeface="Calibri" panose="020F0502020204030204"/>
+            </a:endParaRPr>
+          </a:p>
+          <a:p>
+            <a:pPr lvl="0" defTabSz="1706910">
+              <a:defRPr/>
+            </a:pPr>
+            <a:endParaRPr kumimoji="0" lang="en-GB" sz="1000" b="0" i="0" u="none" strike="noStrike" kern="1200" cap="none" spc="0" normalizeH="0" baseline="0" noProof="0" dirty="0">
+              <a:ln>
+                <a:noFill/>
+              </a:ln>
+              <a:solidFill>
+                <a:prstClr val="black"/>
+              </a:solidFill>
+              <a:effectLst/>
+              <a:uLnTx/>
+              <a:uFillTx/>
+              <a:latin typeface="Calibri" panose="020F0502020204030204"/>
+              <a:ea typeface="+mn-ea"/>
+              <a:cs typeface="+mn-cs"/>
+            </a:endParaRPr>
+          </a:p>
+          <a:p>
+            <a:pPr lvl="0" defTabSz="1706910">
+              <a:defRPr/>
+            </a:pPr>
+            <a:endParaRPr kumimoji="0" lang="en-GB" sz="1000" b="0" i="0" u="none" strike="noStrike" kern="1200" cap="none" spc="0" normalizeH="0" baseline="0" noProof="0" dirty="0">
+              <a:ln>
+                <a:noFill/>
+              </a:ln>
+              <a:solidFill>
+                <a:prstClr val="black"/>
+              </a:solidFill>
+              <a:effectLst/>
+              <a:uLnTx/>
+              <a:uFillTx/>
+              <a:latin typeface="Calibri" panose="020F0502020204030204"/>
+              <a:ea typeface="+mn-ea"/>
+              <a:cs typeface="+mn-cs"/>
+            </a:endParaRPr>
+          </a:p>
+          <a:p>
+            <a:pPr lvl="0" defTabSz="1706910">
+              <a:defRPr/>
+            </a:pPr>
+            <a:endParaRPr lang="en-GB" sz="1050" b="0" i="0" u="none" strike="noStrike" kern="1200" cap="none" spc="0" normalizeH="0" baseline="0" noProof="0" dirty="0">
               <a:ln>
                 <a:noFill/>
               </a:ln>
@@ -3432,6 +4758,1093 @@
               <a:cs typeface="Calibri"/>
             </a:endParaRPr>
           </a:p>
+        </p:txBody>
+      </p:sp>
+      <p:sp>
+        <p:nvSpPr>
+          <p:cNvPr id="9" name="TextBox 8">
+            <a:extLst>
+              <a:ext uri="{FF2B5EF4-FFF2-40B4-BE49-F238E27FC236}">
+                <a16:creationId xmlns:a16="http://schemas.microsoft.com/office/drawing/2014/main" id="{F206284C-0E38-E129-A921-7FCAD4177EEC}"/>
+              </a:ext>
+            </a:extLst>
+          </p:cNvPr>
+          <p:cNvSpPr txBox="1"/>
+          <p:nvPr/>
+        </p:nvSpPr>
+        <p:spPr>
+          <a:xfrm>
+            <a:off x="358007" y="399527"/>
+            <a:ext cx="9064961" cy="5508000"/>
+          </a:xfrm>
+          <a:prstGeom prst="rect">
+            <a:avLst/>
+          </a:prstGeom>
+          <a:noFill/>
+          <a:ln w="38100">
+            <a:solidFill>
+              <a:schemeClr val="accent1">
+                <a:lumMod val="60000"/>
+                <a:lumOff val="40000"/>
+              </a:schemeClr>
+            </a:solidFill>
+          </a:ln>
+        </p:spPr>
+        <p:txBody>
+          <a:bodyPr wrap="square" lIns="91440" tIns="45720" rIns="91440" bIns="45720" anchor="t">
+            <a:spAutoFit/>
+          </a:bodyPr>
+          <a:lstStyle/>
+          <a:p>
+            <a:pPr>
+              <a:tabLst>
+                <a:tab pos="219075" algn="l"/>
+              </a:tabLst>
+            </a:pPr>
+            <a:r>
+              <a:rPr lang="en-GB" sz="1600" dirty="0"/>
+              <a:t>2. Project Methodology</a:t>
+            </a:r>
+          </a:p>
+          <a:p>
+            <a:pPr>
+              <a:tabLst>
+                <a:tab pos="219075" algn="l"/>
+              </a:tabLst>
+            </a:pPr>
+            <a:r>
+              <a:rPr lang="en-GB" sz="1000" b="1" dirty="0">
+                <a:highlight>
+                  <a:srgbClr val="00FFFF"/>
+                </a:highlight>
+              </a:rPr>
+              <a:t> 1.  Task Understanding </a:t>
+            </a:r>
+            <a:r>
+              <a:rPr lang="en-GB" sz="1000" b="1" dirty="0"/>
+              <a:t>  </a:t>
+            </a:r>
+            <a:r>
+              <a:rPr lang="en-GB" sz="1000" dirty="0">
+                <a:ea typeface="Calibri"/>
+                <a:cs typeface="Calibri"/>
+              </a:rPr>
+              <a:t>This is a binary classification task with the target variable </a:t>
+            </a:r>
+            <a:r>
+              <a:rPr lang="en-GB" sz="1000" i="1" dirty="0">
+                <a:ea typeface="Calibri"/>
+                <a:cs typeface="Calibri"/>
+              </a:rPr>
+              <a:t>failure</a:t>
+            </a:r>
+            <a:r>
+              <a:rPr lang="en-GB" sz="1000" dirty="0">
+                <a:ea typeface="Calibri"/>
+                <a:cs typeface="Calibri"/>
+              </a:rPr>
+              <a:t>, where a predicted probability of failure ≥ 0.5 indicates infrastructure failure. </a:t>
+            </a:r>
+          </a:p>
+          <a:p>
+            <a:pPr>
+              <a:tabLst>
+                <a:tab pos="219075" algn="l"/>
+              </a:tabLst>
+            </a:pPr>
+            <a:r>
+              <a:rPr lang="en-GB" sz="1000" i="1" u="sng" dirty="0">
+                <a:ea typeface="Calibri"/>
+                <a:cs typeface="Calibri"/>
+              </a:rPr>
+              <a:t>The goal </a:t>
+            </a:r>
+            <a:r>
+              <a:rPr lang="en-GB" sz="1000" dirty="0">
+                <a:ea typeface="Calibri"/>
+                <a:cs typeface="Calibri"/>
+              </a:rPr>
+              <a:t>is to predict the probability of infrastructure failure in a city block during the monitoring period. </a:t>
+            </a:r>
+          </a:p>
+          <a:p>
+            <a:pPr marL="7938" indent="-7938">
+              <a:tabLst>
+                <a:tab pos="219075" algn="l"/>
+              </a:tabLst>
+            </a:pPr>
+            <a:r>
+              <a:rPr lang="en-GB" sz="1000" i="1" u="sng" dirty="0">
+                <a:ea typeface="Calibri"/>
+                <a:cs typeface="Calibri"/>
+              </a:rPr>
+              <a:t>A ’good model’ for this task should:</a:t>
+            </a:r>
+            <a:r>
+              <a:rPr lang="en-GB" sz="1000" i="1" dirty="0">
+                <a:ea typeface="Calibri"/>
+                <a:cs typeface="Calibri"/>
+              </a:rPr>
+              <a:t> • </a:t>
+            </a:r>
+            <a:r>
+              <a:rPr lang="en-GB" sz="1000" b="1" i="1" dirty="0">
+                <a:ea typeface="Calibri"/>
+                <a:cs typeface="Calibri"/>
+              </a:rPr>
+              <a:t>accurately predict infrastructure failure</a:t>
+            </a:r>
+            <a:r>
+              <a:rPr lang="en-GB" sz="1000" i="1" dirty="0">
+                <a:ea typeface="Calibri"/>
+                <a:cs typeface="Calibri"/>
+              </a:rPr>
+              <a:t>;</a:t>
+            </a:r>
+            <a:r>
+              <a:rPr lang="en-GB" sz="1000" dirty="0">
+                <a:ea typeface="Calibri"/>
+                <a:cs typeface="Calibri"/>
+              </a:rPr>
+              <a:t> </a:t>
+            </a:r>
+            <a:r>
+              <a:rPr lang="en-GB" sz="1000" i="1" dirty="0">
+                <a:ea typeface="Calibri"/>
+                <a:cs typeface="Calibri"/>
+              </a:rPr>
+              <a:t>• </a:t>
+            </a:r>
+            <a:r>
+              <a:rPr lang="en-GB" sz="1000" b="1" i="1" dirty="0">
+                <a:ea typeface="Calibri"/>
+                <a:cs typeface="Calibri"/>
+              </a:rPr>
+              <a:t>minimise false negatives </a:t>
+            </a:r>
+            <a:r>
+              <a:rPr lang="en-GB" sz="1000" dirty="0">
+                <a:ea typeface="Calibri"/>
+                <a:cs typeface="Calibri"/>
+              </a:rPr>
+              <a:t>to avoid missing high-risk areas (high Recall for the failure class is the most important metric for this task); </a:t>
+            </a:r>
+            <a:r>
+              <a:rPr lang="en-GB" sz="1000" i="1" dirty="0">
+                <a:ea typeface="Calibri"/>
+                <a:cs typeface="Calibri"/>
+              </a:rPr>
+              <a:t>• </a:t>
+            </a:r>
+            <a:r>
+              <a:rPr lang="en-GB" sz="1000" b="1" i="1" dirty="0">
+                <a:ea typeface="Calibri"/>
+                <a:cs typeface="Calibri"/>
+              </a:rPr>
+              <a:t>generalise  well to unseen data</a:t>
+            </a:r>
+            <a:r>
+              <a:rPr lang="en-GB" sz="1000" dirty="0">
+                <a:ea typeface="Calibri"/>
+                <a:cs typeface="Calibri"/>
+              </a:rPr>
+              <a:t> to be useful in real-world applications. </a:t>
+            </a:r>
+          </a:p>
+          <a:p>
+            <a:pPr marL="7938" indent="-7938">
+              <a:tabLst>
+                <a:tab pos="219075" algn="l"/>
+              </a:tabLst>
+            </a:pPr>
+            <a:r>
+              <a:rPr lang="en-GB" sz="1000" i="1" dirty="0">
+                <a:ea typeface="Calibri"/>
+                <a:cs typeface="Calibri"/>
+              </a:rPr>
+              <a:t>In addition, it is important to identify which features have the greatest impact on failure, as this can provide valuable insights for decision-making and risk minimisation.</a:t>
+            </a:r>
+          </a:p>
+          <a:p>
+            <a:pPr>
+              <a:tabLst>
+                <a:tab pos="219075" algn="l"/>
+              </a:tabLst>
+            </a:pPr>
+            <a:r>
+              <a:rPr lang="en-GB" sz="1000" b="1" dirty="0">
+                <a:highlight>
+                  <a:srgbClr val="00FFFF"/>
+                </a:highlight>
+                <a:ea typeface="Calibri"/>
+                <a:cs typeface="Calibri"/>
+              </a:rPr>
+              <a:t> 2.  Data Understanding </a:t>
+            </a:r>
+            <a:r>
+              <a:rPr lang="en-GB" sz="1000" i="1" dirty="0">
+                <a:ea typeface="Calibri"/>
+                <a:cs typeface="Calibri"/>
+              </a:rPr>
+              <a:t>  </a:t>
+            </a:r>
+            <a:r>
+              <a:rPr lang="en-GB" sz="1000" i="1" u="sng" dirty="0">
+                <a:ea typeface="Calibri"/>
+                <a:cs typeface="Calibri"/>
+              </a:rPr>
+              <a:t>Inputs to the model: </a:t>
+            </a:r>
+            <a:r>
+              <a:rPr lang="en-GB" sz="1000" dirty="0">
+                <a:ea typeface="Calibri"/>
+                <a:cs typeface="Calibri"/>
+              </a:rPr>
+              <a:t>Input variables are describing infrastructure and environmental conditions (except of </a:t>
+            </a:r>
+            <a:r>
+              <a:rPr lang="en-GB" sz="1000" dirty="0" err="1">
+                <a:ea typeface="Calibri"/>
+                <a:cs typeface="Calibri"/>
+              </a:rPr>
+              <a:t>inspector_id</a:t>
+            </a:r>
+            <a:r>
+              <a:rPr lang="en-GB" sz="1000" dirty="0">
+                <a:ea typeface="Calibri"/>
+                <a:cs typeface="Calibri"/>
+              </a:rPr>
+              <a:t>, which identifies an inspector and not contain information about infrastructure). </a:t>
+            </a:r>
+            <a:r>
+              <a:rPr lang="en-GB" sz="1000" i="1" u="sng" dirty="0">
+                <a:ea typeface="Calibri"/>
+                <a:cs typeface="Calibri"/>
+              </a:rPr>
+              <a:t>Output of the model</a:t>
+            </a:r>
+            <a:r>
+              <a:rPr lang="en-GB" sz="1000" dirty="0">
+                <a:ea typeface="Calibri"/>
+                <a:cs typeface="Calibri"/>
+              </a:rPr>
+              <a:t> is the binary categorical variable </a:t>
+            </a:r>
+            <a:r>
+              <a:rPr lang="en-GB" sz="1000" b="1" i="1" dirty="0">
+                <a:ea typeface="Calibri"/>
+                <a:cs typeface="Calibri"/>
+              </a:rPr>
+              <a:t>failure</a:t>
+            </a:r>
+            <a:r>
+              <a:rPr lang="en-GB" sz="1000" dirty="0">
+                <a:ea typeface="Calibri"/>
+                <a:cs typeface="Calibri"/>
+              </a:rPr>
+              <a:t> (target), which takes the value </a:t>
+            </a:r>
+            <a:r>
+              <a:rPr lang="en-GB" sz="1000" b="1" dirty="0">
+                <a:ea typeface="Calibri"/>
+                <a:cs typeface="Calibri"/>
+              </a:rPr>
+              <a:t>0</a:t>
+            </a:r>
+            <a:r>
+              <a:rPr lang="en-GB" sz="1000" dirty="0">
+                <a:ea typeface="Calibri"/>
+                <a:cs typeface="Calibri"/>
+              </a:rPr>
+              <a:t> – for</a:t>
+            </a:r>
+            <a:r>
+              <a:rPr lang="en-GB" sz="1000" i="1" dirty="0">
+                <a:ea typeface="Calibri"/>
+                <a:cs typeface="Calibri"/>
+              </a:rPr>
+              <a:t> no infrastructure failure </a:t>
+            </a:r>
+            <a:r>
+              <a:rPr lang="en-GB" sz="1000" dirty="0">
+                <a:ea typeface="Calibri"/>
+                <a:cs typeface="Calibri"/>
+              </a:rPr>
+              <a:t>and </a:t>
+            </a:r>
+            <a:r>
+              <a:rPr lang="en-GB" sz="1000" b="1" dirty="0">
+                <a:ea typeface="Calibri"/>
+                <a:cs typeface="Calibri"/>
+              </a:rPr>
+              <a:t>1</a:t>
+            </a:r>
+            <a:r>
+              <a:rPr lang="en-GB" sz="1000" dirty="0">
+                <a:ea typeface="Calibri"/>
+                <a:cs typeface="Calibri"/>
+              </a:rPr>
+              <a:t> - for</a:t>
+            </a:r>
+            <a:r>
+              <a:rPr lang="en-GB" sz="1000" i="1" dirty="0">
+                <a:ea typeface="Calibri"/>
+                <a:cs typeface="Calibri"/>
+              </a:rPr>
+              <a:t> failure occurs</a:t>
+            </a:r>
+            <a:r>
+              <a:rPr lang="en-GB" sz="1000" dirty="0">
+                <a:ea typeface="Calibri"/>
+                <a:cs typeface="Calibri"/>
+              </a:rPr>
+              <a:t>. </a:t>
+            </a:r>
+            <a:r>
+              <a:rPr lang="en-GB" sz="1000" i="1" u="sng" dirty="0">
+                <a:ea typeface="Calibri"/>
+                <a:cs typeface="Calibri"/>
+              </a:rPr>
+              <a:t>To solve this task</a:t>
+            </a:r>
+            <a:r>
+              <a:rPr lang="en-GB" sz="1000" dirty="0">
+                <a:ea typeface="Calibri"/>
+                <a:cs typeface="Calibri"/>
+              </a:rPr>
+              <a:t>, we cannot use conventional software because we do not know the exactly rules under which a failure occurs. Besides, many factors may influence the failure simultaneously and there may be complex dependencies between them. Machine Learning is the best way to solve this problem because it automatically finds pattern in the data, uses past observations, and model the probability of failure.</a:t>
+            </a:r>
+            <a:r>
+              <a:rPr lang="en-GB" sz="1000" i="1" dirty="0">
+                <a:ea typeface="Calibri"/>
+                <a:cs typeface="Calibri"/>
+              </a:rPr>
+              <a:t> </a:t>
+            </a:r>
+            <a:r>
+              <a:rPr lang="en-GB" sz="1000" b="1" i="1" u="sng" dirty="0">
+                <a:ea typeface="Calibri"/>
+                <a:cs typeface="Calibri"/>
+              </a:rPr>
+              <a:t>Data visualisation</a:t>
+            </a:r>
+            <a:r>
+              <a:rPr lang="en-GB" sz="1000" b="1" i="1" dirty="0">
+                <a:ea typeface="Calibri"/>
+                <a:cs typeface="Calibri"/>
+              </a:rPr>
+              <a:t> </a:t>
+            </a:r>
+            <a:r>
+              <a:rPr lang="en-GB" sz="1000" b="1" dirty="0">
+                <a:ea typeface="Calibri"/>
+                <a:cs typeface="Calibri"/>
+              </a:rPr>
+              <a:t>was used to explore feature distributions and identify potential issues.</a:t>
+            </a:r>
+            <a:r>
+              <a:rPr lang="en-GB" sz="1000" dirty="0">
+                <a:ea typeface="Calibri"/>
+                <a:cs typeface="Calibri"/>
+              </a:rPr>
+              <a:t> </a:t>
+            </a:r>
+            <a:r>
+              <a:rPr lang="en-GB" sz="1000" i="1" u="sng" dirty="0">
+                <a:ea typeface="Calibri"/>
+                <a:cs typeface="Calibri"/>
+              </a:rPr>
+              <a:t>Histograms showed</a:t>
+            </a:r>
+            <a:r>
+              <a:rPr lang="en-GB" sz="1000" i="1" dirty="0">
+                <a:ea typeface="Calibri"/>
+                <a:cs typeface="Calibri"/>
+              </a:rPr>
+              <a:t> </a:t>
+            </a:r>
+            <a:r>
+              <a:rPr lang="en-GB" sz="1000" dirty="0">
+                <a:ea typeface="Calibri"/>
+                <a:cs typeface="Calibri"/>
+              </a:rPr>
+              <a:t>that some features  have significant impact on failure, where higher values increase probability of failure, and that failures occur mostly in summer period. </a:t>
+            </a:r>
+            <a:r>
+              <a:rPr lang="en-GB" sz="1000" i="1" dirty="0">
+                <a:ea typeface="Calibri"/>
+                <a:cs typeface="Calibri"/>
+              </a:rPr>
+              <a:t>Examination of the data distribution also revealed that there are some errors in the dataset. </a:t>
+            </a:r>
+          </a:p>
+          <a:p>
+            <a:pPr>
+              <a:tabLst>
+                <a:tab pos="219075" algn="l"/>
+              </a:tabLst>
+            </a:pPr>
+            <a:r>
+              <a:rPr lang="en-GB" sz="1000" b="1" dirty="0">
+                <a:highlight>
+                  <a:srgbClr val="00FFFF"/>
+                </a:highlight>
+                <a:ea typeface="Calibri"/>
+                <a:cs typeface="Calibri"/>
+              </a:rPr>
+              <a:t> 3.  Data Preparation </a:t>
+            </a:r>
+            <a:r>
+              <a:rPr lang="en-GB" sz="1000" b="1" dirty="0">
+                <a:ea typeface="Calibri"/>
+                <a:cs typeface="Calibri"/>
+              </a:rPr>
+              <a:t>  </a:t>
+            </a:r>
+            <a:r>
+              <a:rPr lang="en-GB" sz="1000" i="1" dirty="0">
+                <a:ea typeface="Calibri"/>
+                <a:cs typeface="Calibri"/>
+              </a:rPr>
+              <a:t>• </a:t>
+            </a:r>
+            <a:r>
+              <a:rPr lang="en-GB" sz="1000" dirty="0">
+                <a:ea typeface="Calibri"/>
+                <a:cs typeface="Calibri"/>
+              </a:rPr>
+              <a:t>Visualisation showed that the </a:t>
+            </a:r>
+            <a:r>
+              <a:rPr lang="en-GB" sz="1000" b="1" dirty="0" err="1">
+                <a:ea typeface="Calibri"/>
+                <a:cs typeface="Calibri"/>
+              </a:rPr>
+              <a:t>inspector_id</a:t>
+            </a:r>
+            <a:r>
+              <a:rPr lang="en-GB" sz="1000" b="1" dirty="0">
+                <a:ea typeface="Calibri"/>
+                <a:cs typeface="Calibri"/>
+              </a:rPr>
+              <a:t> </a:t>
+            </a:r>
+            <a:r>
+              <a:rPr lang="en-GB" sz="1000" dirty="0">
+                <a:ea typeface="Calibri"/>
+                <a:cs typeface="Calibri"/>
+              </a:rPr>
+              <a:t>has a flat distribution and therefore, is not useful for prediction and was removed from the dataset. </a:t>
+            </a:r>
+            <a:r>
+              <a:rPr lang="en-GB" sz="1000" i="1" dirty="0">
+                <a:ea typeface="Calibri"/>
+                <a:cs typeface="Calibri"/>
+              </a:rPr>
+              <a:t>• </a:t>
+            </a:r>
+            <a:r>
+              <a:rPr lang="en-GB" sz="1000" dirty="0">
+                <a:ea typeface="Calibri"/>
+                <a:cs typeface="Calibri"/>
+              </a:rPr>
+              <a:t>Some </a:t>
+            </a:r>
+            <a:r>
+              <a:rPr lang="en-GB" sz="1000" b="1" dirty="0">
+                <a:ea typeface="Calibri"/>
+                <a:cs typeface="Calibri"/>
+              </a:rPr>
+              <a:t>errors</a:t>
+            </a:r>
+            <a:r>
+              <a:rPr lang="en-GB" sz="1000" dirty="0">
+                <a:ea typeface="Calibri"/>
+                <a:cs typeface="Calibri"/>
+              </a:rPr>
+              <a:t> were identified and corrected before splitting the data (e.g. </a:t>
+            </a:r>
+            <a:r>
+              <a:rPr lang="en-GB" sz="1000" dirty="0" err="1">
+                <a:ea typeface="Calibri"/>
+                <a:cs typeface="Calibri"/>
+              </a:rPr>
+              <a:t>sumer</a:t>
+            </a:r>
+            <a:r>
+              <a:rPr lang="en-GB" sz="1000" dirty="0">
+                <a:ea typeface="Calibri"/>
+                <a:cs typeface="Calibri"/>
+              </a:rPr>
+              <a:t> and morni1ng). </a:t>
+            </a:r>
+            <a:r>
+              <a:rPr lang="en-GB" sz="1000" i="1" dirty="0">
+                <a:ea typeface="Calibri"/>
+                <a:cs typeface="Calibri"/>
+              </a:rPr>
+              <a:t>• </a:t>
+            </a:r>
+            <a:r>
+              <a:rPr lang="en-GB" sz="1000" dirty="0">
+                <a:ea typeface="Calibri"/>
+                <a:cs typeface="Calibri"/>
+              </a:rPr>
+              <a:t>Additionally, there were </a:t>
+            </a:r>
+            <a:r>
+              <a:rPr lang="en-GB" sz="1000" b="1" dirty="0">
+                <a:ea typeface="Calibri"/>
+                <a:cs typeface="Calibri"/>
+              </a:rPr>
+              <a:t>0.2% missing values</a:t>
+            </a:r>
+            <a:r>
+              <a:rPr lang="ru-RU" sz="1000" b="1" dirty="0">
+                <a:ea typeface="Calibri"/>
+                <a:cs typeface="Calibri"/>
+              </a:rPr>
+              <a:t> </a:t>
+            </a:r>
+            <a:r>
+              <a:rPr lang="ru-RU" sz="1000" dirty="0">
+                <a:ea typeface="Calibri"/>
+                <a:cs typeface="Calibri"/>
+              </a:rPr>
+              <a:t>(</a:t>
+            </a:r>
+            <a:r>
+              <a:rPr lang="en-GB" sz="1000" dirty="0">
+                <a:ea typeface="Calibri"/>
+                <a:cs typeface="Calibri"/>
+              </a:rPr>
+              <a:t>only 11 instances in the dataset), and these rows were deleted as such a small amount of data is unlikely to affect model performance and it is better option than attempting to estimate imputed missing values. </a:t>
+            </a:r>
+            <a:r>
+              <a:rPr lang="en-GB" sz="1000" i="1" dirty="0">
+                <a:ea typeface="Calibri"/>
+                <a:cs typeface="Calibri"/>
+              </a:rPr>
+              <a:t>• </a:t>
+            </a:r>
+            <a:r>
+              <a:rPr lang="en-GB" sz="1000" b="1" dirty="0">
+                <a:ea typeface="Calibri"/>
+                <a:cs typeface="Calibri"/>
+              </a:rPr>
+              <a:t>The dataset was then split into 70% training data and 30% test data.</a:t>
+            </a:r>
+            <a:r>
+              <a:rPr lang="en-GB" sz="1000" dirty="0">
+                <a:ea typeface="Calibri"/>
+                <a:cs typeface="Calibri"/>
+              </a:rPr>
+              <a:t> </a:t>
+            </a:r>
+            <a:r>
+              <a:rPr lang="en-GB" sz="1000" i="1" dirty="0">
+                <a:ea typeface="Calibri"/>
+                <a:cs typeface="Calibri"/>
+              </a:rPr>
+              <a:t>• </a:t>
+            </a:r>
+            <a:r>
+              <a:rPr lang="en-GB" sz="1000" dirty="0">
+                <a:ea typeface="Calibri"/>
+                <a:cs typeface="Calibri"/>
+              </a:rPr>
+              <a:t>An </a:t>
+            </a:r>
+            <a:r>
+              <a:rPr lang="en-GB" sz="1000" b="1" dirty="0">
+                <a:ea typeface="Calibri"/>
+                <a:cs typeface="Calibri"/>
+              </a:rPr>
+              <a:t>outlier</a:t>
+            </a:r>
+            <a:r>
+              <a:rPr lang="en-GB" sz="1000" dirty="0">
+                <a:ea typeface="Calibri"/>
+                <a:cs typeface="Calibri"/>
+              </a:rPr>
+              <a:t> was identified and deleted in </a:t>
+            </a:r>
+            <a:r>
+              <a:rPr lang="en-GB" sz="1000" dirty="0" err="1">
+                <a:ea typeface="Calibri"/>
+                <a:cs typeface="Calibri"/>
+              </a:rPr>
+              <a:t>material_flexibility</a:t>
+            </a:r>
+            <a:r>
+              <a:rPr lang="en-GB" sz="1000" dirty="0">
+                <a:ea typeface="Calibri"/>
+                <a:cs typeface="Calibri"/>
+              </a:rPr>
+              <a:t> feature. </a:t>
+            </a:r>
+            <a:r>
+              <a:rPr lang="en-GB" sz="1000" i="1" dirty="0">
+                <a:ea typeface="Calibri"/>
+                <a:cs typeface="Calibri"/>
+              </a:rPr>
+              <a:t>• </a:t>
+            </a:r>
+            <a:r>
+              <a:rPr lang="en-GB" sz="1000" dirty="0">
+                <a:ea typeface="Calibri"/>
+                <a:cs typeface="Calibri"/>
+              </a:rPr>
+              <a:t>The </a:t>
+            </a:r>
+            <a:r>
+              <a:rPr lang="en-GB" sz="1000" b="1" dirty="0">
+                <a:ea typeface="Calibri"/>
+                <a:cs typeface="Calibri"/>
+              </a:rPr>
+              <a:t>categorical variables were encoded </a:t>
+            </a:r>
+            <a:r>
+              <a:rPr lang="en-GB" sz="1000" dirty="0">
+                <a:ea typeface="Calibri"/>
+                <a:cs typeface="Calibri"/>
+              </a:rPr>
+              <a:t>using one-hot encoding. </a:t>
+            </a:r>
+            <a:r>
+              <a:rPr lang="en-GB" sz="1000" i="1" dirty="0">
+                <a:ea typeface="Calibri"/>
+                <a:cs typeface="Calibri"/>
+              </a:rPr>
+              <a:t>• </a:t>
+            </a:r>
+            <a:r>
+              <a:rPr lang="en-GB" sz="1000" dirty="0">
+                <a:ea typeface="Calibri"/>
+                <a:cs typeface="Calibri"/>
+              </a:rPr>
+              <a:t>As the variables are on different scales, so </a:t>
+            </a:r>
+            <a:r>
+              <a:rPr lang="en-GB" sz="1000" b="1" dirty="0">
+                <a:ea typeface="Calibri"/>
+                <a:cs typeface="Calibri"/>
+              </a:rPr>
+              <a:t>normalisation</a:t>
+            </a:r>
+            <a:r>
+              <a:rPr lang="en-GB" sz="1000" dirty="0">
+                <a:ea typeface="Calibri"/>
+                <a:cs typeface="Calibri"/>
+              </a:rPr>
+              <a:t> was applied before </a:t>
+            </a:r>
+            <a:r>
+              <a:rPr lang="en-GB" sz="1000" i="1" dirty="0">
+                <a:ea typeface="Calibri"/>
+                <a:cs typeface="Calibri"/>
+              </a:rPr>
+              <a:t>model development.</a:t>
+            </a:r>
+            <a:r>
+              <a:rPr lang="en-GB" sz="1000" dirty="0">
+                <a:ea typeface="Calibri"/>
+                <a:cs typeface="Calibri"/>
+              </a:rPr>
+              <a:t> </a:t>
+            </a:r>
+          </a:p>
+          <a:p>
+            <a:pPr>
+              <a:tabLst>
+                <a:tab pos="219075" algn="l"/>
+              </a:tabLst>
+            </a:pPr>
+            <a:r>
+              <a:rPr lang="en-GB" sz="1000" b="1" dirty="0">
+                <a:highlight>
+                  <a:srgbClr val="00FFFF"/>
+                </a:highlight>
+                <a:ea typeface="Calibri"/>
+                <a:cs typeface="Calibri"/>
+              </a:rPr>
+              <a:t> 4.  Model Training and Hyperparameter Tuning </a:t>
+            </a:r>
+            <a:r>
+              <a:rPr lang="en-GB" sz="1000" b="1" dirty="0">
+                <a:ea typeface="Calibri"/>
+                <a:cs typeface="Calibri"/>
+              </a:rPr>
+              <a:t>  </a:t>
+            </a:r>
+            <a:r>
+              <a:rPr lang="en-GB" sz="1000" dirty="0">
+                <a:ea typeface="Calibri"/>
+                <a:cs typeface="Calibri"/>
+              </a:rPr>
+              <a:t>Three models (</a:t>
+            </a:r>
+            <a:r>
+              <a:rPr lang="en-GB" sz="1000" b="1" dirty="0">
+                <a:ea typeface="Calibri"/>
+                <a:cs typeface="Calibri"/>
+              </a:rPr>
+              <a:t>Logistic Regression, Decision Tree, Neural Network</a:t>
+            </a:r>
+            <a:r>
+              <a:rPr lang="en-GB" sz="1000" dirty="0">
+                <a:ea typeface="Calibri"/>
+                <a:cs typeface="Calibri"/>
+              </a:rPr>
+              <a:t>) were trained and tuned by varying hyperparameters systematically. </a:t>
+            </a:r>
+            <a:r>
+              <a:rPr lang="en-GB" sz="1000" b="1" dirty="0">
+                <a:ea typeface="Calibri"/>
+                <a:cs typeface="Calibri"/>
+              </a:rPr>
+              <a:t>Logistic Regression achieved Recall = 0.919, AUC = 0.971; Neural Network: Recall = 0.928, AUC = 0.965; and Decision Tree: Recall = 0.889, AUC = 0.938. </a:t>
+            </a:r>
+          </a:p>
+          <a:p>
+            <a:pPr>
+              <a:tabLst>
+                <a:tab pos="219075" algn="l"/>
+              </a:tabLst>
+            </a:pPr>
+            <a:r>
+              <a:rPr lang="en-GB" sz="1000" b="1" dirty="0">
+                <a:highlight>
+                  <a:srgbClr val="00FFFF"/>
+                </a:highlight>
+                <a:cs typeface="Calibri"/>
+              </a:rPr>
+              <a:t> 5.  Feature Projection </a:t>
+            </a:r>
+            <a:r>
+              <a:rPr lang="en-GB" sz="1000" i="1" dirty="0"/>
+              <a:t>  Principal Component Analysis </a:t>
+            </a:r>
+            <a:r>
+              <a:rPr lang="en-GB" sz="1000" dirty="0"/>
+              <a:t>was applied to the dataset; however, it decreased the accuracy of the models. PCA reduced the number of dimension, but it also worsened the separability</a:t>
+            </a:r>
+            <a:r>
+              <a:rPr lang="ru-RU" sz="1000" dirty="0"/>
+              <a:t> </a:t>
+            </a:r>
+            <a:r>
+              <a:rPr lang="en-GB" sz="1000" dirty="0"/>
+              <a:t>by mixing the classes and losing important relationships between the features, which led to poorer model performance. </a:t>
+            </a:r>
+          </a:p>
+          <a:p>
+            <a:pPr>
+              <a:tabLst>
+                <a:tab pos="219075" algn="l"/>
+              </a:tabLst>
+            </a:pPr>
+            <a:r>
+              <a:rPr lang="en-GB" sz="1000" i="1" dirty="0"/>
+              <a:t>Manifold learning </a:t>
+            </a:r>
+            <a:r>
+              <a:rPr lang="en-GB" sz="1000" dirty="0"/>
+              <a:t>was also applied, but it resulted in a slight decrease in model accuracy as well. </a:t>
+            </a:r>
+            <a:r>
+              <a:rPr lang="en-GB" sz="1000" i="1" dirty="0"/>
+              <a:t>Therefore, these methods were excluded from the final modelling pipeline. </a:t>
+            </a:r>
+          </a:p>
+          <a:p>
+            <a:pPr>
+              <a:tabLst>
+                <a:tab pos="219075" algn="l"/>
+              </a:tabLst>
+            </a:pPr>
+            <a:r>
+              <a:rPr lang="en-GB" sz="1000" b="1" i="1" dirty="0">
+                <a:highlight>
+                  <a:srgbClr val="00FFFF"/>
+                </a:highlight>
+              </a:rPr>
+              <a:t> 6.  </a:t>
+            </a:r>
+            <a:r>
+              <a:rPr lang="en-GB" sz="1000" b="1" dirty="0">
+                <a:highlight>
+                  <a:srgbClr val="00FFFF"/>
+                </a:highlight>
+              </a:rPr>
+              <a:t>Feature Selection</a:t>
+            </a:r>
+            <a:r>
+              <a:rPr lang="en-GB" sz="1000" i="1" dirty="0"/>
+              <a:t>  Filter-based (correlation/ranking) method </a:t>
+            </a:r>
+            <a:r>
+              <a:rPr lang="en-GB" sz="1000" dirty="0"/>
+              <a:t>was applied to identify the most relevant features. The results showed that several features had very low predictive value. After removing these weak features, model performance improved, with the following results:</a:t>
+            </a:r>
+          </a:p>
+          <a:p>
+            <a:pPr>
+              <a:tabLst>
+                <a:tab pos="219075" algn="l"/>
+              </a:tabLst>
+            </a:pPr>
+            <a:r>
+              <a:rPr lang="en-GB" sz="1000" b="1" dirty="0"/>
+              <a:t>1)  Logistic Regression: </a:t>
+            </a:r>
+            <a:r>
+              <a:rPr lang="en-GB" sz="1000" b="1" dirty="0">
+                <a:ea typeface="Calibri"/>
+                <a:cs typeface="Calibri"/>
+              </a:rPr>
+              <a:t>Recall = 0.935, AUC = 0.972;  2)  </a:t>
+            </a:r>
+            <a:r>
+              <a:rPr lang="en-GB" sz="1000" dirty="0">
+                <a:cs typeface="Calibri"/>
+              </a:rPr>
+              <a:t>Neural Network: Recall = 0.919, AUC = 0.971;  </a:t>
+            </a:r>
+            <a:r>
+              <a:rPr lang="en-GB" sz="1000" b="1" dirty="0">
+                <a:cs typeface="Calibri"/>
+              </a:rPr>
+              <a:t>3)</a:t>
+            </a:r>
+            <a:r>
+              <a:rPr lang="en-GB" sz="1000" dirty="0">
+                <a:cs typeface="Calibri"/>
+              </a:rPr>
+              <a:t>  Decision Tree: Recall = 0.902, AUC = 0.918. </a:t>
+            </a:r>
+          </a:p>
+          <a:p>
+            <a:pPr>
+              <a:tabLst>
+                <a:tab pos="219075" algn="l"/>
+              </a:tabLst>
+            </a:pPr>
+            <a:r>
+              <a:rPr lang="en-GB" sz="1000" dirty="0"/>
+              <a:t>A </a:t>
+            </a:r>
+            <a:r>
+              <a:rPr lang="en-GB" sz="1000" i="1" dirty="0"/>
+              <a:t>wrapper-based approach </a:t>
+            </a:r>
+            <a:r>
+              <a:rPr lang="en-GB" sz="1000" dirty="0"/>
+              <a:t>was also applied, which confirmed the same best subset of 9 features, with the following results:</a:t>
+            </a:r>
+          </a:p>
+          <a:p>
+            <a:pPr>
+              <a:tabLst>
+                <a:tab pos="219075" algn="l"/>
+              </a:tabLst>
+            </a:pPr>
+            <a:r>
+              <a:rPr lang="en-GB" sz="1000" b="1" dirty="0"/>
+              <a:t>1)  Logistic Regression: </a:t>
+            </a:r>
+            <a:r>
+              <a:rPr lang="en-GB" sz="1000" b="1" dirty="0">
+                <a:ea typeface="Calibri"/>
+                <a:cs typeface="Calibri"/>
+              </a:rPr>
+              <a:t>Recall = 0.935, AUC = 0.971;  2)  </a:t>
+            </a:r>
+            <a:r>
+              <a:rPr lang="en-GB" sz="1000" dirty="0">
+                <a:cs typeface="Calibri"/>
+              </a:rPr>
+              <a:t>Neural Network: Recall = 0.932, AUC = 0.968;  </a:t>
+            </a:r>
+            <a:r>
+              <a:rPr lang="en-GB" sz="1000" b="1" dirty="0">
+                <a:cs typeface="Calibri"/>
+              </a:rPr>
+              <a:t>3)</a:t>
+            </a:r>
+            <a:r>
+              <a:rPr lang="en-GB" sz="1000" dirty="0">
+                <a:cs typeface="Calibri"/>
+              </a:rPr>
+              <a:t>  Decision Tree: Recall = 0.899, AUC = 0.940. </a:t>
+            </a:r>
+          </a:p>
+          <a:p>
+            <a:pPr>
+              <a:tabLst>
+                <a:tab pos="219075" algn="l"/>
+              </a:tabLst>
+            </a:pPr>
+            <a:r>
+              <a:rPr lang="en-GB" sz="1000" i="1" dirty="0"/>
+              <a:t>Overall, Feature Selection reduced dimensionality, training time, model complexity, removed noise and improved model performance. </a:t>
+            </a:r>
+          </a:p>
+          <a:p>
+            <a:pPr>
+              <a:tabLst>
+                <a:tab pos="219075" algn="l"/>
+              </a:tabLst>
+            </a:pPr>
+            <a:r>
+              <a:rPr lang="en-GB" sz="1000" b="1" dirty="0"/>
+              <a:t>Considering all 5-fold cross-validation evaluation metrics, Logistic Regression was selected as the final model, as it achieved the best overall performance. </a:t>
+            </a:r>
+          </a:p>
+          <a:p>
+            <a:pPr>
+              <a:tabLst>
+                <a:tab pos="219075" algn="l"/>
+              </a:tabLst>
+            </a:pPr>
+            <a:r>
+              <a:rPr lang="en-GB" sz="1000" b="1" dirty="0">
+                <a:highlight>
+                  <a:srgbClr val="00FFFF"/>
+                </a:highlight>
+              </a:rPr>
+              <a:t> 7.  Test Data Preparation</a:t>
+            </a:r>
+            <a:r>
+              <a:rPr lang="en-GB" sz="1000" dirty="0"/>
+              <a:t>  The test data was transformed using the same encoding and normalisation parameters derived from the training data. </a:t>
+            </a:r>
+          </a:p>
+          <a:p>
+            <a:pPr>
+              <a:tabLst>
+                <a:tab pos="219075" algn="l"/>
+              </a:tabLst>
+            </a:pPr>
+            <a:r>
+              <a:rPr lang="en-GB" sz="1000" b="1" dirty="0">
+                <a:highlight>
+                  <a:srgbClr val="00FFFF"/>
+                </a:highlight>
+              </a:rPr>
+              <a:t> 8.  Final Model Evaluation</a:t>
+            </a:r>
+            <a:r>
+              <a:rPr lang="en-GB" sz="1000" dirty="0"/>
+              <a:t>  </a:t>
+            </a:r>
+            <a:r>
+              <a:rPr lang="en-GB" sz="1000" b="1" dirty="0"/>
+              <a:t>The Logistic Regression model was evaluated on unseen test data, achieving </a:t>
+            </a:r>
+            <a:r>
+              <a:rPr lang="en-GB" sz="1000" b="1" dirty="0">
+                <a:ea typeface="Calibri"/>
+                <a:cs typeface="Calibri"/>
+              </a:rPr>
+              <a:t>Recall = 0.925 and AUC = 0.958. </a:t>
+            </a:r>
+          </a:p>
+          <a:p>
+            <a:pPr>
+              <a:tabLst>
+                <a:tab pos="219075" algn="l"/>
+              </a:tabLst>
+            </a:pPr>
+            <a:r>
+              <a:rPr lang="en-GB" sz="1000" b="1" i="1" dirty="0"/>
+              <a:t>It is important to note that the Recall of the model can be further increased by adjusting the classification threshold. </a:t>
+            </a:r>
+            <a:r>
+              <a:rPr lang="en-GB" sz="1000" i="1" dirty="0"/>
+              <a:t>The current threshold is set to 0.5; however, the ROC curve suggests that a more suitable threshold for this problem is approximately 0.34. Lowering the threshold would make the model more sensitive to failure, reducing false negatives at the cost of increasing false positives. This trade-off may be acceptable in this task, where missing a failure is more critical than generating false alarms. </a:t>
+            </a:r>
+          </a:p>
+        </p:txBody>
+      </p:sp>
+      <p:sp>
+        <p:nvSpPr>
+          <p:cNvPr id="8" name="TextBox 7">
+            <a:extLst>
+              <a:ext uri="{FF2B5EF4-FFF2-40B4-BE49-F238E27FC236}">
+                <a16:creationId xmlns:a16="http://schemas.microsoft.com/office/drawing/2014/main" id="{53F18AD2-7D7C-86A1-617F-5ED4C88C525F}"/>
+              </a:ext>
+            </a:extLst>
+          </p:cNvPr>
+          <p:cNvSpPr txBox="1"/>
+          <p:nvPr/>
+        </p:nvSpPr>
+        <p:spPr>
+          <a:xfrm>
+            <a:off x="254001" y="101433"/>
+            <a:ext cx="8838682" cy="338554"/>
+          </a:xfrm>
+          <a:prstGeom prst="rect">
+            <a:avLst/>
+          </a:prstGeom>
+          <a:noFill/>
+        </p:spPr>
+        <p:txBody>
+          <a:bodyPr wrap="square" lIns="91440" tIns="45720" rIns="91440" bIns="45720" rtlCol="0" anchor="t">
+            <a:spAutoFit/>
+          </a:bodyPr>
+          <a:lstStyle/>
+          <a:p>
+            <a:r>
+              <a:rPr lang="en-GB" sz="1600" dirty="0"/>
+              <a:t>ITNPBD6 Assignment 1. Student Number </a:t>
+            </a:r>
+            <a:r>
+              <a:rPr lang="en-GB" sz="1600" b="1" dirty="0"/>
+              <a:t>3461226</a:t>
+            </a:r>
+            <a:endParaRPr lang="en-GB" sz="1600" b="1" dirty="0">
+              <a:ea typeface="Calibri" panose="020F0502020204030204"/>
+              <a:cs typeface="Calibri" panose="020F0502020204030204"/>
+            </a:endParaRPr>
+          </a:p>
+        </p:txBody>
+      </p:sp>
+      <p:sp>
+        <p:nvSpPr>
+          <p:cNvPr id="41" name="TextBox 40">
+            <a:extLst>
+              <a:ext uri="{FF2B5EF4-FFF2-40B4-BE49-F238E27FC236}">
+                <a16:creationId xmlns:a16="http://schemas.microsoft.com/office/drawing/2014/main" id="{F9B60668-076E-2F06-A72F-39EA64A2B359}"/>
+              </a:ext>
+            </a:extLst>
+          </p:cNvPr>
+          <p:cNvSpPr txBox="1"/>
+          <p:nvPr/>
+        </p:nvSpPr>
+        <p:spPr>
+          <a:xfrm>
+            <a:off x="358005" y="5969464"/>
+            <a:ext cx="6408000" cy="1404000"/>
+          </a:xfrm>
+          <a:prstGeom prst="rect">
+            <a:avLst/>
+          </a:prstGeom>
+          <a:noFill/>
+          <a:ln w="38100">
+            <a:solidFill>
+              <a:schemeClr val="accent1">
+                <a:lumMod val="60000"/>
+                <a:lumOff val="40000"/>
+              </a:schemeClr>
+            </a:solidFill>
+          </a:ln>
+        </p:spPr>
+        <p:txBody>
+          <a:bodyPr wrap="square" lIns="91440" tIns="45720" rIns="91440" bIns="45720" anchor="t">
+            <a:spAutoFit/>
+          </a:bodyPr>
+          <a:lstStyle/>
           <a:p>
             <a:pPr marL="0" marR="0" lvl="0" indent="0" algn="l" defTabSz="1706910" rtl="0" eaLnBrk="1" fontAlgn="auto" latinLnBrk="0" hangingPunct="1">
               <a:lnSpc>
@@ -3451,37 +5864,276 @@
               <a:defRPr/>
             </a:pPr>
             <a:r>
-              <a:rPr kumimoji="0" lang="en-US" sz="1000" b="0" i="0" u="none" strike="noStrike" kern="1200" cap="none" spc="0" normalizeH="0" baseline="0" noProof="0" dirty="0">
-                <a:ln>
-                  <a:noFill/>
-                </a:ln>
+              <a:rPr lang="en-GB" sz="1600" dirty="0"/>
+              <a:t>3. Variables</a:t>
+            </a:r>
+            <a:endParaRPr lang="en-GB" sz="1600" dirty="0">
+              <a:ea typeface="Calibri"/>
+              <a:cs typeface="Calibri"/>
+            </a:endParaRPr>
+          </a:p>
+          <a:p>
+            <a:pPr lvl="0" defTabSz="1706910">
+              <a:defRPr/>
+            </a:pPr>
+            <a:r>
+              <a:rPr lang="en-GB" sz="1000" dirty="0">
+                <a:ea typeface="Calibri"/>
+                <a:cs typeface="Calibri"/>
+              </a:rPr>
+              <a:t>Almost all input variables are </a:t>
+            </a:r>
+            <a:r>
+              <a:rPr lang="en-GB" sz="1000" b="1" dirty="0">
+                <a:ea typeface="Calibri"/>
+                <a:cs typeface="Calibri"/>
+              </a:rPr>
+              <a:t>continuous numeric features</a:t>
+            </a:r>
+            <a:r>
+              <a:rPr lang="en-GB" sz="1000" dirty="0">
+                <a:ea typeface="Calibri"/>
+                <a:cs typeface="Calibri"/>
+              </a:rPr>
+              <a:t>; only two variables (</a:t>
+            </a:r>
+            <a:r>
+              <a:rPr lang="en-GB" sz="1000" dirty="0" err="1">
+                <a:ea typeface="Calibri"/>
+                <a:cs typeface="Calibri"/>
+              </a:rPr>
+              <a:t>inspection_season</a:t>
+            </a:r>
+            <a:r>
+              <a:rPr lang="en-GB" sz="1000" dirty="0">
+                <a:ea typeface="Calibri"/>
+                <a:cs typeface="Calibri"/>
+              </a:rPr>
+              <a:t>, </a:t>
+            </a:r>
+            <a:r>
+              <a:rPr lang="en-GB" sz="1000" dirty="0" err="1">
+                <a:ea typeface="Calibri"/>
+                <a:cs typeface="Calibri"/>
+              </a:rPr>
+              <a:t>inspection_window</a:t>
+            </a:r>
+            <a:r>
+              <a:rPr lang="en-GB" sz="1000" dirty="0">
+                <a:ea typeface="Calibri"/>
+                <a:cs typeface="Calibri"/>
+              </a:rPr>
+              <a:t>) are </a:t>
+            </a:r>
+            <a:r>
+              <a:rPr lang="en-GB" sz="1000" b="1" dirty="0">
+                <a:ea typeface="Calibri"/>
+                <a:cs typeface="Calibri"/>
+              </a:rPr>
+              <a:t>categorical</a:t>
+            </a:r>
+            <a:r>
+              <a:rPr lang="en-GB" sz="1000" dirty="0">
+                <a:ea typeface="Calibri"/>
+                <a:cs typeface="Calibri"/>
+              </a:rPr>
+              <a:t> and were encoded using one-hot encoding for Logistic Regression and Neural Network models. Additionally, there is one </a:t>
+            </a:r>
+            <a:r>
+              <a:rPr lang="en-GB" sz="1000" b="1" dirty="0">
+                <a:ea typeface="Calibri"/>
+                <a:cs typeface="Calibri"/>
+              </a:rPr>
+              <a:t>discrete numerical </a:t>
+            </a:r>
+            <a:r>
+              <a:rPr lang="en-GB" sz="1000" dirty="0">
+                <a:ea typeface="Calibri"/>
+                <a:cs typeface="Calibri"/>
+              </a:rPr>
+              <a:t>variable – </a:t>
+            </a:r>
+            <a:r>
+              <a:rPr lang="en-GB" sz="1000" dirty="0" err="1">
+                <a:ea typeface="Calibri"/>
+                <a:cs typeface="Calibri"/>
+              </a:rPr>
+              <a:t>inspector_id</a:t>
+            </a:r>
+            <a:r>
+              <a:rPr lang="en-GB" sz="1000" dirty="0">
+                <a:ea typeface="Calibri"/>
+                <a:cs typeface="Calibri"/>
+              </a:rPr>
+              <a:t>, - which identifies an inspector and has almost nothing to do with failure. This variable adds unnecessary dimension to the model, increase its complexity, and introduces more noise. Thus, it was removed from the dataset. </a:t>
+            </a:r>
+            <a:r>
+              <a:rPr lang="en-GB" sz="1000" b="1" dirty="0">
                 <a:solidFill>
                   <a:prstClr val="black"/>
                 </a:solidFill>
-                <a:effectLst/>
-                <a:uLnTx/>
-                <a:uFillTx/>
                 <a:latin typeface="Calibri" panose="020F0502020204030204"/>
-                <a:ea typeface="+mn-ea"/>
-                <a:cs typeface="+mn-cs"/>
-              </a:rPr>
-              <a:t>A table showing the different models and hyper parameters you trained, along with the correct metric for each; Add a sentence on how you chose the hyper parameter values. Make sure you name the metric correctly.</a:t>
-            </a:r>
-            <a:endParaRPr lang="en-US" sz="1000" b="0" i="0" u="none" strike="noStrike" kern="1200" cap="none" spc="0" normalizeH="0" baseline="0" noProof="0" dirty="0">
-              <a:ln>
-                <a:noFill/>
-              </a:ln>
+                <a:cs typeface="Calibri"/>
+              </a:rPr>
+              <a:t>During </a:t>
+            </a:r>
+            <a:r>
+              <a:rPr lang="en-GB" sz="1000" b="1" dirty="0"/>
+              <a:t>the Feature Selection stage</a:t>
+            </a:r>
+            <a:r>
+              <a:rPr lang="en-GB" sz="1000" dirty="0"/>
+              <a:t>, </a:t>
+            </a:r>
+            <a:r>
+              <a:rPr lang="en-GB" sz="1000" dirty="0" err="1"/>
+              <a:t>inspection_window</a:t>
+            </a:r>
+            <a:r>
+              <a:rPr lang="en-GB" sz="1000" dirty="0"/>
+              <a:t>, </a:t>
+            </a:r>
+            <a:r>
+              <a:rPr lang="en-GB" sz="1000" dirty="0" err="1"/>
+              <a:t>inspection_season</a:t>
+            </a:r>
+            <a:r>
+              <a:rPr lang="en-GB" sz="1000" dirty="0"/>
+              <a:t>=autumn/spring, and </a:t>
+            </a:r>
+            <a:r>
+              <a:rPr lang="en-GB" sz="1000" dirty="0" err="1"/>
+              <a:t>vibration_exposure</a:t>
+            </a:r>
+            <a:r>
+              <a:rPr lang="en-GB" sz="1000" dirty="0"/>
+              <a:t> were deleted due to their very low predictive value. </a:t>
+            </a:r>
+            <a:r>
+              <a:rPr lang="en-GB" sz="1000" i="1" dirty="0"/>
+              <a:t>This improved model performance by reducing dimensionality, model complexity and noise.</a:t>
+            </a:r>
+            <a:endParaRPr lang="en-GB" sz="1000" i="1" dirty="0">
               <a:solidFill>
                 <a:prstClr val="black"/>
               </a:solidFill>
-              <a:effectLst/>
-              <a:uLnTx/>
-              <a:uFillTx/>
               <a:latin typeface="Calibri" panose="020F0502020204030204"/>
-              <a:ea typeface="Calibri"/>
               <a:cs typeface="Calibri"/>
             </a:endParaRPr>
           </a:p>
+        </p:txBody>
+      </p:sp>
+      <p:sp>
+        <p:nvSpPr>
+          <p:cNvPr id="51" name="TextBox 1">
+            <a:extLst>
+              <a:ext uri="{FF2B5EF4-FFF2-40B4-BE49-F238E27FC236}">
+                <a16:creationId xmlns:a16="http://schemas.microsoft.com/office/drawing/2014/main" id="{B75CB895-B4E6-608C-D56A-6BEF8D43169D}"/>
+              </a:ext>
+            </a:extLst>
+          </p:cNvPr>
+          <p:cNvSpPr txBox="1"/>
+          <p:nvPr/>
+        </p:nvSpPr>
+        <p:spPr>
+          <a:xfrm>
+            <a:off x="358006" y="7432929"/>
+            <a:ext cx="6396299" cy="3131999"/>
+          </a:xfrm>
+          <a:prstGeom prst="rect">
+            <a:avLst/>
+          </a:prstGeom>
+          <a:noFill/>
+          <a:ln w="38100">
+            <a:solidFill>
+              <a:schemeClr val="accent1">
+                <a:lumMod val="60000"/>
+                <a:lumOff val="40000"/>
+              </a:schemeClr>
+            </a:solidFill>
+          </a:ln>
+        </p:spPr>
+        <p:style>
+          <a:lnRef idx="0">
+            <a:scrgbClr r="0" g="0" b="0"/>
+          </a:lnRef>
+          <a:fillRef idx="0">
+            <a:scrgbClr r="0" g="0" b="0"/>
+          </a:fillRef>
+          <a:effectRef idx="0">
+            <a:scrgbClr r="0" g="0" b="0"/>
+          </a:effectRef>
+          <a:fontRef idx="major"/>
+        </p:style>
+        <p:txBody>
+          <a:bodyPr wrap="square" lIns="91440" tIns="45720" rIns="91440" bIns="45720" anchor="t">
+            <a:spAutoFit/>
+          </a:bodyPr>
+          <a:lstStyle>
+            <a:lvl1pPr>
+              <a:defRPr>
+                <a:latin typeface="+mj-lt"/>
+                <a:ea typeface="+mj-ea"/>
+                <a:cs typeface="+mj-cs"/>
+              </a:defRPr>
+            </a:lvl1pPr>
+            <a:lvl2pPr>
+              <a:defRPr>
+                <a:latin typeface="+mj-lt"/>
+                <a:ea typeface="+mj-ea"/>
+                <a:cs typeface="+mj-cs"/>
+              </a:defRPr>
+            </a:lvl2pPr>
+            <a:lvl3pPr>
+              <a:defRPr>
+                <a:latin typeface="+mj-lt"/>
+                <a:ea typeface="+mj-ea"/>
+                <a:cs typeface="+mj-cs"/>
+              </a:defRPr>
+            </a:lvl3pPr>
+            <a:lvl4pPr>
+              <a:defRPr>
+                <a:latin typeface="+mj-lt"/>
+                <a:ea typeface="+mj-ea"/>
+                <a:cs typeface="+mj-cs"/>
+              </a:defRPr>
+            </a:lvl4pPr>
+            <a:lvl5pPr>
+              <a:defRPr>
+                <a:latin typeface="+mj-lt"/>
+                <a:ea typeface="+mj-ea"/>
+                <a:cs typeface="+mj-cs"/>
+              </a:defRPr>
+            </a:lvl5pPr>
+            <a:lvl6pPr>
+              <a:defRPr>
+                <a:latin typeface="+mj-lt"/>
+                <a:ea typeface="+mj-ea"/>
+                <a:cs typeface="+mj-cs"/>
+              </a:defRPr>
+            </a:lvl6pPr>
+            <a:lvl7pPr>
+              <a:defRPr>
+                <a:latin typeface="+mj-lt"/>
+                <a:ea typeface="+mj-ea"/>
+                <a:cs typeface="+mj-cs"/>
+              </a:defRPr>
+            </a:lvl7pPr>
+            <a:lvl8pPr>
+              <a:defRPr>
+                <a:latin typeface="+mj-lt"/>
+                <a:ea typeface="+mj-ea"/>
+                <a:cs typeface="+mj-cs"/>
+              </a:defRPr>
+            </a:lvl8pPr>
+            <a:lvl9pPr>
+              <a:defRPr>
+                <a:latin typeface="+mj-lt"/>
+                <a:ea typeface="+mj-ea"/>
+                <a:cs typeface="+mj-cs"/>
+              </a:defRPr>
+            </a:lvl9pPr>
+          </a:lstStyle>
           <a:p>
             <a:pPr marL="0" marR="0" lvl="0" indent="0" algn="l" defTabSz="1706910" rtl="0" eaLnBrk="1" fontAlgn="auto" latinLnBrk="0" hangingPunct="1">
               <a:lnSpc>
@@ -3498,6 +6150,131 @@
               <a:buFontTx/>
               <a:buNone/>
               <a:tabLst/>
+              <a:defRPr/>
+            </a:pPr>
+            <a:r>
+              <a:rPr kumimoji="0" lang="en-GB" sz="1600" b="0" i="0" u="none" strike="noStrike" kern="1200" cap="none" spc="0" normalizeH="0" baseline="0" noProof="0" dirty="0">
+                <a:ln>
+                  <a:noFill/>
+                </a:ln>
+                <a:solidFill>
+                  <a:prstClr val="black"/>
+                </a:solidFill>
+                <a:effectLst/>
+                <a:uLnTx/>
+                <a:uFillTx/>
+                <a:latin typeface="Calibri" panose="020F0502020204030204"/>
+                <a:ea typeface="+mn-ea"/>
+                <a:cs typeface="+mn-cs"/>
+              </a:rPr>
+              <a:t>5. Model Training and Hyperparameters</a:t>
+            </a:r>
+            <a:endParaRPr lang="en-GB" sz="1600" b="0" i="0" u="none" strike="noStrike" kern="1200" cap="none" spc="0" normalizeH="0" baseline="0" noProof="0" dirty="0">
+              <a:ln>
+                <a:noFill/>
+              </a:ln>
+              <a:solidFill>
+                <a:prstClr val="black"/>
+              </a:solidFill>
+              <a:effectLst/>
+              <a:uLnTx/>
+              <a:uFillTx/>
+              <a:latin typeface="Calibri" panose="020F0502020204030204"/>
+              <a:ea typeface="Calibri"/>
+              <a:cs typeface="Calibri"/>
+            </a:endParaRPr>
+          </a:p>
+          <a:p>
+            <a:pPr lvl="0" defTabSz="1706910">
+              <a:defRPr/>
+            </a:pPr>
+            <a:r>
+              <a:rPr lang="en-GB" sz="1000" dirty="0">
+                <a:latin typeface="+mn-lt"/>
+                <a:ea typeface="Calibri"/>
+                <a:cs typeface="Calibri"/>
+              </a:rPr>
+              <a:t>A number of models were built using different hyperparameter settings. A</a:t>
+            </a:r>
+            <a:r>
+              <a:rPr lang="ru-RU" sz="1000" dirty="0">
+                <a:latin typeface="+mn-lt"/>
+                <a:ea typeface="Calibri"/>
+                <a:cs typeface="Calibri"/>
+              </a:rPr>
+              <a:t> </a:t>
+            </a:r>
+            <a:r>
+              <a:rPr lang="en-GB" sz="1000" dirty="0">
+                <a:latin typeface="+mn-lt"/>
+                <a:ea typeface="Calibri"/>
+                <a:cs typeface="Calibri"/>
+              </a:rPr>
+              <a:t>systematic approach was applied, where only one hyperparameter was varied at a time. Each model was evaluated using 5-fold cross-validation. The optimal hyper parameter configuration was selected based on maximising Recall, with AUC used as a secondary performance metric.</a:t>
+            </a:r>
+          </a:p>
+          <a:p>
+            <a:pPr lvl="0" defTabSz="1706910">
+              <a:defRPr/>
+            </a:pPr>
+            <a:endParaRPr lang="en-GB" sz="1000" dirty="0">
+              <a:solidFill>
+                <a:prstClr val="black"/>
+              </a:solidFill>
+              <a:latin typeface="+mn-lt"/>
+              <a:cs typeface="Calibri"/>
+            </a:endParaRPr>
+          </a:p>
+          <a:p>
+            <a:pPr lvl="0" defTabSz="1706910">
+              <a:defRPr/>
+            </a:pPr>
+            <a:endParaRPr lang="en-GB" sz="1000" dirty="0">
+              <a:solidFill>
+                <a:prstClr val="black"/>
+              </a:solidFill>
+              <a:latin typeface="+mn-lt"/>
+              <a:cs typeface="Calibri"/>
+            </a:endParaRPr>
+          </a:p>
+          <a:p>
+            <a:pPr lvl="0" defTabSz="1706910">
+              <a:defRPr/>
+            </a:pPr>
+            <a:endParaRPr lang="en-GB" sz="1000" dirty="0">
+              <a:solidFill>
+                <a:prstClr val="black"/>
+              </a:solidFill>
+              <a:latin typeface="Calibri" panose="020F0502020204030204"/>
+              <a:cs typeface="Calibri"/>
+            </a:endParaRPr>
+          </a:p>
+          <a:p>
+            <a:pPr lvl="0" defTabSz="1706910">
+              <a:defRPr/>
+            </a:pPr>
+            <a:endParaRPr lang="en-GB" sz="1000" dirty="0">
+              <a:solidFill>
+                <a:prstClr val="black"/>
+              </a:solidFill>
+              <a:latin typeface="Calibri" panose="020F0502020204030204"/>
+              <a:cs typeface="Calibri"/>
+            </a:endParaRPr>
+          </a:p>
+          <a:p>
+            <a:pPr lvl="0" defTabSz="1706910">
+              <a:defRPr/>
+            </a:pPr>
+            <a:endParaRPr lang="en-GB" sz="1000" dirty="0">
+              <a:solidFill>
+                <a:prstClr val="black"/>
+              </a:solidFill>
+              <a:latin typeface="Calibri" panose="020F0502020204030204"/>
+              <a:cs typeface="Calibri"/>
+            </a:endParaRPr>
+          </a:p>
+          <a:p>
+            <a:pPr lvl="0" defTabSz="1706910">
               <a:defRPr/>
             </a:pPr>
             <a:endParaRPr lang="en-US" sz="1200" dirty="0">
@@ -3716,416 +6493,12 @@
           </a:p>
         </p:txBody>
       </p:sp>
-      <p:sp>
-        <p:nvSpPr>
-          <p:cNvPr id="20" name="TextBox 19">
+      <p:graphicFrame>
+        <p:nvGraphicFramePr>
+          <p:cNvPr id="53" name="Table 7">
             <a:extLst>
               <a:ext uri="{FF2B5EF4-FFF2-40B4-BE49-F238E27FC236}">
-                <a16:creationId xmlns:a16="http://schemas.microsoft.com/office/drawing/2014/main" id="{5F922132-ED33-E59C-B714-DBB27B5DF6F8}"/>
-              </a:ext>
-            </a:extLst>
-          </p:cNvPr>
-          <p:cNvSpPr txBox="1"/>
-          <p:nvPr/>
-        </p:nvSpPr>
-        <p:spPr>
-          <a:xfrm>
-            <a:off x="4882289" y="8816780"/>
-            <a:ext cx="4424602" cy="2015936"/>
-          </a:xfrm>
-          <a:prstGeom prst="rect">
-            <a:avLst/>
-          </a:prstGeom>
-          <a:noFill/>
-          <a:ln w="38100">
-            <a:solidFill>
-              <a:schemeClr val="accent1">
-                <a:lumMod val="60000"/>
-                <a:lumOff val="40000"/>
-              </a:schemeClr>
-            </a:solidFill>
-          </a:ln>
-        </p:spPr>
-        <p:txBody>
-          <a:bodyPr wrap="square" lIns="91440" tIns="45720" rIns="91440" bIns="45720" anchor="t">
-            <a:spAutoFit/>
-          </a:bodyPr>
-          <a:lstStyle/>
-          <a:p>
-            <a:pPr marL="0" marR="0" lvl="0" indent="0" algn="l" defTabSz="1706910" rtl="0" eaLnBrk="1" fontAlgn="auto" latinLnBrk="0" hangingPunct="1">
-              <a:lnSpc>
-                <a:spcPct val="100000"/>
-              </a:lnSpc>
-              <a:spcBef>
-                <a:spcPts val="0"/>
-              </a:spcBef>
-              <a:spcAft>
-                <a:spcPts val="0"/>
-              </a:spcAft>
-              <a:buClrTx/>
-              <a:buSzTx/>
-              <a:buFontTx/>
-              <a:buNone/>
-              <a:tabLst/>
-              <a:defRPr/>
-            </a:pPr>
-            <a:r>
-              <a:rPr kumimoji="0" lang="en-GB" sz="2000" b="0" i="0" u="none" strike="noStrike" kern="1200" cap="none" spc="0" normalizeH="0" baseline="0" noProof="0" dirty="0">
-                <a:ln>
-                  <a:noFill/>
-                </a:ln>
-                <a:solidFill>
-                  <a:prstClr val="black"/>
-                </a:solidFill>
-                <a:effectLst/>
-                <a:uLnTx/>
-                <a:uFillTx/>
-                <a:latin typeface="Calibri" panose="020F0502020204030204"/>
-                <a:ea typeface="+mn-ea"/>
-                <a:cs typeface="+mn-cs"/>
-              </a:rPr>
-              <a:t>6. Final Model and Results</a:t>
-            </a:r>
-          </a:p>
-          <a:p>
-            <a:pPr marL="0" marR="0" lvl="0" indent="0" algn="l" defTabSz="1706910" rtl="0" eaLnBrk="1" fontAlgn="auto" latinLnBrk="0" hangingPunct="1">
-              <a:lnSpc>
-                <a:spcPct val="100000"/>
-              </a:lnSpc>
-              <a:spcBef>
-                <a:spcPts val="0"/>
-              </a:spcBef>
-              <a:spcAft>
-                <a:spcPts val="0"/>
-              </a:spcAft>
-              <a:buClrTx/>
-              <a:buSzTx/>
-              <a:buFontTx/>
-              <a:buNone/>
-              <a:tabLst/>
-              <a:defRPr/>
-            </a:pPr>
-            <a:r>
-              <a:rPr kumimoji="0" lang="en-GB" sz="1050" b="0" i="0" u="none" strike="noStrike" kern="1200" cap="none" spc="0" normalizeH="0" baseline="0" noProof="0" dirty="0">
-                <a:ln>
-                  <a:noFill/>
-                </a:ln>
-                <a:solidFill>
-                  <a:prstClr val="black"/>
-                </a:solidFill>
-                <a:effectLst/>
-                <a:uLnTx/>
-                <a:uFillTx/>
-                <a:latin typeface="Calibri" panose="020F0502020204030204"/>
-                <a:ea typeface="+mn-ea"/>
-                <a:cs typeface="+mn-cs"/>
-              </a:rPr>
-              <a:t>Say how you chose the final model to test, and how you trained that model.</a:t>
-            </a:r>
-            <a:endParaRPr lang="en-GB" sz="1050" b="0" i="0" u="none" strike="noStrike" kern="1200" cap="none" spc="0" normalizeH="0" baseline="0" noProof="0" dirty="0">
-              <a:ln>
-                <a:noFill/>
-              </a:ln>
-              <a:solidFill>
-                <a:prstClr val="black"/>
-              </a:solidFill>
-              <a:effectLst/>
-              <a:uLnTx/>
-              <a:uFillTx/>
-              <a:latin typeface="Calibri" panose="020F0502020204030204"/>
-              <a:ea typeface="Calibri"/>
-              <a:cs typeface="Calibri"/>
-            </a:endParaRPr>
-          </a:p>
-          <a:p>
-            <a:pPr marL="0" marR="0" lvl="0" indent="0" algn="l" defTabSz="1706910" rtl="0" eaLnBrk="1" fontAlgn="auto" latinLnBrk="0" hangingPunct="1">
-              <a:lnSpc>
-                <a:spcPct val="100000"/>
-              </a:lnSpc>
-              <a:spcBef>
-                <a:spcPts val="0"/>
-              </a:spcBef>
-              <a:spcAft>
-                <a:spcPts val="0"/>
-              </a:spcAft>
-              <a:buClrTx/>
-              <a:buSzTx/>
-              <a:buFontTx/>
-              <a:buNone/>
-              <a:tabLst/>
-              <a:defRPr/>
-            </a:pPr>
-            <a:r>
-              <a:rPr kumimoji="0" lang="en-GB" sz="1050" b="0" i="0" u="none" strike="noStrike" kern="1200" cap="none" spc="0" normalizeH="0" baseline="0" noProof="0" dirty="0">
-                <a:ln>
-                  <a:noFill/>
-                </a:ln>
-                <a:solidFill>
-                  <a:prstClr val="black"/>
-                </a:solidFill>
-                <a:effectLst/>
-                <a:uLnTx/>
-                <a:uFillTx/>
-                <a:latin typeface="Calibri" panose="020F0502020204030204"/>
-                <a:ea typeface="+mn-ea"/>
-                <a:cs typeface="+mn-cs"/>
-              </a:rPr>
-              <a:t>Put the confusion matrix here</a:t>
-            </a:r>
-            <a:endParaRPr lang="en-GB" sz="1050" b="0" i="0" u="none" strike="noStrike" kern="1200" cap="none" spc="0" normalizeH="0" baseline="0" noProof="0" dirty="0">
-              <a:ln>
-                <a:noFill/>
-              </a:ln>
-              <a:solidFill>
-                <a:prstClr val="black"/>
-              </a:solidFill>
-              <a:effectLst/>
-              <a:uLnTx/>
-              <a:uFillTx/>
-              <a:latin typeface="Calibri" panose="020F0502020204030204"/>
-              <a:ea typeface="Calibri"/>
-              <a:cs typeface="Calibri"/>
-            </a:endParaRPr>
-          </a:p>
-          <a:p>
-            <a:pPr marL="0" marR="0" lvl="0" indent="0" algn="l" defTabSz="1706910" rtl="0" eaLnBrk="1" fontAlgn="auto" latinLnBrk="0" hangingPunct="1">
-              <a:lnSpc>
-                <a:spcPct val="100000"/>
-              </a:lnSpc>
-              <a:spcBef>
-                <a:spcPts val="0"/>
-              </a:spcBef>
-              <a:spcAft>
-                <a:spcPts val="0"/>
-              </a:spcAft>
-              <a:buClrTx/>
-              <a:buSzTx/>
-              <a:buFontTx/>
-              <a:buNone/>
-              <a:tabLst/>
-              <a:defRPr/>
-            </a:pPr>
-            <a:endParaRPr kumimoji="0" lang="en-GB" sz="1200" b="0" i="0" u="none" strike="noStrike" kern="1200" cap="none" spc="0" normalizeH="0" baseline="0" noProof="0" dirty="0">
-              <a:ln>
-                <a:noFill/>
-              </a:ln>
-              <a:solidFill>
-                <a:prstClr val="black"/>
-              </a:solidFill>
-              <a:effectLst/>
-              <a:uLnTx/>
-              <a:uFillTx/>
-              <a:latin typeface="Calibri" panose="020F0502020204030204"/>
-              <a:ea typeface="+mn-ea"/>
-              <a:cs typeface="+mn-cs"/>
-            </a:endParaRPr>
-          </a:p>
-          <a:p>
-            <a:pPr marL="0" marR="0" lvl="0" indent="0" algn="l" defTabSz="1706910" rtl="0" eaLnBrk="1" fontAlgn="auto" latinLnBrk="0" hangingPunct="1">
-              <a:lnSpc>
-                <a:spcPct val="100000"/>
-              </a:lnSpc>
-              <a:spcBef>
-                <a:spcPts val="0"/>
-              </a:spcBef>
-              <a:spcAft>
-                <a:spcPts val="0"/>
-              </a:spcAft>
-              <a:buClrTx/>
-              <a:buSzTx/>
-              <a:buFontTx/>
-              <a:buNone/>
-              <a:tabLst/>
-              <a:defRPr/>
-            </a:pPr>
-            <a:endParaRPr kumimoji="0" lang="en-GB" sz="1200" b="0" i="0" u="none" strike="noStrike" kern="1200" cap="none" spc="0" normalizeH="0" baseline="0" noProof="0" dirty="0">
-              <a:ln>
-                <a:noFill/>
-              </a:ln>
-              <a:solidFill>
-                <a:prstClr val="black"/>
-              </a:solidFill>
-              <a:effectLst/>
-              <a:uLnTx/>
-              <a:uFillTx/>
-              <a:latin typeface="Calibri" panose="020F0502020204030204"/>
-              <a:ea typeface="+mn-ea"/>
-              <a:cs typeface="+mn-cs"/>
-            </a:endParaRPr>
-          </a:p>
-          <a:p>
-            <a:pPr marL="0" marR="0" lvl="0" indent="0" algn="l" defTabSz="1706910" rtl="0" eaLnBrk="1" fontAlgn="auto" latinLnBrk="0" hangingPunct="1">
-              <a:lnSpc>
-                <a:spcPct val="100000"/>
-              </a:lnSpc>
-              <a:spcBef>
-                <a:spcPts val="0"/>
-              </a:spcBef>
-              <a:spcAft>
-                <a:spcPts val="0"/>
-              </a:spcAft>
-              <a:buClrTx/>
-              <a:buSzTx/>
-              <a:buFontTx/>
-              <a:buNone/>
-              <a:tabLst/>
-              <a:defRPr/>
-            </a:pPr>
-            <a:endParaRPr kumimoji="0" lang="en-GB" sz="1200" b="0" i="0" u="none" strike="noStrike" kern="1200" cap="none" spc="0" normalizeH="0" baseline="0" noProof="0" dirty="0">
-              <a:ln>
-                <a:noFill/>
-              </a:ln>
-              <a:solidFill>
-                <a:prstClr val="black"/>
-              </a:solidFill>
-              <a:effectLst/>
-              <a:uLnTx/>
-              <a:uFillTx/>
-              <a:latin typeface="Calibri" panose="020F0502020204030204"/>
-              <a:ea typeface="+mn-ea"/>
-              <a:cs typeface="+mn-cs"/>
-            </a:endParaRPr>
-          </a:p>
-          <a:p>
-            <a:pPr marL="0" marR="0" lvl="0" indent="0" algn="l" defTabSz="1706910" rtl="0" eaLnBrk="1" fontAlgn="auto" latinLnBrk="0" hangingPunct="1">
-              <a:lnSpc>
-                <a:spcPct val="100000"/>
-              </a:lnSpc>
-              <a:spcBef>
-                <a:spcPts val="0"/>
-              </a:spcBef>
-              <a:spcAft>
-                <a:spcPts val="0"/>
-              </a:spcAft>
-              <a:buClrTx/>
-              <a:buSzTx/>
-              <a:buFontTx/>
-              <a:buNone/>
-              <a:tabLst/>
-              <a:defRPr/>
-            </a:pPr>
-            <a:endParaRPr kumimoji="0" lang="en-GB" sz="1200" b="0" i="0" u="none" strike="noStrike" kern="1200" cap="none" spc="0" normalizeH="0" baseline="0" noProof="0" dirty="0">
-              <a:ln>
-                <a:noFill/>
-              </a:ln>
-              <a:solidFill>
-                <a:prstClr val="black"/>
-              </a:solidFill>
-              <a:effectLst/>
-              <a:uLnTx/>
-              <a:uFillTx/>
-              <a:latin typeface="Calibri" panose="020F0502020204030204"/>
-              <a:ea typeface="+mn-ea"/>
-              <a:cs typeface="+mn-cs"/>
-            </a:endParaRPr>
-          </a:p>
-          <a:p>
-            <a:pPr marL="0" marR="0" lvl="0" indent="0" algn="l" defTabSz="1706910" rtl="0" eaLnBrk="1" fontAlgn="auto" latinLnBrk="0" hangingPunct="1">
-              <a:lnSpc>
-                <a:spcPct val="100000"/>
-              </a:lnSpc>
-              <a:spcBef>
-                <a:spcPts val="0"/>
-              </a:spcBef>
-              <a:spcAft>
-                <a:spcPts val="0"/>
-              </a:spcAft>
-              <a:buClrTx/>
-              <a:buSzTx/>
-              <a:buFontTx/>
-              <a:buNone/>
-              <a:tabLst/>
-              <a:defRPr/>
-            </a:pPr>
-            <a:endParaRPr kumimoji="0" lang="en-GB" sz="1200" b="0" i="0" u="none" strike="noStrike" kern="1200" cap="none" spc="0" normalizeH="0" baseline="0" noProof="0" dirty="0">
-              <a:ln>
-                <a:noFill/>
-              </a:ln>
-              <a:solidFill>
-                <a:prstClr val="black"/>
-              </a:solidFill>
-              <a:effectLst/>
-              <a:uLnTx/>
-              <a:uFillTx/>
-              <a:latin typeface="Calibri" panose="020F0502020204030204"/>
-              <a:ea typeface="+mn-ea"/>
-              <a:cs typeface="+mn-cs"/>
-            </a:endParaRPr>
-          </a:p>
-          <a:p>
-            <a:pPr marL="0" marR="0" lvl="0" indent="0" algn="l" defTabSz="1706910" rtl="0" eaLnBrk="1" fontAlgn="auto" latinLnBrk="0" hangingPunct="1">
-              <a:lnSpc>
-                <a:spcPct val="100000"/>
-              </a:lnSpc>
-              <a:spcBef>
-                <a:spcPts val="0"/>
-              </a:spcBef>
-              <a:spcAft>
-                <a:spcPts val="0"/>
-              </a:spcAft>
-              <a:buClrTx/>
-              <a:buSzTx/>
-              <a:buFontTx/>
-              <a:buNone/>
-              <a:tabLst/>
-              <a:defRPr/>
-            </a:pPr>
-            <a:endParaRPr kumimoji="0" lang="en-GB" sz="1200" b="0" i="0" u="none" strike="noStrike" kern="1200" cap="none" spc="0" normalizeH="0" baseline="0" noProof="0" dirty="0">
-              <a:ln>
-                <a:noFill/>
-              </a:ln>
-              <a:solidFill>
-                <a:prstClr val="black"/>
-              </a:solidFill>
-              <a:effectLst/>
-              <a:uLnTx/>
-              <a:uFillTx/>
-              <a:latin typeface="Calibri" panose="020F0502020204030204"/>
-              <a:ea typeface="+mn-ea"/>
-              <a:cs typeface="+mn-cs"/>
-            </a:endParaRPr>
-          </a:p>
-          <a:p>
-            <a:pPr marL="0" marR="0" lvl="0" indent="0" algn="l" defTabSz="1706910" rtl="0" eaLnBrk="1" fontAlgn="auto" latinLnBrk="0" hangingPunct="1">
-              <a:lnSpc>
-                <a:spcPct val="100000"/>
-              </a:lnSpc>
-              <a:spcBef>
-                <a:spcPts val="0"/>
-              </a:spcBef>
-              <a:spcAft>
-                <a:spcPts val="0"/>
-              </a:spcAft>
-              <a:buClrTx/>
-              <a:buSzTx/>
-              <a:buFontTx/>
-              <a:buNone/>
-              <a:tabLst/>
-              <a:defRPr/>
-            </a:pPr>
-            <a:endParaRPr kumimoji="0" lang="en-GB" sz="1200" b="0" i="0" u="none" strike="noStrike" kern="1200" cap="none" spc="0" normalizeH="0" baseline="0" noProof="0" dirty="0">
-              <a:ln>
-                <a:noFill/>
-              </a:ln>
-              <a:solidFill>
-                <a:prstClr val="black"/>
-              </a:solidFill>
-              <a:effectLst/>
-              <a:uLnTx/>
-              <a:uFillTx/>
-              <a:latin typeface="Calibri" panose="020F0502020204030204"/>
-              <a:ea typeface="+mn-ea"/>
-              <a:cs typeface="+mn-cs"/>
-            </a:endParaRPr>
-          </a:p>
-        </p:txBody>
-      </p:sp>
-      <p:graphicFrame>
-        <p:nvGraphicFramePr>
-          <p:cNvPr id="7" name="Table 7">
-            <a:extLst>
-              <a:ext uri="{FF2B5EF4-FFF2-40B4-BE49-F238E27FC236}">
-                <a16:creationId xmlns:a16="http://schemas.microsoft.com/office/drawing/2014/main" id="{FBE95B7C-B010-6D30-1BB3-D0BB1817071D}"/>
+                <a16:creationId xmlns:a16="http://schemas.microsoft.com/office/drawing/2014/main" id="{1F973EE7-4549-71FB-3989-96BEF2BC838D}"/>
               </a:ext>
             </a:extLst>
           </p:cNvPr>
@@ -4135,14 +6508,14 @@
           <p:nvPr>
             <p:extLst>
               <p:ext uri="{D42A27DB-BD31-4B8C-83A1-F6EECF244321}">
-                <p14:modId xmlns:p14="http://schemas.microsoft.com/office/powerpoint/2010/main" val="11063398"/>
+                <p14:modId xmlns:p14="http://schemas.microsoft.com/office/powerpoint/2010/main" val="23553094"/>
               </p:ext>
             </p:extLst>
           </p:nvPr>
         </p:nvGraphicFramePr>
         <p:xfrm>
-          <a:off x="4775726" y="6931436"/>
-          <a:ext cx="4443504" cy="1737360"/>
+          <a:off x="444140" y="8179123"/>
+          <a:ext cx="6251127" cy="2346960"/>
         </p:xfrm>
         <a:graphic>
           <a:graphicData uri="http://schemas.openxmlformats.org/drawingml/2006/table">
@@ -4151,21 +6524,21 @@
                 <a:tableStyleId>{5C22544A-7EE6-4342-B048-85BDC9FD1C3A}</a:tableStyleId>
               </a:tblPr>
               <a:tblGrid>
-                <a:gridCol w="1481168">
+                <a:gridCol w="764728">
                   <a:extLst>
                     <a:ext uri="{9D8B030D-6E8A-4147-A177-3AD203B41FA5}">
                       <a16:colId xmlns:a16="http://schemas.microsoft.com/office/drawing/2014/main" val="1907166431"/>
                     </a:ext>
                   </a:extLst>
                 </a:gridCol>
-                <a:gridCol w="1865917">
+                <a:gridCol w="4510007">
                   <a:extLst>
                     <a:ext uri="{9D8B030D-6E8A-4147-A177-3AD203B41FA5}">
                       <a16:colId xmlns:a16="http://schemas.microsoft.com/office/drawing/2014/main" val="3484362391"/>
                     </a:ext>
                   </a:extLst>
                 </a:gridCol>
-                <a:gridCol w="1096419">
+                <a:gridCol w="976392">
                   <a:extLst>
                     <a:ext uri="{9D8B030D-6E8A-4147-A177-3AD203B41FA5}">
                       <a16:colId xmlns:a16="http://schemas.microsoft.com/office/drawing/2014/main" val="326053815"/>
@@ -4173,14 +6546,14 @@
                   </a:extLst>
                 </a:gridCol>
               </a:tblGrid>
-              <a:tr h="561889">
+              <a:tr h="215321">
                 <a:tc>
                   <a:txBody>
                     <a:bodyPr/>
                     <a:lstStyle/>
                     <a:p>
                       <a:r>
-                        <a:rPr lang="en-GB" sz="1800" dirty="0"/>
+                        <a:rPr lang="en-GB" sz="1000" dirty="0"/>
                         <a:t>Model</a:t>
                       </a:r>
                     </a:p>
@@ -4193,8 +6566,8 @@
                     <a:lstStyle/>
                     <a:p>
                       <a:r>
-                        <a:rPr lang="en-GB" sz="1800" dirty="0"/>
-                        <a:t>Hyper Parameters</a:t>
+                        <a:rPr lang="en-GB" sz="1000" dirty="0"/>
+                        <a:t>Hyperparameters</a:t>
                       </a:r>
                     </a:p>
                   </a:txBody>
@@ -4206,8 +6579,8 @@
                     <a:lstStyle/>
                     <a:p>
                       <a:r>
-                        <a:rPr lang="en-GB" sz="1800" dirty="0"/>
-                        <a:t>Validation Metric</a:t>
+                        <a:rPr lang="en-GB" sz="1000" dirty="0"/>
+                        <a:t>Valid. Metric</a:t>
                       </a:r>
                     </a:p>
                   </a:txBody>
@@ -4219,17 +6592,17 @@
                   </a:ext>
                 </a:extLst>
               </a:tr>
-              <a:tr h="268174">
+              <a:tr h="434421">
                 <a:tc>
                   <a:txBody>
                     <a:bodyPr/>
                     <a:lstStyle/>
                     <a:p>
                       <a:r>
-                        <a:rPr lang="en-US" sz="1200" dirty="0"/>
-                        <a:t>Model 1</a:t>
+                        <a:rPr lang="en-US" sz="1000" dirty="0"/>
+                        <a:t>1. Logistic Regression</a:t>
                       </a:r>
-                      <a:endParaRPr lang="en-GB" sz="1200" dirty="0"/>
+                      <a:endParaRPr lang="en-GB" sz="1000" dirty="0"/>
                     </a:p>
                   </a:txBody>
                   <a:tcPr/>
@@ -4240,9 +6613,64 @@
                     <a:lstStyle/>
                     <a:p>
                       <a:r>
-                        <a:rPr lang="en-GB" sz="1200" dirty="0"/>
-                        <a:t>Hyper parameter list</a:t>
+                        <a:rPr lang="en-GB" sz="1000" i="1" dirty="0">
+                          <a:ea typeface="Calibri"/>
+                          <a:cs typeface="Calibri"/>
+                        </a:rPr>
+                        <a:t>• </a:t>
                       </a:r>
+                      <a:r>
+                        <a:rPr lang="en-GB" sz="1000" i="1" dirty="0"/>
+                        <a:t>L1-regularisation (Lasso), C</a:t>
+                      </a:r>
+                      <a:r>
+                        <a:rPr lang="en-GB" sz="1000" dirty="0"/>
+                        <a:t> : 0.001, 0.01, 0.05, 0.1, 0.2, 1, 10, 100, 1000;</a:t>
+                      </a:r>
+                    </a:p>
+                    <a:p>
+                      <a:r>
+                        <a:rPr lang="en-GB" sz="1000" i="1" dirty="0">
+                          <a:ea typeface="Calibri"/>
+                          <a:cs typeface="Calibri"/>
+                        </a:rPr>
+                        <a:t>• </a:t>
+                      </a:r>
+                      <a:r>
+                        <a:rPr lang="en-GB" sz="1000" i="1" dirty="0"/>
+                        <a:t>L2-regularisation (Ridge), C</a:t>
+                      </a:r>
+                      <a:r>
+                        <a:rPr lang="en-GB" sz="1000" dirty="0"/>
+                        <a:t> : 0.001, 0.01, 0.05, 0.1, 0.2, 1, 10, 100, 1000 </a:t>
+                      </a:r>
+                    </a:p>
+                    <a:p>
+                      <a:pPr marL="0" marR="0" lvl="0" indent="0" algn="l" defTabSz="1706910" rtl="0" eaLnBrk="1" fontAlgn="auto" latinLnBrk="0" hangingPunct="1">
+                        <a:lnSpc>
+                          <a:spcPct val="100000"/>
+                        </a:lnSpc>
+                        <a:spcBef>
+                          <a:spcPts val="0"/>
+                        </a:spcBef>
+                        <a:spcAft>
+                          <a:spcPts val="0"/>
+                        </a:spcAft>
+                        <a:buClrTx/>
+                        <a:buSzTx/>
+                        <a:buFontTx/>
+                        <a:buNone/>
+                        <a:tabLst/>
+                        <a:defRPr/>
+                      </a:pPr>
+                      <a:r>
+                        <a:rPr lang="en-GB" sz="1000" b="1" i="1" dirty="0">
+                          <a:ea typeface="Calibri"/>
+                          <a:cs typeface="Calibri"/>
+                        </a:rPr>
+                        <a:t>The best result was achieved at L2, C = 0.05 and class balancing. </a:t>
+                      </a:r>
+                      <a:endParaRPr lang="en-GB" sz="1000" b="1" i="1" dirty="0"/>
                     </a:p>
                   </a:txBody>
                   <a:tcPr/>
@@ -4252,9 +6680,35 @@
                     <a:bodyPr/>
                     <a:lstStyle/>
                     <a:p>
+                      <a:endParaRPr lang="en-GB" sz="1000" dirty="0">
+                        <a:ea typeface="Calibri"/>
+                        <a:cs typeface="Calibri"/>
+                      </a:endParaRPr>
+                    </a:p>
+                    <a:p>
                       <a:r>
-                        <a:rPr lang="en-GB" sz="1200" dirty="0"/>
-                        <a:t>A%</a:t>
+                        <a:rPr lang="en-GB" sz="1000" b="1" dirty="0">
+                          <a:ea typeface="Calibri"/>
+                          <a:cs typeface="Calibri"/>
+                        </a:rPr>
+                        <a:t>Recall = 91.9</a:t>
+                      </a:r>
+                      <a:r>
+                        <a:rPr lang="en-GB" sz="1000" b="1" dirty="0"/>
+                        <a:t>%</a:t>
+                      </a:r>
+                    </a:p>
+                    <a:p>
+                      <a:r>
+                        <a:rPr lang="en-GB" sz="1000" b="1" dirty="0">
+                          <a:ea typeface="Calibri"/>
+                          <a:cs typeface="Calibri"/>
+                        </a:rPr>
+                        <a:t>AUC = 97.1</a:t>
+                      </a:r>
+                      <a:r>
+                        <a:rPr lang="en-GB" sz="1000" b="1" dirty="0"/>
+                        <a:t>%</a:t>
                       </a:r>
                     </a:p>
                   </a:txBody>
@@ -4266,7 +6720,7 @@
                   </a:ext>
                 </a:extLst>
               </a:tr>
-              <a:tr h="242633">
+              <a:tr h="245410">
                 <a:tc>
                   <a:txBody>
                     <a:bodyPr/>
@@ -4290,10 +6744,10 @@
                         <a:defRPr/>
                       </a:pPr>
                       <a:r>
-                        <a:rPr lang="en-US" sz="1200" dirty="0"/>
-                        <a:t>Model 2</a:t>
+                        <a:rPr lang="en-US" sz="1000" dirty="0"/>
+                        <a:t>2. Neural Network</a:t>
                       </a:r>
-                      <a:endParaRPr lang="en-GB" sz="1200" dirty="0"/>
+                      <a:endParaRPr lang="en-GB" sz="1000" dirty="0"/>
                     </a:p>
                   </a:txBody>
                   <a:tcPr/>
@@ -4303,9 +6757,150 @@
                     <a:bodyPr/>
                     <a:lstStyle/>
                     <a:p>
+                      <a:pPr marL="0" indent="0">
+                        <a:buFont typeface="Arial" panose="020B0604020202020204" pitchFamily="34" charset="0"/>
+                        <a:buNone/>
+                        <a:tabLst>
+                          <a:tab pos="219075" algn="l"/>
+                        </a:tabLst>
+                      </a:pPr>
                       <a:r>
-                        <a:rPr lang="en-GB" sz="1200" dirty="0"/>
-                        <a:t>Hyper parameter list</a:t>
+                        <a:rPr lang="en-GB" sz="1000" i="1" dirty="0">
+                          <a:ea typeface="Calibri"/>
+                          <a:cs typeface="Calibri"/>
+                        </a:rPr>
+                        <a:t>• Neurons in hidden layers: </a:t>
+                      </a:r>
+                      <a:r>
+                        <a:rPr lang="en-GB" sz="1000" dirty="0">
+                          <a:ea typeface="Calibri"/>
+                          <a:cs typeface="Calibri"/>
+                        </a:rPr>
+                        <a:t>10, 20, 50, 100, 200, 300;</a:t>
+                      </a:r>
+                    </a:p>
+                    <a:p>
+                      <a:pPr marL="0" indent="0">
+                        <a:buFont typeface="Arial" panose="020B0604020202020204" pitchFamily="34" charset="0"/>
+                        <a:buNone/>
+                        <a:tabLst>
+                          <a:tab pos="219075" algn="l"/>
+                        </a:tabLst>
+                      </a:pPr>
+                      <a:r>
+                        <a:rPr lang="en-GB" sz="1000" i="1" dirty="0">
+                          <a:ea typeface="Calibri"/>
+                          <a:cs typeface="Calibri"/>
+                        </a:rPr>
+                        <a:t>• Activation functions</a:t>
+                      </a:r>
+                      <a:r>
+                        <a:rPr lang="en-GB" sz="1000" dirty="0">
+                          <a:ea typeface="Calibri"/>
+                          <a:cs typeface="Calibri"/>
+                        </a:rPr>
+                        <a:t>: </a:t>
+                      </a:r>
+                      <a:r>
+                        <a:rPr lang="en-GB" sz="1000" dirty="0" err="1">
+                          <a:ea typeface="Calibri"/>
+                          <a:cs typeface="Calibri"/>
+                        </a:rPr>
+                        <a:t>ReLu</a:t>
+                      </a:r>
+                      <a:r>
+                        <a:rPr lang="en-GB" sz="1000" dirty="0">
+                          <a:ea typeface="Calibri"/>
+                          <a:cs typeface="Calibri"/>
+                        </a:rPr>
+                        <a:t>, tanh, logistic;     </a:t>
+                      </a:r>
+                      <a:r>
+                        <a:rPr lang="en-GB" sz="1000" i="1" dirty="0">
+                          <a:ea typeface="Calibri"/>
+                          <a:cs typeface="Calibri"/>
+                        </a:rPr>
+                        <a:t>• Solver: </a:t>
+                      </a:r>
+                      <a:r>
+                        <a:rPr lang="en-GB" sz="1000" dirty="0">
+                          <a:ea typeface="Calibri"/>
+                          <a:cs typeface="Calibri"/>
+                        </a:rPr>
+                        <a:t>Adam, L-BFGS, SGD;</a:t>
+                      </a:r>
+                    </a:p>
+                    <a:p>
+                      <a:pPr marL="0" indent="0">
+                        <a:buFont typeface="Arial" panose="020B0604020202020204" pitchFamily="34" charset="0"/>
+                        <a:buNone/>
+                        <a:tabLst>
+                          <a:tab pos="219075" algn="l"/>
+                        </a:tabLst>
+                      </a:pPr>
+                      <a:r>
+                        <a:rPr lang="en-GB" sz="1000" i="1" dirty="0">
+                          <a:ea typeface="Calibri"/>
+                          <a:cs typeface="Calibri"/>
+                        </a:rPr>
+                        <a:t>• Regularisation: </a:t>
+                      </a:r>
+                      <a:r>
+                        <a:rPr lang="en-GB" sz="1000" dirty="0">
+                          <a:ea typeface="Calibri"/>
+                          <a:cs typeface="Calibri"/>
+                        </a:rPr>
+                        <a:t>0.0001, 0.001, 0.01, 0.1, 1, 2, 3, 4, 5, 6, 7, 8, 10, 15;</a:t>
+                      </a:r>
+                    </a:p>
+                    <a:p>
+                      <a:pPr marL="0" indent="0">
+                        <a:buFont typeface="Arial" panose="020B0604020202020204" pitchFamily="34" charset="0"/>
+                        <a:buNone/>
+                        <a:tabLst>
+                          <a:tab pos="219075" algn="l"/>
+                        </a:tabLst>
+                      </a:pPr>
+                      <a:r>
+                        <a:rPr lang="en-GB" sz="1000" i="1" dirty="0">
+                          <a:ea typeface="Calibri"/>
+                          <a:cs typeface="Calibri"/>
+                        </a:rPr>
+                        <a:t>• Max iterations: </a:t>
+                      </a:r>
+                      <a:r>
+                        <a:rPr lang="en-GB" sz="1000" dirty="0">
+                          <a:ea typeface="Calibri"/>
+                          <a:cs typeface="Calibri"/>
+                        </a:rPr>
+                        <a:t>50, 100, 200, 300, 400, 500, 700, 800, 1000. </a:t>
+                      </a:r>
+                    </a:p>
+                    <a:p>
+                      <a:pPr marL="0" indent="0">
+                        <a:buFont typeface="Arial" panose="020B0604020202020204" pitchFamily="34" charset="0"/>
+                        <a:buNone/>
+                        <a:tabLst>
+                          <a:tab pos="219075" algn="l"/>
+                        </a:tabLst>
+                      </a:pPr>
+                      <a:r>
+                        <a:rPr lang="en-GB" sz="1000" b="1" i="1" dirty="0">
+                          <a:ea typeface="Calibri"/>
+                          <a:cs typeface="Calibri"/>
+                        </a:rPr>
+                        <a:t>The best result: </a:t>
+                      </a:r>
+                      <a:r>
+                        <a:rPr lang="en-GB" sz="1000" b="1" i="1" dirty="0"/>
+                        <a:t>50 neurons in hidden layer, tanh function, SGD solver, 200 </a:t>
+                      </a:r>
+                      <a:r>
+                        <a:rPr lang="en-GB" sz="1000" b="1" i="1" dirty="0">
+                          <a:ea typeface="Calibri"/>
+                          <a:cs typeface="Calibri"/>
+                        </a:rPr>
+                        <a:t>epochs. </a:t>
                       </a:r>
                     </a:p>
                   </a:txBody>
@@ -4316,9 +6911,41 @@
                     <a:bodyPr/>
                     <a:lstStyle/>
                     <a:p>
+                      <a:endParaRPr lang="en-GB" sz="1000" dirty="0"/>
+                    </a:p>
+                    <a:p>
+                      <a:endParaRPr lang="en-GB" sz="1000" dirty="0"/>
+                    </a:p>
+                    <a:p>
+                      <a:endParaRPr lang="en-GB" sz="1000" b="1" dirty="0">
+                        <a:ea typeface="Calibri"/>
+                        <a:cs typeface="Calibri"/>
+                      </a:endParaRPr>
+                    </a:p>
+                    <a:p>
                       <a:r>
-                        <a:rPr lang="en-GB" sz="1200" dirty="0"/>
-                        <a:t>B%</a:t>
+                        <a:rPr lang="en-GB" sz="1000" b="1" dirty="0">
+                          <a:ea typeface="Calibri"/>
+                          <a:cs typeface="Calibri"/>
+                        </a:rPr>
+                        <a:t>Recall = 92.8</a:t>
+                      </a:r>
+                      <a:r>
+                        <a:rPr lang="en-GB" sz="1000" b="1" dirty="0"/>
+                        <a:t>%</a:t>
+                      </a:r>
+                    </a:p>
+                    <a:p>
+                      <a:r>
+                        <a:rPr lang="en-GB" sz="1000" b="1" dirty="0">
+                          <a:ea typeface="Calibri"/>
+                          <a:cs typeface="Calibri"/>
+                        </a:rPr>
+                        <a:t>AUC = 96.5</a:t>
+                      </a:r>
+                      <a:r>
+                        <a:rPr lang="en-GB" sz="1000" b="1" dirty="0"/>
+                        <a:t>%</a:t>
                       </a:r>
                     </a:p>
                   </a:txBody>
@@ -4330,7 +6957,7 @@
                   </a:ext>
                 </a:extLst>
               </a:tr>
-              <a:tr h="242633">
+              <a:tr h="291073">
                 <a:tc>
                   <a:txBody>
                     <a:bodyPr/>
@@ -4354,10 +6981,10 @@
                         <a:defRPr/>
                       </a:pPr>
                       <a:r>
-                        <a:rPr lang="en-US" sz="1200" dirty="0"/>
-                        <a:t>Model 3</a:t>
+                        <a:rPr lang="en-US" sz="1000" dirty="0"/>
+                        <a:t>3. Decision Tree</a:t>
                       </a:r>
-                      <a:endParaRPr lang="en-GB" sz="1200" dirty="0"/>
+                      <a:endParaRPr lang="en-GB" sz="1000" dirty="0"/>
                     </a:p>
                   </a:txBody>
                   <a:tcPr/>
@@ -4367,10 +6994,91 @@
                     <a:bodyPr/>
                     <a:lstStyle/>
                     <a:p>
+                      <a:pPr marL="0" indent="0">
+                        <a:buFont typeface="Arial" panose="020B0604020202020204" pitchFamily="34" charset="0"/>
+                        <a:buNone/>
+                        <a:tabLst>
+                          <a:tab pos="219075" algn="l"/>
+                        </a:tabLst>
+                      </a:pPr>
                       <a:r>
-                        <a:rPr lang="en-GB" sz="1200" dirty="0"/>
-                        <a:t>Hyper parameter list</a:t>
+                        <a:rPr lang="en-GB" sz="1000" i="1" dirty="0">
+                          <a:ea typeface="Calibri"/>
+                          <a:cs typeface="Calibri"/>
+                        </a:rPr>
+                        <a:t>• Minimum number of instances in leaves: </a:t>
                       </a:r>
+                      <a:r>
+                        <a:rPr lang="en-GB" sz="1000" dirty="0">
+                          <a:ea typeface="Calibri"/>
+                          <a:cs typeface="Calibri"/>
+                        </a:rPr>
+                        <a:t>2, 5, 10, 20;</a:t>
+                      </a:r>
+                    </a:p>
+                    <a:p>
+                      <a:pPr marL="0" indent="0">
+                        <a:buFont typeface="Arial" panose="020B0604020202020204" pitchFamily="34" charset="0"/>
+                        <a:buNone/>
+                        <a:tabLst>
+                          <a:tab pos="219075" algn="l"/>
+                        </a:tabLst>
+                      </a:pPr>
+                      <a:r>
+                        <a:rPr lang="en-GB" sz="1000" i="1" dirty="0">
+                          <a:ea typeface="Calibri"/>
+                          <a:cs typeface="Calibri"/>
+                        </a:rPr>
+                        <a:t>• Split subsets: </a:t>
+                      </a:r>
+                      <a:r>
+                        <a:rPr lang="en-GB" sz="1000" dirty="0">
+                          <a:ea typeface="Calibri"/>
+                          <a:cs typeface="Calibri"/>
+                        </a:rPr>
+                        <a:t>5, 10, 20, which did not have any effect on the results;</a:t>
+                      </a:r>
+                    </a:p>
+                    <a:p>
+                      <a:pPr marL="0" indent="0">
+                        <a:buFont typeface="Arial" panose="020B0604020202020204" pitchFamily="34" charset="0"/>
+                        <a:buNone/>
+                        <a:tabLst>
+                          <a:tab pos="219075" algn="l"/>
+                        </a:tabLst>
+                      </a:pPr>
+                      <a:r>
+                        <a:rPr lang="en-GB" sz="1000" i="1" dirty="0">
+                          <a:ea typeface="Calibri"/>
+                          <a:cs typeface="Calibri"/>
+                        </a:rPr>
+                        <a:t>• Maximum tree depth: </a:t>
+                      </a:r>
+                      <a:r>
+                        <a:rPr lang="en-GB" sz="1000" dirty="0">
+                          <a:ea typeface="Calibri"/>
+                          <a:cs typeface="Calibri"/>
+                        </a:rPr>
+                        <a:t>2, 5, 8, 10. </a:t>
+                      </a:r>
+                    </a:p>
+                    <a:p>
+                      <a:pPr>
+                        <a:tabLst>
+                          <a:tab pos="219075" algn="l"/>
+                        </a:tabLst>
+                      </a:pPr>
+                      <a:r>
+                        <a:rPr lang="en-GB" sz="1000" b="1" i="1" dirty="0">
+                          <a:ea typeface="Calibri"/>
+                          <a:cs typeface="Calibri"/>
+                        </a:rPr>
+                        <a:t>The best result: 10 instances in leaves, 5 split subsets and a max tree depth of 10</a:t>
+                      </a:r>
+                      <a:endParaRPr lang="en-GB" sz="1000" b="1" dirty="0">
+                        <a:ea typeface="Calibri"/>
+                        <a:cs typeface="Calibri"/>
+                      </a:endParaRPr>
                     </a:p>
                   </a:txBody>
                   <a:tcPr/>
@@ -4380,9 +7088,41 @@
                     <a:bodyPr/>
                     <a:lstStyle/>
                     <a:p>
+                      <a:endParaRPr lang="en-GB" sz="1000" b="1" dirty="0">
+                        <a:ea typeface="Calibri"/>
+                        <a:cs typeface="Calibri"/>
+                      </a:endParaRPr>
+                    </a:p>
+                    <a:p>
+                      <a:endParaRPr lang="en-GB" sz="1000" b="1" dirty="0">
+                        <a:ea typeface="Calibri"/>
+                        <a:cs typeface="Calibri"/>
+                      </a:endParaRPr>
+                    </a:p>
+                    <a:p>
                       <a:r>
-                        <a:rPr lang="en-GB" sz="1200" dirty="0"/>
-                        <a:t>C%</a:t>
+                        <a:rPr lang="en-GB" sz="1000" b="1" dirty="0">
+                          <a:ea typeface="Calibri"/>
+                          <a:cs typeface="Calibri"/>
+                        </a:rPr>
+                        <a:t>Recall = 88.9</a:t>
+                      </a:r>
+                      <a:r>
+                        <a:rPr lang="en-GB" sz="1000" b="1" dirty="0"/>
+                        <a:t>%</a:t>
+                      </a:r>
+                    </a:p>
+                    <a:p>
+                      <a:r>
+                        <a:rPr lang="en-GB" sz="1000" b="1" dirty="0">
+                          <a:ea typeface="Calibri"/>
+                          <a:cs typeface="Calibri"/>
+                        </a:rPr>
+                        <a:t>AUC = 93.8</a:t>
+                      </a:r>
+                      <a:r>
+                        <a:rPr lang="en-GB" sz="1000" b="1" dirty="0"/>
+                        <a:t>%</a:t>
                       </a:r>
                     </a:p>
                   </a:txBody>
@@ -4394,261 +7134,16 @@
                   </a:ext>
                 </a:extLst>
               </a:tr>
-              <a:tr h="242633">
-                <a:tc>
-                  <a:txBody>
-                    <a:bodyPr/>
-                    <a:lstStyle/>
-                    <a:p>
-                      <a:r>
-                        <a:rPr lang="en-US" sz="1200" dirty="0"/>
-                        <a:t>Model 4 ….</a:t>
-                      </a:r>
-                      <a:endParaRPr lang="en-GB" sz="1200" dirty="0"/>
-                    </a:p>
-                  </a:txBody>
-                  <a:tcPr/>
-                </a:tc>
-                <a:tc>
-                  <a:txBody>
-                    <a:bodyPr/>
-                    <a:lstStyle/>
-                    <a:p>
-                      <a:r>
-                        <a:rPr lang="en-GB" sz="1200" dirty="0"/>
-                        <a:t>Hyper parameter list</a:t>
-                      </a:r>
-                    </a:p>
-                  </a:txBody>
-                  <a:tcPr/>
-                </a:tc>
-                <a:tc>
-                  <a:txBody>
-                    <a:bodyPr/>
-                    <a:lstStyle/>
-                    <a:p>
-                      <a:r>
-                        <a:rPr lang="en-GB" sz="1200" dirty="0"/>
-                        <a:t>D%</a:t>
-                      </a:r>
-                    </a:p>
-                  </a:txBody>
-                  <a:tcPr/>
-                </a:tc>
-                <a:extLst>
-                  <a:ext uri="{0D108BD9-81ED-4DB2-BD59-A6C34878D82A}">
-                    <a16:rowId xmlns:a16="http://schemas.microsoft.com/office/drawing/2014/main" val="3656706315"/>
-                  </a:ext>
-                </a:extLst>
-              </a:tr>
-            </a:tbl>
-          </a:graphicData>
-        </a:graphic>
-      </p:graphicFrame>
-      <p:graphicFrame>
-        <p:nvGraphicFramePr>
-          <p:cNvPr id="2" name="Table 2">
-            <a:extLst>
-              <a:ext uri="{FF2B5EF4-FFF2-40B4-BE49-F238E27FC236}">
-                <a16:creationId xmlns:a16="http://schemas.microsoft.com/office/drawing/2014/main" id="{50697821-56EE-B522-2650-CAC52B000E80}"/>
-              </a:ext>
-            </a:extLst>
-          </p:cNvPr>
-          <p:cNvGraphicFramePr>
-            <a:graphicFrameLocks noGrp="1"/>
-          </p:cNvGraphicFramePr>
-          <p:nvPr>
-            <p:extLst>
-              <p:ext uri="{D42A27DB-BD31-4B8C-83A1-F6EECF244321}">
-                <p14:modId xmlns:p14="http://schemas.microsoft.com/office/powerpoint/2010/main" val="374137924"/>
-              </p:ext>
-            </p:extLst>
-          </p:nvPr>
-        </p:nvGraphicFramePr>
-        <p:xfrm>
-          <a:off x="5005441" y="9764892"/>
-          <a:ext cx="4178298" cy="1151476"/>
-        </p:xfrm>
-        <a:graphic>
-          <a:graphicData uri="http://schemas.openxmlformats.org/drawingml/2006/table">
-            <a:tbl>
-              <a:tblPr firstRow="1" bandRow="1">
-                <a:tableStyleId>{5C22544A-7EE6-4342-B048-85BDC9FD1C3A}</a:tableStyleId>
-              </a:tblPr>
-              <a:tblGrid>
-                <a:gridCol w="1392766">
-                  <a:extLst>
-                    <a:ext uri="{9D8B030D-6E8A-4147-A177-3AD203B41FA5}">
-                      <a16:colId xmlns:a16="http://schemas.microsoft.com/office/drawing/2014/main" val="3385219870"/>
-                    </a:ext>
-                  </a:extLst>
-                </a:gridCol>
-                <a:gridCol w="1392766">
-                  <a:extLst>
-                    <a:ext uri="{9D8B030D-6E8A-4147-A177-3AD203B41FA5}">
-                      <a16:colId xmlns:a16="http://schemas.microsoft.com/office/drawing/2014/main" val="2134976436"/>
-                    </a:ext>
-                  </a:extLst>
-                </a:gridCol>
-                <a:gridCol w="1392766">
-                  <a:extLst>
-                    <a:ext uri="{9D8B030D-6E8A-4147-A177-3AD203B41FA5}">
-                      <a16:colId xmlns:a16="http://schemas.microsoft.com/office/drawing/2014/main" val="629384850"/>
-                    </a:ext>
-                  </a:extLst>
-                </a:gridCol>
-              </a:tblGrid>
-              <a:tr h="401768">
-                <a:tc>
-                  <a:txBody>
-                    <a:bodyPr/>
-                    <a:lstStyle/>
-                    <a:p>
-                      <a:r>
-                        <a:rPr lang="en-GB" sz="1200" dirty="0"/>
-                        <a:t>Actual / Predicted</a:t>
-                      </a:r>
-                    </a:p>
-                  </a:txBody>
-                  <a:tcPr/>
-                </a:tc>
-                <a:tc>
-                  <a:txBody>
-                    <a:bodyPr/>
-                    <a:lstStyle/>
-                    <a:p>
-                      <a:r>
-                        <a:rPr lang="en-GB" sz="1200" dirty="0"/>
-                        <a:t>Good</a:t>
-                      </a:r>
-                    </a:p>
-                  </a:txBody>
-                  <a:tcPr/>
-                </a:tc>
-                <a:tc>
-                  <a:txBody>
-                    <a:bodyPr/>
-                    <a:lstStyle/>
-                    <a:p>
-                      <a:r>
-                        <a:rPr lang="en-GB" sz="1200" dirty="0"/>
-                        <a:t>Bad</a:t>
-                      </a:r>
-                    </a:p>
-                  </a:txBody>
-                  <a:tcPr/>
-                </a:tc>
-                <a:extLst>
-                  <a:ext uri="{0D108BD9-81ED-4DB2-BD59-A6C34878D82A}">
-                    <a16:rowId xmlns:a16="http://schemas.microsoft.com/office/drawing/2014/main" val="2126179801"/>
-                  </a:ext>
-                </a:extLst>
-              </a:tr>
-              <a:tr h="370840">
-                <a:tc>
-                  <a:txBody>
-                    <a:bodyPr/>
-                    <a:lstStyle/>
-                    <a:p>
-                      <a:r>
-                        <a:rPr lang="en-GB" sz="1200" dirty="0"/>
-                        <a:t>Good</a:t>
-                      </a:r>
-                    </a:p>
-                  </a:txBody>
-                  <a:tcPr/>
-                </a:tc>
-                <a:tc>
-                  <a:txBody>
-                    <a:bodyPr/>
-                    <a:lstStyle/>
-                    <a:p>
-                      <a:r>
-                        <a:rPr lang="en-GB" sz="1200" dirty="0"/>
-                        <a:t>X</a:t>
-                      </a:r>
-                    </a:p>
-                  </a:txBody>
-                  <a:tcPr/>
-                </a:tc>
-                <a:tc>
-                  <a:txBody>
-                    <a:bodyPr/>
-                    <a:lstStyle/>
-                    <a:p>
-                      <a:r>
-                        <a:rPr lang="en-US" sz="1200" dirty="0"/>
-                        <a:t>X</a:t>
-                      </a:r>
-                      <a:endParaRPr lang="en-GB" sz="1200" dirty="0"/>
-                    </a:p>
-                  </a:txBody>
-                  <a:tcPr/>
-                </a:tc>
-                <a:extLst>
-                  <a:ext uri="{0D108BD9-81ED-4DB2-BD59-A6C34878D82A}">
-                    <a16:rowId xmlns:a16="http://schemas.microsoft.com/office/drawing/2014/main" val="1186692526"/>
-                  </a:ext>
-                </a:extLst>
-              </a:tr>
-              <a:tr h="378868">
-                <a:tc>
-                  <a:txBody>
-                    <a:bodyPr/>
-                    <a:lstStyle/>
-                    <a:p>
-                      <a:r>
-                        <a:rPr lang="en-GB" sz="1200" dirty="0"/>
-                        <a:t>Bad</a:t>
-                      </a:r>
-                    </a:p>
-                  </a:txBody>
-                  <a:tcPr/>
-                </a:tc>
-                <a:tc>
-                  <a:txBody>
-                    <a:bodyPr/>
-                    <a:lstStyle/>
-                    <a:p>
-                      <a:r>
-                        <a:rPr lang="en-US" sz="1200" dirty="0"/>
-                        <a:t>X</a:t>
-                      </a:r>
-                      <a:endParaRPr lang="en-GB" sz="1200" dirty="0"/>
-                    </a:p>
-                  </a:txBody>
-                  <a:tcPr/>
-                </a:tc>
-                <a:tc>
-                  <a:txBody>
-                    <a:bodyPr/>
-                    <a:lstStyle/>
-                    <a:p>
-                      <a:r>
-                        <a:rPr lang="en-US" sz="1200" dirty="0"/>
-                        <a:t>X</a:t>
-                      </a:r>
-                      <a:endParaRPr lang="en-GB" sz="1200" dirty="0"/>
-                    </a:p>
-                  </a:txBody>
-                  <a:tcPr/>
-                </a:tc>
-                <a:extLst>
-                  <a:ext uri="{0D108BD9-81ED-4DB2-BD59-A6C34878D82A}">
-                    <a16:rowId xmlns:a16="http://schemas.microsoft.com/office/drawing/2014/main" val="788774926"/>
-                  </a:ext>
-                </a:extLst>
-              </a:tr>
             </a:tbl>
           </a:graphicData>
         </a:graphic>
       </p:graphicFrame>
       <p:sp>
         <p:nvSpPr>
-          <p:cNvPr id="8" name="TextBox 7">
+          <p:cNvPr id="54" name="TextBox 53">
             <a:extLst>
               <a:ext uri="{FF2B5EF4-FFF2-40B4-BE49-F238E27FC236}">
-                <a16:creationId xmlns:a16="http://schemas.microsoft.com/office/drawing/2014/main" id="{53F18AD2-7D7C-86A1-617F-5ED4C88C525F}"/>
+                <a16:creationId xmlns:a16="http://schemas.microsoft.com/office/drawing/2014/main" id="{6BDA679E-4349-2F41-3552-AFD1827AE747}"/>
               </a:ext>
             </a:extLst>
           </p:cNvPr>
@@ -4657,2483 +7152,8 @@
         </p:nvSpPr>
         <p:spPr>
           <a:xfrm>
-            <a:off x="358007" y="221862"/>
-            <a:ext cx="8885186" cy="523220"/>
-          </a:xfrm>
-          <a:prstGeom prst="rect">
-            <a:avLst/>
-          </a:prstGeom>
-          <a:noFill/>
-        </p:spPr>
-        <p:txBody>
-          <a:bodyPr wrap="square" lIns="91440" tIns="45720" rIns="91440" bIns="45720" rtlCol="0" anchor="t">
-            <a:spAutoFit/>
-          </a:bodyPr>
-          <a:lstStyle/>
-          <a:p>
-            <a:r>
-              <a:rPr lang="en-GB" sz="2800" dirty="0"/>
-              <a:t>ITNPBD6 Assignment 1. Student Number </a:t>
-            </a:r>
-            <a:r>
-              <a:rPr lang="en-GB" sz="2800" b="1" dirty="0"/>
-              <a:t>3461226</a:t>
-            </a:r>
-            <a:endParaRPr lang="en-GB" sz="2800" b="1" dirty="0">
-              <a:ea typeface="Calibri" panose="020F0502020204030204"/>
-              <a:cs typeface="Calibri" panose="020F0502020204030204"/>
-            </a:endParaRPr>
-          </a:p>
-        </p:txBody>
-      </p:sp>
-      <p:graphicFrame>
-        <p:nvGraphicFramePr>
-          <p:cNvPr id="5" name="Table 9">
-            <a:extLst>
-              <a:ext uri="{FF2B5EF4-FFF2-40B4-BE49-F238E27FC236}">
-                <a16:creationId xmlns:a16="http://schemas.microsoft.com/office/drawing/2014/main" id="{D4D093B8-47C2-E43F-6BF0-1D763DE45341}"/>
-              </a:ext>
-            </a:extLst>
-          </p:cNvPr>
-          <p:cNvGraphicFramePr>
-            <a:graphicFrameLocks noGrp="1"/>
-          </p:cNvGraphicFramePr>
-          <p:nvPr>
-            <p:extLst>
-              <p:ext uri="{D42A27DB-BD31-4B8C-83A1-F6EECF244321}">
-                <p14:modId xmlns:p14="http://schemas.microsoft.com/office/powerpoint/2010/main" val="930254923"/>
-              </p:ext>
-            </p:extLst>
-          </p:nvPr>
-        </p:nvGraphicFramePr>
-        <p:xfrm>
-          <a:off x="4882290" y="2435450"/>
-          <a:ext cx="4178298" cy="1112520"/>
-        </p:xfrm>
-        <a:graphic>
-          <a:graphicData uri="http://schemas.openxmlformats.org/drawingml/2006/table">
-            <a:tbl>
-              <a:tblPr firstRow="1" bandRow="1">
-                <a:tableStyleId>{5C22544A-7EE6-4342-B048-85BDC9FD1C3A}</a:tableStyleId>
-              </a:tblPr>
-              <a:tblGrid>
-                <a:gridCol w="2089149">
-                  <a:extLst>
-                    <a:ext uri="{9D8B030D-6E8A-4147-A177-3AD203B41FA5}">
-                      <a16:colId xmlns:a16="http://schemas.microsoft.com/office/drawing/2014/main" val="1922141735"/>
-                    </a:ext>
-                  </a:extLst>
-                </a:gridCol>
-                <a:gridCol w="2089149">
-                  <a:extLst>
-                    <a:ext uri="{9D8B030D-6E8A-4147-A177-3AD203B41FA5}">
-                      <a16:colId xmlns:a16="http://schemas.microsoft.com/office/drawing/2014/main" val="2956065983"/>
-                    </a:ext>
-                  </a:extLst>
-                </a:gridCol>
-              </a:tblGrid>
-              <a:tr h="370840">
-                <a:tc>
-                  <a:txBody>
-                    <a:bodyPr/>
-                    <a:lstStyle/>
-                    <a:p>
-                      <a:r>
-                        <a:rPr lang="en-US" sz="1400" dirty="0"/>
-                        <a:t>Variable</a:t>
-                      </a:r>
-                      <a:endParaRPr lang="en-GB" sz="1400" dirty="0"/>
-                    </a:p>
-                  </a:txBody>
-                  <a:tcPr/>
-                </a:tc>
-                <a:tc>
-                  <a:txBody>
-                    <a:bodyPr/>
-                    <a:lstStyle/>
-                    <a:p>
-                      <a:r>
-                        <a:rPr lang="en-US" sz="1400" dirty="0"/>
-                        <a:t>Type</a:t>
-                      </a:r>
-                      <a:endParaRPr lang="en-GB" sz="1400" dirty="0"/>
-                    </a:p>
-                  </a:txBody>
-                  <a:tcPr/>
-                </a:tc>
-                <a:extLst>
-                  <a:ext uri="{0D108BD9-81ED-4DB2-BD59-A6C34878D82A}">
-                    <a16:rowId xmlns:a16="http://schemas.microsoft.com/office/drawing/2014/main" val="2821401175"/>
-                  </a:ext>
-                </a:extLst>
-              </a:tr>
-              <a:tr h="370840">
-                <a:tc>
-                  <a:txBody>
-                    <a:bodyPr/>
-                    <a:lstStyle/>
-                    <a:p>
-                      <a:r>
-                        <a:rPr lang="en-US" sz="1200" dirty="0"/>
-                        <a:t>Variable 1</a:t>
-                      </a:r>
-                      <a:endParaRPr lang="en-GB" sz="1200" dirty="0"/>
-                    </a:p>
-                  </a:txBody>
-                  <a:tcPr/>
-                </a:tc>
-                <a:tc>
-                  <a:txBody>
-                    <a:bodyPr/>
-                    <a:lstStyle/>
-                    <a:p>
-                      <a:r>
-                        <a:rPr lang="en-US" sz="1200" dirty="0"/>
-                        <a:t>Numeric</a:t>
-                      </a:r>
-                      <a:endParaRPr lang="en-GB" sz="1200" dirty="0"/>
-                    </a:p>
-                  </a:txBody>
-                  <a:tcPr/>
-                </a:tc>
-                <a:extLst>
-                  <a:ext uri="{0D108BD9-81ED-4DB2-BD59-A6C34878D82A}">
-                    <a16:rowId xmlns:a16="http://schemas.microsoft.com/office/drawing/2014/main" val="3202199352"/>
-                  </a:ext>
-                </a:extLst>
-              </a:tr>
-              <a:tr h="370840">
-                <a:tc>
-                  <a:txBody>
-                    <a:bodyPr/>
-                    <a:lstStyle/>
-                    <a:p>
-                      <a:r>
-                        <a:rPr lang="en-US" sz="1200" dirty="0"/>
-                        <a:t>Variable 2</a:t>
-                      </a:r>
-                      <a:endParaRPr lang="en-GB" sz="1200" dirty="0"/>
-                    </a:p>
-                  </a:txBody>
-                  <a:tcPr/>
-                </a:tc>
-                <a:tc>
-                  <a:txBody>
-                    <a:bodyPr/>
-                    <a:lstStyle/>
-                    <a:p>
-                      <a:r>
-                        <a:rPr lang="en-US" sz="1200" dirty="0"/>
-                        <a:t>Categorical</a:t>
-                      </a:r>
-                      <a:endParaRPr lang="en-GB" sz="1200" dirty="0"/>
-                    </a:p>
-                  </a:txBody>
-                  <a:tcPr/>
-                </a:tc>
-                <a:extLst>
-                  <a:ext uri="{0D108BD9-81ED-4DB2-BD59-A6C34878D82A}">
-                    <a16:rowId xmlns:a16="http://schemas.microsoft.com/office/drawing/2014/main" val="2473242010"/>
-                  </a:ext>
-                </a:extLst>
-              </a:tr>
-            </a:tbl>
-          </a:graphicData>
-        </a:graphic>
-      </p:graphicFrame>
-      <p:sp>
-        <p:nvSpPr>
-          <p:cNvPr id="10" name="Rectangle 9">
-            <a:extLst>
-              <a:ext uri="{FF2B5EF4-FFF2-40B4-BE49-F238E27FC236}">
-                <a16:creationId xmlns:a16="http://schemas.microsoft.com/office/drawing/2014/main" id="{61114EC5-034B-1ADA-C1F8-62FDCCE2A9A4}"/>
-              </a:ext>
-            </a:extLst>
-          </p:cNvPr>
-          <p:cNvSpPr/>
-          <p:nvPr/>
-        </p:nvSpPr>
-        <p:spPr>
-          <a:xfrm>
-            <a:off x="5130744" y="5656129"/>
-            <a:ext cx="1398030" cy="724214"/>
-          </a:xfrm>
-          <a:prstGeom prst="rect">
-            <a:avLst/>
-          </a:prstGeom>
-          <a:ln w="38100"/>
-        </p:spPr>
-        <p:style>
-          <a:lnRef idx="2">
-            <a:schemeClr val="accent1">
-              <a:shade val="50000"/>
-            </a:schemeClr>
-          </a:lnRef>
-          <a:fillRef idx="1">
-            <a:schemeClr val="accent1"/>
-          </a:fillRef>
-          <a:effectRef idx="0">
-            <a:schemeClr val="accent1"/>
-          </a:effectRef>
-          <a:fontRef idx="minor">
-            <a:schemeClr val="lt1"/>
-          </a:fontRef>
-        </p:style>
-        <p:txBody>
-          <a:bodyPr rtlCol="0" anchor="ctr"/>
-          <a:lstStyle/>
-          <a:p>
-            <a:pPr algn="ctr"/>
-            <a:r>
-              <a:rPr lang="en-US" dirty="0"/>
-              <a:t>Before Cleaning</a:t>
-            </a:r>
-            <a:endParaRPr lang="en-GB" dirty="0"/>
-          </a:p>
-        </p:txBody>
-      </p:sp>
-      <p:sp>
-        <p:nvSpPr>
-          <p:cNvPr id="12" name="Rectangle 11">
-            <a:extLst>
-              <a:ext uri="{FF2B5EF4-FFF2-40B4-BE49-F238E27FC236}">
-                <a16:creationId xmlns:a16="http://schemas.microsoft.com/office/drawing/2014/main" id="{6DA0385D-A5DD-C169-AF26-24FFB0DB2E30}"/>
-              </a:ext>
-            </a:extLst>
-          </p:cNvPr>
-          <p:cNvSpPr/>
-          <p:nvPr/>
-        </p:nvSpPr>
-        <p:spPr>
-          <a:xfrm>
-            <a:off x="6841409" y="5656128"/>
-            <a:ext cx="1398030" cy="724214"/>
-          </a:xfrm>
-          <a:prstGeom prst="rect">
-            <a:avLst/>
-          </a:prstGeom>
-          <a:ln w="38100"/>
-        </p:spPr>
-        <p:style>
-          <a:lnRef idx="2">
-            <a:schemeClr val="accent1">
-              <a:shade val="50000"/>
-            </a:schemeClr>
-          </a:lnRef>
-          <a:fillRef idx="1">
-            <a:schemeClr val="accent1"/>
-          </a:fillRef>
-          <a:effectRef idx="0">
-            <a:schemeClr val="accent1"/>
-          </a:effectRef>
-          <a:fontRef idx="minor">
-            <a:schemeClr val="lt1"/>
-          </a:fontRef>
-        </p:style>
-        <p:txBody>
-          <a:bodyPr rtlCol="0" anchor="ctr"/>
-          <a:lstStyle/>
-          <a:p>
-            <a:pPr algn="ctr"/>
-            <a:r>
-              <a:rPr lang="en-US" dirty="0"/>
-              <a:t>After Cleaning</a:t>
-            </a:r>
-            <a:endParaRPr lang="en-GB" dirty="0"/>
-          </a:p>
-        </p:txBody>
-      </p:sp>
-      <p:sp>
-        <p:nvSpPr>
-          <p:cNvPr id="13" name="TextBox 12">
-            <a:extLst>
-              <a:ext uri="{FF2B5EF4-FFF2-40B4-BE49-F238E27FC236}">
-                <a16:creationId xmlns:a16="http://schemas.microsoft.com/office/drawing/2014/main" id="{CA1EAAA5-A1A2-3B0D-12F1-60B2E50A677D}"/>
-              </a:ext>
-            </a:extLst>
-          </p:cNvPr>
-          <p:cNvSpPr txBox="1"/>
-          <p:nvPr/>
-        </p:nvSpPr>
-        <p:spPr>
-          <a:xfrm>
-            <a:off x="5130744" y="7041596"/>
-            <a:ext cx="2320660" cy="830997"/>
-          </a:xfrm>
-          <a:prstGeom prst="rect">
-            <a:avLst/>
-          </a:prstGeom>
-          <a:noFill/>
-          <a:ln w="38100">
-            <a:noFill/>
-          </a:ln>
-        </p:spPr>
-        <p:txBody>
-          <a:bodyPr wrap="square" rtlCol="0">
-            <a:spAutoFit/>
-          </a:bodyPr>
-          <a:lstStyle/>
-          <a:p>
-            <a:r>
-              <a:rPr lang="en-US" sz="1200" dirty="0">
-                <a:solidFill>
-                  <a:prstClr val="black"/>
-                </a:solidFill>
-                <a:latin typeface="Calibri" panose="020F0502020204030204"/>
-              </a:rPr>
-              <a:t>Explain here how you chose the hyper parameter settings to explore and how you ran your experiments.</a:t>
-            </a:r>
-            <a:endParaRPr lang="en-GB" sz="1200" dirty="0">
-              <a:solidFill>
-                <a:prstClr val="black"/>
-              </a:solidFill>
-              <a:latin typeface="Calibri" panose="020F0502020204030204"/>
-            </a:endParaRPr>
-          </a:p>
-        </p:txBody>
-      </p:sp>
-      <p:sp>
-        <p:nvSpPr>
-          <p:cNvPr id="9" name="TextBox 8">
-            <a:extLst>
-              <a:ext uri="{FF2B5EF4-FFF2-40B4-BE49-F238E27FC236}">
-                <a16:creationId xmlns:a16="http://schemas.microsoft.com/office/drawing/2014/main" id="{F206284C-0E38-E129-A921-7FCAD4177EEC}"/>
-              </a:ext>
-            </a:extLst>
-          </p:cNvPr>
-          <p:cNvSpPr txBox="1"/>
-          <p:nvPr/>
-        </p:nvSpPr>
-        <p:spPr>
-          <a:xfrm>
-            <a:off x="475353" y="745082"/>
-            <a:ext cx="4211646" cy="25306928"/>
-          </a:xfrm>
-          <a:prstGeom prst="rect">
-            <a:avLst/>
-          </a:prstGeom>
-          <a:noFill/>
-          <a:ln w="38100">
-            <a:solidFill>
-              <a:schemeClr val="accent1">
-                <a:lumMod val="60000"/>
-                <a:lumOff val="40000"/>
-              </a:schemeClr>
-            </a:solidFill>
-          </a:ln>
-        </p:spPr>
-        <p:txBody>
-          <a:bodyPr wrap="square" lIns="91440" tIns="45720" rIns="91440" bIns="45720" anchor="t">
-            <a:spAutoFit/>
-          </a:bodyPr>
-          <a:lstStyle/>
-          <a:p>
-            <a:pPr>
-              <a:tabLst>
-                <a:tab pos="219075" algn="l"/>
-              </a:tabLst>
-            </a:pPr>
-            <a:r>
-              <a:rPr lang="en-GB" sz="2000" dirty="0"/>
-              <a:t>2. Project Methodology</a:t>
-            </a:r>
-          </a:p>
-          <a:p>
-            <a:pPr>
-              <a:buFont typeface="+mj-lt"/>
-              <a:buAutoNum type="arabicPeriod"/>
-              <a:tabLst>
-                <a:tab pos="219075" algn="l"/>
-              </a:tabLst>
-            </a:pPr>
-            <a:r>
-              <a:rPr lang="en-GB" sz="1050" b="1" dirty="0"/>
-              <a:t>Task Understanding</a:t>
-            </a:r>
-          </a:p>
-          <a:p>
-            <a:pPr>
-              <a:tabLst>
-                <a:tab pos="219075" algn="l"/>
-              </a:tabLst>
-            </a:pPr>
-            <a:r>
-              <a:rPr lang="en-GB" sz="1050" dirty="0">
-                <a:ea typeface="Calibri"/>
-                <a:cs typeface="Calibri"/>
-              </a:rPr>
-              <a:t>This is a binary classification task with target variable failure, where probability of failure ≥ 0.5 means infrastructure failure. </a:t>
-            </a:r>
-          </a:p>
-          <a:p>
-            <a:pPr>
-              <a:tabLst>
-                <a:tab pos="219075" algn="l"/>
-              </a:tabLst>
-            </a:pPr>
-            <a:r>
-              <a:rPr lang="en-GB" sz="1050" i="1" u="sng" dirty="0">
-                <a:ea typeface="Calibri"/>
-                <a:cs typeface="Calibri"/>
-              </a:rPr>
-              <a:t>The goal </a:t>
-            </a:r>
-            <a:r>
-              <a:rPr lang="en-GB" sz="1050" dirty="0">
-                <a:ea typeface="Calibri"/>
-                <a:cs typeface="Calibri"/>
-              </a:rPr>
-              <a:t>is to predict the probability of the infrastructure failure in a city block during the monitoring period. </a:t>
-            </a:r>
-          </a:p>
-          <a:p>
-            <a:pPr>
-              <a:tabLst>
-                <a:tab pos="219075" algn="l"/>
-              </a:tabLst>
-            </a:pPr>
-            <a:r>
-              <a:rPr lang="en-GB" sz="1050" i="1" u="sng" dirty="0">
-                <a:ea typeface="Calibri"/>
-                <a:cs typeface="Calibri"/>
-              </a:rPr>
-              <a:t>It is important to note that a ’good model’ for this task should </a:t>
-            </a:r>
-          </a:p>
-          <a:p>
-            <a:pPr>
-              <a:buFont typeface="Wingdings" pitchFamily="2" charset="2"/>
-              <a:buChar char="ü"/>
-              <a:tabLst>
-                <a:tab pos="219075" algn="l"/>
-              </a:tabLst>
-            </a:pPr>
-            <a:r>
-              <a:rPr lang="en-GB" sz="1050" i="1" dirty="0">
-                <a:ea typeface="Calibri"/>
-                <a:cs typeface="Calibri"/>
-              </a:rPr>
-              <a:t>accurately predict infrastructure failure;</a:t>
-            </a:r>
-            <a:endParaRPr lang="en-GB" sz="1050" dirty="0">
-              <a:ea typeface="Calibri"/>
-              <a:cs typeface="Calibri"/>
-            </a:endParaRPr>
-          </a:p>
-          <a:p>
-            <a:pPr>
-              <a:buFont typeface="Wingdings" pitchFamily="2" charset="2"/>
-              <a:buChar char="ü"/>
-              <a:tabLst>
-                <a:tab pos="219075" algn="l"/>
-              </a:tabLst>
-            </a:pPr>
-            <a:r>
-              <a:rPr lang="en-GB" sz="1050" i="1" dirty="0">
-                <a:ea typeface="Calibri"/>
-                <a:cs typeface="Calibri"/>
-              </a:rPr>
-              <a:t>minimise false negative </a:t>
-            </a:r>
-            <a:r>
-              <a:rPr lang="en-GB" sz="1050" dirty="0">
-                <a:ea typeface="Calibri"/>
-                <a:cs typeface="Calibri"/>
-              </a:rPr>
-              <a:t>to avoid missing high-risk areas </a:t>
-            </a:r>
-          </a:p>
-          <a:p>
-            <a:pPr>
-              <a:tabLst>
-                <a:tab pos="219075" algn="l"/>
-              </a:tabLst>
-            </a:pPr>
-            <a:r>
-              <a:rPr lang="en-GB" sz="1050" dirty="0">
-                <a:ea typeface="Calibri"/>
-                <a:cs typeface="Calibri"/>
-              </a:rPr>
-              <a:t>(high Recall for failure is the most important metric for this task) ;</a:t>
-            </a:r>
-          </a:p>
-          <a:p>
-            <a:pPr>
-              <a:buFont typeface="Wingdings" pitchFamily="2" charset="2"/>
-              <a:buChar char="ü"/>
-              <a:tabLst>
-                <a:tab pos="219075" algn="l"/>
-              </a:tabLst>
-            </a:pPr>
-            <a:r>
-              <a:rPr lang="en-GB" sz="1050" i="1" dirty="0">
-                <a:ea typeface="Calibri"/>
-                <a:cs typeface="Calibri"/>
-              </a:rPr>
-              <a:t>generalise  well to unseen data</a:t>
-            </a:r>
-            <a:r>
-              <a:rPr lang="en-GB" sz="1050" dirty="0">
-                <a:ea typeface="Calibri"/>
-                <a:cs typeface="Calibri"/>
-              </a:rPr>
-              <a:t> to be useful in real-world applications. </a:t>
-            </a:r>
-          </a:p>
-          <a:p>
-            <a:pPr>
-              <a:tabLst>
-                <a:tab pos="219075" algn="l"/>
-              </a:tabLst>
-            </a:pPr>
-            <a:r>
-              <a:rPr lang="en-GB" sz="1050" dirty="0">
-                <a:ea typeface="Calibri"/>
-                <a:cs typeface="Calibri"/>
-              </a:rPr>
-              <a:t>In addition, it is important to identify which features have the greatest impact on failure, as this can provide valuable insights for decision-making and risk minimisation.</a:t>
-            </a:r>
-          </a:p>
-          <a:p>
-            <a:pPr>
-              <a:buFont typeface="+mj-lt"/>
-              <a:buAutoNum type="arabicPeriod" startAt="2"/>
-              <a:tabLst>
-                <a:tab pos="219075" algn="l"/>
-              </a:tabLst>
-            </a:pPr>
-            <a:r>
-              <a:rPr lang="en-GB" sz="1050" b="1" dirty="0">
-                <a:ea typeface="Calibri"/>
-                <a:cs typeface="Calibri"/>
-              </a:rPr>
-              <a:t>Data Understanding</a:t>
-            </a:r>
-          </a:p>
-          <a:p>
-            <a:pPr>
-              <a:tabLst>
-                <a:tab pos="219075" algn="l"/>
-              </a:tabLst>
-            </a:pPr>
-            <a:r>
-              <a:rPr lang="en-GB" sz="1050" i="1" u="sng" dirty="0">
-                <a:ea typeface="Calibri"/>
-                <a:cs typeface="Calibri"/>
-              </a:rPr>
-              <a:t>Inputs to the model: </a:t>
-            </a:r>
-            <a:r>
-              <a:rPr lang="en-GB" sz="1050" dirty="0">
-                <a:ea typeface="Calibri"/>
-                <a:cs typeface="Calibri"/>
-              </a:rPr>
-              <a:t>almost all of the input variables are continues numeric features which are describing infrastructure and environmental conditions. Only two of them (</a:t>
-            </a:r>
-            <a:r>
-              <a:rPr lang="en-GB" sz="1050" dirty="0" err="1">
-                <a:ea typeface="Calibri"/>
-                <a:cs typeface="Calibri"/>
-              </a:rPr>
-              <a:t>inspection_season</a:t>
-            </a:r>
-            <a:r>
-              <a:rPr lang="en-GB" sz="1050" dirty="0">
-                <a:ea typeface="Calibri"/>
-                <a:cs typeface="Calibri"/>
-              </a:rPr>
-              <a:t> and </a:t>
-            </a:r>
-            <a:r>
-              <a:rPr lang="en-GB" sz="1050" dirty="0" err="1">
-                <a:ea typeface="Calibri"/>
-                <a:cs typeface="Calibri"/>
-              </a:rPr>
-              <a:t>inspection_window</a:t>
-            </a:r>
-            <a:r>
-              <a:rPr lang="en-GB" sz="1050" dirty="0">
-                <a:ea typeface="Calibri"/>
-                <a:cs typeface="Calibri"/>
-              </a:rPr>
-              <a:t>) are categorical and need to be encoded by one-hot encoding. Additionally, there is one discrete numeric variable – </a:t>
-            </a:r>
-            <a:r>
-              <a:rPr lang="en-GB" sz="1050" dirty="0" err="1">
-                <a:ea typeface="Calibri"/>
-                <a:cs typeface="Calibri"/>
-              </a:rPr>
-              <a:t>inspector_id</a:t>
-            </a:r>
-            <a:r>
-              <a:rPr lang="en-GB" sz="1050" dirty="0">
-                <a:ea typeface="Calibri"/>
-                <a:cs typeface="Calibri"/>
-              </a:rPr>
-              <a:t>, - which identifies an inspector and not contain information about infrastructure, so it has almost nothing to do with failure. This variable adds an unnecessary dimension to the model, increase its complexity, and introduces more noise. Thus, it would be best just to remove it from the dataset. </a:t>
-            </a:r>
-          </a:p>
-          <a:p>
-            <a:pPr>
-              <a:tabLst>
-                <a:tab pos="219075" algn="l"/>
-              </a:tabLst>
-            </a:pPr>
-            <a:r>
-              <a:rPr lang="en-GB" sz="1050" i="1" u="sng" dirty="0">
-                <a:ea typeface="Calibri"/>
-                <a:cs typeface="Calibri"/>
-              </a:rPr>
-              <a:t>Output of the model</a:t>
-            </a:r>
-            <a:r>
-              <a:rPr lang="en-GB" sz="1050" dirty="0">
-                <a:ea typeface="Calibri"/>
-                <a:cs typeface="Calibri"/>
-              </a:rPr>
-              <a:t> is the binary categorical variable failure (target) which takes values 0 – for no infrastructure failure and 1 - for failure occurs. </a:t>
-            </a:r>
-          </a:p>
-          <a:p>
-            <a:pPr>
-              <a:tabLst>
-                <a:tab pos="219075" algn="l"/>
-              </a:tabLst>
-            </a:pPr>
-            <a:r>
-              <a:rPr lang="en-GB" sz="1050" i="1" u="sng" dirty="0">
-                <a:ea typeface="Calibri"/>
-                <a:cs typeface="Calibri"/>
-              </a:rPr>
-              <a:t>To solve this task</a:t>
-            </a:r>
-            <a:r>
-              <a:rPr lang="en-GB" sz="1050" dirty="0">
-                <a:ea typeface="Calibri"/>
-                <a:cs typeface="Calibri"/>
-              </a:rPr>
-              <a:t>, we cannot use conventional software because we do not know the exactly rules under which a failure occurs. Besides, many factors may influence the failure simultaneously and there may be complex dependencies between them. Machine Learning is the best way to solve this problem because it automatically finds pattern in the data, uses past observations, and build probability model. </a:t>
-            </a:r>
-          </a:p>
-          <a:p>
-            <a:pPr>
-              <a:tabLst>
-                <a:tab pos="219075" algn="l"/>
-              </a:tabLst>
-            </a:pPr>
-            <a:r>
-              <a:rPr lang="en-GB" sz="1050" i="1" dirty="0">
-                <a:ea typeface="Calibri"/>
-                <a:cs typeface="Calibri"/>
-              </a:rPr>
-              <a:t>It worth to emphasise that care must be taken to avoid overtraining the model and preventing data leakage. </a:t>
-            </a:r>
-          </a:p>
-          <a:p>
-            <a:pPr>
-              <a:tabLst>
-                <a:tab pos="219075" algn="l"/>
-              </a:tabLst>
-            </a:pPr>
-            <a:r>
-              <a:rPr lang="en-GB" sz="1050" i="1" u="sng" dirty="0">
-                <a:ea typeface="Calibri"/>
-                <a:cs typeface="Calibri"/>
-              </a:rPr>
-              <a:t>Plot the data</a:t>
-            </a:r>
-            <a:r>
-              <a:rPr lang="en-GB" sz="1050" dirty="0">
-                <a:ea typeface="Calibri"/>
-                <a:cs typeface="Calibri"/>
-              </a:rPr>
-              <a:t> for better data mining and possible errors identification. </a:t>
-            </a:r>
-          </a:p>
-          <a:p>
-            <a:pPr>
-              <a:tabLst>
-                <a:tab pos="219075" algn="l"/>
-              </a:tabLst>
-            </a:pPr>
-            <a:r>
-              <a:rPr lang="en-GB" sz="1050" i="1" dirty="0">
-                <a:ea typeface="Calibri"/>
-                <a:cs typeface="Calibri"/>
-              </a:rPr>
-              <a:t>Histograms show </a:t>
-            </a:r>
-            <a:r>
-              <a:rPr lang="en-GB" sz="1050" dirty="0">
-                <a:ea typeface="Calibri"/>
-                <a:cs typeface="Calibri"/>
-              </a:rPr>
-              <a:t>that some features (like </a:t>
-            </a:r>
-            <a:r>
-              <a:rPr lang="en-GB" sz="1050" dirty="0" err="1">
-                <a:ea typeface="Calibri"/>
-                <a:cs typeface="Calibri"/>
-              </a:rPr>
-              <a:t>structural_mass_ratio</a:t>
-            </a:r>
-            <a:r>
-              <a:rPr lang="en-GB" sz="1050" dirty="0">
-                <a:ea typeface="Calibri"/>
-                <a:cs typeface="Calibri"/>
-              </a:rPr>
-              <a:t>, </a:t>
-            </a:r>
-            <a:r>
-              <a:rPr lang="en-GB" sz="1050" dirty="0" err="1">
-                <a:ea typeface="Calibri"/>
-                <a:cs typeface="Calibri"/>
-              </a:rPr>
-              <a:t>surface_debris</a:t>
-            </a:r>
-            <a:r>
-              <a:rPr lang="en-GB" sz="1050" dirty="0">
-                <a:ea typeface="Calibri"/>
-                <a:cs typeface="Calibri"/>
-              </a:rPr>
-              <a:t>, </a:t>
-            </a:r>
-            <a:r>
-              <a:rPr lang="en-GB" sz="1050" dirty="0" err="1">
-                <a:ea typeface="Calibri"/>
-                <a:cs typeface="Calibri"/>
-              </a:rPr>
-              <a:t>infrastructure_age</a:t>
-            </a:r>
-            <a:r>
-              <a:rPr lang="en-GB" sz="1050" dirty="0">
-                <a:ea typeface="Calibri"/>
-                <a:cs typeface="Calibri"/>
-              </a:rPr>
-              <a:t>, </a:t>
-            </a:r>
-            <a:r>
-              <a:rPr lang="en-GB" sz="1050" dirty="0" err="1">
-                <a:ea typeface="Calibri"/>
-                <a:cs typeface="Calibri"/>
-              </a:rPr>
-              <a:t>moisture_stress</a:t>
-            </a:r>
-            <a:r>
-              <a:rPr lang="en-GB" sz="1050" dirty="0">
-                <a:ea typeface="Calibri"/>
-                <a:cs typeface="Calibri"/>
-              </a:rPr>
-              <a:t>, </a:t>
-            </a:r>
-            <a:r>
-              <a:rPr lang="en-GB" sz="1050" dirty="0" err="1">
-                <a:ea typeface="Calibri"/>
-                <a:cs typeface="Calibri"/>
-              </a:rPr>
-              <a:t>recent_precipitation</a:t>
-            </a:r>
-            <a:r>
-              <a:rPr lang="en-GB" sz="1050" dirty="0">
-                <a:ea typeface="Calibri"/>
-                <a:cs typeface="Calibri"/>
-              </a:rPr>
-              <a:t>) have significant impact on failure, where higher values increase probability of failure. And histogram of of </a:t>
-            </a:r>
-            <a:r>
-              <a:rPr lang="en-GB" sz="1050" dirty="0" err="1">
-                <a:ea typeface="Calibri"/>
-                <a:cs typeface="Calibri"/>
-              </a:rPr>
-              <a:t>inspection_season</a:t>
-            </a:r>
-            <a:r>
-              <a:rPr lang="en-GB" sz="1050" dirty="0">
-                <a:ea typeface="Calibri"/>
-                <a:cs typeface="Calibri"/>
-              </a:rPr>
-              <a:t> shows that failures occur mostly in summer period. </a:t>
-            </a:r>
-          </a:p>
-          <a:p>
-            <a:pPr>
-              <a:tabLst>
-                <a:tab pos="219075" algn="l"/>
-              </a:tabLst>
-            </a:pPr>
-            <a:r>
-              <a:rPr lang="en-GB" sz="1050" dirty="0">
-                <a:ea typeface="Calibri"/>
-                <a:cs typeface="Calibri"/>
-              </a:rPr>
-              <a:t>By examine the distribution, it becomes clear that there are some errors in the dataset. </a:t>
-            </a:r>
-          </a:p>
-          <a:p>
-            <a:pPr>
-              <a:buFont typeface="+mj-lt"/>
-              <a:buAutoNum type="arabicPeriod" startAt="3"/>
-              <a:tabLst>
-                <a:tab pos="219075" algn="l"/>
-              </a:tabLst>
-            </a:pPr>
-            <a:r>
-              <a:rPr lang="en-GB" sz="1050" b="1" dirty="0">
-                <a:ea typeface="Calibri"/>
-                <a:cs typeface="Calibri"/>
-              </a:rPr>
-              <a:t>Data Preparation</a:t>
-            </a:r>
-          </a:p>
-          <a:p>
-            <a:pPr marL="7938" indent="-7938">
-              <a:buFont typeface="Arial" panose="020B0604020202020204" pitchFamily="34" charset="0"/>
-              <a:buChar char="•"/>
-              <a:tabLst>
-                <a:tab pos="219075" algn="l"/>
-              </a:tabLst>
-            </a:pPr>
-            <a:r>
-              <a:rPr lang="en-GB" sz="1050" dirty="0">
-                <a:ea typeface="Calibri"/>
-                <a:cs typeface="Calibri"/>
-              </a:rPr>
-              <a:t>  Afte visualising the data, the </a:t>
-            </a:r>
-            <a:r>
-              <a:rPr lang="en-GB" sz="1050" dirty="0" err="1">
-                <a:ea typeface="Calibri"/>
-                <a:cs typeface="Calibri"/>
-              </a:rPr>
-              <a:t>inspector_id</a:t>
-            </a:r>
-            <a:r>
-              <a:rPr lang="en-GB" sz="1050" dirty="0">
-                <a:ea typeface="Calibri"/>
-                <a:cs typeface="Calibri"/>
-              </a:rPr>
-              <a:t>  feature appears to have a flat distribution and therefore, is not useful for prediction. As mentioned before, it should be removed from the dataset at this stage. </a:t>
-            </a:r>
-          </a:p>
-          <a:p>
-            <a:pPr marL="7938" indent="-7938">
-              <a:buFont typeface="Arial" panose="020B0604020202020204" pitchFamily="34" charset="0"/>
-              <a:buChar char="•"/>
-              <a:tabLst>
-                <a:tab pos="219075" algn="l"/>
-              </a:tabLst>
-            </a:pPr>
-            <a:r>
-              <a:rPr lang="en-GB" sz="1050" dirty="0">
-                <a:ea typeface="Calibri"/>
-                <a:cs typeface="Calibri"/>
-              </a:rPr>
-              <a:t>  Besides, there are some mistakes can be seen in categorical values (</a:t>
-            </a:r>
-            <a:r>
-              <a:rPr lang="en-GB" sz="1050" dirty="0" err="1">
-                <a:ea typeface="Calibri"/>
-                <a:cs typeface="Calibri"/>
-              </a:rPr>
-              <a:t>sumer</a:t>
-            </a:r>
-            <a:r>
-              <a:rPr lang="en-GB" sz="1050" dirty="0">
-                <a:ea typeface="Calibri"/>
-                <a:cs typeface="Calibri"/>
-              </a:rPr>
-              <a:t> instead of summer and morni1ng instead of morning). It is appropriate to fix them before splitting the data. </a:t>
-            </a:r>
-          </a:p>
-          <a:p>
-            <a:pPr marL="7938" indent="-7938">
-              <a:buFont typeface="Arial" panose="020B0604020202020204" pitchFamily="34" charset="0"/>
-              <a:buChar char="•"/>
-              <a:tabLst>
-                <a:tab pos="219075" algn="l"/>
-              </a:tabLst>
-            </a:pPr>
-            <a:r>
-              <a:rPr lang="en-GB" sz="1050" dirty="0">
-                <a:ea typeface="Calibri"/>
-                <a:cs typeface="Calibri"/>
-              </a:rPr>
-              <a:t>  Additionally, there are 0.2% missing values</a:t>
-            </a:r>
-            <a:r>
-              <a:rPr lang="ru-RU" sz="1050" dirty="0">
-                <a:ea typeface="Calibri"/>
-                <a:cs typeface="Calibri"/>
-              </a:rPr>
-              <a:t> (</a:t>
-            </a:r>
-            <a:r>
-              <a:rPr lang="en-GB" sz="1050" dirty="0">
-                <a:ea typeface="Calibri"/>
-                <a:cs typeface="Calibri"/>
-              </a:rPr>
-              <a:t>only 11 instances in the dataset), and the best way here is to simply delete these rows  rather than impute impute values. Deleting such a small amount of data is unlikely to affect model performance and it is better option than attempting to estimate missing values. </a:t>
-            </a:r>
-          </a:p>
-          <a:p>
-            <a:pPr marL="7938" indent="-7938">
-              <a:buFont typeface="Arial" panose="020B0604020202020204" pitchFamily="34" charset="0"/>
-              <a:buChar char="•"/>
-              <a:tabLst>
-                <a:tab pos="219075" algn="l"/>
-              </a:tabLst>
-            </a:pPr>
-            <a:r>
-              <a:rPr lang="en-GB" sz="1050" dirty="0">
-                <a:ea typeface="Calibri"/>
-                <a:cs typeface="Calibri"/>
-              </a:rPr>
-              <a:t>  Splitting the data into 70% of training data and 30% of of test data. </a:t>
-            </a:r>
-          </a:p>
-          <a:p>
-            <a:pPr marL="7938" indent="-7938">
-              <a:buFont typeface="Arial" panose="020B0604020202020204" pitchFamily="34" charset="0"/>
-              <a:buChar char="•"/>
-              <a:tabLst>
-                <a:tab pos="219075" algn="l"/>
-              </a:tabLst>
-            </a:pPr>
-            <a:r>
-              <a:rPr lang="en-GB" sz="1050" dirty="0">
-                <a:ea typeface="Calibri"/>
-                <a:cs typeface="Calibri"/>
-              </a:rPr>
-              <a:t>  There is an outlier in </a:t>
-            </a:r>
-            <a:r>
-              <a:rPr lang="en-GB" sz="1050" dirty="0" err="1">
-                <a:ea typeface="Calibri"/>
-                <a:cs typeface="Calibri"/>
-              </a:rPr>
-              <a:t>material_flexibility</a:t>
-            </a:r>
-            <a:r>
-              <a:rPr lang="en-GB" sz="1050" dirty="0">
-                <a:ea typeface="Calibri"/>
-                <a:cs typeface="Calibri"/>
-              </a:rPr>
-              <a:t> feature (≈90) which should be deleted. </a:t>
-            </a:r>
-          </a:p>
-          <a:p>
-            <a:pPr marL="7938" indent="-7938">
-              <a:buFont typeface="Arial" panose="020B0604020202020204" pitchFamily="34" charset="0"/>
-              <a:buChar char="•"/>
-              <a:tabLst>
-                <a:tab pos="219075" algn="l"/>
-              </a:tabLst>
-            </a:pPr>
-            <a:r>
-              <a:rPr lang="en-GB" sz="1050" dirty="0">
-                <a:ea typeface="Calibri"/>
-                <a:cs typeface="Calibri"/>
-              </a:rPr>
-              <a:t>  Categorical </a:t>
-            </a:r>
-            <a:r>
-              <a:rPr lang="en-GB" sz="1050" dirty="0" err="1">
-                <a:ea typeface="Calibri"/>
-                <a:cs typeface="Calibri"/>
-              </a:rPr>
-              <a:t>varialbles</a:t>
-            </a:r>
-            <a:r>
-              <a:rPr lang="en-GB" sz="1050" dirty="0">
-                <a:ea typeface="Calibri"/>
-                <a:cs typeface="Calibri"/>
-              </a:rPr>
-              <a:t> </a:t>
-            </a:r>
-            <a:r>
-              <a:rPr lang="en-GB" sz="1050" dirty="0" err="1">
-                <a:ea typeface="Calibri"/>
-                <a:cs typeface="Calibri"/>
-              </a:rPr>
-              <a:t>inspection_season</a:t>
-            </a:r>
-            <a:r>
-              <a:rPr lang="en-GB" sz="1050" dirty="0">
-                <a:ea typeface="Calibri"/>
-                <a:cs typeface="Calibri"/>
-              </a:rPr>
-              <a:t> and </a:t>
-            </a:r>
-            <a:r>
-              <a:rPr lang="en-GB" sz="1050" dirty="0" err="1">
-                <a:ea typeface="Calibri"/>
-                <a:cs typeface="Calibri"/>
-              </a:rPr>
-              <a:t>inspection_window</a:t>
-            </a:r>
-            <a:r>
-              <a:rPr lang="en-GB" sz="1050" dirty="0">
-                <a:ea typeface="Calibri"/>
-                <a:cs typeface="Calibri"/>
-              </a:rPr>
-              <a:t> should be encoded by one-hot encoding at this stage as well. </a:t>
-            </a:r>
-          </a:p>
-          <a:p>
-            <a:pPr marL="7938" indent="-7938">
-              <a:buFont typeface="Arial" panose="020B0604020202020204" pitchFamily="34" charset="0"/>
-              <a:buChar char="•"/>
-              <a:tabLst>
-                <a:tab pos="219075" algn="l"/>
-              </a:tabLst>
-            </a:pPr>
-            <a:r>
-              <a:rPr lang="en-GB" sz="1050" dirty="0">
-                <a:ea typeface="Calibri"/>
-                <a:cs typeface="Calibri"/>
-              </a:rPr>
-              <a:t>  The variables have different scales, so normalisation must be done before modelling. </a:t>
-            </a:r>
-          </a:p>
-          <a:p>
-            <a:pPr>
-              <a:tabLst>
-                <a:tab pos="219075" algn="l"/>
-              </a:tabLst>
-            </a:pPr>
-            <a:r>
-              <a:rPr lang="en-GB" sz="1050" dirty="0">
-                <a:ea typeface="Calibri"/>
-                <a:cs typeface="Calibri"/>
-              </a:rPr>
-              <a:t>Now, our data is ready for the modelling. </a:t>
-            </a:r>
-          </a:p>
-          <a:p>
-            <a:pPr marL="228600" indent="-228600">
-              <a:buFont typeface="+mj-lt"/>
-              <a:buAutoNum type="arabicPeriod" startAt="4"/>
-              <a:tabLst>
-                <a:tab pos="219075" algn="l"/>
-              </a:tabLst>
-            </a:pPr>
-            <a:r>
-              <a:rPr lang="en-GB" sz="1050" b="1" dirty="0">
-                <a:ea typeface="Calibri"/>
-                <a:cs typeface="Calibri"/>
-              </a:rPr>
-              <a:t>Building Logistic Regression Model</a:t>
-            </a:r>
-          </a:p>
-          <a:p>
-            <a:pPr>
-              <a:tabLst>
-                <a:tab pos="219075" algn="l"/>
-              </a:tabLst>
-            </a:pPr>
-            <a:r>
-              <a:rPr lang="en-GB" sz="1050" dirty="0">
-                <a:ea typeface="Calibri"/>
-                <a:cs typeface="Calibri"/>
-              </a:rPr>
-              <a:t>On 5-folds cross validation data the model shows the AUC = 0.953, which means the there is a 95.3% probability that the model will assign a higher score to a true failure case than to a non-failure case. </a:t>
-            </a:r>
-          </a:p>
-          <a:p>
-            <a:pPr>
-              <a:tabLst>
-                <a:tab pos="219075" algn="l"/>
-              </a:tabLst>
-            </a:pPr>
-            <a:r>
-              <a:rPr lang="en-GB" sz="1050" dirty="0">
-                <a:ea typeface="Calibri"/>
-                <a:cs typeface="Calibri"/>
-              </a:rPr>
-              <a:t>Recall metric = 0.889, meaning that 88.9% of actual failure cases were correctly identified. </a:t>
-            </a:r>
-          </a:p>
-          <a:p>
-            <a:pPr marL="171450" indent="-171450">
-              <a:buFont typeface="Arial" panose="020B0604020202020204" pitchFamily="34" charset="0"/>
-              <a:buChar char="•"/>
-              <a:tabLst>
-                <a:tab pos="219075" algn="l"/>
-              </a:tabLst>
-            </a:pPr>
-            <a:r>
-              <a:rPr lang="en-GB" sz="1050" dirty="0">
-                <a:ea typeface="Calibri"/>
-                <a:cs typeface="Calibri"/>
-              </a:rPr>
-              <a:t>L1-regularisation (Lasso) was applied , with the hyperparameter </a:t>
-            </a:r>
-            <a:r>
-              <a:rPr lang="en-GB" sz="1050" i="1" dirty="0">
-                <a:ea typeface="Calibri"/>
-                <a:cs typeface="Calibri"/>
-              </a:rPr>
-              <a:t>C</a:t>
-            </a:r>
-            <a:r>
-              <a:rPr lang="en-GB" sz="1050" dirty="0">
-                <a:ea typeface="Calibri"/>
-                <a:cs typeface="Calibri"/>
-              </a:rPr>
-              <a:t> tuned across multiple values (0.001, 0.01, 0.05, 0.1, 0.2, 1, 10, 100, 1000) to control the strength of regularisation. The optimal performance was achieved at </a:t>
-            </a:r>
-            <a:r>
-              <a:rPr lang="en-GB" sz="1050" i="1" dirty="0">
-                <a:ea typeface="Calibri"/>
-                <a:cs typeface="Calibri"/>
-              </a:rPr>
-              <a:t>C = 0.05</a:t>
-            </a:r>
-            <a:r>
-              <a:rPr lang="en-GB" sz="1050" dirty="0">
-                <a:ea typeface="Calibri"/>
-                <a:cs typeface="Calibri"/>
-              </a:rPr>
-              <a:t>, yielding a Recall = 0.915 and AUC = 0.969.</a:t>
-            </a:r>
-          </a:p>
-          <a:p>
-            <a:pPr marL="171450" indent="-171450">
-              <a:buFont typeface="Arial" panose="020B0604020202020204" pitchFamily="34" charset="0"/>
-              <a:buChar char="•"/>
-              <a:tabLst>
-                <a:tab pos="219075" algn="l"/>
-              </a:tabLst>
-            </a:pPr>
-            <a:r>
-              <a:rPr lang="en-GB" sz="1050" dirty="0">
-                <a:ea typeface="Calibri"/>
-                <a:cs typeface="Calibri"/>
-              </a:rPr>
-              <a:t>L2-regularisation (Ridge) was applied , with the same rage of hyperparameter </a:t>
-            </a:r>
-            <a:r>
-              <a:rPr lang="en-GB" sz="1050" i="1" dirty="0">
-                <a:ea typeface="Calibri"/>
-                <a:cs typeface="Calibri"/>
-              </a:rPr>
-              <a:t>C. </a:t>
-            </a:r>
-            <a:r>
-              <a:rPr lang="en-GB" sz="1050" dirty="0">
-                <a:ea typeface="Calibri"/>
-                <a:cs typeface="Calibri"/>
-              </a:rPr>
-              <a:t>The best result was achieved with the </a:t>
-            </a:r>
-            <a:r>
-              <a:rPr lang="en-GB" sz="1050" i="1" dirty="0">
-                <a:ea typeface="Calibri"/>
-                <a:cs typeface="Calibri"/>
-              </a:rPr>
-              <a:t>C = 0.05 and balancing class distribution</a:t>
-            </a:r>
-            <a:r>
-              <a:rPr lang="en-GB" sz="1050" dirty="0">
-                <a:ea typeface="Calibri"/>
-                <a:cs typeface="Calibri"/>
-              </a:rPr>
-              <a:t>, yielding a </a:t>
-            </a:r>
-            <a:r>
-              <a:rPr lang="en-GB" sz="1050" b="1" dirty="0">
-                <a:ea typeface="Calibri"/>
-                <a:cs typeface="Calibri"/>
-              </a:rPr>
-              <a:t>Recall = 0.919 </a:t>
-            </a:r>
-            <a:r>
-              <a:rPr lang="en-GB" sz="1050" dirty="0">
-                <a:ea typeface="Calibri"/>
-                <a:cs typeface="Calibri"/>
-              </a:rPr>
-              <a:t>and </a:t>
-            </a:r>
-            <a:r>
-              <a:rPr lang="en-GB" sz="1050" b="1" dirty="0">
-                <a:ea typeface="Calibri"/>
-                <a:cs typeface="Calibri"/>
-              </a:rPr>
-              <a:t>AUC = 0.971</a:t>
-            </a:r>
-            <a:r>
-              <a:rPr lang="en-GB" sz="1050" dirty="0">
-                <a:ea typeface="Calibri"/>
-                <a:cs typeface="Calibri"/>
-              </a:rPr>
-              <a:t>.</a:t>
-            </a:r>
-          </a:p>
-          <a:p>
-            <a:pPr marL="228600" indent="-228600">
-              <a:buFont typeface="+mj-lt"/>
-              <a:buAutoNum type="arabicPeriod" startAt="5"/>
-              <a:tabLst>
-                <a:tab pos="219075" algn="l"/>
-              </a:tabLst>
-            </a:pPr>
-            <a:r>
-              <a:rPr lang="en-GB" sz="1050" b="1" dirty="0">
-                <a:ea typeface="Calibri"/>
-                <a:cs typeface="Calibri"/>
-              </a:rPr>
-              <a:t>Building Decision Tree Model</a:t>
-            </a:r>
-          </a:p>
-          <a:p>
-            <a:pPr>
-              <a:tabLst>
-                <a:tab pos="219075" algn="l"/>
-              </a:tabLst>
-            </a:pPr>
-            <a:r>
-              <a:rPr lang="en-GB" sz="1050" dirty="0">
-                <a:ea typeface="Calibri"/>
-                <a:cs typeface="Calibri"/>
-              </a:rPr>
-              <a:t>Different hyperparameters were examined, including: </a:t>
-            </a:r>
-          </a:p>
-          <a:p>
-            <a:pPr marL="171450" indent="-171450">
-              <a:buFont typeface="Arial" panose="020B0604020202020204" pitchFamily="34" charset="0"/>
-              <a:buChar char="•"/>
-              <a:tabLst>
-                <a:tab pos="219075" algn="l"/>
-              </a:tabLst>
-            </a:pPr>
-            <a:r>
-              <a:rPr lang="en-GB" sz="1050" dirty="0">
-                <a:ea typeface="Calibri"/>
-                <a:cs typeface="Calibri"/>
-              </a:rPr>
-              <a:t>Minimum number of instances in leaves (2, 5, 10, 20);</a:t>
-            </a:r>
-          </a:p>
-          <a:p>
-            <a:pPr marL="171450" indent="-171450">
-              <a:buFont typeface="Arial" panose="020B0604020202020204" pitchFamily="34" charset="0"/>
-              <a:buChar char="•"/>
-              <a:tabLst>
-                <a:tab pos="219075" algn="l"/>
-              </a:tabLst>
-            </a:pPr>
-            <a:r>
-              <a:rPr lang="en-GB" sz="1050" dirty="0">
-                <a:ea typeface="Calibri"/>
-                <a:cs typeface="Calibri"/>
-              </a:rPr>
-              <a:t>Split subsets (5, 10, 20), which did not have any effect on the results;</a:t>
-            </a:r>
-          </a:p>
-          <a:p>
-            <a:pPr marL="171450" indent="-171450">
-              <a:buFont typeface="Arial" panose="020B0604020202020204" pitchFamily="34" charset="0"/>
-              <a:buChar char="•"/>
-              <a:tabLst>
-                <a:tab pos="219075" algn="l"/>
-              </a:tabLst>
-            </a:pPr>
-            <a:r>
-              <a:rPr lang="en-GB" sz="1050" dirty="0">
-                <a:ea typeface="Calibri"/>
-                <a:cs typeface="Calibri"/>
-              </a:rPr>
-              <a:t>Maximum tree depth (2, 5, 8, 10). </a:t>
-            </a:r>
-          </a:p>
-          <a:p>
-            <a:pPr>
-              <a:tabLst>
-                <a:tab pos="219075" algn="l"/>
-              </a:tabLst>
-            </a:pPr>
-            <a:r>
-              <a:rPr lang="en-GB" sz="1050" dirty="0">
-                <a:ea typeface="Calibri"/>
-                <a:cs typeface="Calibri"/>
-              </a:rPr>
-              <a:t>The best performance was achieved with 10 instances in leaves, 5 split subsets and a maximum tree depth of 10, resulting in </a:t>
-            </a:r>
-            <a:r>
-              <a:rPr lang="en-GB" sz="1050" b="1" dirty="0">
-                <a:ea typeface="Calibri"/>
-                <a:cs typeface="Calibri"/>
-              </a:rPr>
-              <a:t>Recall = 0.889 </a:t>
-            </a:r>
-            <a:r>
-              <a:rPr lang="en-GB" sz="1050" dirty="0">
-                <a:ea typeface="Calibri"/>
-                <a:cs typeface="Calibri"/>
-              </a:rPr>
-              <a:t>and </a:t>
-            </a:r>
-            <a:r>
-              <a:rPr lang="en-GB" sz="1050" b="1" dirty="0">
-                <a:ea typeface="Calibri"/>
-                <a:cs typeface="Calibri"/>
-              </a:rPr>
-              <a:t>AUC = 0.938</a:t>
-            </a:r>
-            <a:r>
-              <a:rPr lang="en-GB" sz="1050" dirty="0">
-                <a:ea typeface="Calibri"/>
-                <a:cs typeface="Calibri"/>
-              </a:rPr>
-              <a:t>. </a:t>
-            </a:r>
-          </a:p>
-          <a:p>
-            <a:pPr marL="228600" indent="-228600">
-              <a:buFont typeface="+mj-lt"/>
-              <a:buAutoNum type="arabicPeriod" startAt="6"/>
-              <a:tabLst>
-                <a:tab pos="219075" algn="l"/>
-              </a:tabLst>
-            </a:pPr>
-            <a:r>
-              <a:rPr lang="en-GB" sz="1050" b="1" dirty="0">
-                <a:ea typeface="Calibri"/>
-                <a:cs typeface="Calibri"/>
-              </a:rPr>
-              <a:t>Building Neural Network Model</a:t>
-            </a:r>
-          </a:p>
-          <a:p>
-            <a:pPr>
-              <a:tabLst>
-                <a:tab pos="219075" algn="l"/>
-              </a:tabLst>
-            </a:pPr>
-            <a:r>
-              <a:rPr lang="en-GB" sz="1050" dirty="0">
-                <a:ea typeface="Calibri"/>
-                <a:cs typeface="Calibri"/>
-              </a:rPr>
-              <a:t>The following hyperparameters were examined on </a:t>
-            </a:r>
-            <a:r>
-              <a:rPr lang="en-GB" sz="1050" dirty="0"/>
-              <a:t>across multiple </a:t>
-            </a:r>
-            <a:r>
-              <a:rPr lang="en-GB" sz="1050" dirty="0">
-                <a:ea typeface="Calibri"/>
-                <a:cs typeface="Calibri"/>
-              </a:rPr>
-              <a:t>MLPs:</a:t>
-            </a:r>
-          </a:p>
-          <a:p>
-            <a:pPr marL="171450" indent="-171450">
-              <a:buFont typeface="Arial" panose="020B0604020202020204" pitchFamily="34" charset="0"/>
-              <a:buChar char="•"/>
-              <a:tabLst>
-                <a:tab pos="219075" algn="l"/>
-              </a:tabLst>
-            </a:pPr>
-            <a:r>
-              <a:rPr lang="en-GB" sz="1050" dirty="0">
-                <a:ea typeface="Calibri"/>
-                <a:cs typeface="Calibri"/>
-              </a:rPr>
-              <a:t>Neurons in hidden layers (10, 20, 50, 100, 200, 300);</a:t>
-            </a:r>
-          </a:p>
-          <a:p>
-            <a:pPr marL="171450" indent="-171450">
-              <a:buFont typeface="Arial" panose="020B0604020202020204" pitchFamily="34" charset="0"/>
-              <a:buChar char="•"/>
-              <a:tabLst>
-                <a:tab pos="219075" algn="l"/>
-              </a:tabLst>
-            </a:pPr>
-            <a:r>
-              <a:rPr lang="en-GB" sz="1050" dirty="0">
-                <a:ea typeface="Calibri"/>
-                <a:cs typeface="Calibri"/>
-              </a:rPr>
-              <a:t>Activation functions (</a:t>
-            </a:r>
-            <a:r>
-              <a:rPr lang="en-GB" sz="1050" dirty="0" err="1">
-                <a:ea typeface="Calibri"/>
-                <a:cs typeface="Calibri"/>
-              </a:rPr>
-              <a:t>ReLu</a:t>
-            </a:r>
-            <a:r>
-              <a:rPr lang="en-GB" sz="1050" dirty="0">
-                <a:ea typeface="Calibri"/>
-                <a:cs typeface="Calibri"/>
-              </a:rPr>
-              <a:t>, tanh, logistic);</a:t>
-            </a:r>
-          </a:p>
-          <a:p>
-            <a:pPr marL="171450" indent="-171450">
-              <a:buFont typeface="Arial" panose="020B0604020202020204" pitchFamily="34" charset="0"/>
-              <a:buChar char="•"/>
-              <a:tabLst>
-                <a:tab pos="219075" algn="l"/>
-              </a:tabLst>
-            </a:pPr>
-            <a:r>
-              <a:rPr lang="en-GB" sz="1050" dirty="0">
-                <a:ea typeface="Calibri"/>
-                <a:cs typeface="Calibri"/>
-              </a:rPr>
-              <a:t>Solver (Adam, L-BFGS, SGD);</a:t>
-            </a:r>
-          </a:p>
-          <a:p>
-            <a:pPr marL="171450" indent="-171450">
-              <a:buFont typeface="Arial" panose="020B0604020202020204" pitchFamily="34" charset="0"/>
-              <a:buChar char="•"/>
-              <a:tabLst>
-                <a:tab pos="219075" algn="l"/>
-              </a:tabLst>
-            </a:pPr>
-            <a:r>
-              <a:rPr lang="en-GB" sz="1050" dirty="0">
-                <a:ea typeface="Calibri"/>
-                <a:cs typeface="Calibri"/>
-              </a:rPr>
-              <a:t>Regularisation (0.0001, 0.001, 0.01, 0.1, 1, 2, 3, 4, 5, 6, 7, 8, 10, 15);</a:t>
-            </a:r>
-          </a:p>
-          <a:p>
-            <a:pPr marL="171450" indent="-171450">
-              <a:buFont typeface="Arial" panose="020B0604020202020204" pitchFamily="34" charset="0"/>
-              <a:buChar char="•"/>
-              <a:tabLst>
-                <a:tab pos="219075" algn="l"/>
-              </a:tabLst>
-            </a:pPr>
-            <a:r>
-              <a:rPr lang="en-GB" sz="1050" dirty="0">
-                <a:ea typeface="Calibri"/>
-                <a:cs typeface="Calibri"/>
-              </a:rPr>
-              <a:t>Maximal number of iterations (50, 100, 200, 300, 400, 500, 700, 800, 1000)</a:t>
-            </a:r>
-          </a:p>
-          <a:p>
-            <a:pPr>
-              <a:tabLst>
-                <a:tab pos="219075" algn="l"/>
-              </a:tabLst>
-            </a:pPr>
-            <a:r>
-              <a:rPr lang="en-GB" sz="1050" dirty="0"/>
-              <a:t>The best-performing configuration consisted of 50 neurons in the hidden layer, a tanh activation function, the SGD solver and 200 </a:t>
-            </a:r>
-            <a:r>
-              <a:rPr lang="en-GB" sz="1050" dirty="0">
-                <a:ea typeface="Calibri"/>
-                <a:cs typeface="Calibri"/>
-              </a:rPr>
-              <a:t>epochs, resulting in </a:t>
-            </a:r>
-            <a:r>
-              <a:rPr lang="en-GB" sz="1050" b="1" dirty="0">
-                <a:ea typeface="Calibri"/>
-                <a:cs typeface="Calibri"/>
-              </a:rPr>
-              <a:t>Recall = 0.928 </a:t>
-            </a:r>
-            <a:r>
-              <a:rPr lang="en-GB" sz="1050" dirty="0">
-                <a:ea typeface="Calibri"/>
-                <a:cs typeface="Calibri"/>
-              </a:rPr>
-              <a:t>and </a:t>
-            </a:r>
-            <a:r>
-              <a:rPr lang="en-GB" sz="1050" b="1" dirty="0">
-                <a:ea typeface="Calibri"/>
-                <a:cs typeface="Calibri"/>
-              </a:rPr>
-              <a:t>AUC = 0.965</a:t>
-            </a:r>
-            <a:r>
-              <a:rPr lang="en-GB" sz="1050" dirty="0">
-                <a:ea typeface="Calibri"/>
-                <a:cs typeface="Calibri"/>
-              </a:rPr>
-              <a:t>. </a:t>
-            </a:r>
-          </a:p>
-          <a:p>
-            <a:pPr marL="228600" indent="-228600">
-              <a:buFont typeface="+mj-lt"/>
-              <a:buAutoNum type="arabicPeriod" startAt="7"/>
-              <a:tabLst>
-                <a:tab pos="219075" algn="l"/>
-              </a:tabLst>
-            </a:pPr>
-            <a:r>
-              <a:rPr lang="en-GB" sz="1050" b="1" dirty="0">
-                <a:cs typeface="Calibri"/>
-              </a:rPr>
-              <a:t>Feature Projection</a:t>
-            </a:r>
-            <a:endParaRPr lang="en-GB" sz="1200" b="1" dirty="0"/>
-          </a:p>
-          <a:p>
-            <a:pPr>
-              <a:tabLst>
-                <a:tab pos="219075" algn="l"/>
-              </a:tabLst>
-            </a:pPr>
-            <a:r>
-              <a:rPr lang="en-GB" sz="1200" i="1" dirty="0"/>
-              <a:t>Principal Component Analysis </a:t>
-            </a:r>
-            <a:r>
-              <a:rPr lang="en-GB" sz="1200" dirty="0"/>
-              <a:t>was applied to the dataset; however, it decreased the accuracy of the models. PCA reduced the number of dimension, but it also worsened the separability</a:t>
-            </a:r>
-            <a:r>
-              <a:rPr lang="ru-RU" sz="1200" dirty="0"/>
-              <a:t> </a:t>
-            </a:r>
-            <a:r>
-              <a:rPr lang="en-GB" sz="1200" dirty="0"/>
-              <a:t>by mixing the classes and losing important relationships between the features, which led to poorer model performance. </a:t>
-            </a:r>
-          </a:p>
-          <a:p>
-            <a:pPr>
-              <a:tabLst>
-                <a:tab pos="219075" algn="l"/>
-              </a:tabLst>
-            </a:pPr>
-            <a:r>
-              <a:rPr lang="en-GB" sz="1200" i="1" dirty="0"/>
-              <a:t>Manifold learning </a:t>
-            </a:r>
-            <a:r>
-              <a:rPr lang="en-GB" sz="1200" dirty="0"/>
-              <a:t>was also applied, but it resulted in a slight decrease in model accuracy as well.</a:t>
-            </a:r>
-          </a:p>
-          <a:p>
-            <a:pPr>
-              <a:tabLst>
-                <a:tab pos="219075" algn="l"/>
-              </a:tabLst>
-            </a:pPr>
-            <a:r>
-              <a:rPr lang="en-GB" sz="1200" i="1" dirty="0"/>
-              <a:t>Therefore, these methods were excluded from the final modelling pipeline. </a:t>
-            </a:r>
-          </a:p>
-          <a:p>
-            <a:pPr marL="228600" indent="-228600">
-              <a:buFont typeface="+mj-lt"/>
-              <a:buAutoNum type="arabicPeriod" startAt="8"/>
-              <a:tabLst>
-                <a:tab pos="219075" algn="l"/>
-              </a:tabLst>
-            </a:pPr>
-            <a:r>
-              <a:rPr lang="en-GB" sz="1200" b="1" dirty="0"/>
-              <a:t>Feature Selection</a:t>
-            </a:r>
-          </a:p>
-          <a:p>
-            <a:pPr>
-              <a:tabLst>
-                <a:tab pos="219075" algn="l"/>
-              </a:tabLst>
-            </a:pPr>
-            <a:r>
-              <a:rPr lang="en-GB" sz="1200" i="1" dirty="0"/>
-              <a:t>Filter-based (correlation</a:t>
-            </a:r>
-            <a:r>
-              <a:rPr lang="en-GB" sz="1200" dirty="0"/>
-              <a:t>/feature ranking</a:t>
-            </a:r>
-            <a:r>
-              <a:rPr lang="en-GB" sz="1200" i="1" dirty="0"/>
-              <a:t>) method </a:t>
-            </a:r>
-            <a:r>
-              <a:rPr lang="en-GB" sz="1200" dirty="0"/>
-              <a:t>was </a:t>
-            </a:r>
-            <a:r>
-              <a:rPr lang="en-GB" sz="1200" dirty="0" err="1"/>
-              <a:t>appliedto</a:t>
-            </a:r>
-            <a:r>
-              <a:rPr lang="en-GB" sz="1200" dirty="0"/>
-              <a:t> identify the most relevant features. The results showed that several features (</a:t>
-            </a:r>
-            <a:r>
-              <a:rPr lang="en-GB" sz="1200" dirty="0" err="1"/>
-              <a:t>inspection_window</a:t>
-            </a:r>
-            <a:r>
-              <a:rPr lang="en-GB" sz="1200" dirty="0"/>
-              <a:t>, </a:t>
-            </a:r>
-            <a:r>
-              <a:rPr lang="en-GB" sz="1200" dirty="0" err="1"/>
-              <a:t>inspection_season</a:t>
-            </a:r>
-            <a:r>
-              <a:rPr lang="en-GB" sz="1200" dirty="0"/>
-              <a:t>=autumn, </a:t>
-            </a:r>
-            <a:r>
-              <a:rPr lang="en-GB" sz="1200" dirty="0" err="1"/>
-              <a:t>inspection_season</a:t>
-            </a:r>
-            <a:r>
-              <a:rPr lang="en-GB" sz="1200" dirty="0"/>
-              <a:t>=spring, and </a:t>
-            </a:r>
-            <a:r>
-              <a:rPr lang="en-GB" sz="1200" dirty="0" err="1"/>
-              <a:t>vibration_exposure</a:t>
-            </a:r>
-            <a:r>
-              <a:rPr lang="en-GB" sz="1200" dirty="0"/>
-              <a:t>) had very low predictive value. After removing these weak features, model performance improved, with the following results:</a:t>
-            </a:r>
-          </a:p>
-          <a:p>
-            <a:pPr marL="228600" indent="-228600">
-              <a:buFont typeface="+mj-lt"/>
-              <a:buAutoNum type="arabicParenR"/>
-              <a:tabLst>
-                <a:tab pos="219075" algn="l"/>
-              </a:tabLst>
-            </a:pPr>
-            <a:r>
-              <a:rPr lang="en-GB" sz="1200" b="1" dirty="0"/>
-              <a:t>Logistic Regression: </a:t>
-            </a:r>
-            <a:r>
-              <a:rPr lang="en-GB" sz="1200" b="1" dirty="0">
-                <a:ea typeface="Calibri"/>
-                <a:cs typeface="Calibri"/>
-              </a:rPr>
-              <a:t>Recall = 0.935, AUC = 0.972;</a:t>
-            </a:r>
-          </a:p>
-          <a:p>
-            <a:pPr marL="228600" indent="-228600">
-              <a:buFont typeface="+mj-lt"/>
-              <a:buAutoNum type="arabicParenR"/>
-              <a:tabLst>
-                <a:tab pos="219075" algn="l"/>
-              </a:tabLst>
-            </a:pPr>
-            <a:r>
-              <a:rPr lang="en-GB" sz="1200" dirty="0">
-                <a:cs typeface="Calibri"/>
-              </a:rPr>
-              <a:t>Neural Network: Recall = 0.919, AUC = 0.971;</a:t>
-            </a:r>
-          </a:p>
-          <a:p>
-            <a:pPr marL="228600" indent="-228600">
-              <a:buFont typeface="+mj-lt"/>
-              <a:buAutoNum type="arabicParenR"/>
-              <a:tabLst>
-                <a:tab pos="219075" algn="l"/>
-              </a:tabLst>
-            </a:pPr>
-            <a:r>
-              <a:rPr lang="en-GB" sz="1200" dirty="0">
-                <a:cs typeface="Calibri"/>
-              </a:rPr>
-              <a:t>Decision Tree: Recall = 0.902, AUC = 0.918. </a:t>
-            </a:r>
-          </a:p>
-          <a:p>
-            <a:pPr>
-              <a:tabLst>
-                <a:tab pos="219075" algn="l"/>
-              </a:tabLst>
-            </a:pPr>
-            <a:r>
-              <a:rPr lang="en-GB" sz="1200" dirty="0"/>
-              <a:t>A wrapper-based approach</a:t>
-            </a:r>
-            <a:r>
-              <a:rPr lang="en-GB" sz="1200" i="1" dirty="0"/>
-              <a:t> </a:t>
-            </a:r>
-            <a:r>
-              <a:rPr lang="en-GB" sz="1200" dirty="0"/>
-              <a:t>was also applied, which confirmed the same best subset of 9 features, with the following results:</a:t>
-            </a:r>
-          </a:p>
-          <a:p>
-            <a:pPr marL="228600" indent="-228600">
-              <a:buFont typeface="+mj-lt"/>
-              <a:buAutoNum type="arabicParenR"/>
-              <a:tabLst>
-                <a:tab pos="219075" algn="l"/>
-              </a:tabLst>
-            </a:pPr>
-            <a:r>
-              <a:rPr lang="en-GB" sz="1200" b="1" dirty="0"/>
-              <a:t>Logistic Regression: </a:t>
-            </a:r>
-            <a:r>
-              <a:rPr lang="en-GB" sz="1200" b="1" dirty="0">
-                <a:ea typeface="Calibri"/>
-                <a:cs typeface="Calibri"/>
-              </a:rPr>
-              <a:t>Recall = 0.935, AUC = 0.971;</a:t>
-            </a:r>
-          </a:p>
-          <a:p>
-            <a:pPr marL="228600" indent="-228600">
-              <a:buFont typeface="+mj-lt"/>
-              <a:buAutoNum type="arabicParenR"/>
-              <a:tabLst>
-                <a:tab pos="219075" algn="l"/>
-              </a:tabLst>
-            </a:pPr>
-            <a:r>
-              <a:rPr lang="en-GB" sz="1200" dirty="0">
-                <a:cs typeface="Calibri"/>
-              </a:rPr>
-              <a:t>Neural Network: Recall = 0.932, AUC = 0.968;</a:t>
-            </a:r>
-          </a:p>
-          <a:p>
-            <a:pPr marL="228600" indent="-228600">
-              <a:buFont typeface="+mj-lt"/>
-              <a:buAutoNum type="arabicParenR"/>
-              <a:tabLst>
-                <a:tab pos="219075" algn="l"/>
-              </a:tabLst>
-            </a:pPr>
-            <a:r>
-              <a:rPr lang="en-GB" sz="1200" dirty="0">
-                <a:cs typeface="Calibri"/>
-              </a:rPr>
-              <a:t>Decision Tree: Recall = 0.899, AUC = 0.940. </a:t>
-            </a:r>
-          </a:p>
-          <a:p>
-            <a:pPr>
-              <a:tabLst>
-                <a:tab pos="219075" algn="l"/>
-              </a:tabLst>
-            </a:pPr>
-            <a:r>
-              <a:rPr lang="en-GB" sz="1200" i="1" dirty="0"/>
-              <a:t>Overall, Feature Selection reduced dimensionality, training time, model complexity, removed noise and improved model performance. </a:t>
-            </a:r>
-          </a:p>
-          <a:p>
-            <a:pPr>
-              <a:tabLst>
-                <a:tab pos="219075" algn="l"/>
-              </a:tabLst>
-            </a:pPr>
-            <a:r>
-              <a:rPr lang="en-GB" sz="1200" i="1" dirty="0"/>
-              <a:t>--------------------------------------------------------------------------------------</a:t>
-            </a:r>
-          </a:p>
-          <a:p>
-            <a:pPr>
-              <a:tabLst>
-                <a:tab pos="219075" algn="l"/>
-              </a:tabLst>
-            </a:pPr>
-            <a:r>
-              <a:rPr lang="en-GB" sz="1200" dirty="0"/>
-              <a:t>Considering all 5-fold cross-validation evaluation metrics, </a:t>
-            </a:r>
-            <a:r>
-              <a:rPr lang="en-GB" sz="1200" b="1" dirty="0"/>
-              <a:t>Logistic Regression was selected as the final model</a:t>
-            </a:r>
-            <a:r>
-              <a:rPr lang="en-GB" sz="1200" dirty="0"/>
-              <a:t>, as it achieved the best overall performance and the highest recall, making it the most suitable choice for identifying infrastructure failure.</a:t>
-            </a:r>
-          </a:p>
-          <a:p>
-            <a:pPr>
-              <a:tabLst>
-                <a:tab pos="219075" algn="l"/>
-              </a:tabLst>
-            </a:pPr>
-            <a:r>
-              <a:rPr lang="en-GB" sz="1200" dirty="0"/>
-              <a:t>----------------------------------------------------------------------------------</a:t>
-            </a:r>
-          </a:p>
-          <a:p>
-            <a:pPr marL="228600" indent="-228600">
-              <a:buFont typeface="+mj-lt"/>
-              <a:buAutoNum type="arabicPeriod" startAt="9"/>
-              <a:tabLst>
-                <a:tab pos="219075" algn="l"/>
-              </a:tabLst>
-            </a:pPr>
-            <a:r>
-              <a:rPr lang="en-GB" sz="1200" b="1" dirty="0"/>
-              <a:t>Test Data Preparation</a:t>
-            </a:r>
-          </a:p>
-          <a:p>
-            <a:pPr>
-              <a:tabLst>
-                <a:tab pos="219075" algn="l"/>
-              </a:tabLst>
-            </a:pPr>
-            <a:r>
-              <a:rPr lang="en-GB" sz="1200" dirty="0"/>
-              <a:t>The test data was transformed using the same encoding and normalisation parameters derived from the training data. </a:t>
-            </a:r>
-          </a:p>
-          <a:p>
-            <a:pPr marL="228600" indent="-228600">
-              <a:buFont typeface="+mj-lt"/>
-              <a:buAutoNum type="arabicPeriod" startAt="10"/>
-              <a:tabLst>
-                <a:tab pos="219075" algn="l"/>
-              </a:tabLst>
-            </a:pPr>
-            <a:r>
-              <a:rPr lang="en-GB" sz="1200" b="1" dirty="0"/>
-              <a:t>Final Model Evaluation</a:t>
-            </a:r>
-          </a:p>
-          <a:p>
-            <a:pPr>
-              <a:tabLst>
-                <a:tab pos="219075" algn="l"/>
-              </a:tabLst>
-            </a:pPr>
-            <a:r>
-              <a:rPr lang="en-GB" sz="1200" dirty="0"/>
-              <a:t>The Logistic Regression model was evaluated on unseen test data archiving </a:t>
-            </a:r>
-            <a:r>
-              <a:rPr lang="en-GB" sz="1200" b="1" dirty="0">
-                <a:ea typeface="Calibri"/>
-                <a:cs typeface="Calibri"/>
-              </a:rPr>
-              <a:t>Recall = 0.925, AUC = 0.958. </a:t>
-            </a:r>
-          </a:p>
-          <a:p>
-            <a:pPr>
-              <a:tabLst>
-                <a:tab pos="219075" algn="l"/>
-              </a:tabLst>
-            </a:pPr>
-            <a:r>
-              <a:rPr lang="en-GB" sz="1200" i="1" dirty="0"/>
-              <a:t>The accuracy of the model shows that 92.5% of all real failure cases were correctly detected. This means that the model almost never misses dangerous </a:t>
-            </a:r>
-            <a:r>
-              <a:rPr lang="en-GB" sz="1200" i="1"/>
-              <a:t>cases, has </a:t>
-            </a:r>
-            <a:r>
-              <a:rPr lang="en-GB" sz="1200" i="1" dirty="0"/>
-              <a:t>a low number of false negatives and is good at identifying the risk of infrastructure failure. </a:t>
-            </a:r>
-          </a:p>
-          <a:p>
-            <a:pPr>
-              <a:tabLst>
-                <a:tab pos="219075" algn="l"/>
-              </a:tabLst>
-            </a:pPr>
-            <a:r>
-              <a:rPr lang="en-GB" sz="1200" i="1" dirty="0"/>
-              <a:t>These results confirm that the model generalises well to unseen data and is suitable for real-world application.</a:t>
-            </a:r>
-          </a:p>
-        </p:txBody>
-      </p:sp>
-      <p:sp>
-        <p:nvSpPr>
-          <p:cNvPr id="14" name="TextBox 13">
-            <a:extLst>
-              <a:ext uri="{FF2B5EF4-FFF2-40B4-BE49-F238E27FC236}">
-                <a16:creationId xmlns:a16="http://schemas.microsoft.com/office/drawing/2014/main" id="{720648D2-2C2F-D4B7-A939-01723E5AA434}"/>
-              </a:ext>
-            </a:extLst>
-          </p:cNvPr>
-          <p:cNvSpPr txBox="1"/>
-          <p:nvPr/>
-        </p:nvSpPr>
-        <p:spPr>
-          <a:xfrm>
-            <a:off x="4686999" y="745082"/>
-            <a:ext cx="4686223" cy="2823850"/>
-          </a:xfrm>
-          <a:prstGeom prst="rect">
-            <a:avLst/>
-          </a:prstGeom>
-          <a:noFill/>
-          <a:ln w="38100">
-            <a:solidFill>
-              <a:schemeClr val="accent1">
-                <a:lumMod val="60000"/>
-                <a:lumOff val="40000"/>
-              </a:schemeClr>
-            </a:solidFill>
-          </a:ln>
-        </p:spPr>
-        <p:txBody>
-          <a:bodyPr wrap="square" lIns="91440" tIns="45720" rIns="91440" bIns="45720" anchor="t">
-            <a:spAutoFit/>
-          </a:bodyPr>
-          <a:lstStyle/>
-          <a:p>
-            <a:pPr marL="0" marR="0" lvl="0" indent="0" algn="l" defTabSz="1706910" rtl="0" eaLnBrk="1" fontAlgn="auto" latinLnBrk="0" hangingPunct="1">
-              <a:lnSpc>
-                <a:spcPct val="100000"/>
-              </a:lnSpc>
-              <a:spcBef>
-                <a:spcPts val="0"/>
-              </a:spcBef>
-              <a:spcAft>
-                <a:spcPts val="0"/>
-              </a:spcAft>
-              <a:buClrTx/>
-              <a:buSzTx/>
-              <a:buFontTx/>
-              <a:buNone/>
-              <a:tabLst/>
-              <a:defRPr/>
-            </a:pPr>
-            <a:r>
-              <a:rPr lang="en-GB" sz="2000" dirty="0"/>
-              <a:t>3 Variables</a:t>
-            </a:r>
-            <a:endParaRPr lang="en-GB" sz="1000" dirty="0">
-              <a:ea typeface="Calibri"/>
-              <a:cs typeface="Calibri"/>
-            </a:endParaRPr>
-          </a:p>
-          <a:p>
-            <a:pPr marL="0" marR="0" lvl="0" indent="0" algn="l" defTabSz="1706910" rtl="0" eaLnBrk="1" fontAlgn="auto" latinLnBrk="0" hangingPunct="1">
-              <a:lnSpc>
-                <a:spcPct val="100000"/>
-              </a:lnSpc>
-              <a:spcBef>
-                <a:spcPts val="0"/>
-              </a:spcBef>
-              <a:spcAft>
-                <a:spcPts val="0"/>
-              </a:spcAft>
-              <a:buClrTx/>
-              <a:buSzTx/>
-              <a:buFontTx/>
-              <a:buNone/>
-              <a:tabLst/>
-              <a:defRPr/>
-            </a:pPr>
-            <a:r>
-              <a:rPr lang="en-GB" sz="1000" dirty="0">
-                <a:solidFill>
-                  <a:prstClr val="black"/>
-                </a:solidFill>
-                <a:latin typeface="Calibri" panose="020F0502020204030204"/>
-              </a:rPr>
-              <a:t>Say which variables you used in your model, and whether you treated then as numeric3 Variables</a:t>
-            </a:r>
-            <a:endParaRPr lang="en-GB" sz="1000" dirty="0">
-              <a:solidFill>
-                <a:prstClr val="black"/>
-              </a:solidFill>
-              <a:latin typeface="Calibri" panose="020F0502020204030204"/>
-              <a:ea typeface="Calibri"/>
-              <a:cs typeface="Calibri"/>
-            </a:endParaRPr>
-          </a:p>
-          <a:p>
-            <a:pPr marL="0" marR="0" lvl="0" indent="0" algn="l" defTabSz="1706910" rtl="0" eaLnBrk="1" fontAlgn="auto" latinLnBrk="0" hangingPunct="1">
-              <a:lnSpc>
-                <a:spcPct val="100000"/>
-              </a:lnSpc>
-              <a:spcBef>
-                <a:spcPts val="0"/>
-              </a:spcBef>
-              <a:spcAft>
-                <a:spcPts val="0"/>
-              </a:spcAft>
-              <a:buClrTx/>
-              <a:buSzTx/>
-              <a:buFontTx/>
-              <a:buNone/>
-              <a:tabLst/>
-              <a:defRPr/>
-            </a:pPr>
-            <a:r>
-              <a:rPr lang="en-GB" sz="1000" dirty="0">
-                <a:solidFill>
-                  <a:prstClr val="black"/>
-                </a:solidFill>
-                <a:latin typeface="Calibri" panose="020F0502020204030204"/>
-              </a:rPr>
-              <a:t>Say which variables you used in your model, and whether you treated then as numeric or categorical. Explain the impact your choices will have on the models you build. You can use a table:</a:t>
-            </a:r>
-            <a:endParaRPr lang="en-GB" sz="1000" dirty="0">
-              <a:solidFill>
-                <a:prstClr val="black"/>
-              </a:solidFill>
-              <a:latin typeface="Calibri" panose="020F0502020204030204"/>
-              <a:ea typeface="Calibri"/>
-              <a:cs typeface="Calibri"/>
-            </a:endParaRPr>
-          </a:p>
-          <a:p>
-            <a:r>
-              <a:rPr lang="en-GB" sz="1000" dirty="0">
-                <a:solidFill>
-                  <a:prstClr val="black"/>
-                </a:solidFill>
-                <a:latin typeface="Calibri" panose="020F0502020204030204"/>
-              </a:rPr>
-              <a:t> or categorical. Explain the impact your choices will have on the models you build. You can use a table:</a:t>
-            </a:r>
-            <a:endParaRPr lang="en-GB" sz="1000" dirty="0">
-              <a:solidFill>
-                <a:prstClr val="black"/>
-              </a:solidFill>
-              <a:latin typeface="Calibri" panose="020F0502020204030204"/>
-              <a:ea typeface="Calibri"/>
-              <a:cs typeface="Calibri"/>
-            </a:endParaRPr>
-          </a:p>
-          <a:p>
-            <a:endParaRPr lang="en-GB" sz="1200" dirty="0">
-              <a:solidFill>
-                <a:prstClr val="black"/>
-              </a:solidFill>
-              <a:latin typeface="Calibri" panose="020F0502020204030204"/>
-            </a:endParaRPr>
-          </a:p>
-          <a:p>
-            <a:endParaRPr lang="en-GB" sz="1200" dirty="0">
-              <a:solidFill>
-                <a:prstClr val="black"/>
-              </a:solidFill>
-              <a:latin typeface="Calibri" panose="020F0502020204030204"/>
-            </a:endParaRPr>
-          </a:p>
-          <a:p>
-            <a:endParaRPr lang="en-GB" sz="1200" dirty="0">
-              <a:solidFill>
-                <a:prstClr val="black"/>
-              </a:solidFill>
-              <a:latin typeface="Calibri" panose="020F0502020204030204"/>
-            </a:endParaRPr>
-          </a:p>
-          <a:p>
-            <a:endParaRPr lang="en-GB" sz="1200" dirty="0">
-              <a:solidFill>
-                <a:prstClr val="black"/>
-              </a:solidFill>
-              <a:latin typeface="Calibri" panose="020F0502020204030204"/>
-            </a:endParaRPr>
-          </a:p>
-          <a:p>
-            <a:endParaRPr lang="en-GB" sz="1200" dirty="0">
-              <a:solidFill>
-                <a:prstClr val="black"/>
-              </a:solidFill>
-              <a:latin typeface="Calibri" panose="020F0502020204030204"/>
-            </a:endParaRPr>
-          </a:p>
-          <a:p>
-            <a:endParaRPr lang="en-GB" sz="1200" dirty="0">
-              <a:solidFill>
-                <a:prstClr val="black"/>
-              </a:solidFill>
-              <a:latin typeface="Calibri" panose="020F0502020204030204"/>
-            </a:endParaRPr>
-          </a:p>
-          <a:p>
-            <a:endParaRPr lang="en-GB" sz="1200" dirty="0">
-              <a:solidFill>
-                <a:prstClr val="black"/>
-              </a:solidFill>
-              <a:latin typeface="Calibri" panose="020F0502020204030204"/>
-            </a:endParaRPr>
-          </a:p>
-        </p:txBody>
-      </p:sp>
-      <p:sp>
-        <p:nvSpPr>
-          <p:cNvPr id="16" name="TextBox 15">
-            <a:extLst>
-              <a:ext uri="{FF2B5EF4-FFF2-40B4-BE49-F238E27FC236}">
-                <a16:creationId xmlns:a16="http://schemas.microsoft.com/office/drawing/2014/main" id="{303339E9-D30D-6514-92CD-6CDE78311274}"/>
-              </a:ext>
-            </a:extLst>
-          </p:cNvPr>
-          <p:cNvSpPr txBox="1"/>
-          <p:nvPr/>
-        </p:nvSpPr>
-        <p:spPr>
-          <a:xfrm>
-            <a:off x="4882290" y="5538821"/>
-            <a:ext cx="4490932" cy="1046440"/>
-          </a:xfrm>
-          <a:prstGeom prst="rect">
-            <a:avLst/>
-          </a:prstGeom>
-          <a:noFill/>
-          <a:ln w="38100">
-            <a:solidFill>
-              <a:schemeClr val="accent1">
-                <a:lumMod val="60000"/>
-                <a:lumOff val="40000"/>
-              </a:schemeClr>
-            </a:solidFill>
-          </a:ln>
-        </p:spPr>
-        <p:txBody>
-          <a:bodyPr wrap="square" lIns="91440" tIns="45720" rIns="91440" bIns="45720" anchor="t">
-            <a:spAutoFit/>
-          </a:bodyPr>
-          <a:lstStyle/>
-          <a:p>
-            <a:pPr marL="0" marR="0" lvl="0" indent="0" algn="l" defTabSz="1706910" rtl="0" eaLnBrk="1" fontAlgn="auto" latinLnBrk="0" hangingPunct="1">
-              <a:lnSpc>
-                <a:spcPct val="100000"/>
-              </a:lnSpc>
-              <a:spcBef>
-                <a:spcPts val="0"/>
-              </a:spcBef>
-              <a:spcAft>
-                <a:spcPts val="0"/>
-              </a:spcAft>
-              <a:buClrTx/>
-              <a:buSzTx/>
-              <a:buFontTx/>
-              <a:buNone/>
-              <a:tabLst/>
-              <a:defRPr/>
-            </a:pPr>
-            <a:r>
-              <a:rPr kumimoji="0" lang="en-GB" sz="2000" b="0" i="0" u="none" strike="noStrike" kern="1200" cap="none" spc="0" normalizeH="0" baseline="0" noProof="0" dirty="0">
-                <a:ln>
-                  <a:noFill/>
-                </a:ln>
-                <a:solidFill>
-                  <a:prstClr val="black"/>
-                </a:solidFill>
-                <a:effectLst/>
-                <a:uLnTx/>
-                <a:uFillTx/>
-                <a:latin typeface="Calibri" panose="020F0502020204030204"/>
-                <a:ea typeface="+mn-ea"/>
-                <a:cs typeface="+mn-cs"/>
-              </a:rPr>
-              <a:t>4. Data Preparation</a:t>
-            </a:r>
-          </a:p>
-          <a:p>
-            <a:pPr marL="0" marR="0" lvl="0" indent="0" algn="l" defTabSz="1706910" rtl="0" eaLnBrk="1" fontAlgn="auto" latinLnBrk="0" hangingPunct="1">
-              <a:lnSpc>
-                <a:spcPct val="100000"/>
-              </a:lnSpc>
-              <a:spcBef>
-                <a:spcPts val="0"/>
-              </a:spcBef>
-              <a:spcAft>
-                <a:spcPts val="0"/>
-              </a:spcAft>
-              <a:buClrTx/>
-              <a:buSzTx/>
-              <a:buFontTx/>
-              <a:buNone/>
-              <a:tabLst/>
-              <a:defRPr/>
-            </a:pPr>
-            <a:r>
-              <a:rPr kumimoji="0" lang="en-GB" sz="1050" b="0" i="0" u="none" strike="noStrike" kern="1200" cap="none" spc="0" normalizeH="0" baseline="0" noProof="0" dirty="0">
-                <a:ln>
-                  <a:noFill/>
-                </a:ln>
-                <a:solidFill>
-                  <a:prstClr val="black"/>
-                </a:solidFill>
-                <a:effectLst/>
-                <a:uLnTx/>
-                <a:uFillTx/>
-                <a:latin typeface="Calibri" panose="020F0502020204030204"/>
-                <a:ea typeface="+mn-ea"/>
-                <a:cs typeface="+mn-cs"/>
-              </a:rPr>
-              <a:t>Show two histograms here. One should show the distribution of one</a:t>
-            </a:r>
-            <a:endParaRPr lang="en-GB" sz="1050" b="0" i="0" u="none" strike="noStrike" kern="1200" cap="none" spc="0" normalizeH="0" baseline="0" noProof="0" dirty="0">
-              <a:ln>
-                <a:noFill/>
-              </a:ln>
-              <a:solidFill>
-                <a:prstClr val="black"/>
-              </a:solidFill>
-              <a:effectLst/>
-              <a:uLnTx/>
-              <a:uFillTx/>
-              <a:latin typeface="Calibri" panose="020F0502020204030204"/>
-              <a:ea typeface="Calibri"/>
-              <a:cs typeface="Calibri"/>
-            </a:endParaRPr>
-          </a:p>
-          <a:p>
-            <a:pPr marL="0" marR="0" lvl="0" indent="0" algn="l" defTabSz="1706910" rtl="0" eaLnBrk="1" fontAlgn="auto" latinLnBrk="0" hangingPunct="1">
-              <a:lnSpc>
-                <a:spcPct val="100000"/>
-              </a:lnSpc>
-              <a:spcBef>
-                <a:spcPts val="0"/>
-              </a:spcBef>
-              <a:spcAft>
-                <a:spcPts val="0"/>
-              </a:spcAft>
-              <a:buClrTx/>
-              <a:buSzTx/>
-              <a:buFontTx/>
-              <a:buNone/>
-              <a:tabLst/>
-              <a:defRPr/>
-            </a:pPr>
-            <a:r>
-              <a:rPr kumimoji="0" lang="en-GB" sz="1050" b="0" i="0" u="none" strike="noStrike" kern="1200" cap="none" spc="0" normalizeH="0" baseline="0" noProof="0" dirty="0">
-                <a:ln>
-                  <a:noFill/>
-                </a:ln>
-                <a:solidFill>
-                  <a:prstClr val="black"/>
-                </a:solidFill>
-                <a:effectLst/>
-                <a:uLnTx/>
-                <a:uFillTx/>
-                <a:latin typeface="Calibri" panose="020F0502020204030204"/>
-                <a:ea typeface="+mn-ea"/>
-                <a:cs typeface="+mn-cs"/>
-              </a:rPr>
-              <a:t>variable before it has been cleaned. The other should show the</a:t>
-            </a:r>
-            <a:endParaRPr lang="en-GB" sz="1050" b="0" i="0" u="none" strike="noStrike" kern="1200" cap="none" spc="0" normalizeH="0" baseline="0" noProof="0" dirty="0">
-              <a:ln>
-                <a:noFill/>
-              </a:ln>
-              <a:solidFill>
-                <a:prstClr val="black"/>
-              </a:solidFill>
-              <a:effectLst/>
-              <a:uLnTx/>
-              <a:uFillTx/>
-              <a:latin typeface="Calibri" panose="020F0502020204030204"/>
-              <a:ea typeface="Calibri"/>
-              <a:cs typeface="Calibri"/>
-            </a:endParaRPr>
-          </a:p>
-          <a:p>
-            <a:pPr marL="0" marR="0" lvl="0" indent="0" algn="l" defTabSz="1706910" rtl="0" eaLnBrk="1" fontAlgn="auto" latinLnBrk="0" hangingPunct="1">
-              <a:lnSpc>
-                <a:spcPct val="100000"/>
-              </a:lnSpc>
-              <a:spcBef>
-                <a:spcPts val="0"/>
-              </a:spcBef>
-              <a:spcAft>
-                <a:spcPts val="0"/>
-              </a:spcAft>
-              <a:buClrTx/>
-              <a:buSzTx/>
-              <a:buFontTx/>
-              <a:buNone/>
-              <a:tabLst/>
-              <a:defRPr/>
-            </a:pPr>
-            <a:r>
-              <a:rPr kumimoji="0" lang="en-GB" sz="1050" b="0" i="0" u="none" strike="noStrike" kern="1200" cap="none" spc="0" normalizeH="0" baseline="0" noProof="0" dirty="0">
-                <a:ln>
-                  <a:noFill/>
-                </a:ln>
-                <a:solidFill>
-                  <a:prstClr val="black"/>
-                </a:solidFill>
-                <a:effectLst/>
-                <a:uLnTx/>
-                <a:uFillTx/>
-                <a:latin typeface="Calibri" panose="020F0502020204030204"/>
-                <a:ea typeface="+mn-ea"/>
-                <a:cs typeface="+mn-cs"/>
-              </a:rPr>
-              <a:t>distribution of the same variable after cleaning. Choose a variable</a:t>
-            </a:r>
-            <a:endParaRPr lang="en-GB" sz="1050" b="0" i="0" u="none" strike="noStrike" kern="1200" cap="none" spc="0" normalizeH="0" baseline="0" noProof="0" dirty="0">
-              <a:ln>
-                <a:noFill/>
-              </a:ln>
-              <a:solidFill>
-                <a:prstClr val="black"/>
-              </a:solidFill>
-              <a:effectLst/>
-              <a:uLnTx/>
-              <a:uFillTx/>
-              <a:latin typeface="Calibri" panose="020F0502020204030204"/>
-              <a:ea typeface="Calibri"/>
-              <a:cs typeface="Calibri"/>
-            </a:endParaRPr>
-          </a:p>
-          <a:p>
-            <a:pPr marL="0" marR="0" lvl="0" indent="0" algn="l" defTabSz="1706910" rtl="0" eaLnBrk="1" fontAlgn="auto" latinLnBrk="0" hangingPunct="1">
-              <a:lnSpc>
-                <a:spcPct val="100000"/>
-              </a:lnSpc>
-              <a:spcBef>
-                <a:spcPts val="0"/>
-              </a:spcBef>
-              <a:spcAft>
-                <a:spcPts val="0"/>
-              </a:spcAft>
-              <a:buClrTx/>
-              <a:buSzTx/>
-              <a:buFontTx/>
-              <a:buNone/>
-              <a:tabLst/>
-              <a:defRPr/>
-            </a:pPr>
-            <a:r>
-              <a:rPr kumimoji="0" lang="en-GB" sz="1050" b="0" i="0" u="none" strike="noStrike" kern="1200" cap="none" spc="0" normalizeH="0" baseline="0" noProof="0" dirty="0">
-                <a:ln>
-                  <a:noFill/>
-                </a:ln>
-                <a:solidFill>
-                  <a:prstClr val="black"/>
-                </a:solidFill>
-                <a:effectLst/>
-                <a:uLnTx/>
-                <a:uFillTx/>
-                <a:latin typeface="Calibri" panose="020F0502020204030204"/>
-                <a:ea typeface="+mn-ea"/>
-                <a:cs typeface="+mn-cs"/>
-              </a:rPr>
-              <a:t>that needs to be cleaned!!</a:t>
-            </a:r>
-            <a:endParaRPr lang="en-GB" sz="1050" b="0" i="0" u="none" strike="noStrike" kern="1200" cap="none" spc="0" normalizeH="0" baseline="0" noProof="0" dirty="0">
-              <a:ln>
-                <a:noFill/>
-              </a:ln>
-              <a:solidFill>
-                <a:prstClr val="black"/>
-              </a:solidFill>
-              <a:effectLst/>
-              <a:uLnTx/>
-              <a:uFillTx/>
-              <a:latin typeface="Calibri" panose="020F0502020204030204"/>
-              <a:ea typeface="Calibri"/>
-              <a:cs typeface="Calibri"/>
-            </a:endParaRPr>
-          </a:p>
-        </p:txBody>
-      </p:sp>
-      <p:sp>
-        <p:nvSpPr>
-          <p:cNvPr id="22" name="TextBox 21">
-            <a:extLst>
-              <a:ext uri="{FF2B5EF4-FFF2-40B4-BE49-F238E27FC236}">
-                <a16:creationId xmlns:a16="http://schemas.microsoft.com/office/drawing/2014/main" id="{A963A857-22CD-BC85-9293-B211890D5A3A}"/>
-              </a:ext>
-            </a:extLst>
-          </p:cNvPr>
-          <p:cNvSpPr txBox="1"/>
-          <p:nvPr/>
-        </p:nvSpPr>
-        <p:spPr>
-          <a:xfrm>
-            <a:off x="4914384" y="9812406"/>
-            <a:ext cx="4178298" cy="253916"/>
-          </a:xfrm>
-          <a:prstGeom prst="rect">
-            <a:avLst/>
-          </a:prstGeom>
-          <a:noFill/>
-        </p:spPr>
-        <p:txBody>
-          <a:bodyPr wrap="square" lIns="91440" tIns="45720" rIns="91440" bIns="45720" anchor="t">
-            <a:spAutoFit/>
-          </a:bodyPr>
-          <a:lstStyle/>
-          <a:p>
-            <a:pPr marL="0" marR="0" lvl="0" indent="0" algn="l" defTabSz="1706910" rtl="0" eaLnBrk="1" fontAlgn="auto" latinLnBrk="0" hangingPunct="1">
-              <a:lnSpc>
-                <a:spcPct val="100000"/>
-              </a:lnSpc>
-              <a:spcBef>
-                <a:spcPts val="0"/>
-              </a:spcBef>
-              <a:spcAft>
-                <a:spcPts val="0"/>
-              </a:spcAft>
-              <a:buClrTx/>
-              <a:buSzTx/>
-              <a:buFontTx/>
-              <a:buNone/>
-              <a:tabLst/>
-              <a:defRPr/>
-            </a:pPr>
-            <a:r>
-              <a:rPr kumimoji="0" lang="en-GB" sz="1050" b="0" i="0" u="none" strike="noStrike" kern="1200" cap="none" spc="0" normalizeH="0" baseline="0" noProof="0" dirty="0">
-                <a:ln>
-                  <a:noFill/>
-                </a:ln>
-                <a:solidFill>
-                  <a:prstClr val="black"/>
-                </a:solidFill>
-                <a:effectLst/>
-                <a:uLnTx/>
-                <a:uFillTx/>
-                <a:latin typeface="Calibri" panose="020F0502020204030204"/>
-                <a:ea typeface="+mn-ea"/>
-                <a:cs typeface="+mn-cs"/>
-              </a:rPr>
-              <a:t>Explain what the confusion matrix tells us.</a:t>
-            </a:r>
-          </a:p>
-        </p:txBody>
-      </p:sp>
-      <p:sp>
-        <p:nvSpPr>
-          <p:cNvPr id="3" name="TextBox 2">
-            <a:extLst>
-              <a:ext uri="{FF2B5EF4-FFF2-40B4-BE49-F238E27FC236}">
-                <a16:creationId xmlns:a16="http://schemas.microsoft.com/office/drawing/2014/main" id="{483CDE9C-72DC-E883-E910-51206EB5A594}"/>
-              </a:ext>
-            </a:extLst>
-          </p:cNvPr>
-          <p:cNvSpPr txBox="1"/>
-          <p:nvPr/>
-        </p:nvSpPr>
-        <p:spPr>
-          <a:xfrm>
-            <a:off x="4881044" y="10977048"/>
-            <a:ext cx="4490932" cy="1261884"/>
+            <a:off x="358005" y="10623907"/>
+            <a:ext cx="6408000" cy="2124000"/>
           </a:xfrm>
           <a:prstGeom prst="rect">
             <a:avLst/>
@@ -7155,27 +7175,25 @@
           <a:lstStyle/>
           <a:p>
             <a:r>
-              <a:rPr lang="en-GB" sz="2000" dirty="0"/>
+              <a:rPr lang="en-GB" sz="1600" dirty="0"/>
               <a:t>7. Insight about data </a:t>
             </a:r>
             <a:r>
-              <a:rPr lang="en-GB" sz="2000" b="0" i="0" dirty="0">
+              <a:rPr lang="en-GB" sz="1600" b="0" i="0" dirty="0">
                 <a:solidFill>
                   <a:srgbClr val="000000"/>
                 </a:solidFill>
                 <a:effectLst/>
-                <a:latin typeface="Calibri"/>
                 <a:ea typeface="Calibri"/>
                 <a:cs typeface="Calibri"/>
               </a:rPr>
               <a:t>or </a:t>
             </a:r>
             <a:r>
-              <a:rPr lang="en-GB" sz="2000" dirty="0">
+              <a:rPr lang="en-GB" sz="1600" dirty="0">
                 <a:solidFill>
                   <a:srgbClr val="000000"/>
                 </a:solidFill>
-                <a:latin typeface="Calibri"/>
                 <a:ea typeface="Calibri"/>
                 <a:cs typeface="Calibri"/>
               </a:rPr>
@@ -7183,62 +7201,187 @@
             </a:r>
           </a:p>
           <a:p>
-            <a:endParaRPr lang="en-GB" sz="1200" dirty="0">
-              <a:solidFill>
-                <a:srgbClr val="000000"/>
-              </a:solidFill>
-              <a:latin typeface="Calibri"/>
-              <a:ea typeface="Calibri"/>
-              <a:cs typeface="Calibri"/>
-            </a:endParaRPr>
-          </a:p>
-          <a:p>
-            <a:pPr marL="457200" indent="-457200">
-              <a:buFont typeface="Arial,Sans-Serif"/>
-              <a:buChar char="•"/>
-            </a:pPr>
-            <a:r>
-              <a:rPr lang="en-GB" sz="1100" dirty="0">
+            <a:r>
+              <a:rPr lang="en-GB" sz="1000" dirty="0">
+                <a:ea typeface="Calibri"/>
+                <a:cs typeface="Calibri"/>
+              </a:rPr>
+              <a:t>Features such as </a:t>
+            </a:r>
+            <a:r>
+              <a:rPr lang="en-GB" sz="900" i="1" dirty="0" err="1">
+                <a:ea typeface="Calibri"/>
+                <a:cs typeface="Calibri"/>
+              </a:rPr>
+              <a:t>surface_debris</a:t>
+            </a:r>
+            <a:r>
+              <a:rPr lang="en-GB" sz="900" i="1" dirty="0">
+                <a:ea typeface="Calibri"/>
+                <a:cs typeface="Calibri"/>
+              </a:rPr>
+              <a:t>, </a:t>
+            </a:r>
+            <a:r>
+              <a:rPr lang="en-GB" sz="900" i="1" dirty="0" err="1">
+                <a:ea typeface="Calibri"/>
+                <a:cs typeface="Calibri"/>
+              </a:rPr>
+              <a:t>structural_mass_ratio</a:t>
+            </a:r>
+            <a:r>
+              <a:rPr lang="en-GB" sz="900" i="1" dirty="0">
+                <a:ea typeface="Calibri"/>
+                <a:cs typeface="Calibri"/>
+              </a:rPr>
+              <a:t>, </a:t>
+            </a:r>
+            <a:r>
+              <a:rPr lang="en-GB" sz="900" i="1" dirty="0" err="1">
+                <a:ea typeface="Calibri"/>
+                <a:cs typeface="Calibri"/>
+              </a:rPr>
+              <a:t>recent_precipitation</a:t>
+            </a:r>
+            <a:r>
+              <a:rPr lang="en-GB" sz="900" i="1" dirty="0">
+                <a:ea typeface="Calibri"/>
+                <a:cs typeface="Calibri"/>
+              </a:rPr>
+              <a:t>, </a:t>
+            </a:r>
+            <a:r>
+              <a:rPr lang="en-GB" sz="900" i="1" dirty="0" err="1">
+                <a:ea typeface="Calibri"/>
+                <a:cs typeface="Calibri"/>
+              </a:rPr>
+              <a:t>infrastructure_age</a:t>
+            </a:r>
+            <a:r>
+              <a:rPr lang="en-GB" sz="900" i="1" dirty="0">
+                <a:ea typeface="Calibri"/>
+                <a:cs typeface="Calibri"/>
+              </a:rPr>
+              <a:t>, </a:t>
+            </a:r>
+            <a:r>
+              <a:rPr lang="en-GB" sz="900" i="1" dirty="0" err="1">
+                <a:ea typeface="Calibri"/>
+                <a:cs typeface="Calibri"/>
+              </a:rPr>
+              <a:t>moisture_stress</a:t>
+            </a:r>
+            <a:r>
+              <a:rPr lang="en-GB" sz="900" i="1" dirty="0">
+                <a:ea typeface="Calibri"/>
+                <a:cs typeface="Calibri"/>
+              </a:rPr>
+              <a:t> </a:t>
+            </a:r>
+            <a:r>
+              <a:rPr lang="en-GB" sz="1000" dirty="0">
+                <a:ea typeface="Calibri"/>
+                <a:cs typeface="Calibri"/>
+              </a:rPr>
+              <a:t>have a significant impact on infrastructure failure, with higher values associated with an increased probability of failure. </a:t>
+            </a:r>
+          </a:p>
+          <a:p>
+            <a:r>
+              <a:rPr lang="en-GB" sz="1000" b="1" dirty="0">
+                <a:ea typeface="Calibri"/>
+                <a:cs typeface="Calibri"/>
+              </a:rPr>
+              <a:t>In contrast</a:t>
+            </a:r>
+            <a:r>
+              <a:rPr lang="en-GB" sz="1000" dirty="0">
+                <a:ea typeface="Calibri"/>
+                <a:cs typeface="Calibri"/>
+              </a:rPr>
+              <a:t>, features such as </a:t>
+            </a:r>
+            <a:r>
+              <a:rPr lang="en-GB" sz="900" i="1" dirty="0" err="1">
+                <a:ea typeface="Calibri"/>
+                <a:cs typeface="Calibri"/>
+              </a:rPr>
+              <a:t>inspection_window</a:t>
+            </a:r>
+            <a:r>
+              <a:rPr lang="en-GB" sz="900" i="1" dirty="0">
+                <a:ea typeface="Calibri"/>
+                <a:cs typeface="Calibri"/>
+              </a:rPr>
+              <a:t>, </a:t>
+            </a:r>
+            <a:r>
+              <a:rPr lang="en-GB" sz="900" i="1" dirty="0" err="1">
+                <a:ea typeface="Calibri"/>
+                <a:cs typeface="Calibri"/>
+              </a:rPr>
+              <a:t>inspection_season</a:t>
+            </a:r>
+            <a:r>
+              <a:rPr lang="en-GB" sz="900" i="1" dirty="0">
+                <a:ea typeface="Calibri"/>
+                <a:cs typeface="Calibri"/>
+              </a:rPr>
+              <a:t> = autumn/spring, and </a:t>
+            </a:r>
+            <a:r>
+              <a:rPr lang="en-GB" sz="900" i="1" dirty="0" err="1">
+                <a:ea typeface="Calibri"/>
+                <a:cs typeface="Calibri"/>
+              </a:rPr>
+              <a:t>vibration_exposure</a:t>
+            </a:r>
+            <a:r>
+              <a:rPr lang="en-GB" sz="900" i="1" dirty="0">
+                <a:ea typeface="Calibri"/>
+                <a:cs typeface="Calibri"/>
+              </a:rPr>
+              <a:t> </a:t>
+            </a:r>
+            <a:r>
+              <a:rPr lang="en-GB" sz="1000" dirty="0">
+                <a:ea typeface="Calibri"/>
+                <a:cs typeface="Calibri"/>
+              </a:rPr>
+              <a:t>showed almost no predictive value and were removed during feature selection. </a:t>
+            </a:r>
+            <a:r>
+              <a:rPr lang="en-GB" sz="1000" b="1" dirty="0">
                 <a:solidFill>
                   <a:srgbClr val="000000"/>
                 </a:solidFill>
-                <a:latin typeface="Calibri"/>
-                <a:ea typeface="Calibri"/>
-                <a:cs typeface="Calibri"/>
-              </a:rPr>
-              <a:t>For example</a:t>
-            </a:r>
-            <a:r>
-              <a:rPr lang="en-GB" sz="1100" b="0" i="0" dirty="0">
+                <a:ea typeface="Calibri"/>
+                <a:cs typeface="Calibri"/>
+              </a:rPr>
+              <a:t>The analysis also indicated </a:t>
+            </a:r>
+            <a:r>
+              <a:rPr lang="en-GB" sz="1000" dirty="0">
                 <a:solidFill>
                   <a:srgbClr val="000000"/>
                 </a:solidFill>
-                <a:effectLst/>
-                <a:latin typeface="Calibri"/>
-                <a:ea typeface="Calibri"/>
-                <a:cs typeface="Calibri"/>
-              </a:rPr>
-              <a:t>, </a:t>
-            </a:r>
-            <a:r>
-              <a:rPr lang="en-GB" sz="1100" dirty="0">
+                <a:ea typeface="Calibri"/>
+                <a:cs typeface="Calibri"/>
+              </a:rPr>
+              <a:t>a clear environmental influence, with failures occurring more frequently during the summer period. This suggests that weather conditions play an important role. Overall, infrastructure failure depends on both structural characteristics and external environmental factors (weather/level of usage). No strong model bias was observed; but some seasonal variation is present in the data.</a:t>
+            </a:r>
+          </a:p>
+          <a:p>
+            <a:r>
+              <a:rPr lang="en-GB" sz="1000" b="1" dirty="0">
                 <a:solidFill>
                   <a:srgbClr val="000000"/>
                 </a:solidFill>
-                <a:latin typeface="Calibri"/>
-                <a:ea typeface="Calibri"/>
-                <a:cs typeface="Calibri"/>
-              </a:rPr>
-              <a:t>did you learn anything about specific features that drive the model? Is the model biased towards particular groups in the data? Is the model you've chosen good for helping us to understand why particular predictions are made?</a:t>
-            </a:r>
-            <a:endParaRPr lang="en-US" sz="1100" dirty="0">
-              <a:solidFill>
-                <a:srgbClr val="000000"/>
-              </a:solidFill>
-              <a:latin typeface="Calibri"/>
-              <a:ea typeface="Calibri"/>
-              <a:cs typeface="Calibri"/>
-            </a:endParaRPr>
+                <a:ea typeface="Calibri"/>
+                <a:cs typeface="Calibri"/>
+              </a:rPr>
+              <a:t>Logistic Regression was selected as the final model due to its strong performance and interpretability. Its coefficients indicate the direction and strength of the relationship between each feature and the probability of failure, helping to understand which factors lead to failure. Besides, it is fast (learns and predicts quickly), simple to tune (few hyperparameters), and practical for real-world decision-making. This demonstrates that simpler, interpretable models can achieve both high performance and practical value in real-world applications.</a:t>
+            </a:r>
           </a:p>
         </p:txBody>
       </p:sp>
@@ -7550,6 +7693,321 @@
 </a:theme>
 </file>
 
+<file path=ppt/theme/theme2.xml><?xml version="1.0" encoding="utf-8"?>
+<a:theme xmlns:a="http://schemas.openxmlformats.org/drawingml/2006/main" name="Office Theme">
+  <a:themeElements>
+    <a:clrScheme name="Office">
+      <a:dk1>
+        <a:sysClr val="windowText" lastClr="000000"/>
+      </a:dk1>
+      <a:lt1>
+        <a:sysClr val="window" lastClr="FFFFFF"/>
+      </a:lt1>
+      <a:dk2>
+        <a:srgbClr val="0E2841"/>
+      </a:dk2>
+      <a:lt2>
+        <a:srgbClr val="E8E8E8"/>
+      </a:lt2>
+      <a:accent1>
+        <a:srgbClr val="156082"/>
+      </a:accent1>
+      <a:accent2>
+        <a:srgbClr val="E97132"/>
+      </a:accent2>
+      <a:accent3>
+        <a:srgbClr val="196B24"/>
+      </a:accent3>
+      <a:accent4>
+        <a:srgbClr val="0F9ED5"/>
+      </a:accent4>
+      <a:accent5>
+        <a:srgbClr val="A02B93"/>
+      </a:accent5>
+      <a:accent6>
+        <a:srgbClr val="4EA72E"/>
+      </a:accent6>
+      <a:hlink>
+        <a:srgbClr val="467886"/>
+      </a:hlink>
+      <a:folHlink>
+        <a:srgbClr val="96607D"/>
+      </a:folHlink>
+    </a:clrScheme>
+    <a:fontScheme name="Office">
+      <a:majorFont>
+        <a:latin typeface="Aptos Display" panose="02110004020202020204"/>
+        <a:ea typeface=""/>
+        <a:cs typeface=""/>
+        <a:font script="Jpan" typeface="游ゴシック Light"/>
+        <a:font script="Hang" typeface="맑은 고딕"/>
+        <a:font script="Hans" typeface="等线 Light"/>
+        <a:font script="Hant" typeface="新細明體"/>
+        <a:font script="Arab" typeface="Times New Roman"/>
+        <a:font script="Hebr" typeface="Times New Roman"/>
+        <a:font script="Thai" typeface="Angsana New"/>
+        <a:font script="Ethi" typeface="Nyala"/>
+        <a:font script="Beng" typeface="Vrinda"/>
+        <a:font script="Gujr" typeface="Shruti"/>
+        <a:font script="Khmr" typeface="MoolBoran"/>
+        <a:font script="Knda" typeface="Tunga"/>
+        <a:font script="Guru" typeface="Raavi"/>
+        <a:font script="Cans" typeface="Euphemia"/>
+        <a:font script="Cher" typeface="Plantagenet Cherokee"/>
+        <a:font script="Yiii" typeface="Microsoft Yi Baiti"/>
+        <a:font script="Tibt" typeface="Microsoft Himalaya"/>
+        <a:font script="Thaa" typeface="MV Boli"/>
+        <a:font script="Deva" typeface="Mangal"/>
+        <a:font script="Telu" typeface="Gautami"/>
+        <a:font script="Taml" typeface="Latha"/>
+        <a:font script="Syrc" typeface="Estrangelo Edessa"/>
+        <a:font script="Orya" typeface="Kalinga"/>
+        <a:font script="Mlym" typeface="Kartika"/>
+        <a:font script="Laoo" typeface="DokChampa"/>
+        <a:font script="Sinh" typeface="Iskoola Pota"/>
+        <a:font script="Mong" typeface="Mongolian Baiti"/>
+        <a:font script="Viet" typeface="Times New Roman"/>
+        <a:font script="Uigh" typeface="Microsoft Uighur"/>
+        <a:font script="Geor" typeface="Sylfaen"/>
+        <a:font script="Armn" typeface="Arial"/>
+        <a:font script="Bugi" typeface="Leelawadee UI"/>
+        <a:font script="Bopo" typeface="Microsoft JhengHei"/>
+        <a:font script="Java" typeface="Javanese Text"/>
+        <a:font script="Lisu" typeface="Segoe UI"/>
+        <a:font script="Mymr" typeface="Myanmar Text"/>
+        <a:font script="Nkoo" typeface="Ebrima"/>
+        <a:font script="Olck" typeface="Nirmala UI"/>
+        <a:font script="Osma" typeface="Ebrima"/>
+        <a:font script="Phag" typeface="Phagspa"/>
+        <a:font script="Syrn" typeface="Estrangelo Edessa"/>
+        <a:font script="Syrj" typeface="Estrangelo Edessa"/>
+        <a:font script="Syre" typeface="Estrangelo Edessa"/>
+        <a:font script="Sora" typeface="Nirmala UI"/>
+        <a:font script="Tale" typeface="Microsoft Tai Le"/>
+        <a:font script="Talu" typeface="Microsoft New Tai Lue"/>
+        <a:font script="Tfng" typeface="Ebrima"/>
+      </a:majorFont>
+      <a:minorFont>
+        <a:latin typeface="Aptos" panose="02110004020202020204"/>
+        <a:ea typeface=""/>
+        <a:cs typeface=""/>
+        <a:font script="Jpan" typeface="游ゴシック"/>
+        <a:font script="Hang" typeface="맑은 고딕"/>
+        <a:font script="Hans" typeface="等线"/>
+        <a:font script="Hant" typeface="新細明體"/>
+        <a:font script="Arab" typeface="Arial"/>
+        <a:font script="Hebr" typeface="Arial"/>
+        <a:font script="Thai" typeface="Cordia New"/>
+        <a:font script="Ethi" typeface="Nyala"/>
+        <a:font script="Beng" typeface="Vrinda"/>
+        <a:font script="Gujr" typeface="Shruti"/>
+        <a:font script="Khmr" typeface="DaunPenh"/>
+        <a:font script="Knda" typeface="Tunga"/>
+        <a:font script="Guru" typeface="Raavi"/>
+        <a:font script="Cans" typeface="Euphemia"/>
+        <a:font script="Cher" typeface="Plantagenet Cherokee"/>
+        <a:font script="Yiii" typeface="Microsoft Yi Baiti"/>
+        <a:font script="Tibt" typeface="Microsoft Himalaya"/>
+        <a:font script="Thaa" typeface="MV Boli"/>
+        <a:font script="Deva" typeface="Mangal"/>
+        <a:font script="Telu" typeface="Gautami"/>
+        <a:font script="Taml" typeface="Latha"/>
+        <a:font script="Syrc" typeface="Estrangelo Edessa"/>
+        <a:font script="Orya" typeface="Kalinga"/>
+        <a:font script="Mlym" typeface="Kartika"/>
+        <a:font script="Laoo" typeface="DokChampa"/>
+        <a:font script="Sinh" typeface="Iskoola Pota"/>
+        <a:font script="Mong" typeface="Mongolian Baiti"/>
+        <a:font script="Viet" typeface="Arial"/>
+        <a:font script="Uigh" typeface="Microsoft Uighur"/>
+        <a:font script="Geor" typeface="Sylfaen"/>
+        <a:font script="Armn" typeface="Arial"/>
+        <a:font script="Bugi" typeface="Leelawadee UI"/>
+        <a:font script="Bopo" typeface="Microsoft JhengHei"/>
+        <a:font script="Java" typeface="Javanese Text"/>
+        <a:font script="Lisu" typeface="Segoe UI"/>
+        <a:font script="Mymr" typeface="Myanmar Text"/>
+        <a:font script="Nkoo" typeface="Ebrima"/>
+        <a:font script="Olck" typeface="Nirmala UI"/>
+        <a:font script="Osma" typeface="Ebrima"/>
+        <a:font script="Phag" typeface="Phagspa"/>
+        <a:font script="Syrn" typeface="Estrangelo Edessa"/>
+        <a:font script="Syrj" typeface="Estrangelo Edessa"/>
+        <a:font script="Syre" typeface="Estrangelo Edessa"/>
+        <a:font script="Sora" typeface="Nirmala UI"/>
+        <a:font script="Tale" typeface="Microsoft Tai Le"/>
+        <a:font script="Talu" typeface="Microsoft New Tai Lue"/>
+        <a:font script="Tfng" typeface="Ebrima"/>
+      </a:minorFont>
+    </a:fontScheme>
+    <a:fmtScheme name="Office">
+      <a:fillStyleLst>
+        <a:solidFill>
+          <a:schemeClr val="phClr"/>
+        </a:solidFill>
+        <a:gradFill rotWithShape="1">
+          <a:gsLst>
+            <a:gs pos="0">
+              <a:schemeClr val="phClr">
+                <a:lumMod val="110000"/>
+                <a:satMod val="105000"/>
+                <a:tint val="67000"/>
+              </a:schemeClr>
+            </a:gs>
+            <a:gs pos="50000">
+              <a:schemeClr val="phClr">
+                <a:lumMod val="105000"/>
+                <a:satMod val="103000"/>
+                <a:tint val="73000"/>
+              </a:schemeClr>
+            </a:gs>
+            <a:gs pos="100000">
+              <a:schemeClr val="phClr">
+                <a:lumMod val="105000"/>
+                <a:satMod val="109000"/>
+                <a:tint val="81000"/>
+              </a:schemeClr>
+            </a:gs>
+          </a:gsLst>
+          <a:lin ang="5400000" scaled="0"/>
+        </a:gradFill>
+        <a:gradFill rotWithShape="1">
+          <a:gsLst>
+            <a:gs pos="0">
+              <a:schemeClr val="phClr">
+                <a:satMod val="103000"/>
+                <a:lumMod val="102000"/>
+                <a:tint val="94000"/>
+              </a:schemeClr>
+            </a:gs>
+            <a:gs pos="50000">
+              <a:schemeClr val="phClr">
+                <a:satMod val="110000"/>
+                <a:lumMod val="100000"/>
+                <a:shade val="100000"/>
+              </a:schemeClr>
+            </a:gs>
+            <a:gs pos="100000">
+              <a:schemeClr val="phClr">
+                <a:lumMod val="99000"/>
+                <a:satMod val="120000"/>
+                <a:shade val="78000"/>
+              </a:schemeClr>
+            </a:gs>
+          </a:gsLst>
+          <a:lin ang="5400000" scaled="0"/>
+        </a:gradFill>
+      </a:fillStyleLst>
+      <a:lnStyleLst>
+        <a:ln w="12700" cap="flat" cmpd="sng" algn="ctr">
+          <a:solidFill>
+            <a:schemeClr val="phClr"/>
+          </a:solidFill>
+          <a:prstDash val="solid"/>
+          <a:miter lim="800000"/>
+        </a:ln>
+        <a:ln w="19050" cap="flat" cmpd="sng" algn="ctr">
+          <a:solidFill>
+            <a:schemeClr val="phClr"/>
+          </a:solidFill>
+          <a:prstDash val="solid"/>
+          <a:miter lim="800000"/>
+        </a:ln>
+        <a:ln w="25400" cap="flat" cmpd="sng" algn="ctr">
+          <a:solidFill>
+            <a:schemeClr val="phClr"/>
+          </a:solidFill>
+          <a:prstDash val="solid"/>
+          <a:miter lim="800000"/>
+        </a:ln>
+      </a:lnStyleLst>
+      <a:effectStyleLst>
+        <a:effectStyle>
+          <a:effectLst/>
+        </a:effectStyle>
+        <a:effectStyle>
+          <a:effectLst/>
+        </a:effectStyle>
+        <a:effectStyle>
+          <a:effectLst>
+            <a:outerShdw blurRad="57150" dist="19050" dir="5400000" algn="ctr" rotWithShape="0">
+              <a:srgbClr val="000000">
+                <a:alpha val="63000"/>
+              </a:srgbClr>
+            </a:outerShdw>
+          </a:effectLst>
+        </a:effectStyle>
+      </a:effectStyleLst>
+      <a:bgFillStyleLst>
+        <a:solidFill>
+          <a:schemeClr val="phClr"/>
+        </a:solidFill>
+        <a:solidFill>
+          <a:schemeClr val="phClr">
+            <a:tint val="95000"/>
+            <a:satMod val="170000"/>
+          </a:schemeClr>
+        </a:solidFill>
+        <a:gradFill rotWithShape="1">
+          <a:gsLst>
+            <a:gs pos="0">
+              <a:schemeClr val="phClr">
+                <a:tint val="93000"/>
+                <a:satMod val="150000"/>
+                <a:shade val="98000"/>
+                <a:lumMod val="102000"/>
+              </a:schemeClr>
+            </a:gs>
+            <a:gs pos="50000">
+              <a:schemeClr val="phClr">
+                <a:tint val="98000"/>
+                <a:satMod val="130000"/>
+                <a:shade val="90000"/>
+                <a:lumMod val="103000"/>
+              </a:schemeClr>
+            </a:gs>
+            <a:gs pos="100000">
+              <a:schemeClr val="phClr">
+                <a:shade val="63000"/>
+                <a:satMod val="120000"/>
+              </a:schemeClr>
+            </a:gs>
+          </a:gsLst>
+          <a:lin ang="5400000" scaled="0"/>
+        </a:gradFill>
+      </a:bgFillStyleLst>
+    </a:fmtScheme>
+  </a:themeElements>
+  <a:objectDefaults>
+    <a:lnDef>
+      <a:spPr/>
+      <a:bodyPr/>
+      <a:lstStyle/>
+      <a:style>
+        <a:lnRef idx="2">
+          <a:schemeClr val="accent1"/>
+        </a:lnRef>
+        <a:fillRef idx="0">
+          <a:schemeClr val="accent1"/>
+        </a:fillRef>
+        <a:effectRef idx="1">
+          <a:schemeClr val="accent1"/>
+        </a:effectRef>
+        <a:fontRef idx="minor">
+          <a:schemeClr val="tx1"/>
+        </a:fontRef>
+      </a:style>
+    </a:lnDef>
+  </a:objectDefaults>
+  <a:extraClrSchemeLst/>
+  <a:extLst>
+    <a:ext uri="{05A4C25C-085E-4340-85A3-A5531E510DB2}">
+      <thm15:themeFamily xmlns:thm15="http://schemas.microsoft.com/office/thememl/2012/main" name="Office Theme" id="{2E142A2C-CD16-42D6-873A-C26D2A0506FA}" vid="{1BDDFF52-6CD6-40A5-AB3C-68EB2F1E4D0A}"/>
+    </a:ext>
+  </a:extLst>
+</a:theme>
+</file>
+
 <file path=customXml/item1.xml><?xml version="1.0" encoding="utf-8"?>
 <p:properties xmlns:p="http://schemas.microsoft.com/office/2006/metadata/properties" xmlns:xsi="http://www.w3.org/2001/XMLSchema-instance" xmlns:pc="http://schemas.microsoft.com/office/infopath/2007/PartnerControls">
   <documentManagement/>

--- a/BD6 Assignment.pptx
+++ b/BD6 Assignment.pptx
@@ -3805,7 +3805,7 @@
         </p:blipFill>
         <p:spPr>
           <a:xfrm>
-            <a:off x="7369696" y="8403449"/>
+            <a:off x="7369696" y="8341457"/>
             <a:ext cx="1689656" cy="923344"/>
           </a:xfrm>
           <a:prstGeom prst="rect">
@@ -3827,8 +3827,8 @@
         </p:nvSpPr>
         <p:spPr>
           <a:xfrm>
-            <a:off x="6809773" y="7432929"/>
-            <a:ext cx="2613195" cy="5328000"/>
+            <a:off x="6809773" y="7370937"/>
+            <a:ext cx="2613195" cy="5349600"/>
           </a:xfrm>
           <a:prstGeom prst="rect">
             <a:avLst/>
@@ -4487,7 +4487,7 @@
         </p:nvGrpSpPr>
         <p:grpSpPr>
           <a:xfrm>
-            <a:off x="6887534" y="6474652"/>
+            <a:off x="6887534" y="6412660"/>
             <a:ext cx="2390472" cy="878254"/>
             <a:chOff x="6887534" y="6940579"/>
             <a:chExt cx="2390472" cy="878254"/>
@@ -4568,7 +4568,7 @@
         </p:nvSpPr>
         <p:spPr>
           <a:xfrm>
-            <a:off x="6823500" y="5969519"/>
+            <a:off x="6823500" y="5907527"/>
             <a:ext cx="2599468" cy="1404000"/>
           </a:xfrm>
           <a:prstGeom prst="rect">
@@ -4774,7 +4774,7 @@
         </p:nvSpPr>
         <p:spPr>
           <a:xfrm>
-            <a:off x="358007" y="399527"/>
+            <a:off x="358007" y="337535"/>
             <a:ext cx="9064961" cy="5508000"/>
           </a:xfrm>
           <a:prstGeom prst="rect">
@@ -5781,7 +5781,7 @@
         </p:nvSpPr>
         <p:spPr>
           <a:xfrm>
-            <a:off x="254001" y="101433"/>
+            <a:off x="254001" y="54939"/>
             <a:ext cx="8838682" cy="338554"/>
           </a:xfrm>
           <a:prstGeom prst="rect">
@@ -5824,7 +5824,7 @@
         </p:nvSpPr>
         <p:spPr>
           <a:xfrm>
-            <a:off x="358005" y="5969464"/>
+            <a:off x="358005" y="5907472"/>
             <a:ext cx="6408000" cy="1404000"/>
           </a:xfrm>
           <a:prstGeom prst="rect">
@@ -6037,7 +6037,7 @@
         </p:nvSpPr>
         <p:spPr>
           <a:xfrm>
-            <a:off x="358006" y="7432929"/>
+            <a:off x="358006" y="7370937"/>
             <a:ext cx="6396299" cy="3131999"/>
           </a:xfrm>
           <a:prstGeom prst="rect">
@@ -6508,13 +6508,13 @@
           <p:nvPr>
             <p:extLst>
               <p:ext uri="{D42A27DB-BD31-4B8C-83A1-F6EECF244321}">
-                <p14:modId xmlns:p14="http://schemas.microsoft.com/office/powerpoint/2010/main" val="23553094"/>
+                <p14:modId xmlns:p14="http://schemas.microsoft.com/office/powerpoint/2010/main" val="1750158232"/>
               </p:ext>
             </p:extLst>
           </p:nvPr>
         </p:nvGraphicFramePr>
         <p:xfrm>
-          <a:off x="444140" y="8179123"/>
+          <a:off x="444140" y="8117131"/>
           <a:ext cx="6251127" cy="2346960"/>
         </p:xfrm>
         <a:graphic>
@@ -7152,8 +7152,8 @@
         </p:nvSpPr>
         <p:spPr>
           <a:xfrm>
-            <a:off x="358005" y="10623907"/>
-            <a:ext cx="6408000" cy="2124000"/>
+            <a:off x="358005" y="10561915"/>
+            <a:ext cx="6408000" cy="2160000"/>
           </a:xfrm>
           <a:prstGeom prst="rect">
             <a:avLst/>

--- a/BD6 Assignment.pptx
+++ b/BD6 Assignment.pptx
@@ -3805,7 +3805,7 @@
         </p:blipFill>
         <p:spPr>
           <a:xfrm>
-            <a:off x="7369696" y="8341457"/>
+            <a:off x="7271542" y="8375257"/>
             <a:ext cx="1689656" cy="923344"/>
           </a:xfrm>
           <a:prstGeom prst="rect">
@@ -3828,7 +3828,7 @@
         <p:spPr>
           <a:xfrm>
             <a:off x="6809773" y="7370937"/>
-            <a:ext cx="2613195" cy="5349600"/>
+            <a:ext cx="2613195" cy="5364000"/>
           </a:xfrm>
           <a:prstGeom prst="rect">
             <a:avLst/>
@@ -4006,7 +4006,7 @@
                 </a:solidFill>
                 <a:latin typeface="+mn-lt"/>
               </a:rPr>
-              <a:t>Logistic Regression achieved the best performance, with the highest recall (Recall = 0.935, AUC = 0.972)</a:t>
+              <a:t>Logistic Regression achieved the best performance, </a:t>
             </a:r>
             <a:r>
               <a:rPr lang="en-GB" sz="1000" dirty="0">
@@ -4015,7 +4015,30 @@
                 </a:solidFill>
                 <a:latin typeface="+mn-lt"/>
               </a:rPr>
-              <a:t>, and was therefore selected as the final model. </a:t>
+              <a:t>with the highest recall </a:t>
+            </a:r>
+          </a:p>
+          <a:p>
+            <a:pPr lvl="0" defTabSz="1706910">
+              <a:defRPr/>
+            </a:pPr>
+            <a:r>
+              <a:rPr lang="en-GB" sz="1000" b="1" dirty="0">
+                <a:solidFill>
+                  <a:prstClr val="black"/>
+                </a:solidFill>
+                <a:latin typeface="+mn-lt"/>
+              </a:rPr>
+              <a:t>(Recall = 0.935, AUC = 0.972) </a:t>
+            </a:r>
+            <a:r>
+              <a:rPr lang="en-GB" sz="1000" dirty="0">
+                <a:solidFill>
+                  <a:prstClr val="black"/>
+                </a:solidFill>
+                <a:latin typeface="+mn-lt"/>
+              </a:rPr>
+              <a:t>and was therefore selected as the final model. </a:t>
             </a:r>
           </a:p>
           <a:p>
@@ -7153,7 +7176,7 @@
         <p:spPr>
           <a:xfrm>
             <a:off x="358005" y="10561915"/>
-            <a:ext cx="6408000" cy="2160000"/>
+            <a:ext cx="6397200" cy="2170800"/>
           </a:xfrm>
           <a:prstGeom prst="rect">
             <a:avLst/>

--- a/BD6 Assignment.pptx
+++ b/BD6 Assignment.pptx
@@ -2,7 +2,7 @@
 <file path=ppt/presentation.xml><?xml version="1.0" encoding="utf-8"?>
 <p:presentation xmlns:a="http://schemas.openxmlformats.org/drawingml/2006/main" xmlns:r="http://schemas.openxmlformats.org/officeDocument/2006/relationships" xmlns:p="http://schemas.openxmlformats.org/presentationml/2006/main" saveSubsetFonts="1">
   <p:sldMasterIdLst>
-    <p:sldMasterId id="2147483648" r:id="rId4"/>
+    <p:sldMasterId id="2147483756" r:id="rId4"/>
   </p:sldMasterIdLst>
   <p:notesMasterIdLst>
     <p:notesMasterId r:id="rId6"/>
@@ -16,7 +16,7 @@
     <a:defPPr>
       <a:defRPr lang="en-US"/>
     </a:defPPr>
-    <a:lvl1pPr marL="0" algn="l" defTabSz="914400" rtl="0" eaLnBrk="1" latinLnBrk="0" hangingPunct="1">
+    <a:lvl1pPr marL="0" algn="l" defTabSz="457200" rtl="0" eaLnBrk="1" latinLnBrk="0" hangingPunct="1">
       <a:defRPr sz="1800" kern="1200">
         <a:solidFill>
           <a:schemeClr val="tx1"/>
@@ -26,7 +26,7 @@
         <a:cs typeface="+mn-cs"/>
       </a:defRPr>
     </a:lvl1pPr>
-    <a:lvl2pPr marL="457200" algn="l" defTabSz="914400" rtl="0" eaLnBrk="1" latinLnBrk="0" hangingPunct="1">
+    <a:lvl2pPr marL="457200" algn="l" defTabSz="457200" rtl="0" eaLnBrk="1" latinLnBrk="0" hangingPunct="1">
       <a:defRPr sz="1800" kern="1200">
         <a:solidFill>
           <a:schemeClr val="tx1"/>
@@ -36,7 +36,7 @@
         <a:cs typeface="+mn-cs"/>
       </a:defRPr>
     </a:lvl2pPr>
-    <a:lvl3pPr marL="914400" algn="l" defTabSz="914400" rtl="0" eaLnBrk="1" latinLnBrk="0" hangingPunct="1">
+    <a:lvl3pPr marL="914400" algn="l" defTabSz="457200" rtl="0" eaLnBrk="1" latinLnBrk="0" hangingPunct="1">
       <a:defRPr sz="1800" kern="1200">
         <a:solidFill>
           <a:schemeClr val="tx1"/>
@@ -46,7 +46,7 @@
         <a:cs typeface="+mn-cs"/>
       </a:defRPr>
     </a:lvl3pPr>
-    <a:lvl4pPr marL="1371600" algn="l" defTabSz="914400" rtl="0" eaLnBrk="1" latinLnBrk="0" hangingPunct="1">
+    <a:lvl4pPr marL="1371600" algn="l" defTabSz="457200" rtl="0" eaLnBrk="1" latinLnBrk="0" hangingPunct="1">
       <a:defRPr sz="1800" kern="1200">
         <a:solidFill>
           <a:schemeClr val="tx1"/>
@@ -56,7 +56,7 @@
         <a:cs typeface="+mn-cs"/>
       </a:defRPr>
     </a:lvl4pPr>
-    <a:lvl5pPr marL="1828800" algn="l" defTabSz="914400" rtl="0" eaLnBrk="1" latinLnBrk="0" hangingPunct="1">
+    <a:lvl5pPr marL="1828800" algn="l" defTabSz="457200" rtl="0" eaLnBrk="1" latinLnBrk="0" hangingPunct="1">
       <a:defRPr sz="1800" kern="1200">
         <a:solidFill>
           <a:schemeClr val="tx1"/>
@@ -66,7 +66,7 @@
         <a:cs typeface="+mn-cs"/>
       </a:defRPr>
     </a:lvl5pPr>
-    <a:lvl6pPr marL="2286000" algn="l" defTabSz="914400" rtl="0" eaLnBrk="1" latinLnBrk="0" hangingPunct="1">
+    <a:lvl6pPr marL="2286000" algn="l" defTabSz="457200" rtl="0" eaLnBrk="1" latinLnBrk="0" hangingPunct="1">
       <a:defRPr sz="1800" kern="1200">
         <a:solidFill>
           <a:schemeClr val="tx1"/>
@@ -76,7 +76,7 @@
         <a:cs typeface="+mn-cs"/>
       </a:defRPr>
     </a:lvl6pPr>
-    <a:lvl7pPr marL="2743200" algn="l" defTabSz="914400" rtl="0" eaLnBrk="1" latinLnBrk="0" hangingPunct="1">
+    <a:lvl7pPr marL="2743200" algn="l" defTabSz="457200" rtl="0" eaLnBrk="1" latinLnBrk="0" hangingPunct="1">
       <a:defRPr sz="1800" kern="1200">
         <a:solidFill>
           <a:schemeClr val="tx1"/>
@@ -86,7 +86,7 @@
         <a:cs typeface="+mn-cs"/>
       </a:defRPr>
     </a:lvl7pPr>
-    <a:lvl8pPr marL="3200400" algn="l" defTabSz="914400" rtl="0" eaLnBrk="1" latinLnBrk="0" hangingPunct="1">
+    <a:lvl8pPr marL="3200400" algn="l" defTabSz="457200" rtl="0" eaLnBrk="1" latinLnBrk="0" hangingPunct="1">
       <a:defRPr sz="1800" kern="1200">
         <a:solidFill>
           <a:schemeClr val="tx1"/>
@@ -96,7 +96,7 @@
         <a:cs typeface="+mn-cs"/>
       </a:defRPr>
     </a:lvl8pPr>
-    <a:lvl9pPr marL="3657600" algn="l" defTabSz="914400" rtl="0" eaLnBrk="1" latinLnBrk="0" hangingPunct="1">
+    <a:lvl9pPr marL="3657600" algn="l" defTabSz="457200" rtl="0" eaLnBrk="1" latinLnBrk="0" hangingPunct="1">
       <a:defRPr sz="1800" kern="1200">
         <a:solidFill>
           <a:schemeClr val="tx1"/>
@@ -567,13 +567,7 @@
       </p:grpSpPr>
       <p:sp>
         <p:nvSpPr>
-          <p:cNvPr id="2" name="Title 1">
-            <a:extLst>
-              <a:ext uri="{FF2B5EF4-FFF2-40B4-BE49-F238E27FC236}">
-                <a16:creationId xmlns:a16="http://schemas.microsoft.com/office/drawing/2014/main" id="{122D5957-A6EF-32E7-E3D1-1B003C9F61BD}"/>
-              </a:ext>
-            </a:extLst>
-          </p:cNvPr>
+          <p:cNvPr id="2" name="Title 1"/>
           <p:cNvSpPr>
             <a:spLocks noGrp="1"/>
           </p:cNvSpPr>
@@ -583,35 +577,29 @@
         </p:nvSpPr>
         <p:spPr>
           <a:xfrm>
-            <a:off x="1200150" y="2095078"/>
-            <a:ext cx="7200900" cy="4456853"/>
+            <a:off x="720090" y="2095078"/>
+            <a:ext cx="8161020" cy="4456853"/>
           </a:xfrm>
         </p:spPr>
         <p:txBody>
           <a:bodyPr anchor="b"/>
           <a:lstStyle>
             <a:lvl1pPr algn="ctr">
-              <a:defRPr sz="11200"/>
+              <a:defRPr sz="6300"/>
             </a:lvl1pPr>
           </a:lstStyle>
           <a:p>
             <a:r>
-              <a:rPr lang="en-US"/>
+              <a:rPr lang="en-GB"/>
               <a:t>Click to edit Master title style</a:t>
             </a:r>
-            <a:endParaRPr lang="en-GB"/>
+            <a:endParaRPr lang="en-US" dirty="0"/>
           </a:p>
         </p:txBody>
       </p:sp>
       <p:sp>
         <p:nvSpPr>
-          <p:cNvPr id="3" name="Subtitle 2">
-            <a:extLst>
-              <a:ext uri="{FF2B5EF4-FFF2-40B4-BE49-F238E27FC236}">
-                <a16:creationId xmlns:a16="http://schemas.microsoft.com/office/drawing/2014/main" id="{E3825EEC-0A7C-154A-78AF-21307B34CF47}"/>
-              </a:ext>
-            </a:extLst>
-          </p:cNvPr>
+          <p:cNvPr id="3" name="Subtitle 2"/>
           <p:cNvSpPr>
             <a:spLocks noGrp="1"/>
           </p:cNvSpPr>
@@ -630,59 +618,53 @@
           <a:lstStyle>
             <a:lvl1pPr marL="0" indent="0" algn="ctr">
               <a:buNone/>
-              <a:defRPr sz="4480"/>
+              <a:defRPr sz="2520"/>
             </a:lvl1pPr>
-            <a:lvl2pPr marL="853455" indent="0" algn="ctr">
+            <a:lvl2pPr marL="480060" indent="0" algn="ctr">
               <a:buNone/>
-              <a:defRPr sz="3733"/>
+              <a:defRPr sz="2100"/>
             </a:lvl2pPr>
-            <a:lvl3pPr marL="1706910" indent="0" algn="ctr">
+            <a:lvl3pPr marL="960120" indent="0" algn="ctr">
               <a:buNone/>
-              <a:defRPr sz="3360"/>
+              <a:defRPr sz="1890"/>
             </a:lvl3pPr>
-            <a:lvl4pPr marL="2560366" indent="0" algn="ctr">
+            <a:lvl4pPr marL="1440180" indent="0" algn="ctr">
               <a:buNone/>
-              <a:defRPr sz="2987"/>
+              <a:defRPr sz="1680"/>
             </a:lvl4pPr>
-            <a:lvl5pPr marL="3413821" indent="0" algn="ctr">
+            <a:lvl5pPr marL="1920240" indent="0" algn="ctr">
               <a:buNone/>
-              <a:defRPr sz="2987"/>
+              <a:defRPr sz="1680"/>
             </a:lvl5pPr>
-            <a:lvl6pPr marL="4267276" indent="0" algn="ctr">
+            <a:lvl6pPr marL="2400300" indent="0" algn="ctr">
               <a:buNone/>
-              <a:defRPr sz="2987"/>
+              <a:defRPr sz="1680"/>
             </a:lvl6pPr>
-            <a:lvl7pPr marL="5120731" indent="0" algn="ctr">
+            <a:lvl7pPr marL="2880360" indent="0" algn="ctr">
               <a:buNone/>
-              <a:defRPr sz="2987"/>
+              <a:defRPr sz="1680"/>
             </a:lvl7pPr>
-            <a:lvl8pPr marL="5974187" indent="0" algn="ctr">
+            <a:lvl8pPr marL="3360420" indent="0" algn="ctr">
               <a:buNone/>
-              <a:defRPr sz="2987"/>
+              <a:defRPr sz="1680"/>
             </a:lvl8pPr>
-            <a:lvl9pPr marL="6827642" indent="0" algn="ctr">
+            <a:lvl9pPr marL="3840480" indent="0" algn="ctr">
               <a:buNone/>
-              <a:defRPr sz="2987"/>
+              <a:defRPr sz="1680"/>
             </a:lvl9pPr>
           </a:lstStyle>
           <a:p>
             <a:r>
-              <a:rPr lang="en-US"/>
+              <a:rPr lang="en-GB"/>
               <a:t>Click to edit Master subtitle style</a:t>
             </a:r>
-            <a:endParaRPr lang="en-GB"/>
+            <a:endParaRPr lang="en-US" dirty="0"/>
           </a:p>
         </p:txBody>
       </p:sp>
       <p:sp>
         <p:nvSpPr>
-          <p:cNvPr id="4" name="Date Placeholder 3">
-            <a:extLst>
-              <a:ext uri="{FF2B5EF4-FFF2-40B4-BE49-F238E27FC236}">
-                <a16:creationId xmlns:a16="http://schemas.microsoft.com/office/drawing/2014/main" id="{25F32E64-FDCA-3477-2C2F-6351F106E4A0}"/>
-              </a:ext>
-            </a:extLst>
-          </p:cNvPr>
+          <p:cNvPr id="4" name="Date Placeholder 3"/>
           <p:cNvSpPr>
             <a:spLocks noGrp="1"/>
           </p:cNvSpPr>
@@ -705,13 +687,7 @@
       </p:sp>
       <p:sp>
         <p:nvSpPr>
-          <p:cNvPr id="5" name="Footer Placeholder 4">
-            <a:extLst>
-              <a:ext uri="{FF2B5EF4-FFF2-40B4-BE49-F238E27FC236}">
-                <a16:creationId xmlns:a16="http://schemas.microsoft.com/office/drawing/2014/main" id="{5F0E7E88-14E3-DDE4-83DB-A47D688C31C6}"/>
-              </a:ext>
-            </a:extLst>
-          </p:cNvPr>
+          <p:cNvPr id="5" name="Footer Placeholder 4"/>
           <p:cNvSpPr>
             <a:spLocks noGrp="1"/>
           </p:cNvSpPr>
@@ -730,13 +706,7 @@
       </p:sp>
       <p:sp>
         <p:nvSpPr>
-          <p:cNvPr id="6" name="Slide Number Placeholder 5">
-            <a:extLst>
-              <a:ext uri="{FF2B5EF4-FFF2-40B4-BE49-F238E27FC236}">
-                <a16:creationId xmlns:a16="http://schemas.microsoft.com/office/drawing/2014/main" id="{F4BC03FC-2D55-6B61-A367-2D593B640668}"/>
-              </a:ext>
-            </a:extLst>
-          </p:cNvPr>
+          <p:cNvPr id="6" name="Slide Number Placeholder 5"/>
           <p:cNvSpPr>
             <a:spLocks noGrp="1"/>
           </p:cNvSpPr>
@@ -760,7 +730,7 @@
     </p:spTree>
     <p:extLst>
       <p:ext uri="{BB962C8B-B14F-4D97-AF65-F5344CB8AC3E}">
-        <p14:creationId xmlns:p14="http://schemas.microsoft.com/office/powerpoint/2010/main" val="4208040320"/>
+        <p14:creationId xmlns:p14="http://schemas.microsoft.com/office/powerpoint/2010/main" val="695577194"/>
       </p:ext>
     </p:extLst>
   </p:cSld>
@@ -789,13 +759,7 @@
       </p:grpSpPr>
       <p:sp>
         <p:nvSpPr>
-          <p:cNvPr id="2" name="Title 1">
-            <a:extLst>
-              <a:ext uri="{FF2B5EF4-FFF2-40B4-BE49-F238E27FC236}">
-                <a16:creationId xmlns:a16="http://schemas.microsoft.com/office/drawing/2014/main" id="{964EB5B2-D5B0-19AC-BEB0-9D73849D3E59}"/>
-              </a:ext>
-            </a:extLst>
-          </p:cNvPr>
+          <p:cNvPr id="2" name="Title 1"/>
           <p:cNvSpPr>
             <a:spLocks noGrp="1"/>
           </p:cNvSpPr>
@@ -809,22 +773,16 @@
           <a:lstStyle/>
           <a:p>
             <a:r>
-              <a:rPr lang="en-US"/>
+              <a:rPr lang="en-GB"/>
               <a:t>Click to edit Master title style</a:t>
             </a:r>
-            <a:endParaRPr lang="en-GB"/>
+            <a:endParaRPr lang="en-US" dirty="0"/>
           </a:p>
         </p:txBody>
       </p:sp>
       <p:sp>
         <p:nvSpPr>
-          <p:cNvPr id="3" name="Vertical Text Placeholder 2">
-            <a:extLst>
-              <a:ext uri="{FF2B5EF4-FFF2-40B4-BE49-F238E27FC236}">
-                <a16:creationId xmlns:a16="http://schemas.microsoft.com/office/drawing/2014/main" id="{406005CA-94BC-E16C-EF84-344BD073F8CB}"/>
-              </a:ext>
-            </a:extLst>
-          </p:cNvPr>
+          <p:cNvPr id="3" name="Vertical Text Placeholder 2"/>
           <p:cNvSpPr>
             <a:spLocks noGrp="1"/>
           </p:cNvSpPr>
@@ -839,50 +797,44 @@
           <a:p>
             <a:pPr lvl="0"/>
             <a:r>
-              <a:rPr lang="en-US"/>
+              <a:rPr lang="en-GB"/>
               <a:t>Click to edit Master text styles</a:t>
             </a:r>
           </a:p>
           <a:p>
             <a:pPr lvl="1"/>
             <a:r>
-              <a:rPr lang="en-US"/>
+              <a:rPr lang="en-GB"/>
               <a:t>Second level</a:t>
             </a:r>
           </a:p>
           <a:p>
             <a:pPr lvl="2"/>
             <a:r>
-              <a:rPr lang="en-US"/>
+              <a:rPr lang="en-GB"/>
               <a:t>Third level</a:t>
             </a:r>
           </a:p>
           <a:p>
             <a:pPr lvl="3"/>
             <a:r>
-              <a:rPr lang="en-US"/>
+              <a:rPr lang="en-GB"/>
               <a:t>Fourth level</a:t>
             </a:r>
           </a:p>
           <a:p>
             <a:pPr lvl="4"/>
             <a:r>
-              <a:rPr lang="en-US"/>
+              <a:rPr lang="en-GB"/>
               <a:t>Fifth level</a:t>
             </a:r>
-            <a:endParaRPr lang="en-GB"/>
+            <a:endParaRPr lang="en-US" dirty="0"/>
           </a:p>
         </p:txBody>
       </p:sp>
       <p:sp>
         <p:nvSpPr>
-          <p:cNvPr id="4" name="Date Placeholder 3">
-            <a:extLst>
-              <a:ext uri="{FF2B5EF4-FFF2-40B4-BE49-F238E27FC236}">
-                <a16:creationId xmlns:a16="http://schemas.microsoft.com/office/drawing/2014/main" id="{A5F94088-AE02-9F42-0711-DB0AF9A0CDB3}"/>
-              </a:ext>
-            </a:extLst>
-          </p:cNvPr>
+          <p:cNvPr id="4" name="Date Placeholder 3"/>
           <p:cNvSpPr>
             <a:spLocks noGrp="1"/>
           </p:cNvSpPr>
@@ -905,13 +857,7 @@
       </p:sp>
       <p:sp>
         <p:nvSpPr>
-          <p:cNvPr id="5" name="Footer Placeholder 4">
-            <a:extLst>
-              <a:ext uri="{FF2B5EF4-FFF2-40B4-BE49-F238E27FC236}">
-                <a16:creationId xmlns:a16="http://schemas.microsoft.com/office/drawing/2014/main" id="{7FA0081D-87C2-4B1B-DDE0-CC3F00DF20B7}"/>
-              </a:ext>
-            </a:extLst>
-          </p:cNvPr>
+          <p:cNvPr id="5" name="Footer Placeholder 4"/>
           <p:cNvSpPr>
             <a:spLocks noGrp="1"/>
           </p:cNvSpPr>
@@ -930,13 +876,7 @@
       </p:sp>
       <p:sp>
         <p:nvSpPr>
-          <p:cNvPr id="6" name="Slide Number Placeholder 5">
-            <a:extLst>
-              <a:ext uri="{FF2B5EF4-FFF2-40B4-BE49-F238E27FC236}">
-                <a16:creationId xmlns:a16="http://schemas.microsoft.com/office/drawing/2014/main" id="{FC445E1E-A0A0-BC08-735D-62C39D971EA0}"/>
-              </a:ext>
-            </a:extLst>
-          </p:cNvPr>
+          <p:cNvPr id="6" name="Slide Number Placeholder 5"/>
           <p:cNvSpPr>
             <a:spLocks noGrp="1"/>
           </p:cNvSpPr>
@@ -960,7 +900,7 @@
     </p:spTree>
     <p:extLst>
       <p:ext uri="{BB962C8B-B14F-4D97-AF65-F5344CB8AC3E}">
-        <p14:creationId xmlns:p14="http://schemas.microsoft.com/office/powerpoint/2010/main" val="655154492"/>
+        <p14:creationId xmlns:p14="http://schemas.microsoft.com/office/powerpoint/2010/main" val="1687613702"/>
       </p:ext>
     </p:extLst>
   </p:cSld>
@@ -989,13 +929,7 @@
       </p:grpSpPr>
       <p:sp>
         <p:nvSpPr>
-          <p:cNvPr id="2" name="Vertical Title 1">
-            <a:extLst>
-              <a:ext uri="{FF2B5EF4-FFF2-40B4-BE49-F238E27FC236}">
-                <a16:creationId xmlns:a16="http://schemas.microsoft.com/office/drawing/2014/main" id="{9B9DBB0D-0647-BD14-ACDE-3FE29F7DAF94}"/>
-              </a:ext>
-            </a:extLst>
-          </p:cNvPr>
+          <p:cNvPr id="2" name="Vertical Title 1"/>
           <p:cNvSpPr>
             <a:spLocks noGrp="1"/>
           </p:cNvSpPr>
@@ -1014,22 +948,16 @@
           <a:lstStyle/>
           <a:p>
             <a:r>
-              <a:rPr lang="en-US"/>
+              <a:rPr lang="en-GB"/>
               <a:t>Click to edit Master title style</a:t>
             </a:r>
-            <a:endParaRPr lang="en-GB"/>
+            <a:endParaRPr lang="en-US" dirty="0"/>
           </a:p>
         </p:txBody>
       </p:sp>
       <p:sp>
         <p:nvSpPr>
-          <p:cNvPr id="3" name="Vertical Text Placeholder 2">
-            <a:extLst>
-              <a:ext uri="{FF2B5EF4-FFF2-40B4-BE49-F238E27FC236}">
-                <a16:creationId xmlns:a16="http://schemas.microsoft.com/office/drawing/2014/main" id="{191E2EB1-B200-E53F-4C09-07E4B9A25240}"/>
-              </a:ext>
-            </a:extLst>
-          </p:cNvPr>
+          <p:cNvPr id="3" name="Vertical Text Placeholder 2"/>
           <p:cNvSpPr>
             <a:spLocks noGrp="1"/>
           </p:cNvSpPr>
@@ -1049,50 +977,44 @@
           <a:p>
             <a:pPr lvl="0"/>
             <a:r>
-              <a:rPr lang="en-US"/>
+              <a:rPr lang="en-GB"/>
               <a:t>Click to edit Master text styles</a:t>
             </a:r>
           </a:p>
           <a:p>
             <a:pPr lvl="1"/>
             <a:r>
-              <a:rPr lang="en-US"/>
+              <a:rPr lang="en-GB"/>
               <a:t>Second level</a:t>
             </a:r>
           </a:p>
           <a:p>
             <a:pPr lvl="2"/>
             <a:r>
-              <a:rPr lang="en-US"/>
+              <a:rPr lang="en-GB"/>
               <a:t>Third level</a:t>
             </a:r>
           </a:p>
           <a:p>
             <a:pPr lvl="3"/>
             <a:r>
-              <a:rPr lang="en-US"/>
+              <a:rPr lang="en-GB"/>
               <a:t>Fourth level</a:t>
             </a:r>
           </a:p>
           <a:p>
             <a:pPr lvl="4"/>
             <a:r>
-              <a:rPr lang="en-US"/>
+              <a:rPr lang="en-GB"/>
               <a:t>Fifth level</a:t>
             </a:r>
-            <a:endParaRPr lang="en-GB"/>
+            <a:endParaRPr lang="en-US" dirty="0"/>
           </a:p>
         </p:txBody>
       </p:sp>
       <p:sp>
         <p:nvSpPr>
-          <p:cNvPr id="4" name="Date Placeholder 3">
-            <a:extLst>
-              <a:ext uri="{FF2B5EF4-FFF2-40B4-BE49-F238E27FC236}">
-                <a16:creationId xmlns:a16="http://schemas.microsoft.com/office/drawing/2014/main" id="{8E5D952A-342F-8455-302E-FD29E5066A15}"/>
-              </a:ext>
-            </a:extLst>
-          </p:cNvPr>
+          <p:cNvPr id="4" name="Date Placeholder 3"/>
           <p:cNvSpPr>
             <a:spLocks noGrp="1"/>
           </p:cNvSpPr>
@@ -1115,13 +1037,7 @@
       </p:sp>
       <p:sp>
         <p:nvSpPr>
-          <p:cNvPr id="5" name="Footer Placeholder 4">
-            <a:extLst>
-              <a:ext uri="{FF2B5EF4-FFF2-40B4-BE49-F238E27FC236}">
-                <a16:creationId xmlns:a16="http://schemas.microsoft.com/office/drawing/2014/main" id="{22F88315-D6D6-B195-E85D-6EE3849FE9A4}"/>
-              </a:ext>
-            </a:extLst>
-          </p:cNvPr>
+          <p:cNvPr id="5" name="Footer Placeholder 4"/>
           <p:cNvSpPr>
             <a:spLocks noGrp="1"/>
           </p:cNvSpPr>
@@ -1140,13 +1056,7 @@
       </p:sp>
       <p:sp>
         <p:nvSpPr>
-          <p:cNvPr id="6" name="Slide Number Placeholder 5">
-            <a:extLst>
-              <a:ext uri="{FF2B5EF4-FFF2-40B4-BE49-F238E27FC236}">
-                <a16:creationId xmlns:a16="http://schemas.microsoft.com/office/drawing/2014/main" id="{DE1E61F3-CA3E-E61E-9D5D-F0E721CF0231}"/>
-              </a:ext>
-            </a:extLst>
-          </p:cNvPr>
+          <p:cNvPr id="6" name="Slide Number Placeholder 5"/>
           <p:cNvSpPr>
             <a:spLocks noGrp="1"/>
           </p:cNvSpPr>
@@ -1170,7 +1080,7 @@
     </p:spTree>
     <p:extLst>
       <p:ext uri="{BB962C8B-B14F-4D97-AF65-F5344CB8AC3E}">
-        <p14:creationId xmlns:p14="http://schemas.microsoft.com/office/powerpoint/2010/main" val="3624505315"/>
+        <p14:creationId xmlns:p14="http://schemas.microsoft.com/office/powerpoint/2010/main" val="2937428125"/>
       </p:ext>
     </p:extLst>
   </p:cSld>
@@ -1199,13 +1109,7 @@
       </p:grpSpPr>
       <p:sp>
         <p:nvSpPr>
-          <p:cNvPr id="2" name="Title 1">
-            <a:extLst>
-              <a:ext uri="{FF2B5EF4-FFF2-40B4-BE49-F238E27FC236}">
-                <a16:creationId xmlns:a16="http://schemas.microsoft.com/office/drawing/2014/main" id="{F4E64DFE-1C4E-BAD9-D3B4-913D786F567F}"/>
-              </a:ext>
-            </a:extLst>
-          </p:cNvPr>
+          <p:cNvPr id="2" name="Title 1"/>
           <p:cNvSpPr>
             <a:spLocks noGrp="1"/>
           </p:cNvSpPr>
@@ -1219,22 +1123,16 @@
           <a:lstStyle/>
           <a:p>
             <a:r>
-              <a:rPr lang="en-US"/>
+              <a:rPr lang="en-GB"/>
               <a:t>Click to edit Master title style</a:t>
             </a:r>
-            <a:endParaRPr lang="en-GB"/>
+            <a:endParaRPr lang="en-US" dirty="0"/>
           </a:p>
         </p:txBody>
       </p:sp>
       <p:sp>
         <p:nvSpPr>
-          <p:cNvPr id="3" name="Content Placeholder 2">
-            <a:extLst>
-              <a:ext uri="{FF2B5EF4-FFF2-40B4-BE49-F238E27FC236}">
-                <a16:creationId xmlns:a16="http://schemas.microsoft.com/office/drawing/2014/main" id="{DB9E0584-A067-E8B2-2ADF-8B5A138B5DA5}"/>
-              </a:ext>
-            </a:extLst>
-          </p:cNvPr>
+          <p:cNvPr id="3" name="Content Placeholder 2"/>
           <p:cNvSpPr>
             <a:spLocks noGrp="1"/>
           </p:cNvSpPr>
@@ -1249,50 +1147,44 @@
           <a:p>
             <a:pPr lvl="0"/>
             <a:r>
-              <a:rPr lang="en-US"/>
+              <a:rPr lang="en-GB"/>
               <a:t>Click to edit Master text styles</a:t>
             </a:r>
           </a:p>
           <a:p>
             <a:pPr lvl="1"/>
             <a:r>
-              <a:rPr lang="en-US"/>
+              <a:rPr lang="en-GB"/>
               <a:t>Second level</a:t>
             </a:r>
           </a:p>
           <a:p>
             <a:pPr lvl="2"/>
             <a:r>
-              <a:rPr lang="en-US"/>
+              <a:rPr lang="en-GB"/>
               <a:t>Third level</a:t>
             </a:r>
           </a:p>
           <a:p>
             <a:pPr lvl="3"/>
             <a:r>
-              <a:rPr lang="en-US"/>
+              <a:rPr lang="en-GB"/>
               <a:t>Fourth level</a:t>
             </a:r>
           </a:p>
           <a:p>
             <a:pPr lvl="4"/>
             <a:r>
-              <a:rPr lang="en-US"/>
+              <a:rPr lang="en-GB"/>
               <a:t>Fifth level</a:t>
             </a:r>
-            <a:endParaRPr lang="en-GB"/>
+            <a:endParaRPr lang="en-US" dirty="0"/>
           </a:p>
         </p:txBody>
       </p:sp>
       <p:sp>
         <p:nvSpPr>
-          <p:cNvPr id="4" name="Date Placeholder 3">
-            <a:extLst>
-              <a:ext uri="{FF2B5EF4-FFF2-40B4-BE49-F238E27FC236}">
-                <a16:creationId xmlns:a16="http://schemas.microsoft.com/office/drawing/2014/main" id="{B6A90663-C45E-4197-AA0A-34B4FF7EC89A}"/>
-              </a:ext>
-            </a:extLst>
-          </p:cNvPr>
+          <p:cNvPr id="4" name="Date Placeholder 3"/>
           <p:cNvSpPr>
             <a:spLocks noGrp="1"/>
           </p:cNvSpPr>
@@ -1315,13 +1207,7 @@
       </p:sp>
       <p:sp>
         <p:nvSpPr>
-          <p:cNvPr id="5" name="Footer Placeholder 4">
-            <a:extLst>
-              <a:ext uri="{FF2B5EF4-FFF2-40B4-BE49-F238E27FC236}">
-                <a16:creationId xmlns:a16="http://schemas.microsoft.com/office/drawing/2014/main" id="{AA71D409-2079-EBFB-DA3C-969592ECA967}"/>
-              </a:ext>
-            </a:extLst>
-          </p:cNvPr>
+          <p:cNvPr id="5" name="Footer Placeholder 4"/>
           <p:cNvSpPr>
             <a:spLocks noGrp="1"/>
           </p:cNvSpPr>
@@ -1340,13 +1226,7 @@
       </p:sp>
       <p:sp>
         <p:nvSpPr>
-          <p:cNvPr id="6" name="Slide Number Placeholder 5">
-            <a:extLst>
-              <a:ext uri="{FF2B5EF4-FFF2-40B4-BE49-F238E27FC236}">
-                <a16:creationId xmlns:a16="http://schemas.microsoft.com/office/drawing/2014/main" id="{714A8983-65A7-BE7A-3ECB-60F797C9CACC}"/>
-              </a:ext>
-            </a:extLst>
-          </p:cNvPr>
+          <p:cNvPr id="6" name="Slide Number Placeholder 5"/>
           <p:cNvSpPr>
             <a:spLocks noGrp="1"/>
           </p:cNvSpPr>
@@ -1370,7 +1250,7 @@
     </p:spTree>
     <p:extLst>
       <p:ext uri="{BB962C8B-B14F-4D97-AF65-F5344CB8AC3E}">
-        <p14:creationId xmlns:p14="http://schemas.microsoft.com/office/powerpoint/2010/main" val="2452001464"/>
+        <p14:creationId xmlns:p14="http://schemas.microsoft.com/office/powerpoint/2010/main" val="1993121690"/>
       </p:ext>
     </p:extLst>
   </p:cSld>
@@ -1399,13 +1279,7 @@
       </p:grpSpPr>
       <p:sp>
         <p:nvSpPr>
-          <p:cNvPr id="2" name="Title 1">
-            <a:extLst>
-              <a:ext uri="{FF2B5EF4-FFF2-40B4-BE49-F238E27FC236}">
-                <a16:creationId xmlns:a16="http://schemas.microsoft.com/office/drawing/2014/main" id="{7EFCD998-78BB-45C0-DC77-BFEB31D88B88}"/>
-              </a:ext>
-            </a:extLst>
-          </p:cNvPr>
+          <p:cNvPr id="2" name="Title 1"/>
           <p:cNvSpPr>
             <a:spLocks noGrp="1"/>
           </p:cNvSpPr>
@@ -1415,7 +1289,7 @@
         </p:nvSpPr>
         <p:spPr>
           <a:xfrm>
-            <a:off x="655082" y="3191512"/>
+            <a:off x="655082" y="3191514"/>
             <a:ext cx="8281035" cy="5325109"/>
           </a:xfrm>
         </p:spPr>
@@ -1423,27 +1297,21 @@
           <a:bodyPr anchor="b"/>
           <a:lstStyle>
             <a:lvl1pPr>
-              <a:defRPr sz="11200"/>
+              <a:defRPr sz="6300"/>
             </a:lvl1pPr>
           </a:lstStyle>
           <a:p>
             <a:r>
-              <a:rPr lang="en-US"/>
+              <a:rPr lang="en-GB"/>
               <a:t>Click to edit Master title style</a:t>
             </a:r>
-            <a:endParaRPr lang="en-GB"/>
+            <a:endParaRPr lang="en-US" dirty="0"/>
           </a:p>
         </p:txBody>
       </p:sp>
       <p:sp>
         <p:nvSpPr>
-          <p:cNvPr id="3" name="Text Placeholder 2">
-            <a:extLst>
-              <a:ext uri="{FF2B5EF4-FFF2-40B4-BE49-F238E27FC236}">
-                <a16:creationId xmlns:a16="http://schemas.microsoft.com/office/drawing/2014/main" id="{4927812D-600D-7B2D-69A4-F680EBB7A2CC}"/>
-              </a:ext>
-            </a:extLst>
-          </p:cNvPr>
+          <p:cNvPr id="3" name="Text Placeholder 2"/>
           <p:cNvSpPr>
             <a:spLocks noGrp="1"/>
           </p:cNvSpPr>
@@ -1453,7 +1321,7 @@
         </p:nvSpPr>
         <p:spPr>
           <a:xfrm>
-            <a:off x="655082" y="8566999"/>
+            <a:off x="655082" y="8567000"/>
             <a:ext cx="8281035" cy="2800349"/>
           </a:xfrm>
         </p:spPr>
@@ -1462,99 +1330,97 @@
           <a:lstStyle>
             <a:lvl1pPr marL="0" indent="0">
               <a:buNone/>
-              <a:defRPr sz="4480">
+              <a:defRPr sz="2520">
+                <a:solidFill>
+                  <a:schemeClr val="tx1"/>
+                </a:solidFill>
+              </a:defRPr>
+            </a:lvl1pPr>
+            <a:lvl2pPr marL="480060" indent="0">
+              <a:buNone/>
+              <a:defRPr sz="2100">
                 <a:solidFill>
                   <a:schemeClr val="tx1">
                     <a:tint val="75000"/>
                   </a:schemeClr>
                 </a:solidFill>
               </a:defRPr>
-            </a:lvl1pPr>
-            <a:lvl2pPr marL="853455" indent="0">
+            </a:lvl2pPr>
+            <a:lvl3pPr marL="960120" indent="0">
               <a:buNone/>
-              <a:defRPr sz="3733">
+              <a:defRPr sz="1890">
                 <a:solidFill>
                   <a:schemeClr val="tx1">
                     <a:tint val="75000"/>
                   </a:schemeClr>
                 </a:solidFill>
               </a:defRPr>
-            </a:lvl2pPr>
-            <a:lvl3pPr marL="1706910" indent="0">
+            </a:lvl3pPr>
+            <a:lvl4pPr marL="1440180" indent="0">
               <a:buNone/>
-              <a:defRPr sz="3360">
+              <a:defRPr sz="1680">
                 <a:solidFill>
                   <a:schemeClr val="tx1">
                     <a:tint val="75000"/>
                   </a:schemeClr>
                 </a:solidFill>
               </a:defRPr>
-            </a:lvl3pPr>
-            <a:lvl4pPr marL="2560366" indent="0">
+            </a:lvl4pPr>
+            <a:lvl5pPr marL="1920240" indent="0">
               <a:buNone/>
-              <a:defRPr sz="2987">
+              <a:defRPr sz="1680">
                 <a:solidFill>
                   <a:schemeClr val="tx1">
                     <a:tint val="75000"/>
                   </a:schemeClr>
                 </a:solidFill>
               </a:defRPr>
-            </a:lvl4pPr>
-            <a:lvl5pPr marL="3413821" indent="0">
+            </a:lvl5pPr>
+            <a:lvl6pPr marL="2400300" indent="0">
               <a:buNone/>
-              <a:defRPr sz="2987">
+              <a:defRPr sz="1680">
                 <a:solidFill>
                   <a:schemeClr val="tx1">
                     <a:tint val="75000"/>
                   </a:schemeClr>
                 </a:solidFill>
               </a:defRPr>
-            </a:lvl5pPr>
-            <a:lvl6pPr marL="4267276" indent="0">
+            </a:lvl6pPr>
+            <a:lvl7pPr marL="2880360" indent="0">
               <a:buNone/>
-              <a:defRPr sz="2987">
+              <a:defRPr sz="1680">
                 <a:solidFill>
                   <a:schemeClr val="tx1">
                     <a:tint val="75000"/>
                   </a:schemeClr>
                 </a:solidFill>
               </a:defRPr>
-            </a:lvl6pPr>
-            <a:lvl7pPr marL="5120731" indent="0">
+            </a:lvl7pPr>
+            <a:lvl8pPr marL="3360420" indent="0">
               <a:buNone/>
-              <a:defRPr sz="2987">
+              <a:defRPr sz="1680">
                 <a:solidFill>
                   <a:schemeClr val="tx1">
                     <a:tint val="75000"/>
                   </a:schemeClr>
                 </a:solidFill>
               </a:defRPr>
-            </a:lvl7pPr>
-            <a:lvl8pPr marL="5974187" indent="0">
+            </a:lvl8pPr>
+            <a:lvl9pPr marL="3840480" indent="0">
               <a:buNone/>
-              <a:defRPr sz="2987">
+              <a:defRPr sz="1680">
                 <a:solidFill>
                   <a:schemeClr val="tx1">
                     <a:tint val="75000"/>
                   </a:schemeClr>
                 </a:solidFill>
               </a:defRPr>
-            </a:lvl8pPr>
-            <a:lvl9pPr marL="6827642" indent="0">
-              <a:buNone/>
-              <a:defRPr sz="2987">
-                <a:solidFill>
-                  <a:schemeClr val="tx1">
-                    <a:tint val="75000"/>
-                  </a:schemeClr>
-                </a:solidFill>
-              </a:defRPr>
             </a:lvl9pPr>
           </a:lstStyle>
           <a:p>
             <a:pPr lvl="0"/>
             <a:r>
-              <a:rPr lang="en-US"/>
+              <a:rPr lang="en-GB"/>
               <a:t>Click to edit Master text styles</a:t>
             </a:r>
           </a:p>
@@ -1562,13 +1428,7 @@
       </p:sp>
       <p:sp>
         <p:nvSpPr>
-          <p:cNvPr id="4" name="Date Placeholder 3">
-            <a:extLst>
-              <a:ext uri="{FF2B5EF4-FFF2-40B4-BE49-F238E27FC236}">
-                <a16:creationId xmlns:a16="http://schemas.microsoft.com/office/drawing/2014/main" id="{D1A42C1A-1D43-FD79-27DC-0F688D9BEE95}"/>
-              </a:ext>
-            </a:extLst>
-          </p:cNvPr>
+          <p:cNvPr id="4" name="Date Placeholder 3"/>
           <p:cNvSpPr>
             <a:spLocks noGrp="1"/>
           </p:cNvSpPr>
@@ -1591,13 +1451,7 @@
       </p:sp>
       <p:sp>
         <p:nvSpPr>
-          <p:cNvPr id="5" name="Footer Placeholder 4">
-            <a:extLst>
-              <a:ext uri="{FF2B5EF4-FFF2-40B4-BE49-F238E27FC236}">
-                <a16:creationId xmlns:a16="http://schemas.microsoft.com/office/drawing/2014/main" id="{C5003866-6470-3D4A-38A7-21AF758C6C5A}"/>
-              </a:ext>
-            </a:extLst>
-          </p:cNvPr>
+          <p:cNvPr id="5" name="Footer Placeholder 4"/>
           <p:cNvSpPr>
             <a:spLocks noGrp="1"/>
           </p:cNvSpPr>
@@ -1616,13 +1470,7 @@
       </p:sp>
       <p:sp>
         <p:nvSpPr>
-          <p:cNvPr id="6" name="Slide Number Placeholder 5">
-            <a:extLst>
-              <a:ext uri="{FF2B5EF4-FFF2-40B4-BE49-F238E27FC236}">
-                <a16:creationId xmlns:a16="http://schemas.microsoft.com/office/drawing/2014/main" id="{DF6F41C7-6E95-5BAF-A838-B73FC74B464A}"/>
-              </a:ext>
-            </a:extLst>
-          </p:cNvPr>
+          <p:cNvPr id="6" name="Slide Number Placeholder 5"/>
           <p:cNvSpPr>
             <a:spLocks noGrp="1"/>
           </p:cNvSpPr>
@@ -1646,7 +1494,7 @@
     </p:spTree>
     <p:extLst>
       <p:ext uri="{BB962C8B-B14F-4D97-AF65-F5344CB8AC3E}">
-        <p14:creationId xmlns:p14="http://schemas.microsoft.com/office/powerpoint/2010/main" val="1058519571"/>
+        <p14:creationId xmlns:p14="http://schemas.microsoft.com/office/powerpoint/2010/main" val="2425959205"/>
       </p:ext>
     </p:extLst>
   </p:cSld>
@@ -1675,13 +1523,7 @@
       </p:grpSpPr>
       <p:sp>
         <p:nvSpPr>
-          <p:cNvPr id="2" name="Title 1">
-            <a:extLst>
-              <a:ext uri="{FF2B5EF4-FFF2-40B4-BE49-F238E27FC236}">
-                <a16:creationId xmlns:a16="http://schemas.microsoft.com/office/drawing/2014/main" id="{94E75D1E-3E39-8C74-2CFE-E9F426D6FF9B}"/>
-              </a:ext>
-            </a:extLst>
-          </p:cNvPr>
+          <p:cNvPr id="2" name="Title 1"/>
           <p:cNvSpPr>
             <a:spLocks noGrp="1"/>
           </p:cNvSpPr>
@@ -1695,22 +1537,16 @@
           <a:lstStyle/>
           <a:p>
             <a:r>
-              <a:rPr lang="en-US"/>
+              <a:rPr lang="en-GB"/>
               <a:t>Click to edit Master title style</a:t>
             </a:r>
-            <a:endParaRPr lang="en-GB"/>
+            <a:endParaRPr lang="en-US" dirty="0"/>
           </a:p>
         </p:txBody>
       </p:sp>
       <p:sp>
         <p:nvSpPr>
-          <p:cNvPr id="3" name="Content Placeholder 2">
-            <a:extLst>
-              <a:ext uri="{FF2B5EF4-FFF2-40B4-BE49-F238E27FC236}">
-                <a16:creationId xmlns:a16="http://schemas.microsoft.com/office/drawing/2014/main" id="{C6384DC3-52C3-DA95-4ED9-F089E646D969}"/>
-              </a:ext>
-            </a:extLst>
-          </p:cNvPr>
+          <p:cNvPr id="3" name="Content Placeholder 2"/>
           <p:cNvSpPr>
             <a:spLocks noGrp="1"/>
           </p:cNvSpPr>
@@ -1730,50 +1566,44 @@
           <a:p>
             <a:pPr lvl="0"/>
             <a:r>
-              <a:rPr lang="en-US"/>
+              <a:rPr lang="en-GB"/>
               <a:t>Click to edit Master text styles</a:t>
             </a:r>
           </a:p>
           <a:p>
             <a:pPr lvl="1"/>
             <a:r>
-              <a:rPr lang="en-US"/>
+              <a:rPr lang="en-GB"/>
               <a:t>Second level</a:t>
             </a:r>
           </a:p>
           <a:p>
             <a:pPr lvl="2"/>
             <a:r>
-              <a:rPr lang="en-US"/>
+              <a:rPr lang="en-GB"/>
               <a:t>Third level</a:t>
             </a:r>
           </a:p>
           <a:p>
             <a:pPr lvl="3"/>
             <a:r>
-              <a:rPr lang="en-US"/>
+              <a:rPr lang="en-GB"/>
               <a:t>Fourth level</a:t>
             </a:r>
           </a:p>
           <a:p>
             <a:pPr lvl="4"/>
             <a:r>
-              <a:rPr lang="en-US"/>
+              <a:rPr lang="en-GB"/>
               <a:t>Fifth level</a:t>
             </a:r>
-            <a:endParaRPr lang="en-GB"/>
+            <a:endParaRPr lang="en-US" dirty="0"/>
           </a:p>
         </p:txBody>
       </p:sp>
       <p:sp>
         <p:nvSpPr>
-          <p:cNvPr id="4" name="Content Placeholder 3">
-            <a:extLst>
-              <a:ext uri="{FF2B5EF4-FFF2-40B4-BE49-F238E27FC236}">
-                <a16:creationId xmlns:a16="http://schemas.microsoft.com/office/drawing/2014/main" id="{2333F7AE-7948-6C06-5E53-C0B84A456129}"/>
-              </a:ext>
-            </a:extLst>
-          </p:cNvPr>
+          <p:cNvPr id="4" name="Content Placeholder 3"/>
           <p:cNvSpPr>
             <a:spLocks noGrp="1"/>
           </p:cNvSpPr>
@@ -1793,50 +1623,44 @@
           <a:p>
             <a:pPr lvl="0"/>
             <a:r>
-              <a:rPr lang="en-US"/>
+              <a:rPr lang="en-GB"/>
               <a:t>Click to edit Master text styles</a:t>
             </a:r>
           </a:p>
           <a:p>
             <a:pPr lvl="1"/>
             <a:r>
-              <a:rPr lang="en-US"/>
+              <a:rPr lang="en-GB"/>
               <a:t>Second level</a:t>
             </a:r>
           </a:p>
           <a:p>
             <a:pPr lvl="2"/>
             <a:r>
-              <a:rPr lang="en-US"/>
+              <a:rPr lang="en-GB"/>
               <a:t>Third level</a:t>
             </a:r>
           </a:p>
           <a:p>
             <a:pPr lvl="3"/>
             <a:r>
-              <a:rPr lang="en-US"/>
+              <a:rPr lang="en-GB"/>
               <a:t>Fourth level</a:t>
             </a:r>
           </a:p>
           <a:p>
             <a:pPr lvl="4"/>
             <a:r>
-              <a:rPr lang="en-US"/>
+              <a:rPr lang="en-GB"/>
               <a:t>Fifth level</a:t>
             </a:r>
-            <a:endParaRPr lang="en-GB"/>
+            <a:endParaRPr lang="en-US" dirty="0"/>
           </a:p>
         </p:txBody>
       </p:sp>
       <p:sp>
         <p:nvSpPr>
-          <p:cNvPr id="5" name="Date Placeholder 4">
-            <a:extLst>
-              <a:ext uri="{FF2B5EF4-FFF2-40B4-BE49-F238E27FC236}">
-                <a16:creationId xmlns:a16="http://schemas.microsoft.com/office/drawing/2014/main" id="{91209914-CFA9-9D6C-9AD7-64D2B8C22830}"/>
-              </a:ext>
-            </a:extLst>
-          </p:cNvPr>
+          <p:cNvPr id="5" name="Date Placeholder 4"/>
           <p:cNvSpPr>
             <a:spLocks noGrp="1"/>
           </p:cNvSpPr>
@@ -1859,13 +1683,7 @@
       </p:sp>
       <p:sp>
         <p:nvSpPr>
-          <p:cNvPr id="6" name="Footer Placeholder 5">
-            <a:extLst>
-              <a:ext uri="{FF2B5EF4-FFF2-40B4-BE49-F238E27FC236}">
-                <a16:creationId xmlns:a16="http://schemas.microsoft.com/office/drawing/2014/main" id="{FAA3A4E8-A471-C661-4D2B-1C50B9803F64}"/>
-              </a:ext>
-            </a:extLst>
-          </p:cNvPr>
+          <p:cNvPr id="6" name="Footer Placeholder 5"/>
           <p:cNvSpPr>
             <a:spLocks noGrp="1"/>
           </p:cNvSpPr>
@@ -1884,13 +1702,7 @@
       </p:sp>
       <p:sp>
         <p:nvSpPr>
-          <p:cNvPr id="7" name="Slide Number Placeholder 6">
-            <a:extLst>
-              <a:ext uri="{FF2B5EF4-FFF2-40B4-BE49-F238E27FC236}">
-                <a16:creationId xmlns:a16="http://schemas.microsoft.com/office/drawing/2014/main" id="{95EED025-15FD-E1A6-D3D1-DAB417877C77}"/>
-              </a:ext>
-            </a:extLst>
-          </p:cNvPr>
+          <p:cNvPr id="7" name="Slide Number Placeholder 6"/>
           <p:cNvSpPr>
             <a:spLocks noGrp="1"/>
           </p:cNvSpPr>
@@ -1914,7 +1726,7 @@
     </p:spTree>
     <p:extLst>
       <p:ext uri="{BB962C8B-B14F-4D97-AF65-F5344CB8AC3E}">
-        <p14:creationId xmlns:p14="http://schemas.microsoft.com/office/powerpoint/2010/main" val="4020925188"/>
+        <p14:creationId xmlns:p14="http://schemas.microsoft.com/office/powerpoint/2010/main" val="3995034"/>
       </p:ext>
     </p:extLst>
   </p:cSld>
@@ -1943,13 +1755,7 @@
       </p:grpSpPr>
       <p:sp>
         <p:nvSpPr>
-          <p:cNvPr id="2" name="Title 1">
-            <a:extLst>
-              <a:ext uri="{FF2B5EF4-FFF2-40B4-BE49-F238E27FC236}">
-                <a16:creationId xmlns:a16="http://schemas.microsoft.com/office/drawing/2014/main" id="{F9139F92-4706-3DDC-7BA6-907307250544}"/>
-              </a:ext>
-            </a:extLst>
-          </p:cNvPr>
+          <p:cNvPr id="2" name="Title 1"/>
           <p:cNvSpPr>
             <a:spLocks noGrp="1"/>
           </p:cNvSpPr>
@@ -1959,7 +1765,7 @@
         </p:nvSpPr>
         <p:spPr>
           <a:xfrm>
-            <a:off x="661333" y="681568"/>
+            <a:off x="661333" y="681570"/>
             <a:ext cx="8281035" cy="2474384"/>
           </a:xfrm>
         </p:spPr>
@@ -1968,22 +1774,16 @@
           <a:lstStyle/>
           <a:p>
             <a:r>
-              <a:rPr lang="en-US"/>
+              <a:rPr lang="en-GB"/>
               <a:t>Click to edit Master title style</a:t>
             </a:r>
-            <a:endParaRPr lang="en-GB"/>
+            <a:endParaRPr lang="en-US" dirty="0"/>
           </a:p>
         </p:txBody>
       </p:sp>
       <p:sp>
         <p:nvSpPr>
-          <p:cNvPr id="3" name="Text Placeholder 2">
-            <a:extLst>
-              <a:ext uri="{FF2B5EF4-FFF2-40B4-BE49-F238E27FC236}">
-                <a16:creationId xmlns:a16="http://schemas.microsoft.com/office/drawing/2014/main" id="{612E1805-710E-6EE8-72D2-7E35549937A1}"/>
-              </a:ext>
-            </a:extLst>
-          </p:cNvPr>
+          <p:cNvPr id="3" name="Text Placeholder 2"/>
           <p:cNvSpPr>
             <a:spLocks noGrp="1"/>
           </p:cNvSpPr>
@@ -2002,45 +1802,45 @@
           <a:lstStyle>
             <a:lvl1pPr marL="0" indent="0">
               <a:buNone/>
-              <a:defRPr sz="4480" b="1"/>
+              <a:defRPr sz="2520" b="1"/>
             </a:lvl1pPr>
-            <a:lvl2pPr marL="853455" indent="0">
+            <a:lvl2pPr marL="480060" indent="0">
               <a:buNone/>
-              <a:defRPr sz="3733" b="1"/>
+              <a:defRPr sz="2100" b="1"/>
             </a:lvl2pPr>
-            <a:lvl3pPr marL="1706910" indent="0">
+            <a:lvl3pPr marL="960120" indent="0">
               <a:buNone/>
-              <a:defRPr sz="3360" b="1"/>
+              <a:defRPr sz="1890" b="1"/>
             </a:lvl3pPr>
-            <a:lvl4pPr marL="2560366" indent="0">
+            <a:lvl4pPr marL="1440180" indent="0">
               <a:buNone/>
-              <a:defRPr sz="2987" b="1"/>
+              <a:defRPr sz="1680" b="1"/>
             </a:lvl4pPr>
-            <a:lvl5pPr marL="3413821" indent="0">
+            <a:lvl5pPr marL="1920240" indent="0">
               <a:buNone/>
-              <a:defRPr sz="2987" b="1"/>
+              <a:defRPr sz="1680" b="1"/>
             </a:lvl5pPr>
-            <a:lvl6pPr marL="4267276" indent="0">
+            <a:lvl6pPr marL="2400300" indent="0">
               <a:buNone/>
-              <a:defRPr sz="2987" b="1"/>
+              <a:defRPr sz="1680" b="1"/>
             </a:lvl6pPr>
-            <a:lvl7pPr marL="5120731" indent="0">
+            <a:lvl7pPr marL="2880360" indent="0">
               <a:buNone/>
-              <a:defRPr sz="2987" b="1"/>
+              <a:defRPr sz="1680" b="1"/>
             </a:lvl7pPr>
-            <a:lvl8pPr marL="5974187" indent="0">
+            <a:lvl8pPr marL="3360420" indent="0">
               <a:buNone/>
-              <a:defRPr sz="2987" b="1"/>
+              <a:defRPr sz="1680" b="1"/>
             </a:lvl8pPr>
-            <a:lvl9pPr marL="6827642" indent="0">
+            <a:lvl9pPr marL="3840480" indent="0">
               <a:buNone/>
-              <a:defRPr sz="2987" b="1"/>
+              <a:defRPr sz="1680" b="1"/>
             </a:lvl9pPr>
           </a:lstStyle>
           <a:p>
             <a:pPr lvl="0"/>
             <a:r>
-              <a:rPr lang="en-US"/>
+              <a:rPr lang="en-GB"/>
               <a:t>Click to edit Master text styles</a:t>
             </a:r>
           </a:p>
@@ -2048,13 +1848,7 @@
       </p:sp>
       <p:sp>
         <p:nvSpPr>
-          <p:cNvPr id="4" name="Content Placeholder 3">
-            <a:extLst>
-              <a:ext uri="{FF2B5EF4-FFF2-40B4-BE49-F238E27FC236}">
-                <a16:creationId xmlns:a16="http://schemas.microsoft.com/office/drawing/2014/main" id="{3074222E-79C4-C13E-F7DA-7A265BA5D986}"/>
-              </a:ext>
-            </a:extLst>
-          </p:cNvPr>
+          <p:cNvPr id="4" name="Content Placeholder 3"/>
           <p:cNvSpPr>
             <a:spLocks noGrp="1"/>
           </p:cNvSpPr>
@@ -2074,50 +1868,44 @@
           <a:p>
             <a:pPr lvl="0"/>
             <a:r>
-              <a:rPr lang="en-US"/>
+              <a:rPr lang="en-GB"/>
               <a:t>Click to edit Master text styles</a:t>
             </a:r>
           </a:p>
           <a:p>
             <a:pPr lvl="1"/>
             <a:r>
-              <a:rPr lang="en-US"/>
+              <a:rPr lang="en-GB"/>
               <a:t>Second level</a:t>
             </a:r>
           </a:p>
           <a:p>
             <a:pPr lvl="2"/>
             <a:r>
-              <a:rPr lang="en-US"/>
+              <a:rPr lang="en-GB"/>
               <a:t>Third level</a:t>
             </a:r>
           </a:p>
           <a:p>
             <a:pPr lvl="3"/>
             <a:r>
-              <a:rPr lang="en-US"/>
+              <a:rPr lang="en-GB"/>
               <a:t>Fourth level</a:t>
             </a:r>
           </a:p>
           <a:p>
             <a:pPr lvl="4"/>
             <a:r>
-              <a:rPr lang="en-US"/>
+              <a:rPr lang="en-GB"/>
               <a:t>Fifth level</a:t>
             </a:r>
-            <a:endParaRPr lang="en-GB"/>
+            <a:endParaRPr lang="en-US" dirty="0"/>
           </a:p>
         </p:txBody>
       </p:sp>
       <p:sp>
         <p:nvSpPr>
-          <p:cNvPr id="5" name="Text Placeholder 4">
-            <a:extLst>
-              <a:ext uri="{FF2B5EF4-FFF2-40B4-BE49-F238E27FC236}">
-                <a16:creationId xmlns:a16="http://schemas.microsoft.com/office/drawing/2014/main" id="{91C5D034-B89B-CCDE-6FB7-F6E8EA64E10C}"/>
-              </a:ext>
-            </a:extLst>
-          </p:cNvPr>
+          <p:cNvPr id="5" name="Text Placeholder 4"/>
           <p:cNvSpPr>
             <a:spLocks noGrp="1"/>
           </p:cNvSpPr>
@@ -2127,7 +1915,7 @@
         </p:nvSpPr>
         <p:spPr>
           <a:xfrm>
-            <a:off x="4860607" y="3138171"/>
+            <a:off x="4860608" y="3138171"/>
             <a:ext cx="4081761" cy="1537969"/>
           </a:xfrm>
         </p:spPr>
@@ -2136,45 +1924,45 @@
           <a:lstStyle>
             <a:lvl1pPr marL="0" indent="0">
               <a:buNone/>
-              <a:defRPr sz="4480" b="1"/>
+              <a:defRPr sz="2520" b="1"/>
             </a:lvl1pPr>
-            <a:lvl2pPr marL="853455" indent="0">
+            <a:lvl2pPr marL="480060" indent="0">
               <a:buNone/>
-              <a:defRPr sz="3733" b="1"/>
+              <a:defRPr sz="2100" b="1"/>
             </a:lvl2pPr>
-            <a:lvl3pPr marL="1706910" indent="0">
+            <a:lvl3pPr marL="960120" indent="0">
               <a:buNone/>
-              <a:defRPr sz="3360" b="1"/>
+              <a:defRPr sz="1890" b="1"/>
             </a:lvl3pPr>
-            <a:lvl4pPr marL="2560366" indent="0">
+            <a:lvl4pPr marL="1440180" indent="0">
               <a:buNone/>
-              <a:defRPr sz="2987" b="1"/>
+              <a:defRPr sz="1680" b="1"/>
             </a:lvl4pPr>
-            <a:lvl5pPr marL="3413821" indent="0">
+            <a:lvl5pPr marL="1920240" indent="0">
               <a:buNone/>
-              <a:defRPr sz="2987" b="1"/>
+              <a:defRPr sz="1680" b="1"/>
             </a:lvl5pPr>
-            <a:lvl6pPr marL="4267276" indent="0">
+            <a:lvl6pPr marL="2400300" indent="0">
               <a:buNone/>
-              <a:defRPr sz="2987" b="1"/>
+              <a:defRPr sz="1680" b="1"/>
             </a:lvl6pPr>
-            <a:lvl7pPr marL="5120731" indent="0">
+            <a:lvl7pPr marL="2880360" indent="0">
               <a:buNone/>
-              <a:defRPr sz="2987" b="1"/>
+              <a:defRPr sz="1680" b="1"/>
             </a:lvl7pPr>
-            <a:lvl8pPr marL="5974187" indent="0">
+            <a:lvl8pPr marL="3360420" indent="0">
               <a:buNone/>
-              <a:defRPr sz="2987" b="1"/>
+              <a:defRPr sz="1680" b="1"/>
             </a:lvl8pPr>
-            <a:lvl9pPr marL="6827642" indent="0">
+            <a:lvl9pPr marL="3840480" indent="0">
               <a:buNone/>
-              <a:defRPr sz="2987" b="1"/>
+              <a:defRPr sz="1680" b="1"/>
             </a:lvl9pPr>
           </a:lstStyle>
           <a:p>
             <a:pPr lvl="0"/>
             <a:r>
-              <a:rPr lang="en-US"/>
+              <a:rPr lang="en-GB"/>
               <a:t>Click to edit Master text styles</a:t>
             </a:r>
           </a:p>
@@ -2182,13 +1970,7 @@
       </p:sp>
       <p:sp>
         <p:nvSpPr>
-          <p:cNvPr id="6" name="Content Placeholder 5">
-            <a:extLst>
-              <a:ext uri="{FF2B5EF4-FFF2-40B4-BE49-F238E27FC236}">
-                <a16:creationId xmlns:a16="http://schemas.microsoft.com/office/drawing/2014/main" id="{CB137708-0F32-5EAE-16E3-5CEC2C48DDEC}"/>
-              </a:ext>
-            </a:extLst>
-          </p:cNvPr>
+          <p:cNvPr id="6" name="Content Placeholder 5"/>
           <p:cNvSpPr>
             <a:spLocks noGrp="1"/>
           </p:cNvSpPr>
@@ -2198,7 +1980,7 @@
         </p:nvSpPr>
         <p:spPr>
           <a:xfrm>
-            <a:off x="4860607" y="4676140"/>
+            <a:off x="4860608" y="4676140"/>
             <a:ext cx="4081761" cy="6877898"/>
           </a:xfrm>
         </p:spPr>
@@ -2208,50 +1990,44 @@
           <a:p>
             <a:pPr lvl="0"/>
             <a:r>
-              <a:rPr lang="en-US"/>
+              <a:rPr lang="en-GB"/>
               <a:t>Click to edit Master text styles</a:t>
             </a:r>
           </a:p>
           <a:p>
             <a:pPr lvl="1"/>
             <a:r>
-              <a:rPr lang="en-US"/>
+              <a:rPr lang="en-GB"/>
               <a:t>Second level</a:t>
             </a:r>
           </a:p>
           <a:p>
             <a:pPr lvl="2"/>
             <a:r>
-              <a:rPr lang="en-US"/>
+              <a:rPr lang="en-GB"/>
               <a:t>Third level</a:t>
             </a:r>
           </a:p>
           <a:p>
             <a:pPr lvl="3"/>
             <a:r>
-              <a:rPr lang="en-US"/>
+              <a:rPr lang="en-GB"/>
               <a:t>Fourth level</a:t>
             </a:r>
           </a:p>
           <a:p>
             <a:pPr lvl="4"/>
             <a:r>
-              <a:rPr lang="en-US"/>
+              <a:rPr lang="en-GB"/>
               <a:t>Fifth level</a:t>
             </a:r>
-            <a:endParaRPr lang="en-GB"/>
+            <a:endParaRPr lang="en-US" dirty="0"/>
           </a:p>
         </p:txBody>
       </p:sp>
       <p:sp>
         <p:nvSpPr>
-          <p:cNvPr id="7" name="Date Placeholder 6">
-            <a:extLst>
-              <a:ext uri="{FF2B5EF4-FFF2-40B4-BE49-F238E27FC236}">
-                <a16:creationId xmlns:a16="http://schemas.microsoft.com/office/drawing/2014/main" id="{B3509398-9208-6CE7-B5D8-922184E484D3}"/>
-              </a:ext>
-            </a:extLst>
-          </p:cNvPr>
+          <p:cNvPr id="7" name="Date Placeholder 6"/>
           <p:cNvSpPr>
             <a:spLocks noGrp="1"/>
           </p:cNvSpPr>
@@ -2274,13 +2050,7 @@
       </p:sp>
       <p:sp>
         <p:nvSpPr>
-          <p:cNvPr id="8" name="Footer Placeholder 7">
-            <a:extLst>
-              <a:ext uri="{FF2B5EF4-FFF2-40B4-BE49-F238E27FC236}">
-                <a16:creationId xmlns:a16="http://schemas.microsoft.com/office/drawing/2014/main" id="{17FCADD5-DD6F-640A-A2AC-6FCEB414556C}"/>
-              </a:ext>
-            </a:extLst>
-          </p:cNvPr>
+          <p:cNvPr id="8" name="Footer Placeholder 7"/>
           <p:cNvSpPr>
             <a:spLocks noGrp="1"/>
           </p:cNvSpPr>
@@ -2299,13 +2069,7 @@
       </p:sp>
       <p:sp>
         <p:nvSpPr>
-          <p:cNvPr id="9" name="Slide Number Placeholder 8">
-            <a:extLst>
-              <a:ext uri="{FF2B5EF4-FFF2-40B4-BE49-F238E27FC236}">
-                <a16:creationId xmlns:a16="http://schemas.microsoft.com/office/drawing/2014/main" id="{D906E592-D0B8-9C85-06A0-398F62216259}"/>
-              </a:ext>
-            </a:extLst>
-          </p:cNvPr>
+          <p:cNvPr id="9" name="Slide Number Placeholder 8"/>
           <p:cNvSpPr>
             <a:spLocks noGrp="1"/>
           </p:cNvSpPr>
@@ -2329,7 +2093,7 @@
     </p:spTree>
     <p:extLst>
       <p:ext uri="{BB962C8B-B14F-4D97-AF65-F5344CB8AC3E}">
-        <p14:creationId xmlns:p14="http://schemas.microsoft.com/office/powerpoint/2010/main" val="3447913246"/>
+        <p14:creationId xmlns:p14="http://schemas.microsoft.com/office/powerpoint/2010/main" val="298624500"/>
       </p:ext>
     </p:extLst>
   </p:cSld>
@@ -2358,13 +2122,7 @@
       </p:grpSpPr>
       <p:sp>
         <p:nvSpPr>
-          <p:cNvPr id="2" name="Title 1">
-            <a:extLst>
-              <a:ext uri="{FF2B5EF4-FFF2-40B4-BE49-F238E27FC236}">
-                <a16:creationId xmlns:a16="http://schemas.microsoft.com/office/drawing/2014/main" id="{F5AF9798-5B85-A4F2-E101-1121C3F94952}"/>
-              </a:ext>
-            </a:extLst>
-          </p:cNvPr>
+          <p:cNvPr id="2" name="Title 1"/>
           <p:cNvSpPr>
             <a:spLocks noGrp="1"/>
           </p:cNvSpPr>
@@ -2378,22 +2136,16 @@
           <a:lstStyle/>
           <a:p>
             <a:r>
-              <a:rPr lang="en-US"/>
+              <a:rPr lang="en-GB"/>
               <a:t>Click to edit Master title style</a:t>
             </a:r>
-            <a:endParaRPr lang="en-GB"/>
+            <a:endParaRPr lang="en-US" dirty="0"/>
           </a:p>
         </p:txBody>
       </p:sp>
       <p:sp>
         <p:nvSpPr>
-          <p:cNvPr id="3" name="Date Placeholder 2">
-            <a:extLst>
-              <a:ext uri="{FF2B5EF4-FFF2-40B4-BE49-F238E27FC236}">
-                <a16:creationId xmlns:a16="http://schemas.microsoft.com/office/drawing/2014/main" id="{CCF1F383-63DE-D0B8-8856-624481017098}"/>
-              </a:ext>
-            </a:extLst>
-          </p:cNvPr>
+          <p:cNvPr id="3" name="Date Placeholder 2"/>
           <p:cNvSpPr>
             <a:spLocks noGrp="1"/>
           </p:cNvSpPr>
@@ -2416,13 +2168,7 @@
       </p:sp>
       <p:sp>
         <p:nvSpPr>
-          <p:cNvPr id="4" name="Footer Placeholder 3">
-            <a:extLst>
-              <a:ext uri="{FF2B5EF4-FFF2-40B4-BE49-F238E27FC236}">
-                <a16:creationId xmlns:a16="http://schemas.microsoft.com/office/drawing/2014/main" id="{F514E45E-B824-F49A-D550-DFBBC2360D6D}"/>
-              </a:ext>
-            </a:extLst>
-          </p:cNvPr>
+          <p:cNvPr id="4" name="Footer Placeholder 3"/>
           <p:cNvSpPr>
             <a:spLocks noGrp="1"/>
           </p:cNvSpPr>
@@ -2441,13 +2187,7 @@
       </p:sp>
       <p:sp>
         <p:nvSpPr>
-          <p:cNvPr id="5" name="Slide Number Placeholder 4">
-            <a:extLst>
-              <a:ext uri="{FF2B5EF4-FFF2-40B4-BE49-F238E27FC236}">
-                <a16:creationId xmlns:a16="http://schemas.microsoft.com/office/drawing/2014/main" id="{D4DA846F-17E7-5BAF-65E8-E18B1D8235C5}"/>
-              </a:ext>
-            </a:extLst>
-          </p:cNvPr>
+          <p:cNvPr id="5" name="Slide Number Placeholder 4"/>
           <p:cNvSpPr>
             <a:spLocks noGrp="1"/>
           </p:cNvSpPr>
@@ -2471,7 +2211,7 @@
     </p:spTree>
     <p:extLst>
       <p:ext uri="{BB962C8B-B14F-4D97-AF65-F5344CB8AC3E}">
-        <p14:creationId xmlns:p14="http://schemas.microsoft.com/office/powerpoint/2010/main" val="3867224025"/>
+        <p14:creationId xmlns:p14="http://schemas.microsoft.com/office/powerpoint/2010/main" val="4103927420"/>
       </p:ext>
     </p:extLst>
   </p:cSld>
@@ -2500,13 +2240,7 @@
       </p:grpSpPr>
       <p:sp>
         <p:nvSpPr>
-          <p:cNvPr id="2" name="Date Placeholder 1">
-            <a:extLst>
-              <a:ext uri="{FF2B5EF4-FFF2-40B4-BE49-F238E27FC236}">
-                <a16:creationId xmlns:a16="http://schemas.microsoft.com/office/drawing/2014/main" id="{9AEA2AD3-BC1E-9021-B75C-7BB7BBA930D4}"/>
-              </a:ext>
-            </a:extLst>
-          </p:cNvPr>
+          <p:cNvPr id="2" name="Date Placeholder 1"/>
           <p:cNvSpPr>
             <a:spLocks noGrp="1"/>
           </p:cNvSpPr>
@@ -2529,13 +2263,7 @@
       </p:sp>
       <p:sp>
         <p:nvSpPr>
-          <p:cNvPr id="3" name="Footer Placeholder 2">
-            <a:extLst>
-              <a:ext uri="{FF2B5EF4-FFF2-40B4-BE49-F238E27FC236}">
-                <a16:creationId xmlns:a16="http://schemas.microsoft.com/office/drawing/2014/main" id="{3D601FD4-959E-CE8B-CAD5-C29DF791AB7E}"/>
-              </a:ext>
-            </a:extLst>
-          </p:cNvPr>
+          <p:cNvPr id="3" name="Footer Placeholder 2"/>
           <p:cNvSpPr>
             <a:spLocks noGrp="1"/>
           </p:cNvSpPr>
@@ -2554,13 +2282,7 @@
       </p:sp>
       <p:sp>
         <p:nvSpPr>
-          <p:cNvPr id="4" name="Slide Number Placeholder 3">
-            <a:extLst>
-              <a:ext uri="{FF2B5EF4-FFF2-40B4-BE49-F238E27FC236}">
-                <a16:creationId xmlns:a16="http://schemas.microsoft.com/office/drawing/2014/main" id="{3CE5199D-9EFE-4D3A-F830-FDE667B914E3}"/>
-              </a:ext>
-            </a:extLst>
-          </p:cNvPr>
+          <p:cNvPr id="4" name="Slide Number Placeholder 3"/>
           <p:cNvSpPr>
             <a:spLocks noGrp="1"/>
           </p:cNvSpPr>
@@ -2584,7 +2306,7 @@
     </p:spTree>
     <p:extLst>
       <p:ext uri="{BB962C8B-B14F-4D97-AF65-F5344CB8AC3E}">
-        <p14:creationId xmlns:p14="http://schemas.microsoft.com/office/powerpoint/2010/main" val="1200707267"/>
+        <p14:creationId xmlns:p14="http://schemas.microsoft.com/office/powerpoint/2010/main" val="454177998"/>
       </p:ext>
     </p:extLst>
   </p:cSld>
@@ -2613,13 +2335,7 @@
       </p:grpSpPr>
       <p:sp>
         <p:nvSpPr>
-          <p:cNvPr id="2" name="Title 1">
-            <a:extLst>
-              <a:ext uri="{FF2B5EF4-FFF2-40B4-BE49-F238E27FC236}">
-                <a16:creationId xmlns:a16="http://schemas.microsoft.com/office/drawing/2014/main" id="{D2C2A318-38E3-4775-8C91-13BCC817BF4A}"/>
-              </a:ext>
-            </a:extLst>
-          </p:cNvPr>
+          <p:cNvPr id="2" name="Title 1"/>
           <p:cNvSpPr>
             <a:spLocks noGrp="1"/>
           </p:cNvSpPr>
@@ -2637,27 +2353,21 @@
           <a:bodyPr anchor="b"/>
           <a:lstStyle>
             <a:lvl1pPr>
-              <a:defRPr sz="5973"/>
+              <a:defRPr sz="3360"/>
             </a:lvl1pPr>
           </a:lstStyle>
           <a:p>
             <a:r>
-              <a:rPr lang="en-US"/>
+              <a:rPr lang="en-GB"/>
               <a:t>Click to edit Master title style</a:t>
             </a:r>
-            <a:endParaRPr lang="en-GB"/>
+            <a:endParaRPr lang="en-US" dirty="0"/>
           </a:p>
         </p:txBody>
       </p:sp>
       <p:sp>
         <p:nvSpPr>
-          <p:cNvPr id="3" name="Content Placeholder 2">
-            <a:extLst>
-              <a:ext uri="{FF2B5EF4-FFF2-40B4-BE49-F238E27FC236}">
-                <a16:creationId xmlns:a16="http://schemas.microsoft.com/office/drawing/2014/main" id="{77E83DCD-037A-8390-B751-90536D891278}"/>
-              </a:ext>
-            </a:extLst>
-          </p:cNvPr>
+          <p:cNvPr id="3" name="Content Placeholder 2"/>
           <p:cNvSpPr>
             <a:spLocks noGrp="1"/>
           </p:cNvSpPr>
@@ -2667,7 +2377,7 @@
         </p:nvSpPr>
         <p:spPr>
           <a:xfrm>
-            <a:off x="4081760" y="1843194"/>
+            <a:off x="4081760" y="1843196"/>
             <a:ext cx="4860608" cy="9097433"/>
           </a:xfrm>
         </p:spPr>
@@ -2675,80 +2385,74 @@
           <a:bodyPr/>
           <a:lstStyle>
             <a:lvl1pPr>
-              <a:defRPr sz="5973"/>
+              <a:defRPr sz="3360"/>
             </a:lvl1pPr>
             <a:lvl2pPr>
-              <a:defRPr sz="5227"/>
+              <a:defRPr sz="2940"/>
             </a:lvl2pPr>
             <a:lvl3pPr>
-              <a:defRPr sz="4480"/>
+              <a:defRPr sz="2520"/>
             </a:lvl3pPr>
             <a:lvl4pPr>
-              <a:defRPr sz="3733"/>
+              <a:defRPr sz="2100"/>
             </a:lvl4pPr>
             <a:lvl5pPr>
-              <a:defRPr sz="3733"/>
+              <a:defRPr sz="2100"/>
             </a:lvl5pPr>
             <a:lvl6pPr>
-              <a:defRPr sz="3733"/>
+              <a:defRPr sz="2100"/>
             </a:lvl6pPr>
             <a:lvl7pPr>
-              <a:defRPr sz="3733"/>
+              <a:defRPr sz="2100"/>
             </a:lvl7pPr>
             <a:lvl8pPr>
-              <a:defRPr sz="3733"/>
+              <a:defRPr sz="2100"/>
             </a:lvl8pPr>
             <a:lvl9pPr>
-              <a:defRPr sz="3733"/>
+              <a:defRPr sz="2100"/>
             </a:lvl9pPr>
           </a:lstStyle>
           <a:p>
             <a:pPr lvl="0"/>
             <a:r>
-              <a:rPr lang="en-US"/>
+              <a:rPr lang="en-GB"/>
               <a:t>Click to edit Master text styles</a:t>
             </a:r>
           </a:p>
           <a:p>
             <a:pPr lvl="1"/>
             <a:r>
-              <a:rPr lang="en-US"/>
+              <a:rPr lang="en-GB"/>
               <a:t>Second level</a:t>
             </a:r>
           </a:p>
           <a:p>
             <a:pPr lvl="2"/>
             <a:r>
-              <a:rPr lang="en-US"/>
+              <a:rPr lang="en-GB"/>
               <a:t>Third level</a:t>
             </a:r>
           </a:p>
           <a:p>
             <a:pPr lvl="3"/>
             <a:r>
-              <a:rPr lang="en-US"/>
+              <a:rPr lang="en-GB"/>
               <a:t>Fourth level</a:t>
             </a:r>
           </a:p>
           <a:p>
             <a:pPr lvl="4"/>
             <a:r>
-              <a:rPr lang="en-US"/>
+              <a:rPr lang="en-GB"/>
               <a:t>Fifth level</a:t>
             </a:r>
-            <a:endParaRPr lang="en-GB"/>
+            <a:endParaRPr lang="en-US" dirty="0"/>
           </a:p>
         </p:txBody>
       </p:sp>
       <p:sp>
         <p:nvSpPr>
-          <p:cNvPr id="4" name="Text Placeholder 3">
-            <a:extLst>
-              <a:ext uri="{FF2B5EF4-FFF2-40B4-BE49-F238E27FC236}">
-                <a16:creationId xmlns:a16="http://schemas.microsoft.com/office/drawing/2014/main" id="{15575D34-C1AA-27C9-3C46-0D6DD3484AF7}"/>
-              </a:ext>
-            </a:extLst>
-          </p:cNvPr>
+          <p:cNvPr id="4" name="Text Placeholder 3"/>
           <p:cNvSpPr>
             <a:spLocks noGrp="1"/>
           </p:cNvSpPr>
@@ -2767,45 +2471,45 @@
           <a:lstStyle>
             <a:lvl1pPr marL="0" indent="0">
               <a:buNone/>
-              <a:defRPr sz="2987"/>
+              <a:defRPr sz="1680"/>
             </a:lvl1pPr>
-            <a:lvl2pPr marL="853455" indent="0">
+            <a:lvl2pPr marL="480060" indent="0">
               <a:buNone/>
-              <a:defRPr sz="2613"/>
+              <a:defRPr sz="1470"/>
             </a:lvl2pPr>
-            <a:lvl3pPr marL="1706910" indent="0">
+            <a:lvl3pPr marL="960120" indent="0">
               <a:buNone/>
-              <a:defRPr sz="2240"/>
+              <a:defRPr sz="1260"/>
             </a:lvl3pPr>
-            <a:lvl4pPr marL="2560366" indent="0">
+            <a:lvl4pPr marL="1440180" indent="0">
               <a:buNone/>
-              <a:defRPr sz="1867"/>
+              <a:defRPr sz="1050"/>
             </a:lvl4pPr>
-            <a:lvl5pPr marL="3413821" indent="0">
+            <a:lvl5pPr marL="1920240" indent="0">
               <a:buNone/>
-              <a:defRPr sz="1867"/>
+              <a:defRPr sz="1050"/>
             </a:lvl5pPr>
-            <a:lvl6pPr marL="4267276" indent="0">
+            <a:lvl6pPr marL="2400300" indent="0">
               <a:buNone/>
-              <a:defRPr sz="1867"/>
+              <a:defRPr sz="1050"/>
             </a:lvl6pPr>
-            <a:lvl7pPr marL="5120731" indent="0">
+            <a:lvl7pPr marL="2880360" indent="0">
               <a:buNone/>
-              <a:defRPr sz="1867"/>
+              <a:defRPr sz="1050"/>
             </a:lvl7pPr>
-            <a:lvl8pPr marL="5974187" indent="0">
+            <a:lvl8pPr marL="3360420" indent="0">
               <a:buNone/>
-              <a:defRPr sz="1867"/>
+              <a:defRPr sz="1050"/>
             </a:lvl8pPr>
-            <a:lvl9pPr marL="6827642" indent="0">
+            <a:lvl9pPr marL="3840480" indent="0">
               <a:buNone/>
-              <a:defRPr sz="1867"/>
+              <a:defRPr sz="1050"/>
             </a:lvl9pPr>
           </a:lstStyle>
           <a:p>
             <a:pPr lvl="0"/>
             <a:r>
-              <a:rPr lang="en-US"/>
+              <a:rPr lang="en-GB"/>
               <a:t>Click to edit Master text styles</a:t>
             </a:r>
           </a:p>
@@ -2813,13 +2517,7 @@
       </p:sp>
       <p:sp>
         <p:nvSpPr>
-          <p:cNvPr id="5" name="Date Placeholder 4">
-            <a:extLst>
-              <a:ext uri="{FF2B5EF4-FFF2-40B4-BE49-F238E27FC236}">
-                <a16:creationId xmlns:a16="http://schemas.microsoft.com/office/drawing/2014/main" id="{52E1DB74-5801-1CA3-51E5-D0BCBA37E577}"/>
-              </a:ext>
-            </a:extLst>
-          </p:cNvPr>
+          <p:cNvPr id="5" name="Date Placeholder 4"/>
           <p:cNvSpPr>
             <a:spLocks noGrp="1"/>
           </p:cNvSpPr>
@@ -2842,13 +2540,7 @@
       </p:sp>
       <p:sp>
         <p:nvSpPr>
-          <p:cNvPr id="6" name="Footer Placeholder 5">
-            <a:extLst>
-              <a:ext uri="{FF2B5EF4-FFF2-40B4-BE49-F238E27FC236}">
-                <a16:creationId xmlns:a16="http://schemas.microsoft.com/office/drawing/2014/main" id="{010D4AE3-42FF-B0A6-1279-C81F30D19811}"/>
-              </a:ext>
-            </a:extLst>
-          </p:cNvPr>
+          <p:cNvPr id="6" name="Footer Placeholder 5"/>
           <p:cNvSpPr>
             <a:spLocks noGrp="1"/>
           </p:cNvSpPr>
@@ -2867,13 +2559,7 @@
       </p:sp>
       <p:sp>
         <p:nvSpPr>
-          <p:cNvPr id="7" name="Slide Number Placeholder 6">
-            <a:extLst>
-              <a:ext uri="{FF2B5EF4-FFF2-40B4-BE49-F238E27FC236}">
-                <a16:creationId xmlns:a16="http://schemas.microsoft.com/office/drawing/2014/main" id="{54399B40-3CC6-20CD-8709-BABE62158F0D}"/>
-              </a:ext>
-            </a:extLst>
-          </p:cNvPr>
+          <p:cNvPr id="7" name="Slide Number Placeholder 6"/>
           <p:cNvSpPr>
             <a:spLocks noGrp="1"/>
           </p:cNvSpPr>
@@ -2897,7 +2583,7 @@
     </p:spTree>
     <p:extLst>
       <p:ext uri="{BB962C8B-B14F-4D97-AF65-F5344CB8AC3E}">
-        <p14:creationId xmlns:p14="http://schemas.microsoft.com/office/powerpoint/2010/main" val="1334135247"/>
+        <p14:creationId xmlns:p14="http://schemas.microsoft.com/office/powerpoint/2010/main" val="2686991166"/>
       </p:ext>
     </p:extLst>
   </p:cSld>
@@ -2926,13 +2612,7 @@
       </p:grpSpPr>
       <p:sp>
         <p:nvSpPr>
-          <p:cNvPr id="2" name="Title 1">
-            <a:extLst>
-              <a:ext uri="{FF2B5EF4-FFF2-40B4-BE49-F238E27FC236}">
-                <a16:creationId xmlns:a16="http://schemas.microsoft.com/office/drawing/2014/main" id="{B0398D11-6676-AD97-54F8-77FB651B737E}"/>
-              </a:ext>
-            </a:extLst>
-          </p:cNvPr>
+          <p:cNvPr id="2" name="Title 1"/>
           <p:cNvSpPr>
             <a:spLocks noGrp="1"/>
           </p:cNvSpPr>
@@ -2950,29 +2630,23 @@
           <a:bodyPr anchor="b"/>
           <a:lstStyle>
             <a:lvl1pPr>
-              <a:defRPr sz="5973"/>
+              <a:defRPr sz="3360"/>
             </a:lvl1pPr>
           </a:lstStyle>
           <a:p>
             <a:r>
-              <a:rPr lang="en-US"/>
+              <a:rPr lang="en-GB"/>
               <a:t>Click to edit Master title style</a:t>
             </a:r>
-            <a:endParaRPr lang="en-GB"/>
+            <a:endParaRPr lang="en-US" dirty="0"/>
           </a:p>
         </p:txBody>
       </p:sp>
       <p:sp>
         <p:nvSpPr>
-          <p:cNvPr id="3" name="Picture Placeholder 2">
-            <a:extLst>
-              <a:ext uri="{FF2B5EF4-FFF2-40B4-BE49-F238E27FC236}">
-                <a16:creationId xmlns:a16="http://schemas.microsoft.com/office/drawing/2014/main" id="{A077260A-7003-5D76-4AD8-81E5B66EBC21}"/>
-              </a:ext>
-            </a:extLst>
-          </p:cNvPr>
+          <p:cNvPr id="3" name="Picture Placeholder 2"/>
           <p:cNvSpPr>
-            <a:spLocks noGrp="1"/>
+            <a:spLocks noGrp="1" noChangeAspect="1"/>
           </p:cNvSpPr>
           <p:nvPr>
             <p:ph type="pic" idx="1"/>
@@ -2980,64 +2654,62 @@
         </p:nvSpPr>
         <p:spPr>
           <a:xfrm>
-            <a:off x="4081760" y="1843194"/>
+            <a:off x="4081760" y="1843196"/>
             <a:ext cx="4860608" cy="9097433"/>
           </a:xfrm>
         </p:spPr>
         <p:txBody>
-          <a:bodyPr/>
+          <a:bodyPr anchor="t"/>
           <a:lstStyle>
             <a:lvl1pPr marL="0" indent="0">
               <a:buNone/>
-              <a:defRPr sz="5973"/>
+              <a:defRPr sz="3360"/>
             </a:lvl1pPr>
-            <a:lvl2pPr marL="853455" indent="0">
+            <a:lvl2pPr marL="480060" indent="0">
               <a:buNone/>
-              <a:defRPr sz="5227"/>
+              <a:defRPr sz="2940"/>
             </a:lvl2pPr>
-            <a:lvl3pPr marL="1706910" indent="0">
+            <a:lvl3pPr marL="960120" indent="0">
               <a:buNone/>
-              <a:defRPr sz="4480"/>
+              <a:defRPr sz="2520"/>
             </a:lvl3pPr>
-            <a:lvl4pPr marL="2560366" indent="0">
+            <a:lvl4pPr marL="1440180" indent="0">
               <a:buNone/>
-              <a:defRPr sz="3733"/>
+              <a:defRPr sz="2100"/>
             </a:lvl4pPr>
-            <a:lvl5pPr marL="3413821" indent="0">
+            <a:lvl5pPr marL="1920240" indent="0">
               <a:buNone/>
-              <a:defRPr sz="3733"/>
+              <a:defRPr sz="2100"/>
             </a:lvl5pPr>
-            <a:lvl6pPr marL="4267276" indent="0">
+            <a:lvl6pPr marL="2400300" indent="0">
               <a:buNone/>
-              <a:defRPr sz="3733"/>
+              <a:defRPr sz="2100"/>
             </a:lvl6pPr>
-            <a:lvl7pPr marL="5120731" indent="0">
+            <a:lvl7pPr marL="2880360" indent="0">
               <a:buNone/>
-              <a:defRPr sz="3733"/>
+              <a:defRPr sz="2100"/>
             </a:lvl7pPr>
-            <a:lvl8pPr marL="5974187" indent="0">
+            <a:lvl8pPr marL="3360420" indent="0">
               <a:buNone/>
-              <a:defRPr sz="3733"/>
+              <a:defRPr sz="2100"/>
             </a:lvl8pPr>
-            <a:lvl9pPr marL="6827642" indent="0">
+            <a:lvl9pPr marL="3840480" indent="0">
               <a:buNone/>
-              <a:defRPr sz="3733"/>
+              <a:defRPr sz="2100"/>
             </a:lvl9pPr>
           </a:lstStyle>
           <a:p>
-            <a:endParaRPr lang="en-GB" dirty="0"/>
+            <a:r>
+              <a:rPr lang="en-GB"/>
+              <a:t>Click icon to add picture</a:t>
+            </a:r>
+            <a:endParaRPr lang="en-US" dirty="0"/>
           </a:p>
         </p:txBody>
       </p:sp>
       <p:sp>
         <p:nvSpPr>
-          <p:cNvPr id="4" name="Text Placeholder 3">
-            <a:extLst>
-              <a:ext uri="{FF2B5EF4-FFF2-40B4-BE49-F238E27FC236}">
-                <a16:creationId xmlns:a16="http://schemas.microsoft.com/office/drawing/2014/main" id="{72E64FAF-1B0B-C0E4-BB4A-C8771E4BD8B7}"/>
-              </a:ext>
-            </a:extLst>
-          </p:cNvPr>
+          <p:cNvPr id="4" name="Text Placeholder 3"/>
           <p:cNvSpPr>
             <a:spLocks noGrp="1"/>
           </p:cNvSpPr>
@@ -3056,45 +2728,45 @@
           <a:lstStyle>
             <a:lvl1pPr marL="0" indent="0">
               <a:buNone/>
-              <a:defRPr sz="2987"/>
+              <a:defRPr sz="1680"/>
             </a:lvl1pPr>
-            <a:lvl2pPr marL="853455" indent="0">
+            <a:lvl2pPr marL="480060" indent="0">
               <a:buNone/>
-              <a:defRPr sz="2613"/>
+              <a:defRPr sz="1470"/>
             </a:lvl2pPr>
-            <a:lvl3pPr marL="1706910" indent="0">
+            <a:lvl3pPr marL="960120" indent="0">
               <a:buNone/>
-              <a:defRPr sz="2240"/>
+              <a:defRPr sz="1260"/>
             </a:lvl3pPr>
-            <a:lvl4pPr marL="2560366" indent="0">
+            <a:lvl4pPr marL="1440180" indent="0">
               <a:buNone/>
-              <a:defRPr sz="1867"/>
+              <a:defRPr sz="1050"/>
             </a:lvl4pPr>
-            <a:lvl5pPr marL="3413821" indent="0">
+            <a:lvl5pPr marL="1920240" indent="0">
               <a:buNone/>
-              <a:defRPr sz="1867"/>
+              <a:defRPr sz="1050"/>
             </a:lvl5pPr>
-            <a:lvl6pPr marL="4267276" indent="0">
+            <a:lvl6pPr marL="2400300" indent="0">
               <a:buNone/>
-              <a:defRPr sz="1867"/>
+              <a:defRPr sz="1050"/>
             </a:lvl6pPr>
-            <a:lvl7pPr marL="5120731" indent="0">
+            <a:lvl7pPr marL="2880360" indent="0">
               <a:buNone/>
-              <a:defRPr sz="1867"/>
+              <a:defRPr sz="1050"/>
             </a:lvl7pPr>
-            <a:lvl8pPr marL="5974187" indent="0">
+            <a:lvl8pPr marL="3360420" indent="0">
               <a:buNone/>
-              <a:defRPr sz="1867"/>
+              <a:defRPr sz="1050"/>
             </a:lvl8pPr>
-            <a:lvl9pPr marL="6827642" indent="0">
+            <a:lvl9pPr marL="3840480" indent="0">
               <a:buNone/>
-              <a:defRPr sz="1867"/>
+              <a:defRPr sz="1050"/>
             </a:lvl9pPr>
           </a:lstStyle>
           <a:p>
             <a:pPr lvl="0"/>
             <a:r>
-              <a:rPr lang="en-US"/>
+              <a:rPr lang="en-GB"/>
               <a:t>Click to edit Master text styles</a:t>
             </a:r>
           </a:p>
@@ -3102,13 +2774,7 @@
       </p:sp>
       <p:sp>
         <p:nvSpPr>
-          <p:cNvPr id="5" name="Date Placeholder 4">
-            <a:extLst>
-              <a:ext uri="{FF2B5EF4-FFF2-40B4-BE49-F238E27FC236}">
-                <a16:creationId xmlns:a16="http://schemas.microsoft.com/office/drawing/2014/main" id="{84781043-F4E0-B6B2-9B02-A39D0C61B15F}"/>
-              </a:ext>
-            </a:extLst>
-          </p:cNvPr>
+          <p:cNvPr id="5" name="Date Placeholder 4"/>
           <p:cNvSpPr>
             <a:spLocks noGrp="1"/>
           </p:cNvSpPr>
@@ -3131,13 +2797,7 @@
       </p:sp>
       <p:sp>
         <p:nvSpPr>
-          <p:cNvPr id="6" name="Footer Placeholder 5">
-            <a:extLst>
-              <a:ext uri="{FF2B5EF4-FFF2-40B4-BE49-F238E27FC236}">
-                <a16:creationId xmlns:a16="http://schemas.microsoft.com/office/drawing/2014/main" id="{D24F4448-4867-29B0-B381-ABD2324B4EDB}"/>
-              </a:ext>
-            </a:extLst>
-          </p:cNvPr>
+          <p:cNvPr id="6" name="Footer Placeholder 5"/>
           <p:cNvSpPr>
             <a:spLocks noGrp="1"/>
           </p:cNvSpPr>
@@ -3156,13 +2816,7 @@
       </p:sp>
       <p:sp>
         <p:nvSpPr>
-          <p:cNvPr id="7" name="Slide Number Placeholder 6">
-            <a:extLst>
-              <a:ext uri="{FF2B5EF4-FFF2-40B4-BE49-F238E27FC236}">
-                <a16:creationId xmlns:a16="http://schemas.microsoft.com/office/drawing/2014/main" id="{E2FACF4C-402B-97E5-D6F8-6282619D925D}"/>
-              </a:ext>
-            </a:extLst>
-          </p:cNvPr>
+          <p:cNvPr id="7" name="Slide Number Placeholder 6"/>
           <p:cNvSpPr>
             <a:spLocks noGrp="1"/>
           </p:cNvSpPr>
@@ -3186,7 +2840,7 @@
     </p:spTree>
     <p:extLst>
       <p:ext uri="{BB962C8B-B14F-4D97-AF65-F5344CB8AC3E}">
-        <p14:creationId xmlns:p14="http://schemas.microsoft.com/office/powerpoint/2010/main" val="2778731471"/>
+        <p14:creationId xmlns:p14="http://schemas.microsoft.com/office/powerpoint/2010/main" val="3418519950"/>
       </p:ext>
     </p:extLst>
   </p:cSld>
@@ -3220,13 +2874,7 @@
       </p:grpSpPr>
       <p:sp>
         <p:nvSpPr>
-          <p:cNvPr id="2" name="Title Placeholder 1">
-            <a:extLst>
-              <a:ext uri="{FF2B5EF4-FFF2-40B4-BE49-F238E27FC236}">
-                <a16:creationId xmlns:a16="http://schemas.microsoft.com/office/drawing/2014/main" id="{073BBE65-6769-7B1F-8E17-8E4DEE0F5E6F}"/>
-              </a:ext>
-            </a:extLst>
-          </p:cNvPr>
+          <p:cNvPr id="2" name="Title Placeholder 1"/>
           <p:cNvSpPr>
             <a:spLocks noGrp="1"/>
           </p:cNvSpPr>
@@ -3236,7 +2884,7 @@
         </p:nvSpPr>
         <p:spPr>
           <a:xfrm>
-            <a:off x="660083" y="681568"/>
+            <a:off x="660083" y="681570"/>
             <a:ext cx="8281035" cy="2474384"/>
           </a:xfrm>
           <a:prstGeom prst="rect">
@@ -3250,22 +2898,16 @@
           <a:lstStyle/>
           <a:p>
             <a:r>
-              <a:rPr lang="en-US"/>
+              <a:rPr lang="en-GB"/>
               <a:t>Click to edit Master title style</a:t>
             </a:r>
-            <a:endParaRPr lang="en-GB"/>
+            <a:endParaRPr lang="en-US" dirty="0"/>
           </a:p>
         </p:txBody>
       </p:sp>
       <p:sp>
         <p:nvSpPr>
-          <p:cNvPr id="3" name="Text Placeholder 2">
-            <a:extLst>
-              <a:ext uri="{FF2B5EF4-FFF2-40B4-BE49-F238E27FC236}">
-                <a16:creationId xmlns:a16="http://schemas.microsoft.com/office/drawing/2014/main" id="{899B3C84-1ABC-9785-51AA-DEFE5FD58DE4}"/>
-              </a:ext>
-            </a:extLst>
-          </p:cNvPr>
+          <p:cNvPr id="3" name="Text Placeholder 2"/>
           <p:cNvSpPr>
             <a:spLocks noGrp="1"/>
           </p:cNvSpPr>
@@ -3290,50 +2932,44 @@
           <a:p>
             <a:pPr lvl="0"/>
             <a:r>
-              <a:rPr lang="en-US"/>
+              <a:rPr lang="en-GB"/>
               <a:t>Click to edit Master text styles</a:t>
             </a:r>
           </a:p>
           <a:p>
             <a:pPr lvl="1"/>
             <a:r>
-              <a:rPr lang="en-US"/>
+              <a:rPr lang="en-GB"/>
               <a:t>Second level</a:t>
             </a:r>
           </a:p>
           <a:p>
             <a:pPr lvl="2"/>
             <a:r>
-              <a:rPr lang="en-US"/>
+              <a:rPr lang="en-GB"/>
               <a:t>Third level</a:t>
             </a:r>
           </a:p>
           <a:p>
             <a:pPr lvl="3"/>
             <a:r>
-              <a:rPr lang="en-US"/>
+              <a:rPr lang="en-GB"/>
               <a:t>Fourth level</a:t>
             </a:r>
           </a:p>
           <a:p>
             <a:pPr lvl="4"/>
             <a:r>
-              <a:rPr lang="en-US"/>
+              <a:rPr lang="en-GB"/>
               <a:t>Fifth level</a:t>
             </a:r>
-            <a:endParaRPr lang="en-GB"/>
+            <a:endParaRPr lang="en-US" dirty="0"/>
           </a:p>
         </p:txBody>
       </p:sp>
       <p:sp>
         <p:nvSpPr>
-          <p:cNvPr id="4" name="Date Placeholder 3">
-            <a:extLst>
-              <a:ext uri="{FF2B5EF4-FFF2-40B4-BE49-F238E27FC236}">
-                <a16:creationId xmlns:a16="http://schemas.microsoft.com/office/drawing/2014/main" id="{894952F6-A5E3-AE07-1374-AB3E6483774A}"/>
-              </a:ext>
-            </a:extLst>
-          </p:cNvPr>
+          <p:cNvPr id="4" name="Date Placeholder 3"/>
           <p:cNvSpPr>
             <a:spLocks noGrp="1"/>
           </p:cNvSpPr>
@@ -3343,7 +2979,7 @@
         </p:nvSpPr>
         <p:spPr>
           <a:xfrm>
-            <a:off x="660083" y="11865187"/>
+            <a:off x="660083" y="11865189"/>
             <a:ext cx="2160270" cy="681567"/>
           </a:xfrm>
           <a:prstGeom prst="rect">
@@ -3354,7 +2990,7 @@
           <a:bodyPr vert="horz" lIns="91440" tIns="45720" rIns="91440" bIns="45720" rtlCol="0" anchor="ctr"/>
           <a:lstStyle>
             <a:lvl1pPr algn="l">
-              <a:defRPr sz="2240">
+              <a:defRPr sz="1260">
                 <a:solidFill>
                   <a:schemeClr val="tx1">
                     <a:tint val="75000"/>
@@ -3374,13 +3010,7 @@
       </p:sp>
       <p:sp>
         <p:nvSpPr>
-          <p:cNvPr id="5" name="Footer Placeholder 4">
-            <a:extLst>
-              <a:ext uri="{FF2B5EF4-FFF2-40B4-BE49-F238E27FC236}">
-                <a16:creationId xmlns:a16="http://schemas.microsoft.com/office/drawing/2014/main" id="{2DD11E92-5A95-C483-050F-E7CB60E47E38}"/>
-              </a:ext>
-            </a:extLst>
-          </p:cNvPr>
+          <p:cNvPr id="5" name="Footer Placeholder 4"/>
           <p:cNvSpPr>
             <a:spLocks noGrp="1"/>
           </p:cNvSpPr>
@@ -3390,7 +3020,7 @@
         </p:nvSpPr>
         <p:spPr>
           <a:xfrm>
-            <a:off x="3180398" y="11865187"/>
+            <a:off x="3180398" y="11865189"/>
             <a:ext cx="3240405" cy="681567"/>
           </a:xfrm>
           <a:prstGeom prst="rect">
@@ -3401,7 +3031,7 @@
           <a:bodyPr vert="horz" lIns="91440" tIns="45720" rIns="91440" bIns="45720" rtlCol="0" anchor="ctr"/>
           <a:lstStyle>
             <a:lvl1pPr algn="ctr">
-              <a:defRPr sz="2240">
+              <a:defRPr sz="1260">
                 <a:solidFill>
                   <a:schemeClr val="tx1">
                     <a:tint val="75000"/>
@@ -3417,13 +3047,7 @@
       </p:sp>
       <p:sp>
         <p:nvSpPr>
-          <p:cNvPr id="6" name="Slide Number Placeholder 5">
-            <a:extLst>
-              <a:ext uri="{FF2B5EF4-FFF2-40B4-BE49-F238E27FC236}">
-                <a16:creationId xmlns:a16="http://schemas.microsoft.com/office/drawing/2014/main" id="{A63E2AB0-37CA-182D-9940-8EDF9D524C17}"/>
-              </a:ext>
-            </a:extLst>
-          </p:cNvPr>
+          <p:cNvPr id="6" name="Slide Number Placeholder 5"/>
           <p:cNvSpPr>
             <a:spLocks noGrp="1"/>
           </p:cNvSpPr>
@@ -3433,7 +3057,7 @@
         </p:nvSpPr>
         <p:spPr>
           <a:xfrm>
-            <a:off x="6780848" y="11865187"/>
+            <a:off x="6780848" y="11865189"/>
             <a:ext cx="2160270" cy="681567"/>
           </a:xfrm>
           <a:prstGeom prst="rect">
@@ -3444,7 +3068,7 @@
           <a:bodyPr vert="horz" lIns="91440" tIns="45720" rIns="91440" bIns="45720" rtlCol="0" anchor="ctr"/>
           <a:lstStyle>
             <a:lvl1pPr algn="r">
-              <a:defRPr sz="2240">
+              <a:defRPr sz="1260">
                 <a:solidFill>
                   <a:schemeClr val="tx1">
                     <a:tint val="75000"/>
@@ -3465,27 +3089,27 @@
     </p:spTree>
     <p:extLst>
       <p:ext uri="{BB962C8B-B14F-4D97-AF65-F5344CB8AC3E}">
-        <p14:creationId xmlns:p14="http://schemas.microsoft.com/office/powerpoint/2010/main" val="1527400049"/>
+        <p14:creationId xmlns:p14="http://schemas.microsoft.com/office/powerpoint/2010/main" val="4088855350"/>
       </p:ext>
     </p:extLst>
   </p:cSld>
   <p:clrMap bg1="lt1" tx1="dk1" bg2="lt2" tx2="dk2" accent1="accent1" accent2="accent2" accent3="accent3" accent4="accent4" accent5="accent5" accent6="accent6" hlink="hlink" folHlink="folHlink"/>
   <p:sldLayoutIdLst>
-    <p:sldLayoutId id="2147483649" r:id="rId1"/>
-    <p:sldLayoutId id="2147483650" r:id="rId2"/>
-    <p:sldLayoutId id="2147483651" r:id="rId3"/>
-    <p:sldLayoutId id="2147483652" r:id="rId4"/>
-    <p:sldLayoutId id="2147483653" r:id="rId5"/>
-    <p:sldLayoutId id="2147483654" r:id="rId6"/>
-    <p:sldLayoutId id="2147483655" r:id="rId7"/>
-    <p:sldLayoutId id="2147483656" r:id="rId8"/>
-    <p:sldLayoutId id="2147483657" r:id="rId9"/>
-    <p:sldLayoutId id="2147483658" r:id="rId10"/>
-    <p:sldLayoutId id="2147483659" r:id="rId11"/>
+    <p:sldLayoutId id="2147483757" r:id="rId1"/>
+    <p:sldLayoutId id="2147483758" r:id="rId2"/>
+    <p:sldLayoutId id="2147483759" r:id="rId3"/>
+    <p:sldLayoutId id="2147483760" r:id="rId4"/>
+    <p:sldLayoutId id="2147483761" r:id="rId5"/>
+    <p:sldLayoutId id="2147483762" r:id="rId6"/>
+    <p:sldLayoutId id="2147483763" r:id="rId7"/>
+    <p:sldLayoutId id="2147483764" r:id="rId8"/>
+    <p:sldLayoutId id="2147483765" r:id="rId9"/>
+    <p:sldLayoutId id="2147483766" r:id="rId10"/>
+    <p:sldLayoutId id="2147483767" r:id="rId11"/>
   </p:sldLayoutIdLst>
   <p:txStyles>
     <p:titleStyle>
-      <a:lvl1pPr algn="l" defTabSz="1706910" rtl="0" eaLnBrk="1" latinLnBrk="0" hangingPunct="1">
+      <a:lvl1pPr algn="l" defTabSz="960120" rtl="0" eaLnBrk="1" latinLnBrk="0" hangingPunct="1">
         <a:lnSpc>
           <a:spcPct val="90000"/>
         </a:lnSpc>
@@ -3493,7 +3117,7 @@
           <a:spcPct val="0"/>
         </a:spcBef>
         <a:buNone/>
-        <a:defRPr sz="8213" kern="1200">
+        <a:defRPr sz="4620" kern="1200">
           <a:solidFill>
             <a:schemeClr val="tx1"/>
           </a:solidFill>
@@ -3504,16 +3128,16 @@
       </a:lvl1pPr>
     </p:titleStyle>
     <p:bodyStyle>
-      <a:lvl1pPr marL="426728" indent="-426728" algn="l" defTabSz="1706910" rtl="0" eaLnBrk="1" latinLnBrk="0" hangingPunct="1">
+      <a:lvl1pPr marL="240030" indent="-240030" algn="l" defTabSz="960120" rtl="0" eaLnBrk="1" latinLnBrk="0" hangingPunct="1">
         <a:lnSpc>
           <a:spcPct val="90000"/>
         </a:lnSpc>
         <a:spcBef>
-          <a:spcPts val="1867"/>
+          <a:spcPts val="1050"/>
         </a:spcBef>
         <a:buFont typeface="Arial" panose="020B0604020202020204" pitchFamily="34" charset="0"/>
         <a:buChar char="•"/>
-        <a:defRPr sz="5227" kern="1200">
+        <a:defRPr sz="2940" kern="1200">
           <a:solidFill>
             <a:schemeClr val="tx1"/>
           </a:solidFill>
@@ -3522,16 +3146,16 @@
           <a:cs typeface="+mn-cs"/>
         </a:defRPr>
       </a:lvl1pPr>
-      <a:lvl2pPr marL="1280183" indent="-426728" algn="l" defTabSz="1706910" rtl="0" eaLnBrk="1" latinLnBrk="0" hangingPunct="1">
+      <a:lvl2pPr marL="720090" indent="-240030" algn="l" defTabSz="960120" rtl="0" eaLnBrk="1" latinLnBrk="0" hangingPunct="1">
         <a:lnSpc>
           <a:spcPct val="90000"/>
         </a:lnSpc>
         <a:spcBef>
-          <a:spcPts val="933"/>
+          <a:spcPts val="525"/>
         </a:spcBef>
         <a:buFont typeface="Arial" panose="020B0604020202020204" pitchFamily="34" charset="0"/>
         <a:buChar char="•"/>
-        <a:defRPr sz="4480" kern="1200">
+        <a:defRPr sz="2520" kern="1200">
           <a:solidFill>
             <a:schemeClr val="tx1"/>
           </a:solidFill>
@@ -3540,16 +3164,16 @@
           <a:cs typeface="+mn-cs"/>
         </a:defRPr>
       </a:lvl2pPr>
-      <a:lvl3pPr marL="2133638" indent="-426728" algn="l" defTabSz="1706910" rtl="0" eaLnBrk="1" latinLnBrk="0" hangingPunct="1">
+      <a:lvl3pPr marL="1200150" indent="-240030" algn="l" defTabSz="960120" rtl="0" eaLnBrk="1" latinLnBrk="0" hangingPunct="1">
         <a:lnSpc>
           <a:spcPct val="90000"/>
         </a:lnSpc>
         <a:spcBef>
-          <a:spcPts val="933"/>
+          <a:spcPts val="525"/>
         </a:spcBef>
         <a:buFont typeface="Arial" panose="020B0604020202020204" pitchFamily="34" charset="0"/>
         <a:buChar char="•"/>
-        <a:defRPr sz="3733" kern="1200">
+        <a:defRPr sz="2100" kern="1200">
           <a:solidFill>
             <a:schemeClr val="tx1"/>
           </a:solidFill>
@@ -3558,16 +3182,16 @@
           <a:cs typeface="+mn-cs"/>
         </a:defRPr>
       </a:lvl3pPr>
-      <a:lvl4pPr marL="2987093" indent="-426728" algn="l" defTabSz="1706910" rtl="0" eaLnBrk="1" latinLnBrk="0" hangingPunct="1">
+      <a:lvl4pPr marL="1680210" indent="-240030" algn="l" defTabSz="960120" rtl="0" eaLnBrk="1" latinLnBrk="0" hangingPunct="1">
         <a:lnSpc>
           <a:spcPct val="90000"/>
         </a:lnSpc>
         <a:spcBef>
-          <a:spcPts val="933"/>
+          <a:spcPts val="525"/>
         </a:spcBef>
         <a:buFont typeface="Arial" panose="020B0604020202020204" pitchFamily="34" charset="0"/>
         <a:buChar char="•"/>
-        <a:defRPr sz="3360" kern="1200">
+        <a:defRPr sz="1890" kern="1200">
           <a:solidFill>
             <a:schemeClr val="tx1"/>
           </a:solidFill>
@@ -3576,16 +3200,16 @@
           <a:cs typeface="+mn-cs"/>
         </a:defRPr>
       </a:lvl4pPr>
-      <a:lvl5pPr marL="3840549" indent="-426728" algn="l" defTabSz="1706910" rtl="0" eaLnBrk="1" latinLnBrk="0" hangingPunct="1">
+      <a:lvl5pPr marL="2160270" indent="-240030" algn="l" defTabSz="960120" rtl="0" eaLnBrk="1" latinLnBrk="0" hangingPunct="1">
         <a:lnSpc>
           <a:spcPct val="90000"/>
         </a:lnSpc>
         <a:spcBef>
-          <a:spcPts val="933"/>
+          <a:spcPts val="525"/>
         </a:spcBef>
         <a:buFont typeface="Arial" panose="020B0604020202020204" pitchFamily="34" charset="0"/>
         <a:buChar char="•"/>
-        <a:defRPr sz="3360" kern="1200">
+        <a:defRPr sz="1890" kern="1200">
           <a:solidFill>
             <a:schemeClr val="tx1"/>
           </a:solidFill>
@@ -3594,16 +3218,16 @@
           <a:cs typeface="+mn-cs"/>
         </a:defRPr>
       </a:lvl5pPr>
-      <a:lvl6pPr marL="4694004" indent="-426728" algn="l" defTabSz="1706910" rtl="0" eaLnBrk="1" latinLnBrk="0" hangingPunct="1">
+      <a:lvl6pPr marL="2640330" indent="-240030" algn="l" defTabSz="960120" rtl="0" eaLnBrk="1" latinLnBrk="0" hangingPunct="1">
         <a:lnSpc>
           <a:spcPct val="90000"/>
         </a:lnSpc>
         <a:spcBef>
-          <a:spcPts val="933"/>
+          <a:spcPts val="525"/>
         </a:spcBef>
         <a:buFont typeface="Arial" panose="020B0604020202020204" pitchFamily="34" charset="0"/>
         <a:buChar char="•"/>
-        <a:defRPr sz="3360" kern="1200">
+        <a:defRPr sz="1890" kern="1200">
           <a:solidFill>
             <a:schemeClr val="tx1"/>
           </a:solidFill>
@@ -3612,16 +3236,16 @@
           <a:cs typeface="+mn-cs"/>
         </a:defRPr>
       </a:lvl6pPr>
-      <a:lvl7pPr marL="5547459" indent="-426728" algn="l" defTabSz="1706910" rtl="0" eaLnBrk="1" latinLnBrk="0" hangingPunct="1">
+      <a:lvl7pPr marL="3120390" indent="-240030" algn="l" defTabSz="960120" rtl="0" eaLnBrk="1" latinLnBrk="0" hangingPunct="1">
         <a:lnSpc>
           <a:spcPct val="90000"/>
         </a:lnSpc>
         <a:spcBef>
-          <a:spcPts val="933"/>
+          <a:spcPts val="525"/>
         </a:spcBef>
         <a:buFont typeface="Arial" panose="020B0604020202020204" pitchFamily="34" charset="0"/>
         <a:buChar char="•"/>
-        <a:defRPr sz="3360" kern="1200">
+        <a:defRPr sz="1890" kern="1200">
           <a:solidFill>
             <a:schemeClr val="tx1"/>
           </a:solidFill>
@@ -3630,16 +3254,16 @@
           <a:cs typeface="+mn-cs"/>
         </a:defRPr>
       </a:lvl7pPr>
-      <a:lvl8pPr marL="6400914" indent="-426728" algn="l" defTabSz="1706910" rtl="0" eaLnBrk="1" latinLnBrk="0" hangingPunct="1">
+      <a:lvl8pPr marL="3600450" indent="-240030" algn="l" defTabSz="960120" rtl="0" eaLnBrk="1" latinLnBrk="0" hangingPunct="1">
         <a:lnSpc>
           <a:spcPct val="90000"/>
         </a:lnSpc>
         <a:spcBef>
-          <a:spcPts val="933"/>
+          <a:spcPts val="525"/>
         </a:spcBef>
         <a:buFont typeface="Arial" panose="020B0604020202020204" pitchFamily="34" charset="0"/>
         <a:buChar char="•"/>
-        <a:defRPr sz="3360" kern="1200">
+        <a:defRPr sz="1890" kern="1200">
           <a:solidFill>
             <a:schemeClr val="tx1"/>
           </a:solidFill>
@@ -3648,16 +3272,16 @@
           <a:cs typeface="+mn-cs"/>
         </a:defRPr>
       </a:lvl8pPr>
-      <a:lvl9pPr marL="7254370" indent="-426728" algn="l" defTabSz="1706910" rtl="0" eaLnBrk="1" latinLnBrk="0" hangingPunct="1">
+      <a:lvl9pPr marL="4080510" indent="-240030" algn="l" defTabSz="960120" rtl="0" eaLnBrk="1" latinLnBrk="0" hangingPunct="1">
         <a:lnSpc>
           <a:spcPct val="90000"/>
         </a:lnSpc>
         <a:spcBef>
-          <a:spcPts val="933"/>
+          <a:spcPts val="525"/>
         </a:spcBef>
         <a:buFont typeface="Arial" panose="020B0604020202020204" pitchFamily="34" charset="0"/>
         <a:buChar char="•"/>
-        <a:defRPr sz="3360" kern="1200">
+        <a:defRPr sz="1890" kern="1200">
           <a:solidFill>
             <a:schemeClr val="tx1"/>
           </a:solidFill>
@@ -3671,8 +3295,8 @@
       <a:defPPr>
         <a:defRPr lang="en-US"/>
       </a:defPPr>
-      <a:lvl1pPr marL="0" algn="l" defTabSz="1706910" rtl="0" eaLnBrk="1" latinLnBrk="0" hangingPunct="1">
-        <a:defRPr sz="3360" kern="1200">
+      <a:lvl1pPr marL="0" algn="l" defTabSz="960120" rtl="0" eaLnBrk="1" latinLnBrk="0" hangingPunct="1">
+        <a:defRPr sz="1890" kern="1200">
           <a:solidFill>
             <a:schemeClr val="tx1"/>
           </a:solidFill>
@@ -3681,8 +3305,8 @@
           <a:cs typeface="+mn-cs"/>
         </a:defRPr>
       </a:lvl1pPr>
-      <a:lvl2pPr marL="853455" algn="l" defTabSz="1706910" rtl="0" eaLnBrk="1" latinLnBrk="0" hangingPunct="1">
-        <a:defRPr sz="3360" kern="1200">
+      <a:lvl2pPr marL="480060" algn="l" defTabSz="960120" rtl="0" eaLnBrk="1" latinLnBrk="0" hangingPunct="1">
+        <a:defRPr sz="1890" kern="1200">
           <a:solidFill>
             <a:schemeClr val="tx1"/>
           </a:solidFill>
@@ -3691,8 +3315,8 @@
           <a:cs typeface="+mn-cs"/>
         </a:defRPr>
       </a:lvl2pPr>
-      <a:lvl3pPr marL="1706910" algn="l" defTabSz="1706910" rtl="0" eaLnBrk="1" latinLnBrk="0" hangingPunct="1">
-        <a:defRPr sz="3360" kern="1200">
+      <a:lvl3pPr marL="960120" algn="l" defTabSz="960120" rtl="0" eaLnBrk="1" latinLnBrk="0" hangingPunct="1">
+        <a:defRPr sz="1890" kern="1200">
           <a:solidFill>
             <a:schemeClr val="tx1"/>
           </a:solidFill>
@@ -3701,8 +3325,8 @@
           <a:cs typeface="+mn-cs"/>
         </a:defRPr>
       </a:lvl3pPr>
-      <a:lvl4pPr marL="2560366" algn="l" defTabSz="1706910" rtl="0" eaLnBrk="1" latinLnBrk="0" hangingPunct="1">
-        <a:defRPr sz="3360" kern="1200">
+      <a:lvl4pPr marL="1440180" algn="l" defTabSz="960120" rtl="0" eaLnBrk="1" latinLnBrk="0" hangingPunct="1">
+        <a:defRPr sz="1890" kern="1200">
           <a:solidFill>
             <a:schemeClr val="tx1"/>
           </a:solidFill>
@@ -3711,8 +3335,8 @@
           <a:cs typeface="+mn-cs"/>
         </a:defRPr>
       </a:lvl4pPr>
-      <a:lvl5pPr marL="3413821" algn="l" defTabSz="1706910" rtl="0" eaLnBrk="1" latinLnBrk="0" hangingPunct="1">
-        <a:defRPr sz="3360" kern="1200">
+      <a:lvl5pPr marL="1920240" algn="l" defTabSz="960120" rtl="0" eaLnBrk="1" latinLnBrk="0" hangingPunct="1">
+        <a:defRPr sz="1890" kern="1200">
           <a:solidFill>
             <a:schemeClr val="tx1"/>
           </a:solidFill>
@@ -3721,8 +3345,8 @@
           <a:cs typeface="+mn-cs"/>
         </a:defRPr>
       </a:lvl5pPr>
-      <a:lvl6pPr marL="4267276" algn="l" defTabSz="1706910" rtl="0" eaLnBrk="1" latinLnBrk="0" hangingPunct="1">
-        <a:defRPr sz="3360" kern="1200">
+      <a:lvl6pPr marL="2400300" algn="l" defTabSz="960120" rtl="0" eaLnBrk="1" latinLnBrk="0" hangingPunct="1">
+        <a:defRPr sz="1890" kern="1200">
           <a:solidFill>
             <a:schemeClr val="tx1"/>
           </a:solidFill>
@@ -3731,8 +3355,8 @@
           <a:cs typeface="+mn-cs"/>
         </a:defRPr>
       </a:lvl6pPr>
-      <a:lvl7pPr marL="5120731" algn="l" defTabSz="1706910" rtl="0" eaLnBrk="1" latinLnBrk="0" hangingPunct="1">
-        <a:defRPr sz="3360" kern="1200">
+      <a:lvl7pPr marL="2880360" algn="l" defTabSz="960120" rtl="0" eaLnBrk="1" latinLnBrk="0" hangingPunct="1">
+        <a:defRPr sz="1890" kern="1200">
           <a:solidFill>
             <a:schemeClr val="tx1"/>
           </a:solidFill>
@@ -3741,8 +3365,8 @@
           <a:cs typeface="+mn-cs"/>
         </a:defRPr>
       </a:lvl7pPr>
-      <a:lvl8pPr marL="5974187" algn="l" defTabSz="1706910" rtl="0" eaLnBrk="1" latinLnBrk="0" hangingPunct="1">
-        <a:defRPr sz="3360" kern="1200">
+      <a:lvl8pPr marL="3360420" algn="l" defTabSz="960120" rtl="0" eaLnBrk="1" latinLnBrk="0" hangingPunct="1">
+        <a:defRPr sz="1890" kern="1200">
           <a:solidFill>
             <a:schemeClr val="tx1"/>
           </a:solidFill>
@@ -3751,8 +3375,8 @@
           <a:cs typeface="+mn-cs"/>
         </a:defRPr>
       </a:lvl8pPr>
-      <a:lvl9pPr marL="6827642" algn="l" defTabSz="1706910" rtl="0" eaLnBrk="1" latinLnBrk="0" hangingPunct="1">
-        <a:defRPr sz="3360" kern="1200">
+      <a:lvl9pPr marL="3840480" algn="l" defTabSz="960120" rtl="0" eaLnBrk="1" latinLnBrk="0" hangingPunct="1">
+        <a:defRPr sz="1890" kern="1200">
           <a:solidFill>
             <a:schemeClr val="tx1"/>
           </a:solidFill>
@@ -3828,7 +3452,7 @@
         <p:spPr>
           <a:xfrm>
             <a:off x="6809773" y="7370937"/>
-            <a:ext cx="2613195" cy="5364000"/>
+            <a:ext cx="2613195" cy="4752000"/>
           </a:xfrm>
           <a:prstGeom prst="rect">
             <a:avLst/>
@@ -4311,6 +3935,46 @@
               </a:rPr>
               <a:t>(FN) = 5 </a:t>
             </a:r>
+            <a:r>
+              <a:rPr lang="en-GB" sz="1000" dirty="0">
+                <a:solidFill>
+                  <a:prstClr val="black"/>
+                </a:solidFill>
+                <a:latin typeface="+mn-lt"/>
+              </a:rPr>
+              <a:t>(missed a failure);</a:t>
+            </a:r>
+          </a:p>
+          <a:p>
+            <a:pPr lvl="0" defTabSz="1706910">
+              <a:defRPr/>
+            </a:pPr>
+            <a:r>
+              <a:rPr lang="en-GB" sz="1000" i="1" dirty="0">
+                <a:latin typeface="+mn-lt"/>
+                <a:ea typeface="Calibri"/>
+                <a:cs typeface="Calibri"/>
+              </a:rPr>
+              <a:t>• </a:t>
+            </a:r>
+            <a:r>
+              <a:rPr lang="en-GB" sz="1000" dirty="0">
+                <a:solidFill>
+                  <a:prstClr val="black"/>
+                </a:solidFill>
+                <a:latin typeface="+mn-lt"/>
+              </a:rPr>
+              <a:t>True Positives </a:t>
+            </a:r>
+            <a:r>
+              <a:rPr lang="en-GB" sz="1000" b="1" dirty="0">
+                <a:solidFill>
+                  <a:prstClr val="black"/>
+                </a:solidFill>
+                <a:latin typeface="+mn-lt"/>
+              </a:rPr>
+              <a:t>(TP) = 42 </a:t>
+            </a:r>
             <a:endParaRPr lang="ru-RU" sz="1000" b="1" dirty="0">
               <a:solidFill>
                 <a:prstClr val="black"/>
@@ -4338,66 +4002,6 @@
                 </a:solidFill>
                 <a:latin typeface="+mn-lt"/>
               </a:rPr>
-              <a:t>(the model missed a failure case);</a:t>
-            </a:r>
-          </a:p>
-          <a:p>
-            <a:pPr lvl="0" defTabSz="1706910">
-              <a:defRPr/>
-            </a:pPr>
-            <a:r>
-              <a:rPr lang="en-GB" sz="1000" i="1" dirty="0">
-                <a:latin typeface="+mn-lt"/>
-                <a:ea typeface="Calibri"/>
-                <a:cs typeface="Calibri"/>
-              </a:rPr>
-              <a:t>• </a:t>
-            </a:r>
-            <a:r>
-              <a:rPr lang="en-GB" sz="1000" dirty="0">
-                <a:solidFill>
-                  <a:prstClr val="black"/>
-                </a:solidFill>
-                <a:latin typeface="+mn-lt"/>
-              </a:rPr>
-              <a:t>True Positives </a:t>
-            </a:r>
-            <a:r>
-              <a:rPr lang="en-GB" sz="1000" b="1" dirty="0">
-                <a:solidFill>
-                  <a:prstClr val="black"/>
-                </a:solidFill>
-                <a:latin typeface="+mn-lt"/>
-              </a:rPr>
-              <a:t>(TP) = 42 </a:t>
-            </a:r>
-            <a:endParaRPr lang="ru-RU" sz="1000" b="1" dirty="0">
-              <a:solidFill>
-                <a:prstClr val="black"/>
-              </a:solidFill>
-              <a:latin typeface="+mn-lt"/>
-            </a:endParaRPr>
-          </a:p>
-          <a:p>
-            <a:pPr lvl="0" defTabSz="1706910">
-              <a:defRPr/>
-            </a:pPr>
-            <a:r>
-              <a:rPr lang="ru-RU" sz="1000" dirty="0">
-                <a:solidFill>
-                  <a:prstClr val="black"/>
-                </a:solidFill>
-                <a:latin typeface="+mn-lt"/>
-              </a:rPr>
-              <a:t>   </a:t>
-            </a:r>
-            <a:r>
-              <a:rPr lang="en-GB" sz="1000" dirty="0">
-                <a:solidFill>
-                  <a:prstClr val="black"/>
-                </a:solidFill>
-                <a:latin typeface="+mn-lt"/>
-              </a:rPr>
               <a:t>(correctly detected failure cases). </a:t>
             </a:r>
           </a:p>
@@ -4446,13 +4050,8 @@
                 </a:solidFill>
                 <a:latin typeface="+mn-lt"/>
               </a:rPr>
-              <a:t>The Recall obtained from the confusion matrix differs slightly from the cross-validation result, as it is calculated on a single test split rather than averaged across 5 folds. Cross-validation provides a more robust assessment of model performance, while the confusion matrix reflects performance on a specific dataset.</a:t>
-            </a:r>
-          </a:p>
-          <a:p>
-            <a:pPr lvl="0" defTabSz="1706910">
-              <a:defRPr/>
-            </a:pPr>
+              <a:t>The Recall obtained from the confusion matrix differs slightly from the cross-validation result, as it is calculated on a single test split rather than averaged across 5 folds. </a:t>
+            </a:r>
             <a:r>
               <a:rPr kumimoji="0" lang="en-GB" sz="1000" b="1" i="0" u="none" strike="noStrike" kern="1200" cap="none" spc="0" normalizeH="0" baseline="0" noProof="0" dirty="0">
                 <a:ln>
@@ -4661,7 +4260,7 @@
               <a:t>The </a:t>
             </a:r>
             <a:r>
-              <a:rPr lang="en-GB" sz="1000" dirty="0" err="1">
+              <a:rPr lang="en-GB" sz="1000" b="1" dirty="0" err="1">
                 <a:solidFill>
                   <a:prstClr val="black"/>
                 </a:solidFill>
@@ -4669,12 +4268,20 @@
               <a:t>inspection_window</a:t>
             </a:r>
             <a:r>
+              <a:rPr lang="en-GB" sz="1000" b="1" dirty="0">
+                <a:solidFill>
+                  <a:prstClr val="black"/>
+                </a:solidFill>
+              </a:rPr>
+              <a:t> </a:t>
+            </a:r>
+            <a:r>
               <a:rPr lang="en-GB" sz="1000" dirty="0">
                 <a:solidFill>
                   <a:prstClr val="black"/>
                 </a:solidFill>
               </a:rPr>
-              <a:t> variable before and </a:t>
+              <a:t>variable before and </a:t>
             </a:r>
             <a:r>
               <a:rPr kumimoji="0" lang="en-GB" sz="1000" b="0" i="0" u="none" strike="noStrike" kern="1200" cap="none" spc="0" normalizeH="0" baseline="0" noProof="0" dirty="0">
@@ -4838,24 +4445,62 @@
             <a:r>
               <a:rPr lang="en-GB" sz="1000" b="1" dirty="0">
                 <a:highlight>
-                  <a:srgbClr val="00FFFF"/>
+                  <a:srgbClr val="000000"/>
                 </a:highlight>
               </a:rPr>
-              <a:t> 1.  Task Understanding </a:t>
+              <a:t> </a:t>
+            </a:r>
+            <a:r>
+              <a:rPr lang="en-GB" sz="1000" b="1" dirty="0">
+                <a:solidFill>
+                  <a:schemeClr val="bg1"/>
+                </a:solidFill>
+                <a:highlight>
+                  <a:srgbClr val="808080"/>
+                </a:highlight>
+              </a:rPr>
+              <a:t>  1.  Task Understanding  </a:t>
+            </a:r>
+            <a:r>
+              <a:rPr lang="en-GB" sz="1000" b="1" dirty="0">
+                <a:highlight>
+                  <a:srgbClr val="000000"/>
+                </a:highlight>
+              </a:rPr>
+              <a:t> </a:t>
             </a:r>
             <a:r>
               <a:rPr lang="en-GB" sz="1000" b="1" dirty="0"/>
-              <a:t>  </a:t>
+              <a:t> </a:t>
             </a:r>
             <a:r>
               <a:rPr lang="en-GB" sz="1000" dirty="0">
                 <a:ea typeface="Calibri"/>
                 <a:cs typeface="Calibri"/>
               </a:rPr>
-              <a:t>This is a binary classification task with the target variable </a:t>
+              <a:t>This is a binary </a:t>
+            </a:r>
+            <a:r>
+              <a:rPr lang="en-GB" sz="1000" dirty="0">
+                <a:solidFill>
+                  <a:schemeClr val="tx1">
+                    <a:lumMod val="95000"/>
+                    <a:lumOff val="5000"/>
+                  </a:schemeClr>
+                </a:solidFill>
+                <a:ea typeface="Calibri"/>
+                <a:cs typeface="Calibri"/>
+              </a:rPr>
+              <a:t>classification task with the target variable </a:t>
             </a:r>
             <a:r>
               <a:rPr lang="en-GB" sz="1000" i="1" dirty="0">
+                <a:solidFill>
+                  <a:schemeClr val="tx1">
+                    <a:lumMod val="95000"/>
+                    <a:lumOff val="5000"/>
+                  </a:schemeClr>
+                </a:solidFill>
                 <a:ea typeface="Calibri"/>
                 <a:cs typeface="Calibri"/>
               </a:rPr>
@@ -4863,6 +4508,12 @@
             </a:r>
             <a:r>
               <a:rPr lang="en-GB" sz="1000" dirty="0">
+                <a:solidFill>
+                  <a:schemeClr val="tx1">
+                    <a:lumMod val="95000"/>
+                    <a:lumOff val="5000"/>
+                  </a:schemeClr>
+                </a:solidFill>
                 <a:ea typeface="Calibri"/>
                 <a:cs typeface="Calibri"/>
               </a:rPr>
@@ -4877,6 +4528,12 @@
             </a:pPr>
             <a:r>
               <a:rPr lang="en-GB" sz="1000" i="1" u="sng" dirty="0">
+                <a:solidFill>
+                  <a:schemeClr val="tx1">
+                    <a:lumMod val="95000"/>
+                    <a:lumOff val="5000"/>
+                  </a:schemeClr>
+                </a:solidFill>
                 <a:ea typeface="Calibri"/>
                 <a:cs typeface="Calibri"/>
               </a:rPr>
@@ -4884,6 +4541,12 @@
             </a:r>
             <a:r>
               <a:rPr lang="en-GB" sz="1000" dirty="0">
+                <a:solidFill>
+                  <a:schemeClr val="tx1">
+                    <a:lumMod val="95000"/>
+                    <a:lumOff val="5000"/>
+                  </a:schemeClr>
+                </a:solidFill>
                 <a:ea typeface="Calibri"/>
                 <a:cs typeface="Calibri"/>
               </a:rPr>
@@ -4898,6 +4561,12 @@
             </a:pPr>
             <a:r>
               <a:rPr lang="en-GB" sz="1000" i="1" u="sng" dirty="0">
+                <a:solidFill>
+                  <a:schemeClr val="tx1">
+                    <a:lumMod val="95000"/>
+                    <a:lumOff val="5000"/>
+                  </a:schemeClr>
+                </a:solidFill>
                 <a:ea typeface="Calibri"/>
                 <a:cs typeface="Calibri"/>
               </a:rPr>
@@ -4905,6 +4574,12 @@
             </a:r>
             <a:r>
               <a:rPr lang="en-GB" sz="1000" i="1" dirty="0">
+                <a:solidFill>
+                  <a:schemeClr val="tx1">
+                    <a:lumMod val="95000"/>
+                    <a:lumOff val="5000"/>
+                  </a:schemeClr>
+                </a:solidFill>
                 <a:ea typeface="Calibri"/>
                 <a:cs typeface="Calibri"/>
               </a:rPr>
@@ -4912,6 +4587,12 @@
             </a:r>
             <a:r>
               <a:rPr lang="en-GB" sz="1000" b="1" i="1" dirty="0">
+                <a:solidFill>
+                  <a:schemeClr val="tx1">
+                    <a:lumMod val="95000"/>
+                    <a:lumOff val="5000"/>
+                  </a:schemeClr>
+                </a:solidFill>
                 <a:ea typeface="Calibri"/>
                 <a:cs typeface="Calibri"/>
               </a:rPr>
@@ -4919,6 +4600,12 @@
             </a:r>
             <a:r>
               <a:rPr lang="en-GB" sz="1000" i="1" dirty="0">
+                <a:solidFill>
+                  <a:schemeClr val="tx1">
+                    <a:lumMod val="95000"/>
+                    <a:lumOff val="5000"/>
+                  </a:schemeClr>
+                </a:solidFill>
                 <a:ea typeface="Calibri"/>
                 <a:cs typeface="Calibri"/>
               </a:rPr>
@@ -4926,6 +4613,12 @@
             </a:r>
             <a:r>
               <a:rPr lang="en-GB" sz="1000" dirty="0">
+                <a:solidFill>
+                  <a:schemeClr val="tx1">
+                    <a:lumMod val="95000"/>
+                    <a:lumOff val="5000"/>
+                  </a:schemeClr>
+                </a:solidFill>
                 <a:ea typeface="Calibri"/>
                 <a:cs typeface="Calibri"/>
               </a:rPr>
@@ -4933,6 +4626,12 @@
             </a:r>
             <a:r>
               <a:rPr lang="en-GB" sz="1000" i="1" dirty="0">
+                <a:solidFill>
+                  <a:schemeClr val="tx1">
+                    <a:lumMod val="95000"/>
+                    <a:lumOff val="5000"/>
+                  </a:schemeClr>
+                </a:solidFill>
                 <a:ea typeface="Calibri"/>
                 <a:cs typeface="Calibri"/>
               </a:rPr>
@@ -4940,6 +4639,12 @@
             </a:r>
             <a:r>
               <a:rPr lang="en-GB" sz="1000" b="1" i="1" dirty="0">
+                <a:solidFill>
+                  <a:schemeClr val="tx1">
+                    <a:lumMod val="95000"/>
+                    <a:lumOff val="5000"/>
+                  </a:schemeClr>
+                </a:solidFill>
                 <a:ea typeface="Calibri"/>
                 <a:cs typeface="Calibri"/>
               </a:rPr>
@@ -4947,6 +4652,12 @@
             </a:r>
             <a:r>
               <a:rPr lang="en-GB" sz="1000" dirty="0">
+                <a:solidFill>
+                  <a:schemeClr val="tx1">
+                    <a:lumMod val="95000"/>
+                    <a:lumOff val="5000"/>
+                  </a:schemeClr>
+                </a:solidFill>
                 <a:ea typeface="Calibri"/>
                 <a:cs typeface="Calibri"/>
               </a:rPr>
@@ -4954,6 +4665,12 @@
             </a:r>
             <a:r>
               <a:rPr lang="en-GB" sz="1000" i="1" dirty="0">
+                <a:solidFill>
+                  <a:schemeClr val="tx1">
+                    <a:lumMod val="95000"/>
+                    <a:lumOff val="5000"/>
+                  </a:schemeClr>
+                </a:solidFill>
                 <a:ea typeface="Calibri"/>
                 <a:cs typeface="Calibri"/>
               </a:rPr>
@@ -4961,10 +4678,23 @@
             </a:r>
             <a:r>
               <a:rPr lang="en-GB" sz="1000" b="1" i="1" dirty="0">
-                <a:ea typeface="Calibri"/>
-                <a:cs typeface="Calibri"/>
-              </a:rPr>
-              <a:t>generalise  well to unseen data</a:t>
+                <a:solidFill>
+                  <a:schemeClr val="tx1">
+                    <a:lumMod val="95000"/>
+                    <a:lumOff val="5000"/>
+                  </a:schemeClr>
+                </a:solidFill>
+                <a:ea typeface="Calibri"/>
+                <a:cs typeface="Calibri"/>
+              </a:rPr>
+              <a:t>generalise  </a:t>
+            </a:r>
+            <a:r>
+              <a:rPr lang="en-GB" sz="1000" b="1" i="1" dirty="0">
+                <a:ea typeface="Calibri"/>
+                <a:cs typeface="Calibri"/>
+              </a:rPr>
+              <a:t>well to unseen data</a:t>
             </a:r>
             <a:r>
               <a:rPr lang="en-GB" sz="1000" dirty="0">
@@ -4997,19 +4727,48 @@
             <a:r>
               <a:rPr lang="en-GB" sz="1000" b="1" dirty="0">
                 <a:highlight>
-                  <a:srgbClr val="00FFFF"/>
+                  <a:srgbClr val="000000"/>
                 </a:highlight>
-                <a:ea typeface="Calibri"/>
-                <a:cs typeface="Calibri"/>
-              </a:rPr>
-              <a:t> 2.  Data Understanding </a:t>
+              </a:rPr>
+              <a:t> </a:t>
+            </a:r>
+            <a:r>
+              <a:rPr lang="en-GB" sz="1000" b="1" dirty="0">
+                <a:highlight>
+                  <a:srgbClr val="808080"/>
+                </a:highlight>
+              </a:rPr>
+              <a:t>  </a:t>
+            </a:r>
+            <a:r>
+              <a:rPr lang="en-GB" sz="1000" b="1" dirty="0">
+                <a:solidFill>
+                  <a:schemeClr val="bg1"/>
+                </a:solidFill>
+                <a:highlight>
+                  <a:srgbClr val="808080"/>
+                </a:highlight>
+                <a:ea typeface="Calibri"/>
+                <a:cs typeface="Calibri"/>
+              </a:rPr>
+              <a:t>2.  Data Understanding  </a:t>
             </a:r>
             <a:r>
               <a:rPr lang="en-GB" sz="1000" i="1" dirty="0">
-                <a:ea typeface="Calibri"/>
-                <a:cs typeface="Calibri"/>
-              </a:rPr>
-              <a:t>  </a:t>
+                <a:highlight>
+                  <a:srgbClr val="000000"/>
+                </a:highlight>
+                <a:ea typeface="Calibri"/>
+                <a:cs typeface="Calibri"/>
+              </a:rPr>
+              <a:t> </a:t>
+            </a:r>
+            <a:r>
+              <a:rPr lang="en-GB" sz="1000" i="1" dirty="0">
+                <a:ea typeface="Calibri"/>
+                <a:cs typeface="Calibri"/>
+              </a:rPr>
+              <a:t> </a:t>
             </a:r>
             <a:r>
               <a:rPr lang="en-GB" sz="1000" i="1" u="sng" dirty="0">
@@ -5210,19 +4969,62 @@
             <a:r>
               <a:rPr lang="en-GB" sz="1000" b="1" dirty="0">
                 <a:highlight>
-                  <a:srgbClr val="00FFFF"/>
+                  <a:srgbClr val="000000"/>
                 </a:highlight>
                 <a:ea typeface="Calibri"/>
                 <a:cs typeface="Calibri"/>
               </a:rPr>
-              <a:t> 3.  Data Preparation </a:t>
+              <a:t> </a:t>
             </a:r>
             <a:r>
               <a:rPr lang="en-GB" sz="1000" b="1" dirty="0">
+                <a:highlight>
+                  <a:srgbClr val="808080"/>
+                </a:highlight>
                 <a:ea typeface="Calibri"/>
                 <a:cs typeface="Calibri"/>
               </a:rPr>
               <a:t>  </a:t>
+            </a:r>
+            <a:r>
+              <a:rPr lang="en-GB" sz="1000" b="1" dirty="0">
+                <a:solidFill>
+                  <a:schemeClr val="bg1"/>
+                </a:solidFill>
+                <a:highlight>
+                  <a:srgbClr val="808080"/>
+                </a:highlight>
+                <a:ea typeface="Calibri"/>
+                <a:cs typeface="Calibri"/>
+              </a:rPr>
+              <a:t>3.  Data Preparation </a:t>
+            </a:r>
+            <a:r>
+              <a:rPr lang="en-GB" sz="1000" b="1" dirty="0">
+                <a:highlight>
+                  <a:srgbClr val="808080"/>
+                </a:highlight>
+                <a:ea typeface="Calibri"/>
+                <a:cs typeface="Calibri"/>
+              </a:rPr>
+              <a:t> </a:t>
+            </a:r>
+            <a:r>
+              <a:rPr lang="en-GB" sz="1000" b="1" dirty="0">
+                <a:highlight>
+                  <a:srgbClr val="000000"/>
+                </a:highlight>
+                <a:ea typeface="Calibri"/>
+                <a:cs typeface="Calibri"/>
+              </a:rPr>
+              <a:t> </a:t>
+            </a:r>
+            <a:r>
+              <a:rPr lang="en-GB" sz="1000" b="1" dirty="0">
+                <a:ea typeface="Calibri"/>
+                <a:cs typeface="Calibri"/>
+              </a:rPr>
+              <a:t> </a:t>
             </a:r>
             <a:r>
               <a:rPr lang="en-GB" sz="1000" i="1" dirty="0">
@@ -5486,19 +5288,58 @@
             <a:r>
               <a:rPr lang="en-GB" sz="1000" b="1" dirty="0">
                 <a:highlight>
-                  <a:srgbClr val="00FFFF"/>
+                  <a:srgbClr val="000000"/>
                 </a:highlight>
                 <a:ea typeface="Calibri"/>
                 <a:cs typeface="Calibri"/>
               </a:rPr>
-              <a:t> 4.  Model Training and Hyperparameter Tuning </a:t>
+              <a:t> </a:t>
             </a:r>
             <a:r>
               <a:rPr lang="en-GB" sz="1000" b="1" dirty="0">
+                <a:highlight>
+                  <a:srgbClr val="808080"/>
+                </a:highlight>
                 <a:ea typeface="Calibri"/>
                 <a:cs typeface="Calibri"/>
               </a:rPr>
               <a:t>  </a:t>
+            </a:r>
+            <a:r>
+              <a:rPr lang="en-GB" sz="1000" b="1" dirty="0">
+                <a:solidFill>
+                  <a:schemeClr val="bg1"/>
+                </a:solidFill>
+                <a:highlight>
+                  <a:srgbClr val="808080"/>
+                </a:highlight>
+                <a:ea typeface="Calibri"/>
+                <a:cs typeface="Calibri"/>
+              </a:rPr>
+              <a:t>4.  Model Training and Hyperparameter Tuning </a:t>
+            </a:r>
+            <a:r>
+              <a:rPr lang="en-GB" sz="1000" b="1" dirty="0">
+                <a:solidFill>
+                  <a:schemeClr val="bg1"/>
+                </a:solidFill>
+                <a:highlight>
+                  <a:srgbClr val="000000"/>
+                </a:highlight>
+                <a:ea typeface="Calibri"/>
+                <a:cs typeface="Calibri"/>
+              </a:rPr>
+              <a:t> </a:t>
+            </a:r>
+            <a:r>
+              <a:rPr lang="en-GB" sz="1000" b="1" dirty="0">
+                <a:solidFill>
+                  <a:schemeClr val="bg1"/>
+                </a:solidFill>
+                <a:ea typeface="Calibri"/>
+                <a:cs typeface="Calibri"/>
+              </a:rPr>
+              <a:t> </a:t>
             </a:r>
             <a:r>
               <a:rPr lang="en-GB" sz="1000" dirty="0">
@@ -5538,15 +5379,55 @@
             <a:r>
               <a:rPr lang="en-GB" sz="1000" b="1" dirty="0">
                 <a:highlight>
-                  <a:srgbClr val="00FFFF"/>
+                  <a:srgbClr val="000000"/>
                 </a:highlight>
                 <a:cs typeface="Calibri"/>
               </a:rPr>
-              <a:t> 5.  Feature Projection </a:t>
+              <a:t> </a:t>
+            </a:r>
+            <a:r>
+              <a:rPr lang="en-GB" sz="1000" b="1" dirty="0">
+                <a:highlight>
+                  <a:srgbClr val="808080"/>
+                </a:highlight>
+                <a:cs typeface="Calibri"/>
+              </a:rPr>
+              <a:t>  </a:t>
+            </a:r>
+            <a:r>
+              <a:rPr lang="en-GB" sz="1000" b="1" dirty="0">
+                <a:solidFill>
+                  <a:schemeClr val="bg1"/>
+                </a:solidFill>
+                <a:highlight>
+                  <a:srgbClr val="808080"/>
+                </a:highlight>
+                <a:cs typeface="Calibri"/>
+              </a:rPr>
+              <a:t>5.  Feature Projection  </a:t>
+            </a:r>
+            <a:r>
+              <a:rPr lang="en-GB" sz="1000" i="1" dirty="0">
+                <a:solidFill>
+                  <a:schemeClr val="bg1"/>
+                </a:solidFill>
+                <a:highlight>
+                  <a:srgbClr val="000000"/>
+                </a:highlight>
+              </a:rPr>
+              <a:t> </a:t>
+            </a:r>
+            <a:r>
+              <a:rPr lang="en-GB" sz="1000" i="1" dirty="0">
+                <a:solidFill>
+                  <a:schemeClr val="bg1"/>
+                </a:solidFill>
+              </a:rPr>
+              <a:t> </a:t>
             </a:r>
             <a:r>
               <a:rPr lang="en-GB" sz="1000" i="1" dirty="0"/>
-              <a:t>  Principal Component Analysis </a:t>
+              <a:t>Principal Component Analysis </a:t>
             </a:r>
             <a:r>
               <a:rPr lang="en-GB" sz="1000" dirty="0"/>
@@ -5589,22 +5470,52 @@
             <a:r>
               <a:rPr lang="en-GB" sz="1000" b="1" i="1" dirty="0">
                 <a:highlight>
-                  <a:srgbClr val="00FFFF"/>
+                  <a:srgbClr val="000000"/>
                 </a:highlight>
               </a:rPr>
-              <a:t> 6.  </a:t>
+              <a:t> </a:t>
+            </a:r>
+            <a:r>
+              <a:rPr lang="en-GB" sz="1000" b="1" i="1" dirty="0">
+                <a:highlight>
+                  <a:srgbClr val="808080"/>
+                </a:highlight>
+              </a:rPr>
+              <a:t>  </a:t>
             </a:r>
             <a:r>
               <a:rPr lang="en-GB" sz="1000" b="1" dirty="0">
+                <a:solidFill>
+                  <a:schemeClr val="bg1"/>
+                </a:solidFill>
                 <a:highlight>
-                  <a:srgbClr val="00FFFF"/>
+                  <a:srgbClr val="808080"/>
                 </a:highlight>
               </a:rPr>
-              <a:t>Feature Selection</a:t>
+              <a:t>6.  Feature Selection  </a:t>
+            </a:r>
+            <a:r>
+              <a:rPr lang="en-GB" sz="1000" i="1" dirty="0">
+                <a:solidFill>
+                  <a:schemeClr val="bg1"/>
+                </a:solidFill>
+                <a:highlight>
+                  <a:srgbClr val="000000"/>
+                </a:highlight>
+              </a:rPr>
+              <a:t> </a:t>
+            </a:r>
+            <a:r>
+              <a:rPr lang="en-GB" sz="1000" i="1" dirty="0">
+                <a:solidFill>
+                  <a:schemeClr val="bg1"/>
+                </a:solidFill>
+              </a:rPr>
+              <a:t> </a:t>
             </a:r>
             <a:r>
               <a:rPr lang="en-GB" sz="1000" i="1" dirty="0"/>
-              <a:t>  Filter-based (correlation/ranking) method </a:t>
+              <a:t>Filter-based (correlation/ranking) method </a:t>
             </a:r>
             <a:r>
               <a:rPr lang="en-GB" sz="1000" dirty="0"/>
@@ -5732,15 +5643,37 @@
             </a:pPr>
             <a:r>
               <a:rPr lang="en-GB" sz="1000" b="1" dirty="0">
+                <a:solidFill>
+                  <a:schemeClr val="bg1"/>
+                </a:solidFill>
                 <a:highlight>
-                  <a:srgbClr val="00FFFF"/>
+                  <a:srgbClr val="000000"/>
                 </a:highlight>
               </a:rPr>
-              <a:t> 7.  Test Data Preparation</a:t>
+              <a:t> </a:t>
+            </a:r>
+            <a:r>
+              <a:rPr lang="en-GB" sz="1000" b="1" dirty="0">
+                <a:solidFill>
+                  <a:schemeClr val="bg1"/>
+                </a:solidFill>
+                <a:highlight>
+                  <a:srgbClr val="808080"/>
+                </a:highlight>
+              </a:rPr>
+              <a:t>  7.  Test Data Preparation  </a:t>
+            </a:r>
+            <a:r>
+              <a:rPr lang="en-GB" sz="1000" dirty="0">
+                <a:highlight>
+                  <a:srgbClr val="000000"/>
+                </a:highlight>
+              </a:rPr>
+              <a:t> </a:t>
             </a:r>
             <a:r>
               <a:rPr lang="en-GB" sz="1000" dirty="0"/>
-              <a:t>  The test data was transformed using the same encoding and normalisation parameters derived from the training data. </a:t>
+              <a:t> The test data was transformed using the same encoding and normalisation parameters derived from the training data. </a:t>
             </a:r>
           </a:p>
           <a:p>
@@ -5751,15 +5684,37 @@
             </a:pPr>
             <a:r>
               <a:rPr lang="en-GB" sz="1000" b="1" dirty="0">
+                <a:solidFill>
+                  <a:schemeClr val="bg1"/>
+                </a:solidFill>
                 <a:highlight>
-                  <a:srgbClr val="00FFFF"/>
+                  <a:srgbClr val="000000"/>
                 </a:highlight>
               </a:rPr>
-              <a:t> 8.  Final Model Evaluation</a:t>
+              <a:t> </a:t>
+            </a:r>
+            <a:r>
+              <a:rPr lang="en-GB" sz="1000" b="1" dirty="0">
+                <a:solidFill>
+                  <a:schemeClr val="bg1"/>
+                </a:solidFill>
+                <a:highlight>
+                  <a:srgbClr val="808080"/>
+                </a:highlight>
+              </a:rPr>
+              <a:t>  8.  Final Model Evaluation  </a:t>
+            </a:r>
+            <a:r>
+              <a:rPr lang="en-GB" sz="1000" dirty="0">
+                <a:highlight>
+                  <a:srgbClr val="000000"/>
+                </a:highlight>
+              </a:rPr>
+              <a:t> </a:t>
             </a:r>
             <a:r>
               <a:rPr lang="en-GB" sz="1000" dirty="0"/>
-              <a:t>  </a:t>
+              <a:t> </a:t>
             </a:r>
             <a:r>
               <a:rPr lang="en-GB" sz="1000" b="1" dirty="0"/>
@@ -6032,6 +5987,11 @@
               <a:rPr lang="en-GB" sz="1000" dirty="0"/>
               <a:t> were deleted due to their very low predictive value. </a:t>
             </a:r>
+          </a:p>
+          <a:p>
+            <a:pPr lvl="0" defTabSz="1706910">
+              <a:defRPr/>
+            </a:pPr>
             <a:r>
               <a:rPr lang="en-GB" sz="1000" i="1" dirty="0"/>
               <a:t>This improved model performance by reducing dimensionality, model complexity and noise.</a:t>
@@ -6531,7 +6491,7 @@
           <p:nvPr>
             <p:extLst>
               <p:ext uri="{D42A27DB-BD31-4B8C-83A1-F6EECF244321}">
-                <p14:modId xmlns:p14="http://schemas.microsoft.com/office/powerpoint/2010/main" val="1750158232"/>
+                <p14:modId xmlns:p14="http://schemas.microsoft.com/office/powerpoint/2010/main" val="3017969900"/>
               </p:ext>
             </p:extLst>
           </p:nvPr>
@@ -6691,7 +6651,21 @@
                           <a:ea typeface="Calibri"/>
                           <a:cs typeface="Calibri"/>
                         </a:rPr>
-                        <a:t>The best result was achieved at L2, C = 0.05 and class balancing. </a:t>
+                        <a:t>The best result was achieved at </a:t>
+                      </a:r>
+                      <a:r>
+                        <a:rPr lang="en-GB" sz="1000" b="1" i="1" u="sng" dirty="0">
+                          <a:ea typeface="Calibri"/>
+                          <a:cs typeface="Calibri"/>
+                        </a:rPr>
+                        <a:t>L2, C = 0.05 and class balancing</a:t>
+                      </a:r>
+                      <a:r>
+                        <a:rPr lang="en-GB" sz="1000" b="1" i="1" dirty="0">
+                          <a:ea typeface="Calibri"/>
+                          <a:cs typeface="Calibri"/>
+                        </a:rPr>
+                        <a:t>. </a:t>
                       </a:r>
                       <a:endParaRPr lang="en-GB" sz="1000" b="1" i="1" dirty="0"/>
                     </a:p>
@@ -6915,15 +6889,22 @@
                         <a:t>The best result: </a:t>
                       </a:r>
                       <a:r>
-                        <a:rPr lang="en-GB" sz="1000" b="1" i="1" dirty="0"/>
+                        <a:rPr lang="en-GB" sz="1000" b="1" i="1" u="sng" dirty="0"/>
                         <a:t>50 neurons in hidden layer, tanh function, SGD solver, 200 </a:t>
+                      </a:r>
+                      <a:r>
+                        <a:rPr lang="en-GB" sz="1000" b="1" i="1" u="sng" dirty="0">
+                          <a:ea typeface="Calibri"/>
+                          <a:cs typeface="Calibri"/>
+                        </a:rPr>
+                        <a:t>epochs</a:t>
                       </a:r>
                       <a:r>
                         <a:rPr lang="en-GB" sz="1000" b="1" i="1" dirty="0">
                           <a:ea typeface="Calibri"/>
                           <a:cs typeface="Calibri"/>
                         </a:rPr>
-                        <a:t>epochs. </a:t>
+                        <a:t>. </a:t>
                       </a:r>
                     </a:p>
                   </a:txBody>
@@ -7096,9 +7077,16 @@
                           <a:ea typeface="Calibri"/>
                           <a:cs typeface="Calibri"/>
                         </a:rPr>
-                        <a:t>The best result: 10 instances in leaves, 5 split subsets and a max tree depth of 10</a:t>
+                        <a:t>The best result: </a:t>
                       </a:r>
-                      <a:endParaRPr lang="en-GB" sz="1000" b="1" dirty="0">
+                      <a:r>
+                        <a:rPr lang="en-GB" sz="1000" b="1" i="1" u="sng" dirty="0">
+                          <a:ea typeface="Calibri"/>
+                          <a:cs typeface="Calibri"/>
+                        </a:rPr>
+                        <a:t>10 instances in leaves, 5 split subsets and a max tree depth of 10.</a:t>
+                      </a:r>
+                      <a:endParaRPr lang="en-GB" sz="1000" b="1" u="sng" dirty="0">
                         <a:ea typeface="Calibri"/>
                         <a:cs typeface="Calibri"/>
                       </a:endParaRPr>
@@ -7199,212 +7187,246 @@
           <a:p>
             <a:r>
               <a:rPr lang="en-GB" sz="1600" dirty="0"/>
-              <a:t>7. Insight about data </a:t>
-            </a:r>
-            <a:r>
-              <a:rPr lang="en-GB" sz="1600" b="0" i="0" dirty="0">
+              <a:t>7. Insight About Data </a:t>
+            </a:r>
+          </a:p>
+          <a:p>
+            <a:r>
+              <a:rPr lang="en-GB" sz="1000" dirty="0">
+                <a:ea typeface="Calibri"/>
+                <a:cs typeface="Calibri"/>
+              </a:rPr>
+              <a:t>Features such as </a:t>
+            </a:r>
+            <a:r>
+              <a:rPr lang="en-GB" sz="900" i="1" dirty="0" err="1">
+                <a:ea typeface="Calibri"/>
+                <a:cs typeface="Calibri"/>
+              </a:rPr>
+              <a:t>surface_debris</a:t>
+            </a:r>
+            <a:r>
+              <a:rPr lang="en-GB" sz="900" i="1" dirty="0">
+                <a:ea typeface="Calibri"/>
+                <a:cs typeface="Calibri"/>
+              </a:rPr>
+              <a:t>, </a:t>
+            </a:r>
+            <a:r>
+              <a:rPr lang="en-GB" sz="900" i="1" dirty="0" err="1">
+                <a:ea typeface="Calibri"/>
+                <a:cs typeface="Calibri"/>
+              </a:rPr>
+              <a:t>structural_mass_ratio</a:t>
+            </a:r>
+            <a:r>
+              <a:rPr lang="en-GB" sz="900" i="1" dirty="0">
+                <a:ea typeface="Calibri"/>
+                <a:cs typeface="Calibri"/>
+              </a:rPr>
+              <a:t>, </a:t>
+            </a:r>
+            <a:r>
+              <a:rPr lang="en-GB" sz="900" i="1" dirty="0" err="1">
+                <a:ea typeface="Calibri"/>
+                <a:cs typeface="Calibri"/>
+              </a:rPr>
+              <a:t>recent_precipitation</a:t>
+            </a:r>
+            <a:r>
+              <a:rPr lang="en-GB" sz="900" i="1" dirty="0">
+                <a:ea typeface="Calibri"/>
+                <a:cs typeface="Calibri"/>
+              </a:rPr>
+              <a:t>, </a:t>
+            </a:r>
+            <a:r>
+              <a:rPr lang="en-GB" sz="900" i="1" dirty="0" err="1">
+                <a:ea typeface="Calibri"/>
+                <a:cs typeface="Calibri"/>
+              </a:rPr>
+              <a:t>infrastructure_age</a:t>
+            </a:r>
+            <a:r>
+              <a:rPr lang="en-GB" sz="900" i="1" dirty="0">
+                <a:ea typeface="Calibri"/>
+                <a:cs typeface="Calibri"/>
+              </a:rPr>
+              <a:t>, </a:t>
+            </a:r>
+            <a:r>
+              <a:rPr lang="en-GB" sz="900" i="1" dirty="0" err="1">
+                <a:ea typeface="Calibri"/>
+                <a:cs typeface="Calibri"/>
+              </a:rPr>
+              <a:t>moisture_stress</a:t>
+            </a:r>
+            <a:r>
+              <a:rPr lang="en-GB" sz="900" i="1" dirty="0">
+                <a:ea typeface="Calibri"/>
+                <a:cs typeface="Calibri"/>
+              </a:rPr>
+              <a:t> </a:t>
+            </a:r>
+            <a:r>
+              <a:rPr lang="en-GB" sz="1000" dirty="0">
+                <a:ea typeface="Calibri"/>
+                <a:cs typeface="Calibri"/>
+              </a:rPr>
+              <a:t>have a significant impact on infrastructure failure, with higher values associated with an increased probability of failure. </a:t>
+            </a:r>
+          </a:p>
+          <a:p>
+            <a:r>
+              <a:rPr lang="en-GB" sz="1000" b="1" dirty="0">
+                <a:ea typeface="Calibri"/>
+                <a:cs typeface="Calibri"/>
+              </a:rPr>
+              <a:t>In contrast</a:t>
+            </a:r>
+            <a:r>
+              <a:rPr lang="en-GB" sz="1000" dirty="0">
+                <a:ea typeface="Calibri"/>
+                <a:cs typeface="Calibri"/>
+              </a:rPr>
+              <a:t>, features such as </a:t>
+            </a:r>
+            <a:r>
+              <a:rPr lang="en-GB" sz="900" i="1" dirty="0" err="1">
+                <a:ea typeface="Calibri"/>
+                <a:cs typeface="Calibri"/>
+              </a:rPr>
+              <a:t>inspection_window</a:t>
+            </a:r>
+            <a:r>
+              <a:rPr lang="en-GB" sz="900" i="1" dirty="0">
+                <a:ea typeface="Calibri"/>
+                <a:cs typeface="Calibri"/>
+              </a:rPr>
+              <a:t>, </a:t>
+            </a:r>
+            <a:r>
+              <a:rPr lang="en-GB" sz="900" i="1" dirty="0" err="1">
+                <a:ea typeface="Calibri"/>
+                <a:cs typeface="Calibri"/>
+              </a:rPr>
+              <a:t>inspection_season</a:t>
+            </a:r>
+            <a:r>
+              <a:rPr lang="en-GB" sz="900" i="1" dirty="0">
+                <a:ea typeface="Calibri"/>
+                <a:cs typeface="Calibri"/>
+              </a:rPr>
+              <a:t> = autumn/spring, and </a:t>
+            </a:r>
+            <a:r>
+              <a:rPr lang="en-GB" sz="900" i="1" dirty="0" err="1">
+                <a:ea typeface="Calibri"/>
+                <a:cs typeface="Calibri"/>
+              </a:rPr>
+              <a:t>vibration_exposure</a:t>
+            </a:r>
+            <a:r>
+              <a:rPr lang="en-GB" sz="900" i="1" dirty="0">
+                <a:ea typeface="Calibri"/>
+                <a:cs typeface="Calibri"/>
+              </a:rPr>
+              <a:t> </a:t>
+            </a:r>
+            <a:r>
+              <a:rPr lang="en-GB" sz="1000" dirty="0">
+                <a:ea typeface="Calibri"/>
+                <a:cs typeface="Calibri"/>
+              </a:rPr>
+              <a:t>showed almost no predictive value and were removed during feature selection. </a:t>
+            </a:r>
+            <a:r>
+              <a:rPr lang="en-GB" sz="1000" b="1" dirty="0">
                 <a:solidFill>
                   <a:srgbClr val="000000"/>
                 </a:solidFill>
-                <a:effectLst/>
-                <a:ea typeface="Calibri"/>
-                <a:cs typeface="Calibri"/>
-              </a:rPr>
-              <a:t>or </a:t>
-            </a:r>
-            <a:r>
-              <a:rPr lang="en-GB" sz="1600" dirty="0">
+                <a:ea typeface="Calibri"/>
+                <a:cs typeface="Calibri"/>
+              </a:rPr>
+              <a:t>The analysis also indicated </a:t>
+            </a:r>
+            <a:r>
+              <a:rPr lang="en-GB" sz="1000" dirty="0">
                 <a:solidFill>
                   <a:srgbClr val="000000"/>
                 </a:solidFill>
                 <a:ea typeface="Calibri"/>
                 <a:cs typeface="Calibri"/>
               </a:rPr>
-              <a:t>models gained</a:t>
+              <a:t>a clear environmental influence, with failures occurring more frequently during the summer period. This suggests that weather conditions play an important role. Overall, infrastructure failure depends on both structural characteristics and external environmental factors (weather/level of usage). No strong model bias was observed; but some seasonal variation is present in the data.</a:t>
+            </a:r>
+          </a:p>
+          <a:p>
+            <a:r>
+              <a:rPr lang="en-GB" sz="1000" b="1" dirty="0">
+                <a:solidFill>
+                  <a:srgbClr val="000000"/>
+                </a:solidFill>
+                <a:ea typeface="Calibri"/>
+                <a:cs typeface="Calibri"/>
+              </a:rPr>
+              <a:t>Logistic Regression was selected as the final model due to its strong performance and interpretability. Its coefficients indicate the direction and strength of the relationship between each feature and the probability of failure, helping to understand which factors lead to failure. Besides, it is fast (learns and predicts quickly), simple to tune (few hyperparameters), and practical for real-world decision-making. This demonstrates that simpler, interpretable models can achieve both high performance and practical value in real-world applications.</a:t>
+            </a:r>
+          </a:p>
+        </p:txBody>
+      </p:sp>
+      <p:sp>
+        <p:nvSpPr>
+          <p:cNvPr id="55" name="TextBox 54">
+            <a:extLst>
+              <a:ext uri="{FF2B5EF4-FFF2-40B4-BE49-F238E27FC236}">
+                <a16:creationId xmlns:a16="http://schemas.microsoft.com/office/drawing/2014/main" id="{22EC981E-6237-6699-0660-2EEEE0AE019F}"/>
+              </a:ext>
+            </a:extLst>
+          </p:cNvPr>
+          <p:cNvSpPr txBox="1"/>
+          <p:nvPr/>
+        </p:nvSpPr>
+        <p:spPr>
+          <a:xfrm>
+            <a:off x="6809772" y="12181585"/>
+            <a:ext cx="2613195" cy="540000"/>
+          </a:xfrm>
+          <a:prstGeom prst="rect">
+            <a:avLst/>
+          </a:prstGeom>
+          <a:noFill/>
+          <a:ln w="38100">
+            <a:solidFill>
+              <a:schemeClr val="accent1">
+                <a:lumMod val="60000"/>
+                <a:lumOff val="40000"/>
+              </a:schemeClr>
+            </a:solidFill>
+          </a:ln>
+        </p:spPr>
+        <p:txBody>
+          <a:bodyPr wrap="square" lIns="91440" tIns="45720" rIns="91440" bIns="45720" rtlCol="0" anchor="t">
+            <a:spAutoFit/>
+          </a:bodyPr>
+          <a:lstStyle/>
+          <a:p>
+            <a:r>
+              <a:rPr lang="en-GB" sz="1600" dirty="0"/>
+              <a:t>8. References</a:t>
             </a:r>
           </a:p>
           <a:p>
             <a:r>
               <a:rPr lang="en-GB" sz="1000" dirty="0">
-                <a:ea typeface="Calibri"/>
-                <a:cs typeface="Calibri"/>
-              </a:rPr>
-              <a:t>Features such as </a:t>
-            </a:r>
-            <a:r>
-              <a:rPr lang="en-GB" sz="900" i="1" dirty="0" err="1">
-                <a:ea typeface="Calibri"/>
-                <a:cs typeface="Calibri"/>
-              </a:rPr>
-              <a:t>surface_debris</a:t>
-            </a:r>
-            <a:r>
-              <a:rPr lang="en-GB" sz="900" i="1" dirty="0">
-                <a:ea typeface="Calibri"/>
-                <a:cs typeface="Calibri"/>
-              </a:rPr>
-              <a:t>, </a:t>
-            </a:r>
-            <a:r>
-              <a:rPr lang="en-GB" sz="900" i="1" dirty="0" err="1">
-                <a:ea typeface="Calibri"/>
-                <a:cs typeface="Calibri"/>
-              </a:rPr>
-              <a:t>structural_mass_ratio</a:t>
-            </a:r>
-            <a:r>
-              <a:rPr lang="en-GB" sz="900" i="1" dirty="0">
-                <a:ea typeface="Calibri"/>
-                <a:cs typeface="Calibri"/>
-              </a:rPr>
-              <a:t>, </a:t>
-            </a:r>
-            <a:r>
-              <a:rPr lang="en-GB" sz="900" i="1" dirty="0" err="1">
-                <a:ea typeface="Calibri"/>
-                <a:cs typeface="Calibri"/>
-              </a:rPr>
-              <a:t>recent_precipitation</a:t>
-            </a:r>
-            <a:r>
-              <a:rPr lang="en-GB" sz="900" i="1" dirty="0">
-                <a:ea typeface="Calibri"/>
-                <a:cs typeface="Calibri"/>
-              </a:rPr>
-              <a:t>, </a:t>
-            </a:r>
-            <a:r>
-              <a:rPr lang="en-GB" sz="900" i="1" dirty="0" err="1">
-                <a:ea typeface="Calibri"/>
-                <a:cs typeface="Calibri"/>
-              </a:rPr>
-              <a:t>infrastructure_age</a:t>
-            </a:r>
-            <a:r>
-              <a:rPr lang="en-GB" sz="900" i="1" dirty="0">
-                <a:ea typeface="Calibri"/>
-                <a:cs typeface="Calibri"/>
-              </a:rPr>
-              <a:t>, </a:t>
-            </a:r>
-            <a:r>
-              <a:rPr lang="en-GB" sz="900" i="1" dirty="0" err="1">
-                <a:ea typeface="Calibri"/>
-                <a:cs typeface="Calibri"/>
-              </a:rPr>
-              <a:t>moisture_stress</a:t>
-            </a:r>
-            <a:r>
-              <a:rPr lang="en-GB" sz="900" i="1" dirty="0">
-                <a:ea typeface="Calibri"/>
-                <a:cs typeface="Calibri"/>
-              </a:rPr>
-              <a:t> </a:t>
-            </a:r>
-            <a:r>
-              <a:rPr lang="en-GB" sz="1000" dirty="0">
-                <a:ea typeface="Calibri"/>
-                <a:cs typeface="Calibri"/>
-              </a:rPr>
-              <a:t>have a significant impact on infrastructure failure, with higher values associated with an increased probability of failure. </a:t>
-            </a:r>
-          </a:p>
-          <a:p>
-            <a:r>
-              <a:rPr lang="en-GB" sz="1000" b="1" dirty="0">
-                <a:ea typeface="Calibri"/>
-                <a:cs typeface="Calibri"/>
-              </a:rPr>
-              <a:t>In contrast</a:t>
-            </a:r>
-            <a:r>
-              <a:rPr lang="en-GB" sz="1000" dirty="0">
-                <a:ea typeface="Calibri"/>
-                <a:cs typeface="Calibri"/>
-              </a:rPr>
-              <a:t>, features such as </a:t>
-            </a:r>
-            <a:r>
-              <a:rPr lang="en-GB" sz="900" i="1" dirty="0" err="1">
-                <a:ea typeface="Calibri"/>
-                <a:cs typeface="Calibri"/>
-              </a:rPr>
-              <a:t>inspection_window</a:t>
-            </a:r>
-            <a:r>
-              <a:rPr lang="en-GB" sz="900" i="1" dirty="0">
-                <a:ea typeface="Calibri"/>
-                <a:cs typeface="Calibri"/>
-              </a:rPr>
-              <a:t>, </a:t>
-            </a:r>
-            <a:r>
-              <a:rPr lang="en-GB" sz="900" i="1" dirty="0" err="1">
-                <a:ea typeface="Calibri"/>
-                <a:cs typeface="Calibri"/>
-              </a:rPr>
-              <a:t>inspection_season</a:t>
-            </a:r>
-            <a:r>
-              <a:rPr lang="en-GB" sz="900" i="1" dirty="0">
-                <a:ea typeface="Calibri"/>
-                <a:cs typeface="Calibri"/>
-              </a:rPr>
-              <a:t> = autumn/spring, and </a:t>
-            </a:r>
-            <a:r>
-              <a:rPr lang="en-GB" sz="900" i="1" dirty="0" err="1">
-                <a:ea typeface="Calibri"/>
-                <a:cs typeface="Calibri"/>
-              </a:rPr>
-              <a:t>vibration_exposure</a:t>
-            </a:r>
-            <a:r>
-              <a:rPr lang="en-GB" sz="900" i="1" dirty="0">
-                <a:ea typeface="Calibri"/>
-                <a:cs typeface="Calibri"/>
-              </a:rPr>
-              <a:t> </a:t>
-            </a:r>
-            <a:r>
-              <a:rPr lang="en-GB" sz="1000" dirty="0">
-                <a:ea typeface="Calibri"/>
-                <a:cs typeface="Calibri"/>
-              </a:rPr>
-              <a:t>showed almost no predictive value and were removed during feature selection. </a:t>
-            </a:r>
-            <a:r>
-              <a:rPr lang="en-GB" sz="1000" b="1" dirty="0">
-                <a:solidFill>
-                  <a:srgbClr val="000000"/>
-                </a:solidFill>
-                <a:ea typeface="Calibri"/>
-                <a:cs typeface="Calibri"/>
-              </a:rPr>
-              <a:t>The analysis also indicated </a:t>
-            </a:r>
-            <a:r>
-              <a:rPr lang="en-GB" sz="1000" dirty="0">
-                <a:solidFill>
-                  <a:srgbClr val="000000"/>
-                </a:solidFill>
-                <a:ea typeface="Calibri"/>
-                <a:cs typeface="Calibri"/>
-              </a:rPr>
-              <a:t>a clear environmental influence, with failures occurring more frequently during the summer period. This suggests that weather conditions play an important role. Overall, infrastructure failure depends on both structural characteristics and external environmental factors (weather/level of usage). No strong model bias was observed; but some seasonal variation is present in the data.</a:t>
-            </a:r>
-          </a:p>
-          <a:p>
-            <a:r>
-              <a:rPr lang="en-GB" sz="1000" b="1" dirty="0">
-                <a:solidFill>
-                  <a:srgbClr val="000000"/>
-                </a:solidFill>
-                <a:ea typeface="Calibri"/>
-                <a:cs typeface="Calibri"/>
-              </a:rPr>
-              <a:t>Logistic Regression was selected as the final model due to its strong performance and interpretability. Its coefficients indicate the direction and strength of the relationship between each feature and the probability of failure, helping to understand which factors lead to failure. Besides, it is fast (learns and predicts quickly), simple to tune (few hyperparameters), and practical for real-world decision-making. This demonstrates that simpler, interpretable models can achieve both high performance and practical value in real-world applications.</a:t>
-            </a:r>
+                <a:solidFill>
+                  <a:srgbClr val="202122"/>
+                </a:solidFill>
+                <a:latin typeface="Arial" panose="020B0604020202020204" pitchFamily="34" charset="0"/>
+              </a:rPr>
+              <a:t>1. Lecture materials, University of Stirling</a:t>
+            </a:r>
+            <a:endParaRPr lang="en-GB" sz="1000" dirty="0"/>
           </a:p>
         </p:txBody>
       </p:sp>
@@ -7422,9 +7444,9 @@
 </file>
 
 <file path=ppt/theme/theme1.xml><?xml version="1.0" encoding="utf-8"?>
-<a:theme xmlns:a="http://schemas.openxmlformats.org/drawingml/2006/main" name="Office Theme">
+<a:theme xmlns:a="http://schemas.openxmlformats.org/drawingml/2006/main" name="Office 2013 - 2022 Theme">
   <a:themeElements>
-    <a:clrScheme name="Office">
+    <a:clrScheme name="Blue Warm">
       <a:dk1>
         <a:sysClr val="windowText" lastClr="000000"/>
       </a:dk1>
@@ -7432,37 +7454,37 @@
         <a:sysClr val="window" lastClr="FFFFFF"/>
       </a:lt1>
       <a:dk2>
-        <a:srgbClr val="44546A"/>
+        <a:srgbClr val="242852"/>
       </a:dk2>
       <a:lt2>
-        <a:srgbClr val="E7E6E6"/>
+        <a:srgbClr val="ACCBF9"/>
       </a:lt2>
       <a:accent1>
-        <a:srgbClr val="4472C4"/>
+        <a:srgbClr val="4A66AC"/>
       </a:accent1>
       <a:accent2>
-        <a:srgbClr val="ED7D31"/>
+        <a:srgbClr val="629DD1"/>
       </a:accent2>
       <a:accent3>
-        <a:srgbClr val="A5A5A5"/>
+        <a:srgbClr val="297FD5"/>
       </a:accent3>
       <a:accent4>
-        <a:srgbClr val="FFC000"/>
+        <a:srgbClr val="7F8FA9"/>
       </a:accent4>
       <a:accent5>
-        <a:srgbClr val="5B9BD5"/>
+        <a:srgbClr val="5AA2AE"/>
       </a:accent5>
       <a:accent6>
-        <a:srgbClr val="70AD47"/>
+        <a:srgbClr val="9D90A0"/>
       </a:accent6>
       <a:hlink>
-        <a:srgbClr val="0563C1"/>
+        <a:srgbClr val="9454C3"/>
       </a:hlink>
       <a:folHlink>
-        <a:srgbClr val="954F72"/>
+        <a:srgbClr val="3EBBF0"/>
       </a:folHlink>
     </a:clrScheme>
-    <a:fontScheme name="Office">
+    <a:fontScheme name="Office 2013 - 2022 Theme">
       <a:majorFont>
         <a:latin typeface="Calibri Light" panose="020F0302020204030204"/>
         <a:ea typeface=""/>
@@ -7497,23 +7519,6 @@
         <a:font script="Viet" typeface="Times New Roman"/>
         <a:font script="Uigh" typeface="Microsoft Uighur"/>
         <a:font script="Geor" typeface="Sylfaen"/>
-        <a:font script="Armn" typeface="Arial"/>
-        <a:font script="Bugi" typeface="Leelawadee UI"/>
-        <a:font script="Bopo" typeface="Microsoft JhengHei"/>
-        <a:font script="Java" typeface="Javanese Text"/>
-        <a:font script="Lisu" typeface="Segoe UI"/>
-        <a:font script="Mymr" typeface="Myanmar Text"/>
-        <a:font script="Nkoo" typeface="Ebrima"/>
-        <a:font script="Olck" typeface="Nirmala UI"/>
-        <a:font script="Osma" typeface="Ebrima"/>
-        <a:font script="Phag" typeface="Phagspa"/>
-        <a:font script="Syrn" typeface="Estrangelo Edessa"/>
-        <a:font script="Syrj" typeface="Estrangelo Edessa"/>
-        <a:font script="Syre" typeface="Estrangelo Edessa"/>
-        <a:font script="Sora" typeface="Nirmala UI"/>
-        <a:font script="Tale" typeface="Microsoft Tai Le"/>
-        <a:font script="Talu" typeface="Microsoft New Tai Lue"/>
-        <a:font script="Tfng" typeface="Ebrima"/>
       </a:majorFont>
       <a:minorFont>
         <a:latin typeface="Calibri" panose="020F0502020204030204"/>
@@ -7549,26 +7554,9 @@
         <a:font script="Viet" typeface="Arial"/>
         <a:font script="Uigh" typeface="Microsoft Uighur"/>
         <a:font script="Geor" typeface="Sylfaen"/>
-        <a:font script="Armn" typeface="Arial"/>
-        <a:font script="Bugi" typeface="Leelawadee UI"/>
-        <a:font script="Bopo" typeface="Microsoft JhengHei"/>
-        <a:font script="Java" typeface="Javanese Text"/>
-        <a:font script="Lisu" typeface="Segoe UI"/>
-        <a:font script="Mymr" typeface="Myanmar Text"/>
-        <a:font script="Nkoo" typeface="Ebrima"/>
-        <a:font script="Olck" typeface="Nirmala UI"/>
-        <a:font script="Osma" typeface="Ebrima"/>
-        <a:font script="Phag" typeface="Phagspa"/>
-        <a:font script="Syrn" typeface="Estrangelo Edessa"/>
-        <a:font script="Syrj" typeface="Estrangelo Edessa"/>
-        <a:font script="Syre" typeface="Estrangelo Edessa"/>
-        <a:font script="Sora" typeface="Nirmala UI"/>
-        <a:font script="Tale" typeface="Microsoft Tai Le"/>
-        <a:font script="Talu" typeface="Microsoft New Tai Lue"/>
-        <a:font script="Tfng" typeface="Ebrima"/>
       </a:minorFont>
     </a:fontScheme>
-    <a:fmtScheme name="Office">
+    <a:fmtScheme name="Office 2013 - 2022 Theme">
       <a:fillStyleLst>
         <a:solidFill>
           <a:schemeClr val="phClr"/>
@@ -7710,7 +7698,7 @@
   <a:extraClrSchemeLst/>
   <a:extLst>
     <a:ext uri="{05A4C25C-085E-4340-85A3-A5531E510DB2}">
-      <thm15:themeFamily xmlns:thm15="http://schemas.microsoft.com/office/thememl/2012/main" name="Office Theme" id="{62F939B6-93AF-4DB8-9C6B-D6C7DFDC589F}" vid="{4A3C46E8-61CC-4603-A589-7422A47A8E4A}"/>
+      <thm15:themeFamily xmlns:thm15="http://schemas.microsoft.com/office/thememl/2012/main" name="Office 2013 - 2022 Theme" id="{62F939B6-93AF-4DB8-9C6B-D6C7DFDC589F}" vid="{AE6F2518-B084-4896-AF52-66CC2144AA26}"/>
     </a:ext>
   </a:extLst>
 </a:theme>
